--- a/decks/Micro_02_Gram-Stain-Culture-Identification.pptx
+++ b/decks/Micro_02_Gram-Stain-Culture-Identification.pptx
@@ -25,9 +25,14 @@
     <p:sldId id="273" r:id="rId19"/>
     <p:sldId id="274" r:id="rId20"/>
     <p:sldId id="275" r:id="rId21"/>
+    <p:sldId id="276" r:id="rId22"/>
+    <p:sldId id="277" r:id="rId23"/>
+    <p:sldId id="278" r:id="rId24"/>
+    <p:sldId id="279" r:id="rId25"/>
+    <p:sldId id="280" r:id="rId26"/>
   </p:sldIdLst>
   <p:notesMasterIdLst>
-    <p:notesMasterId r:id="rId22"/>
+    <p:notesMasterId r:id="rId27"/>
   </p:notesMasterIdLst>
   <p:sldSz cx="12191695" cy="6858000"/>
   <p:notesSz cx="6858000" cy="12191695"/>
@@ -1601,6 +1606,446 @@
             <a:fld id="{F7021451-1387-4CA6-816F-3879F97B5CBC}" type="slidenum">
               <a:rPr lang="en-US"/>
               <a:t>20</a:t>
+            </a:fld>
+            <a:endParaRPr lang="en-US"/>
+          </a:p>
+        </p:txBody>
+      </p:sp>
+    </p:spTree>
+    <p:extLst>
+      <p:ext uri="{BB962C8B-B14F-4D97-AF65-F5344CB8AC3E}">
+        <p14:creationId xmlns:p14="http://schemas.microsoft.com/office/powerpoint/2010/main" val="1024086991"/>
+      </p:ext>
+    </p:extLst>
+  </p:cSld>
+  <p:clrMapOvr>
+    <a:masterClrMapping/>
+  </p:clrMapOvr>
+</p:notes>
+</file>
+
+<file path=ppt/notesSlides/notesSlide21.xml><?xml version="1.0" encoding="utf-8"?>
+<p:notes xmlns:a="http://schemas.openxmlformats.org/drawingml/2006/main" xmlns:r="http://schemas.openxmlformats.org/officeDocument/2006/relationships" xmlns:p="http://schemas.openxmlformats.org/presentationml/2006/main">
+  <p:cSld>
+    <p:spTree>
+      <p:nvGrpSpPr>
+        <p:cNvPr id="1" name=""/>
+        <p:cNvGrpSpPr/>
+        <p:nvPr/>
+      </p:nvGrpSpPr>
+      <p:grpSpPr>
+        <a:xfrm>
+          <a:off x="0" y="0"/>
+          <a:ext cx="0" cy="0"/>
+          <a:chOff x="0" y="0"/>
+          <a:chExt cx="0" cy="0"/>
+        </a:xfrm>
+      </p:grpSpPr>
+      <p:sp>
+        <p:nvSpPr>
+          <p:cNvPr id="2" name="Slide Image Placeholder 1"/>
+          <p:cNvSpPr>
+            <a:spLocks noGrp="1" noRot="1" noChangeAspect="1"/>
+          </p:cNvSpPr>
+          <p:nvPr>
+            <p:ph type="sldImg"/>
+          </p:nvPr>
+        </p:nvSpPr>
+        <p:spPr/>
+      </p:sp>
+      <p:sp>
+        <p:nvSpPr>
+          <p:cNvPr id="3" name="Notes Placeholder 2"/>
+          <p:cNvSpPr>
+            <a:spLocks noGrp="1"/>
+          </p:cNvSpPr>
+          <p:nvPr>
+            <p:ph type="body" idx="1"/>
+          </p:nvPr>
+        </p:nvSpPr>
+        <p:spPr/>
+        <p:txBody>
+          <a:bodyPr/>
+          <a:lstStyle/>
+          <a:p>
+            <a:r>
+              <a:rPr lang="en-US" dirty="0"/>
+              <a:t/>
+            </a:r>
+            <a:endParaRPr lang="en-US" dirty="0"/>
+          </a:p>
+        </p:txBody>
+      </p:sp>
+      <p:sp>
+        <p:nvSpPr>
+          <p:cNvPr id="4" name="Slide Number Placeholder 3"/>
+          <p:cNvSpPr>
+            <a:spLocks noGrp="1"/>
+          </p:cNvSpPr>
+          <p:nvPr>
+            <p:ph type="sldNum" sz="quarter" idx="10"/>
+          </p:nvPr>
+        </p:nvSpPr>
+        <p:spPr/>
+        <p:txBody>
+          <a:bodyPr/>
+          <a:lstStyle/>
+          <a:p>
+            <a:fld id="{F7021451-1387-4CA6-816F-3879F97B5CBC}" type="slidenum">
+              <a:rPr lang="en-US"/>
+              <a:t>21</a:t>
+            </a:fld>
+            <a:endParaRPr lang="en-US"/>
+          </a:p>
+        </p:txBody>
+      </p:sp>
+    </p:spTree>
+    <p:extLst>
+      <p:ext uri="{BB962C8B-B14F-4D97-AF65-F5344CB8AC3E}">
+        <p14:creationId xmlns:p14="http://schemas.microsoft.com/office/powerpoint/2010/main" val="1024086991"/>
+      </p:ext>
+    </p:extLst>
+  </p:cSld>
+  <p:clrMapOvr>
+    <a:masterClrMapping/>
+  </p:clrMapOvr>
+</p:notes>
+</file>
+
+<file path=ppt/notesSlides/notesSlide22.xml><?xml version="1.0" encoding="utf-8"?>
+<p:notes xmlns:a="http://schemas.openxmlformats.org/drawingml/2006/main" xmlns:r="http://schemas.openxmlformats.org/officeDocument/2006/relationships" xmlns:p="http://schemas.openxmlformats.org/presentationml/2006/main">
+  <p:cSld>
+    <p:spTree>
+      <p:nvGrpSpPr>
+        <p:cNvPr id="1" name=""/>
+        <p:cNvGrpSpPr/>
+        <p:nvPr/>
+      </p:nvGrpSpPr>
+      <p:grpSpPr>
+        <a:xfrm>
+          <a:off x="0" y="0"/>
+          <a:ext cx="0" cy="0"/>
+          <a:chOff x="0" y="0"/>
+          <a:chExt cx="0" cy="0"/>
+        </a:xfrm>
+      </p:grpSpPr>
+      <p:sp>
+        <p:nvSpPr>
+          <p:cNvPr id="2" name="Slide Image Placeholder 1"/>
+          <p:cNvSpPr>
+            <a:spLocks noGrp="1" noRot="1" noChangeAspect="1"/>
+          </p:cNvSpPr>
+          <p:nvPr>
+            <p:ph type="sldImg"/>
+          </p:nvPr>
+        </p:nvSpPr>
+        <p:spPr/>
+      </p:sp>
+      <p:sp>
+        <p:nvSpPr>
+          <p:cNvPr id="3" name="Notes Placeholder 2"/>
+          <p:cNvSpPr>
+            <a:spLocks noGrp="1"/>
+          </p:cNvSpPr>
+          <p:nvPr>
+            <p:ph type="body" idx="1"/>
+          </p:nvPr>
+        </p:nvSpPr>
+        <p:spPr/>
+        <p:txBody>
+          <a:bodyPr/>
+          <a:lstStyle/>
+          <a:p>
+            <a:r>
+              <a:rPr lang="en-US" dirty="0"/>
+              <a:t/>
+            </a:r>
+            <a:endParaRPr lang="en-US" dirty="0"/>
+          </a:p>
+        </p:txBody>
+      </p:sp>
+      <p:sp>
+        <p:nvSpPr>
+          <p:cNvPr id="4" name="Slide Number Placeholder 3"/>
+          <p:cNvSpPr>
+            <a:spLocks noGrp="1"/>
+          </p:cNvSpPr>
+          <p:nvPr>
+            <p:ph type="sldNum" sz="quarter" idx="10"/>
+          </p:nvPr>
+        </p:nvSpPr>
+        <p:spPr/>
+        <p:txBody>
+          <a:bodyPr/>
+          <a:lstStyle/>
+          <a:p>
+            <a:fld id="{F7021451-1387-4CA6-816F-3879F97B5CBC}" type="slidenum">
+              <a:rPr lang="en-US"/>
+              <a:t>22</a:t>
+            </a:fld>
+            <a:endParaRPr lang="en-US"/>
+          </a:p>
+        </p:txBody>
+      </p:sp>
+    </p:spTree>
+    <p:extLst>
+      <p:ext uri="{BB962C8B-B14F-4D97-AF65-F5344CB8AC3E}">
+        <p14:creationId xmlns:p14="http://schemas.microsoft.com/office/powerpoint/2010/main" val="1024086991"/>
+      </p:ext>
+    </p:extLst>
+  </p:cSld>
+  <p:clrMapOvr>
+    <a:masterClrMapping/>
+  </p:clrMapOvr>
+</p:notes>
+</file>
+
+<file path=ppt/notesSlides/notesSlide23.xml><?xml version="1.0" encoding="utf-8"?>
+<p:notes xmlns:a="http://schemas.openxmlformats.org/drawingml/2006/main" xmlns:r="http://schemas.openxmlformats.org/officeDocument/2006/relationships" xmlns:p="http://schemas.openxmlformats.org/presentationml/2006/main">
+  <p:cSld>
+    <p:spTree>
+      <p:nvGrpSpPr>
+        <p:cNvPr id="1" name=""/>
+        <p:cNvGrpSpPr/>
+        <p:nvPr/>
+      </p:nvGrpSpPr>
+      <p:grpSpPr>
+        <a:xfrm>
+          <a:off x="0" y="0"/>
+          <a:ext cx="0" cy="0"/>
+          <a:chOff x="0" y="0"/>
+          <a:chExt cx="0" cy="0"/>
+        </a:xfrm>
+      </p:grpSpPr>
+      <p:sp>
+        <p:nvSpPr>
+          <p:cNvPr id="2" name="Slide Image Placeholder 1"/>
+          <p:cNvSpPr>
+            <a:spLocks noGrp="1" noRot="1" noChangeAspect="1"/>
+          </p:cNvSpPr>
+          <p:nvPr>
+            <p:ph type="sldImg"/>
+          </p:nvPr>
+        </p:nvSpPr>
+        <p:spPr/>
+      </p:sp>
+      <p:sp>
+        <p:nvSpPr>
+          <p:cNvPr id="3" name="Notes Placeholder 2"/>
+          <p:cNvSpPr>
+            <a:spLocks noGrp="1"/>
+          </p:cNvSpPr>
+          <p:nvPr>
+            <p:ph type="body" idx="1"/>
+          </p:nvPr>
+        </p:nvSpPr>
+        <p:spPr/>
+        <p:txBody>
+          <a:bodyPr/>
+          <a:lstStyle/>
+          <a:p>
+            <a:r>
+              <a:rPr lang="en-US" dirty="0"/>
+              <a:t/>
+            </a:r>
+            <a:endParaRPr lang="en-US" dirty="0"/>
+          </a:p>
+        </p:txBody>
+      </p:sp>
+      <p:sp>
+        <p:nvSpPr>
+          <p:cNvPr id="4" name="Slide Number Placeholder 3"/>
+          <p:cNvSpPr>
+            <a:spLocks noGrp="1"/>
+          </p:cNvSpPr>
+          <p:nvPr>
+            <p:ph type="sldNum" sz="quarter" idx="10"/>
+          </p:nvPr>
+        </p:nvSpPr>
+        <p:spPr/>
+        <p:txBody>
+          <a:bodyPr/>
+          <a:lstStyle/>
+          <a:p>
+            <a:fld id="{F7021451-1387-4CA6-816F-3879F97B5CBC}" type="slidenum">
+              <a:rPr lang="en-US"/>
+              <a:t>23</a:t>
+            </a:fld>
+            <a:endParaRPr lang="en-US"/>
+          </a:p>
+        </p:txBody>
+      </p:sp>
+    </p:spTree>
+    <p:extLst>
+      <p:ext uri="{BB962C8B-B14F-4D97-AF65-F5344CB8AC3E}">
+        <p14:creationId xmlns:p14="http://schemas.microsoft.com/office/powerpoint/2010/main" val="1024086991"/>
+      </p:ext>
+    </p:extLst>
+  </p:cSld>
+  <p:clrMapOvr>
+    <a:masterClrMapping/>
+  </p:clrMapOvr>
+</p:notes>
+</file>
+
+<file path=ppt/notesSlides/notesSlide24.xml><?xml version="1.0" encoding="utf-8"?>
+<p:notes xmlns:a="http://schemas.openxmlformats.org/drawingml/2006/main" xmlns:r="http://schemas.openxmlformats.org/officeDocument/2006/relationships" xmlns:p="http://schemas.openxmlformats.org/presentationml/2006/main">
+  <p:cSld>
+    <p:spTree>
+      <p:nvGrpSpPr>
+        <p:cNvPr id="1" name=""/>
+        <p:cNvGrpSpPr/>
+        <p:nvPr/>
+      </p:nvGrpSpPr>
+      <p:grpSpPr>
+        <a:xfrm>
+          <a:off x="0" y="0"/>
+          <a:ext cx="0" cy="0"/>
+          <a:chOff x="0" y="0"/>
+          <a:chExt cx="0" cy="0"/>
+        </a:xfrm>
+      </p:grpSpPr>
+      <p:sp>
+        <p:nvSpPr>
+          <p:cNvPr id="2" name="Slide Image Placeholder 1"/>
+          <p:cNvSpPr>
+            <a:spLocks noGrp="1" noRot="1" noChangeAspect="1"/>
+          </p:cNvSpPr>
+          <p:nvPr>
+            <p:ph type="sldImg"/>
+          </p:nvPr>
+        </p:nvSpPr>
+        <p:spPr/>
+      </p:sp>
+      <p:sp>
+        <p:nvSpPr>
+          <p:cNvPr id="3" name="Notes Placeholder 2"/>
+          <p:cNvSpPr>
+            <a:spLocks noGrp="1"/>
+          </p:cNvSpPr>
+          <p:nvPr>
+            <p:ph type="body" idx="1"/>
+          </p:nvPr>
+        </p:nvSpPr>
+        <p:spPr/>
+        <p:txBody>
+          <a:bodyPr/>
+          <a:lstStyle/>
+          <a:p>
+            <a:r>
+              <a:rPr lang="en-US" dirty="0"/>
+              <a:t/>
+            </a:r>
+            <a:endParaRPr lang="en-US" dirty="0"/>
+          </a:p>
+        </p:txBody>
+      </p:sp>
+      <p:sp>
+        <p:nvSpPr>
+          <p:cNvPr id="4" name="Slide Number Placeholder 3"/>
+          <p:cNvSpPr>
+            <a:spLocks noGrp="1"/>
+          </p:cNvSpPr>
+          <p:nvPr>
+            <p:ph type="sldNum" sz="quarter" idx="10"/>
+          </p:nvPr>
+        </p:nvSpPr>
+        <p:spPr/>
+        <p:txBody>
+          <a:bodyPr/>
+          <a:lstStyle/>
+          <a:p>
+            <a:fld id="{F7021451-1387-4CA6-816F-3879F97B5CBC}" type="slidenum">
+              <a:rPr lang="en-US"/>
+              <a:t>24</a:t>
+            </a:fld>
+            <a:endParaRPr lang="en-US"/>
+          </a:p>
+        </p:txBody>
+      </p:sp>
+    </p:spTree>
+    <p:extLst>
+      <p:ext uri="{BB962C8B-B14F-4D97-AF65-F5344CB8AC3E}">
+        <p14:creationId xmlns:p14="http://schemas.microsoft.com/office/powerpoint/2010/main" val="1024086991"/>
+      </p:ext>
+    </p:extLst>
+  </p:cSld>
+  <p:clrMapOvr>
+    <a:masterClrMapping/>
+  </p:clrMapOvr>
+</p:notes>
+</file>
+
+<file path=ppt/notesSlides/notesSlide25.xml><?xml version="1.0" encoding="utf-8"?>
+<p:notes xmlns:a="http://schemas.openxmlformats.org/drawingml/2006/main" xmlns:r="http://schemas.openxmlformats.org/officeDocument/2006/relationships" xmlns:p="http://schemas.openxmlformats.org/presentationml/2006/main">
+  <p:cSld>
+    <p:spTree>
+      <p:nvGrpSpPr>
+        <p:cNvPr id="1" name=""/>
+        <p:cNvGrpSpPr/>
+        <p:nvPr/>
+      </p:nvGrpSpPr>
+      <p:grpSpPr>
+        <a:xfrm>
+          <a:off x="0" y="0"/>
+          <a:ext cx="0" cy="0"/>
+          <a:chOff x="0" y="0"/>
+          <a:chExt cx="0" cy="0"/>
+        </a:xfrm>
+      </p:grpSpPr>
+      <p:sp>
+        <p:nvSpPr>
+          <p:cNvPr id="2" name="Slide Image Placeholder 1"/>
+          <p:cNvSpPr>
+            <a:spLocks noGrp="1" noRot="1" noChangeAspect="1"/>
+          </p:cNvSpPr>
+          <p:nvPr>
+            <p:ph type="sldImg"/>
+          </p:nvPr>
+        </p:nvSpPr>
+        <p:spPr/>
+      </p:sp>
+      <p:sp>
+        <p:nvSpPr>
+          <p:cNvPr id="3" name="Notes Placeholder 2"/>
+          <p:cNvSpPr>
+            <a:spLocks noGrp="1"/>
+          </p:cNvSpPr>
+          <p:nvPr>
+            <p:ph type="body" idx="1"/>
+          </p:nvPr>
+        </p:nvSpPr>
+        <p:spPr/>
+        <p:txBody>
+          <a:bodyPr/>
+          <a:lstStyle/>
+          <a:p>
+            <a:r>
+              <a:rPr lang="en-US" dirty="0"/>
+              <a:t/>
+            </a:r>
+            <a:endParaRPr lang="en-US" dirty="0"/>
+          </a:p>
+        </p:txBody>
+      </p:sp>
+      <p:sp>
+        <p:nvSpPr>
+          <p:cNvPr id="4" name="Slide Number Placeholder 3"/>
+          <p:cNvSpPr>
+            <a:spLocks noGrp="1"/>
+          </p:cNvSpPr>
+          <p:nvPr>
+            <p:ph type="sldNum" sz="quarter" idx="10"/>
+          </p:nvPr>
+        </p:nvSpPr>
+        <p:spPr/>
+        <p:txBody>
+          <a:bodyPr/>
+          <a:lstStyle/>
+          <a:p>
+            <a:fld id="{F7021451-1387-4CA6-816F-3879F97B5CBC}" type="slidenum">
+              <a:rPr lang="en-US"/>
+              <a:t>25</a:t>
             </a:fld>
             <a:endParaRPr lang="en-US"/>
           </a:p>
@@ -2765,7 +3210,7 @@
                 <a:ea typeface="Calibri" pitchFamily="34" charset="-122"/>
                 <a:cs typeface="Calibri" pitchFamily="34" charset="-120"/>
               </a:rPr>
-              <a:t>Gram Stain, Culture &amp; Organism Identification</a:t>
+              <a:t>Gram Stain, Culture &amp; Identification</a:t>
             </a:r>
             <a:endParaRPr lang="en-US" sz="4600" dirty="0"/>
           </a:p>
@@ -2804,7 +3249,7 @@
                 <a:ea typeface="Calibri" pitchFamily="34" charset="-122"/>
                 <a:cs typeface="Calibri" pitchFamily="34" charset="-120"/>
               </a:rPr>
-              <a:t>Bench Logic from Smear to MALDI-TOF</a:t>
+              <a:t>From Smear to Named Organism</a:t>
             </a:r>
             <a:endParaRPr lang="en-US" sz="1900" dirty="0"/>
           </a:p>
@@ -2996,7 +3441,7 @@
                 <a:ea typeface="Calibri" pitchFamily="34" charset="-122"/>
                 <a:cs typeface="Calibri" pitchFamily="34" charset="-120"/>
               </a:rPr>
-              <a:t>MICROBIOLOGY   ·   COMMUNICATION</a:t>
+              <a:t>MICROBIOLOGY   ·   IDENTIFICATION</a:t>
             </a:r>
             <a:endParaRPr lang="en-US" sz="1100" dirty="0"/>
           </a:p>
@@ -3035,7 +3480,7 @@
                 <a:ea typeface="Calibri" pitchFamily="34" charset="-122"/>
                 <a:cs typeface="Calibri" pitchFamily="34" charset="-120"/>
               </a:rPr>
-              <a:t>Critical-Result Communication</a:t>
+              <a:t>Rapid Tests &amp; Colony Clues</a:t>
             </a:r>
             <a:endParaRPr lang="en-US" sz="3000" dirty="0"/>
           </a:p>
@@ -3103,7 +3548,7 @@
                 <a:ea typeface="Calibri" pitchFamily="34" charset="-122"/>
                 <a:cs typeface="Calibri" pitchFamily="34" charset="-120"/>
               </a:rPr>
-              <a:t>WHAT TO CALL URGENTLY</a:t>
+              <a:t>BENCH RAPID TESTS</a:t>
             </a:r>
             <a:endParaRPr lang="en-US" sz="1200" dirty="0"/>
           </a:p>
@@ -3146,7 +3591,7 @@
                 <a:ea typeface="Calibri" pitchFamily="34" charset="-122"/>
                 <a:cs typeface="Calibri" pitchFamily="34" charset="-120"/>
               </a:rPr>
-              <a:t>Positive Gram stain or culture from a normally sterile site (blood, CSF, joint).</a:t>
+              <a:t>Catalase separates staphylococci (+) from streptococci (–).</a:t>
             </a:r>
             <a:endParaRPr lang="en-US" sz="1250" dirty="0"/>
           </a:p>
@@ -3167,7 +3612,7 @@
                 <a:ea typeface="Calibri" pitchFamily="34" charset="-122"/>
                 <a:cs typeface="Calibri" pitchFamily="34" charset="-120"/>
               </a:rPr>
-              <a:t>Organisms with public-health/infection-control implications.</a:t>
+              <a:t>Coagulase separates S. aureus (+) from coagulase-negative staph.</a:t>
             </a:r>
             <a:endParaRPr lang="en-US" sz="1250" dirty="0"/>
           </a:p>
@@ -3188,7 +3633,7 @@
                 <a:ea typeface="Calibri" pitchFamily="34" charset="-122"/>
                 <a:cs typeface="Calibri" pitchFamily="34" charset="-120"/>
               </a:rPr>
-              <a:t>Results that change immediate therapy (e.g., GNR bacteremia).</a:t>
+              <a:t>Oxidase flags Pseudomonas, Neisseria, etc.</a:t>
             </a:r>
             <a:endParaRPr lang="en-US" sz="1250" dirty="0"/>
           </a:p>
@@ -3209,7 +3654,7 @@
                 <a:ea typeface="Calibri" pitchFamily="34" charset="-122"/>
                 <a:cs typeface="Calibri" pitchFamily="34" charset="-120"/>
               </a:rPr>
-              <a:t>Document the read-back and time.</a:t>
+              <a:t>Hemolysis and colony morphology add early clues.</a:t>
             </a:r>
             <a:endParaRPr lang="en-US" sz="1250" dirty="0"/>
           </a:p>
@@ -3232,7 +3677,7 @@
             </a:avLst>
           </a:prstGeom>
           <a:solidFill>
-            <a:srgbClr val="E8F2E9"/>
+            <a:srgbClr val="E9F3EA"/>
           </a:solidFill>
           <a:ln/>
           <a:effectLst>
@@ -3277,7 +3722,7 @@
                 <a:ea typeface="Calibri" pitchFamily="34" charset="-122"/>
                 <a:cs typeface="Calibri" pitchFamily="34" charset="-120"/>
               </a:rPr>
-              <a:t>HOW TO REPORT</a:t>
+              <a:t>MALDI-TOF</a:t>
             </a:r>
             <a:endParaRPr lang="en-US" sz="1200" dirty="0"/>
           </a:p>
@@ -3320,7 +3765,7 @@
                 <a:ea typeface="Calibri" pitchFamily="34" charset="-122"/>
                 <a:cs typeface="Calibri" pitchFamily="34" charset="-120"/>
               </a:rPr>
-              <a:t>Preliminary Gram stain results promptly; final ID/AST when available.</a:t>
+              <a:t>Mass spectrometry identifies organisms by protein fingerprint within minutes of growth.</a:t>
             </a:r>
             <a:endParaRPr lang="en-US" sz="1250" dirty="0"/>
           </a:p>
@@ -3341,7 +3786,7 @@
                 <a:ea typeface="Calibri" pitchFamily="34" charset="-122"/>
                 <a:cs typeface="Calibri" pitchFamily="34" charset="-120"/>
               </a:rPr>
-              <a:t>Use clear, standardized terminology.</a:t>
+              <a:t>High accuracy for most bacteria and yeast.</a:t>
             </a:r>
             <a:endParaRPr lang="en-US" sz="1250" dirty="0"/>
           </a:p>
@@ -3362,7 +3807,7 @@
                 <a:ea typeface="Calibri" pitchFamily="34" charset="-122"/>
                 <a:cs typeface="Calibri" pitchFamily="34" charset="-120"/>
               </a:rPr>
-              <a:t>Flag likely contaminants honestly with context.</a:t>
+              <a:t>Limits: closely related species, low biomass, some mycobacteria/molds.</a:t>
             </a:r>
             <a:endParaRPr lang="en-US" sz="1250" dirty="0"/>
           </a:p>
@@ -3383,7 +3828,7 @@
                 <a:ea typeface="Calibri" pitchFamily="34" charset="-122"/>
                 <a:cs typeface="Calibri" pitchFamily="34" charset="-120"/>
               </a:rPr>
-              <a:t>Partner with stewardship for actionable reporting.</a:t>
+              <a:t>Has largely replaced lengthy biochemical panels.</a:t>
             </a:r>
             <a:endParaRPr lang="en-US" sz="1250" dirty="0"/>
           </a:p>
@@ -3506,6 +3951,570 @@
 <file path=ppt/slides/slide11.xml><?xml version="1.0" encoding="utf-8"?>
 <p:sld xmlns:a="http://schemas.openxmlformats.org/drawingml/2006/main" xmlns:r="http://schemas.openxmlformats.org/officeDocument/2006/relationships" xmlns:p="http://schemas.openxmlformats.org/presentationml/2006/main">
   <p:cSld name="Slide 11">
+    <p:bg>
+      <p:bgPr>
+        <a:solidFill>
+          <a:srgbClr val="FFFFFF"/>
+        </a:solidFill>
+      </p:bgPr>
+    </p:bg>
+    <p:spTree>
+      <p:nvGrpSpPr>
+        <p:cNvPr id="1" name=""/>
+        <p:cNvGrpSpPr/>
+        <p:nvPr/>
+      </p:nvGrpSpPr>
+      <p:grpSpPr>
+        <a:xfrm>
+          <a:off x="0" y="0"/>
+          <a:ext cx="0" cy="0"/>
+          <a:chOff x="0" y="0"/>
+          <a:chExt cx="0" cy="0"/>
+        </a:xfrm>
+      </p:grpSpPr>
+      <p:sp>
+        <p:nvSpPr>
+          <p:cNvPr id="2" name="Text 0"/>
+          <p:cNvSpPr/>
+          <p:nvPr/>
+        </p:nvSpPr>
+        <p:spPr>
+          <a:xfrm>
+            <a:off x="566928" y="329184"/>
+            <a:ext cx="10515600" cy="310896"/>
+          </a:xfrm>
+          <a:prstGeom prst="rect">
+            <a:avLst/>
+          </a:prstGeom>
+          <a:noFill/>
+          <a:ln/>
+        </p:spPr>
+        <p:txBody>
+          <a:bodyPr wrap="square" lIns="0" tIns="0" rIns="0" bIns="0" rtlCol="0" anchor="ctr"/>
+          <a:lstStyle/>
+          <a:p>
+            <a:pPr algn="l" indent="0" marL="0">
+              <a:buNone/>
+            </a:pPr>
+            <a:r>
+              <a:rPr lang="en-US" sz="1100" b="1" spc="150" kern="0" dirty="0">
+                <a:solidFill>
+                  <a:srgbClr val="2E7D32"/>
+                </a:solidFill>
+                <a:latin typeface="Calibri" pitchFamily="34" charset="0"/>
+                <a:ea typeface="Calibri" pitchFamily="34" charset="-122"/>
+                <a:cs typeface="Calibri" pitchFamily="34" charset="-120"/>
+              </a:rPr>
+              <a:t>MICROBIOLOGY   ·   INTEGRATION</a:t>
+            </a:r>
+            <a:endParaRPr lang="en-US" sz="1100" dirty="0"/>
+          </a:p>
+        </p:txBody>
+      </p:sp>
+      <p:sp>
+        <p:nvSpPr>
+          <p:cNvPr id="3" name="Text 1"/>
+          <p:cNvSpPr/>
+          <p:nvPr/>
+        </p:nvSpPr>
+        <p:spPr>
+          <a:xfrm>
+            <a:off x="566928" y="713232"/>
+            <a:ext cx="11064240" cy="749808"/>
+          </a:xfrm>
+          <a:prstGeom prst="rect">
+            <a:avLst/>
+          </a:prstGeom>
+          <a:noFill/>
+          <a:ln/>
+        </p:spPr>
+        <p:txBody>
+          <a:bodyPr wrap="square" lIns="0" tIns="0" rIns="0" bIns="0" rtlCol="0" anchor="ctr"/>
+          <a:lstStyle/>
+          <a:p>
+            <a:pPr algn="l" indent="0" marL="0">
+              <a:buNone/>
+            </a:pPr>
+            <a:r>
+              <a:rPr lang="en-US" sz="3000" b="1" dirty="0">
+                <a:solidFill>
+                  <a:srgbClr val="0E3A5F"/>
+                </a:solidFill>
+                <a:latin typeface="Calibri" pitchFamily="34" charset="0"/>
+                <a:ea typeface="Calibri" pitchFamily="34" charset="-122"/>
+                <a:cs typeface="Calibri" pitchFamily="34" charset="-120"/>
+              </a:rPr>
+              <a:t>From Result to Meaning</a:t>
+            </a:r>
+            <a:endParaRPr lang="en-US" sz="3000" dirty="0"/>
+          </a:p>
+        </p:txBody>
+      </p:sp>
+      <p:sp>
+        <p:nvSpPr>
+          <p:cNvPr id="4" name="Shape 2"/>
+          <p:cNvSpPr/>
+          <p:nvPr/>
+        </p:nvSpPr>
+        <p:spPr>
+          <a:xfrm>
+            <a:off x="566928" y="1517904"/>
+            <a:ext cx="5346040" cy="4114800"/>
+          </a:xfrm>
+          <a:prstGeom prst="roundRect">
+            <a:avLst>
+              <a:gd name="adj" fmla="val 2000"/>
+            </a:avLst>
+          </a:prstGeom>
+          <a:solidFill>
+            <a:srgbClr val="E8F2E9"/>
+          </a:solidFill>
+          <a:ln/>
+          <a:effectLst>
+            <a:outerShdw sx="100000" sy="100000" kx="0" ky="0" algn="bl" rotWithShape="0" blurRad="88900" dist="25400" dir="5400000">
+              <a:srgbClr val="22303C">
+                <a:alpha val="12000"/>
+              </a:srgbClr>
+            </a:outerShdw>
+          </a:effectLst>
+        </p:spPr>
+      </p:sp>
+      <p:sp>
+        <p:nvSpPr>
+          <p:cNvPr id="5" name="Text 3"/>
+          <p:cNvSpPr/>
+          <p:nvPr/>
+        </p:nvSpPr>
+        <p:spPr>
+          <a:xfrm>
+            <a:off x="804672" y="1682496"/>
+            <a:ext cx="4888840" cy="274320"/>
+          </a:xfrm>
+          <a:prstGeom prst="rect">
+            <a:avLst/>
+          </a:prstGeom>
+          <a:noFill/>
+          <a:ln/>
+        </p:spPr>
+        <p:txBody>
+          <a:bodyPr wrap="square" lIns="0" tIns="0" rIns="0" bIns="0" rtlCol="0" anchor="ctr"/>
+          <a:lstStyle/>
+          <a:p>
+            <a:pPr indent="0" marL="0">
+              <a:buNone/>
+            </a:pPr>
+            <a:r>
+              <a:rPr lang="en-US" sz="1200" b="1" spc="100" kern="0" dirty="0">
+                <a:solidFill>
+                  <a:srgbClr val="1F5722"/>
+                </a:solidFill>
+                <a:latin typeface="Calibri" pitchFamily="34" charset="0"/>
+                <a:ea typeface="Calibri" pitchFamily="34" charset="-122"/>
+                <a:cs typeface="Calibri" pitchFamily="34" charset="-120"/>
+              </a:rPr>
+              <a:t>CORRELATE WITH THE PATIENT</a:t>
+            </a:r>
+            <a:endParaRPr lang="en-US" sz="1200" dirty="0"/>
+          </a:p>
+        </p:txBody>
+      </p:sp>
+      <p:sp>
+        <p:nvSpPr>
+          <p:cNvPr id="6" name="Text 4"/>
+          <p:cNvSpPr/>
+          <p:nvPr/>
+        </p:nvSpPr>
+        <p:spPr>
+          <a:xfrm>
+            <a:off x="804672" y="2029968"/>
+            <a:ext cx="4870552" cy="3474720"/>
+          </a:xfrm>
+          <a:prstGeom prst="rect">
+            <a:avLst/>
+          </a:prstGeom>
+          <a:noFill/>
+          <a:ln/>
+        </p:spPr>
+        <p:txBody>
+          <a:bodyPr wrap="square" lIns="0" tIns="0" rIns="0" bIns="0" rtlCol="0" anchor="t"/>
+          <a:lstStyle/>
+          <a:p>
+            <a:pPr algn="l" marL="177800" indent="-177800">
+              <a:spcAft>
+                <a:spcPts val="900"/>
+              </a:spcAft>
+              <a:buSzPct val="100000"/>
+              <a:buChar char="•"/>
+            </a:pPr>
+            <a:r>
+              <a:rPr lang="en-US" sz="1250" b="1" dirty="0">
+                <a:solidFill>
+                  <a:srgbClr val="1B2A38"/>
+                </a:solidFill>
+                <a:latin typeface="Calibri" pitchFamily="34" charset="0"/>
+                <a:ea typeface="Calibri" pitchFamily="34" charset="-122"/>
+                <a:cs typeface="Calibri" pitchFamily="34" charset="-120"/>
+              </a:rPr>
+              <a:t>An identified organism must be interpreted against the source and clinical syndrome.</a:t>
+            </a:r>
+            <a:endParaRPr lang="en-US" sz="1250" dirty="0"/>
+          </a:p>
+          <a:p>
+            <a:pPr algn="l" marL="177800" indent="-177800">
+              <a:spcAft>
+                <a:spcPts val="900"/>
+              </a:spcAft>
+              <a:buSzPct val="100000"/>
+              <a:buChar char="•"/>
+            </a:pPr>
+            <a:r>
+              <a:rPr lang="en-US" sz="1250" dirty="0">
+                <a:solidFill>
+                  <a:srgbClr val="33444F"/>
+                </a:solidFill>
+                <a:latin typeface="Calibri" pitchFamily="34" charset="0"/>
+                <a:ea typeface="Calibri" pitchFamily="34" charset="-122"/>
+                <a:cs typeface="Calibri" pitchFamily="34" charset="-120"/>
+              </a:rPr>
+              <a:t>Sterile-site isolates carry more weight than flora-rich sites.</a:t>
+            </a:r>
+            <a:endParaRPr lang="en-US" sz="1250" dirty="0"/>
+          </a:p>
+          <a:p>
+            <a:pPr algn="l" marL="177800" indent="-177800">
+              <a:spcAft>
+                <a:spcPts val="900"/>
+              </a:spcAft>
+              <a:buSzPct val="100000"/>
+              <a:buChar char="•"/>
+            </a:pPr>
+            <a:r>
+              <a:rPr lang="en-US" sz="1250" dirty="0">
+                <a:solidFill>
+                  <a:srgbClr val="33444F"/>
+                </a:solidFill>
+                <a:latin typeface="Calibri" pitchFamily="34" charset="0"/>
+                <a:ea typeface="Calibri" pitchFamily="34" charset="-122"/>
+                <a:cs typeface="Calibri" pitchFamily="34" charset="-120"/>
+              </a:rPr>
+              <a:t>Quantity and purity of growth matter.</a:t>
+            </a:r>
+            <a:endParaRPr lang="en-US" sz="1250" dirty="0"/>
+          </a:p>
+          <a:p>
+            <a:pPr algn="l" marL="177800" indent="-177800">
+              <a:spcAft>
+                <a:spcPts val="900"/>
+              </a:spcAft>
+              <a:buSzPct val="100000"/>
+              <a:buChar char="•"/>
+            </a:pPr>
+            <a:r>
+              <a:rPr lang="en-US" sz="1250" dirty="0">
+                <a:solidFill>
+                  <a:srgbClr val="33444F"/>
+                </a:solidFill>
+                <a:latin typeface="Calibri" pitchFamily="34" charset="0"/>
+                <a:ea typeface="Calibri" pitchFamily="34" charset="-122"/>
+                <a:cs typeface="Calibri" pitchFamily="34" charset="-120"/>
+              </a:rPr>
+              <a:t>Communicate critical Gram stains and IDs promptly.</a:t>
+            </a:r>
+            <a:endParaRPr lang="en-US" sz="1250" dirty="0"/>
+          </a:p>
+        </p:txBody>
+      </p:sp>
+      <p:sp>
+        <p:nvSpPr>
+          <p:cNvPr id="7" name="Shape 5"/>
+          <p:cNvSpPr/>
+          <p:nvPr/>
+        </p:nvSpPr>
+        <p:spPr>
+          <a:xfrm>
+            <a:off x="6278728" y="1517904"/>
+            <a:ext cx="5346040" cy="4114800"/>
+          </a:xfrm>
+          <a:prstGeom prst="roundRect">
+            <a:avLst>
+              <a:gd name="adj" fmla="val 2000"/>
+            </a:avLst>
+          </a:prstGeom>
+          <a:solidFill>
+            <a:srgbClr val="E9F3EA"/>
+          </a:solidFill>
+          <a:ln/>
+          <a:effectLst>
+            <a:outerShdw sx="100000" sy="100000" kx="0" ky="0" algn="bl" rotWithShape="0" blurRad="88900" dist="25400" dir="5400000">
+              <a:srgbClr val="22303C">
+                <a:alpha val="12000"/>
+              </a:srgbClr>
+            </a:outerShdw>
+          </a:effectLst>
+        </p:spPr>
+      </p:sp>
+      <p:sp>
+        <p:nvSpPr>
+          <p:cNvPr id="8" name="Text 6"/>
+          <p:cNvSpPr/>
+          <p:nvPr/>
+        </p:nvSpPr>
+        <p:spPr>
+          <a:xfrm>
+            <a:off x="6516472" y="1682496"/>
+            <a:ext cx="4888840" cy="274320"/>
+          </a:xfrm>
+          <a:prstGeom prst="rect">
+            <a:avLst/>
+          </a:prstGeom>
+          <a:noFill/>
+          <a:ln/>
+        </p:spPr>
+        <p:txBody>
+          <a:bodyPr wrap="square" lIns="0" tIns="0" rIns="0" bIns="0" rtlCol="0" anchor="ctr"/>
+          <a:lstStyle/>
+          <a:p>
+            <a:pPr indent="0" marL="0">
+              <a:buNone/>
+            </a:pPr>
+            <a:r>
+              <a:rPr lang="en-US" sz="1200" b="1" spc="100" kern="0" dirty="0">
+                <a:solidFill>
+                  <a:srgbClr val="1F5722"/>
+                </a:solidFill>
+                <a:latin typeface="Calibri" pitchFamily="34" charset="0"/>
+                <a:ea typeface="Calibri" pitchFamily="34" charset="-122"/>
+                <a:cs typeface="Calibri" pitchFamily="34" charset="-120"/>
+              </a:rPr>
+              <a:t>WORKFLOW DISCIPLINE</a:t>
+            </a:r>
+            <a:endParaRPr lang="en-US" sz="1200" dirty="0"/>
+          </a:p>
+        </p:txBody>
+      </p:sp>
+      <p:sp>
+        <p:nvSpPr>
+          <p:cNvPr id="9" name="Text 7"/>
+          <p:cNvSpPr/>
+          <p:nvPr/>
+        </p:nvSpPr>
+        <p:spPr>
+          <a:xfrm>
+            <a:off x="6516472" y="2029968"/>
+            <a:ext cx="4870552" cy="3474720"/>
+          </a:xfrm>
+          <a:prstGeom prst="rect">
+            <a:avLst/>
+          </a:prstGeom>
+          <a:noFill/>
+          <a:ln/>
+        </p:spPr>
+        <p:txBody>
+          <a:bodyPr wrap="square" lIns="0" tIns="0" rIns="0" bIns="0" rtlCol="0" anchor="t"/>
+          <a:lstStyle/>
+          <a:p>
+            <a:pPr algn="l" marL="177800" indent="-177800">
+              <a:spcAft>
+                <a:spcPts val="900"/>
+              </a:spcAft>
+              <a:buSzPct val="100000"/>
+              <a:buChar char="•"/>
+            </a:pPr>
+            <a:r>
+              <a:rPr lang="en-US" sz="1250" b="1" dirty="0">
+                <a:solidFill>
+                  <a:srgbClr val="1B2A38"/>
+                </a:solidFill>
+                <a:latin typeface="Calibri" pitchFamily="34" charset="0"/>
+                <a:ea typeface="Calibri" pitchFamily="34" charset="-122"/>
+                <a:cs typeface="Calibri" pitchFamily="34" charset="-120"/>
+              </a:rPr>
+              <a:t>Preliminary Gram stain → culture → ID → susceptibility, each reported as available.</a:t>
+            </a:r>
+            <a:endParaRPr lang="en-US" sz="1250" dirty="0"/>
+          </a:p>
+          <a:p>
+            <a:pPr algn="l" marL="177800" indent="-177800">
+              <a:spcAft>
+                <a:spcPts val="900"/>
+              </a:spcAft>
+              <a:buSzPct val="100000"/>
+              <a:buChar char="•"/>
+            </a:pPr>
+            <a:r>
+              <a:rPr lang="en-US" sz="1250" dirty="0">
+                <a:solidFill>
+                  <a:srgbClr val="33444F"/>
+                </a:solidFill>
+                <a:latin typeface="Calibri" pitchFamily="34" charset="0"/>
+                <a:ea typeface="Calibri" pitchFamily="34" charset="-122"/>
+                <a:cs typeface="Calibri" pitchFamily="34" charset="-120"/>
+              </a:rPr>
+              <a:t>Preliminary reports guide empiric therapy.</a:t>
+            </a:r>
+            <a:endParaRPr lang="en-US" sz="1250" dirty="0"/>
+          </a:p>
+          <a:p>
+            <a:pPr algn="l" marL="177800" indent="-177800">
+              <a:spcAft>
+                <a:spcPts val="900"/>
+              </a:spcAft>
+              <a:buSzPct val="100000"/>
+              <a:buChar char="•"/>
+            </a:pPr>
+            <a:r>
+              <a:rPr lang="en-US" sz="1250" dirty="0">
+                <a:solidFill>
+                  <a:srgbClr val="33444F"/>
+                </a:solidFill>
+                <a:latin typeface="Calibri" pitchFamily="34" charset="0"/>
+                <a:ea typeface="Calibri" pitchFamily="34" charset="-122"/>
+                <a:cs typeface="Calibri" pitchFamily="34" charset="-120"/>
+              </a:rPr>
+              <a:t>Final ID and AST refine to targeted therapy.</a:t>
+            </a:r>
+            <a:endParaRPr lang="en-US" sz="1250" dirty="0"/>
+          </a:p>
+          <a:p>
+            <a:pPr algn="l" marL="177800" indent="-177800">
+              <a:spcAft>
+                <a:spcPts val="900"/>
+              </a:spcAft>
+              <a:buSzPct val="100000"/>
+              <a:buChar char="•"/>
+            </a:pPr>
+            <a:r>
+              <a:rPr lang="en-US" sz="1250" dirty="0">
+                <a:solidFill>
+                  <a:srgbClr val="33444F"/>
+                </a:solidFill>
+                <a:latin typeface="Calibri" pitchFamily="34" charset="0"/>
+                <a:ea typeface="Calibri" pitchFamily="34" charset="-122"/>
+                <a:cs typeface="Calibri" pitchFamily="34" charset="-120"/>
+              </a:rPr>
+              <a:t>Documentation supports stewardship.</a:t>
+            </a:r>
+            <a:endParaRPr lang="en-US" sz="1250" dirty="0"/>
+          </a:p>
+        </p:txBody>
+      </p:sp>
+      <p:sp>
+        <p:nvSpPr>
+          <p:cNvPr id="10" name="Text 8"/>
+          <p:cNvSpPr/>
+          <p:nvPr/>
+        </p:nvSpPr>
+        <p:spPr>
+          <a:xfrm>
+            <a:off x="566928" y="6473952"/>
+            <a:ext cx="7772400" cy="274320"/>
+          </a:xfrm>
+          <a:prstGeom prst="rect">
+            <a:avLst/>
+          </a:prstGeom>
+          <a:noFill/>
+          <a:ln/>
+        </p:spPr>
+        <p:txBody>
+          <a:bodyPr wrap="square" lIns="0" tIns="0" rIns="0" bIns="0" rtlCol="0" anchor="ctr"/>
+          <a:lstStyle/>
+          <a:p>
+            <a:pPr algn="l" indent="0" marL="0">
+              <a:buNone/>
+            </a:pPr>
+            <a:r>
+              <a:rPr lang="en-US" sz="850" dirty="0">
+                <a:solidFill>
+                  <a:srgbClr val="9AA8B4"/>
+                </a:solidFill>
+                <a:latin typeface="Calibri" pitchFamily="34" charset="0"/>
+                <a:ea typeface="Calibri" pitchFamily="34" charset="-122"/>
+                <a:cs typeface="Calibri" pitchFamily="34" charset="-120"/>
+              </a:rPr>
+              <a:t>Makassed General Hospital  ·  Department of Laboratory Medicine</a:t>
+            </a:r>
+            <a:endParaRPr lang="en-US" sz="850" dirty="0"/>
+          </a:p>
+        </p:txBody>
+      </p:sp>
+      <p:sp>
+        <p:nvSpPr>
+          <p:cNvPr id="11" name="Text 9"/>
+          <p:cNvSpPr/>
+          <p:nvPr/>
+        </p:nvSpPr>
+        <p:spPr>
+          <a:xfrm>
+            <a:off x="9814255" y="6473952"/>
+            <a:ext cx="1828800" cy="274320"/>
+          </a:xfrm>
+          <a:prstGeom prst="rect">
+            <a:avLst/>
+          </a:prstGeom>
+          <a:noFill/>
+          <a:ln/>
+        </p:spPr>
+        <p:txBody>
+          <a:bodyPr wrap="square" lIns="0" tIns="0" rIns="0" bIns="0" rtlCol="0" anchor="ctr"/>
+          <a:lstStyle/>
+          <a:p>
+            <a:pPr algn="r" indent="0" marL="0">
+              <a:buNone/>
+            </a:pPr>
+            <a:r>
+              <a:rPr lang="en-US" sz="850" dirty="0">
+                <a:solidFill>
+                  <a:srgbClr val="9AA8B4"/>
+                </a:solidFill>
+                <a:latin typeface="Calibri" pitchFamily="34" charset="0"/>
+                <a:ea typeface="Calibri" pitchFamily="34" charset="-122"/>
+                <a:cs typeface="Calibri" pitchFamily="34" charset="-120"/>
+              </a:rPr>
+              <a:t>CP Lecture Series</a:t>
+            </a:r>
+            <a:pPr algn="r" indent="0" marL="0">
+              <a:buNone/>
+            </a:pPr>
+            <a:r>
+              <a:rPr lang="en-US" sz="850" dirty="0">
+                <a:solidFill>
+                  <a:srgbClr val="DCE4EC"/>
+                </a:solidFill>
+                <a:latin typeface="Calibri" pitchFamily="34" charset="0"/>
+                <a:ea typeface="Calibri" pitchFamily="34" charset="-122"/>
+                <a:cs typeface="Calibri" pitchFamily="34" charset="-120"/>
+              </a:rPr>
+              <a:t>   ·   </a:t>
+            </a:r>
+            <a:pPr algn="r" indent="0" marL="0">
+              <a:buNone/>
+            </a:pPr>
+            <a:r>
+              <a:rPr lang="en-US" sz="850" b="1" dirty="0">
+                <a:solidFill>
+                  <a:srgbClr val="2E7D32"/>
+                </a:solidFill>
+                <a:latin typeface="Calibri" pitchFamily="34" charset="0"/>
+                <a:ea typeface="Calibri" pitchFamily="34" charset="-122"/>
+                <a:cs typeface="Calibri" pitchFamily="34" charset="-120"/>
+              </a:rPr>
+              <a:t>9</a:t>
+            </a:r>
+            <a:endParaRPr lang="en-US" sz="850" dirty="0"/>
+          </a:p>
+        </p:txBody>
+      </p:sp>
+    </p:spTree>
+  </p:cSld>
+  <p:clrMapOvr>
+    <a:masterClrMapping/>
+  </p:clrMapOvr>
+</p:sld>
+</file>
+
+<file path=ppt/slides/slide12.xml><?xml version="1.0" encoding="utf-8"?>
+<p:sld xmlns:a="http://schemas.openxmlformats.org/drawingml/2006/main" xmlns:r="http://schemas.openxmlformats.org/officeDocument/2006/relationships" xmlns:p="http://schemas.openxmlformats.org/presentationml/2006/main">
+  <p:cSld name="Slide 12">
     <p:bg>
       <p:bgPr>
         <a:solidFill>
@@ -3682,442 +4691,9 @@
                 <a:ea typeface="Calibri" pitchFamily="34" charset="-122"/>
                 <a:cs typeface="Calibri" pitchFamily="34" charset="-120"/>
               </a:rPr>
-              <a:t>Cases &amp; Board Review</a:t>
+              <a:t>Limits, Cases &amp; Board</a:t>
             </a:r>
             <a:endParaRPr lang="en-US" sz="3800" dirty="0"/>
-          </a:p>
-        </p:txBody>
-      </p:sp>
-    </p:spTree>
-  </p:cSld>
-  <p:clrMapOvr>
-    <a:masterClrMapping/>
-  </p:clrMapOvr>
-</p:sld>
-</file>
-
-<file path=ppt/slides/slide12.xml><?xml version="1.0" encoding="utf-8"?>
-<p:sld xmlns:a="http://schemas.openxmlformats.org/drawingml/2006/main" xmlns:r="http://schemas.openxmlformats.org/officeDocument/2006/relationships" xmlns:p="http://schemas.openxmlformats.org/presentationml/2006/main">
-  <p:cSld name="Slide 12">
-    <p:bg>
-      <p:bgPr>
-        <a:solidFill>
-          <a:srgbClr val="FFFFFF"/>
-        </a:solidFill>
-      </p:bgPr>
-    </p:bg>
-    <p:spTree>
-      <p:nvGrpSpPr>
-        <p:cNvPr id="1" name=""/>
-        <p:cNvGrpSpPr/>
-        <p:nvPr/>
-      </p:nvGrpSpPr>
-      <p:grpSpPr>
-        <a:xfrm>
-          <a:off x="0" y="0"/>
-          <a:ext cx="0" cy="0"/>
-          <a:chOff x="0" y="0"/>
-          <a:chExt cx="0" cy="0"/>
-        </a:xfrm>
-      </p:grpSpPr>
-      <p:sp>
-        <p:nvSpPr>
-          <p:cNvPr id="2" name="Text 0"/>
-          <p:cNvSpPr/>
-          <p:nvPr/>
-        </p:nvSpPr>
-        <p:spPr>
-          <a:xfrm>
-            <a:off x="566928" y="329184"/>
-            <a:ext cx="10515600" cy="310896"/>
-          </a:xfrm>
-          <a:prstGeom prst="rect">
-            <a:avLst/>
-          </a:prstGeom>
-          <a:noFill/>
-          <a:ln/>
-        </p:spPr>
-        <p:txBody>
-          <a:bodyPr wrap="square" lIns="0" tIns="0" rIns="0" bIns="0" rtlCol="0" anchor="ctr"/>
-          <a:lstStyle/>
-          <a:p>
-            <a:pPr algn="l" indent="0" marL="0">
-              <a:buNone/>
-            </a:pPr>
-            <a:r>
-              <a:rPr lang="en-US" sz="1100" b="1" spc="150" kern="0" dirty="0">
-                <a:solidFill>
-                  <a:srgbClr val="2E7D32"/>
-                </a:solidFill>
-                <a:latin typeface="Calibri" pitchFamily="34" charset="0"/>
-                <a:ea typeface="Calibri" pitchFamily="34" charset="-122"/>
-                <a:cs typeface="Calibri" pitchFamily="34" charset="-120"/>
-              </a:rPr>
-              <a:t>MICROBIOLOGY   ·   CASE 1</a:t>
-            </a:r>
-            <a:endParaRPr lang="en-US" sz="1100" dirty="0"/>
-          </a:p>
-        </p:txBody>
-      </p:sp>
-      <p:sp>
-        <p:nvSpPr>
-          <p:cNvPr id="3" name="Text 1"/>
-          <p:cNvSpPr/>
-          <p:nvPr/>
-        </p:nvSpPr>
-        <p:spPr>
-          <a:xfrm>
-            <a:off x="566928" y="713232"/>
-            <a:ext cx="11064240" cy="749808"/>
-          </a:xfrm>
-          <a:prstGeom prst="rect">
-            <a:avLst/>
-          </a:prstGeom>
-          <a:noFill/>
-          <a:ln/>
-        </p:spPr>
-        <p:txBody>
-          <a:bodyPr wrap="square" lIns="0" tIns="0" rIns="0" bIns="0" rtlCol="0" anchor="ctr"/>
-          <a:lstStyle/>
-          <a:p>
-            <a:pPr algn="l" indent="0" marL="0">
-              <a:buNone/>
-            </a:pPr>
-            <a:r>
-              <a:rPr lang="en-US" sz="3000" b="1" dirty="0">
-                <a:solidFill>
-                  <a:srgbClr val="0E3A5F"/>
-                </a:solidFill>
-                <a:latin typeface="Calibri" pitchFamily="34" charset="0"/>
-                <a:ea typeface="Calibri" pitchFamily="34" charset="-122"/>
-                <a:cs typeface="Calibri" pitchFamily="34" charset="-120"/>
-              </a:rPr>
-              <a:t>Case 1</a:t>
-            </a:r>
-            <a:endParaRPr lang="en-US" sz="3000" dirty="0"/>
-          </a:p>
-        </p:txBody>
-      </p:sp>
-      <p:sp>
-        <p:nvSpPr>
-          <p:cNvPr id="4" name="Shape 2"/>
-          <p:cNvSpPr/>
-          <p:nvPr/>
-        </p:nvSpPr>
-        <p:spPr>
-          <a:xfrm>
-            <a:off x="566928" y="1517904"/>
-            <a:ext cx="11057839" cy="2788920"/>
-          </a:xfrm>
-          <a:prstGeom prst="roundRect">
-            <a:avLst>
-              <a:gd name="adj" fmla="val 2951"/>
-            </a:avLst>
-          </a:prstGeom>
-          <a:solidFill>
-            <a:srgbClr val="E8F2E9"/>
-          </a:solidFill>
-          <a:ln/>
-          <a:effectLst>
-            <a:outerShdw sx="100000" sy="100000" kx="0" ky="0" algn="bl" rotWithShape="0" blurRad="88900" dist="25400" dir="5400000">
-              <a:srgbClr val="22303C">
-                <a:alpha val="12000"/>
-              </a:srgbClr>
-            </a:outerShdw>
-          </a:effectLst>
-        </p:spPr>
-      </p:sp>
-      <p:sp>
-        <p:nvSpPr>
-          <p:cNvPr id="5" name="Text 3"/>
-          <p:cNvSpPr/>
-          <p:nvPr/>
-        </p:nvSpPr>
-        <p:spPr>
-          <a:xfrm>
-            <a:off x="841248" y="1700784"/>
-            <a:ext cx="5486400" cy="292608"/>
-          </a:xfrm>
-          <a:prstGeom prst="rect">
-            <a:avLst/>
-          </a:prstGeom>
-          <a:noFill/>
-          <a:ln/>
-        </p:spPr>
-        <p:txBody>
-          <a:bodyPr wrap="square" lIns="0" tIns="0" rIns="0" bIns="0" rtlCol="0" anchor="ctr"/>
-          <a:lstStyle/>
-          <a:p>
-            <a:pPr indent="0" marL="0">
-              <a:buNone/>
-            </a:pPr>
-            <a:r>
-              <a:rPr lang="en-US" sz="1100" b="1" spc="150" kern="0" dirty="0">
-                <a:solidFill>
-                  <a:srgbClr val="2E7D32"/>
-                </a:solidFill>
-                <a:latin typeface="Calibri" pitchFamily="34" charset="0"/>
-                <a:ea typeface="Calibri" pitchFamily="34" charset="-122"/>
-                <a:cs typeface="Calibri" pitchFamily="34" charset="-120"/>
-              </a:rPr>
-              <a:t>CLINICAL VIGNETTE</a:t>
-            </a:r>
-            <a:endParaRPr lang="en-US" sz="1100" dirty="0"/>
-          </a:p>
-        </p:txBody>
-      </p:sp>
-      <p:sp>
-        <p:nvSpPr>
-          <p:cNvPr id="6" name="Text 4"/>
-          <p:cNvSpPr/>
-          <p:nvPr/>
-        </p:nvSpPr>
-        <p:spPr>
-          <a:xfrm>
-            <a:off x="841248" y="2029968"/>
-            <a:ext cx="10509199" cy="2148840"/>
-          </a:xfrm>
-          <a:prstGeom prst="rect">
-            <a:avLst/>
-          </a:prstGeom>
-          <a:noFill/>
-          <a:ln/>
-        </p:spPr>
-        <p:txBody>
-          <a:bodyPr wrap="square" lIns="0" tIns="0" rIns="0" bIns="0" rtlCol="0" anchor="t"/>
-          <a:lstStyle/>
-          <a:p>
-            <a:pPr algn="l" indent="0" marL="0">
-              <a:lnSpc>
-                <a:spcPct val="108000"/>
-              </a:lnSpc>
-              <a:buNone/>
-            </a:pPr>
-            <a:r>
-              <a:rPr lang="en-US" sz="1450" dirty="0">
-                <a:solidFill>
-                  <a:srgbClr val="33444F"/>
-                </a:solidFill>
-                <a:latin typeface="Calibri" pitchFamily="34" charset="0"/>
-                <a:ea typeface="Calibri" pitchFamily="34" charset="-122"/>
-                <a:cs typeface="Calibri" pitchFamily="34" charset="-120"/>
-              </a:rPr>
-              <a:t>A blood culture flags positive; the Gram stain shows Gram-positive cocci in clusters. The patient is septic.</a:t>
-            </a:r>
-            <a:endParaRPr lang="en-US" sz="1450" dirty="0"/>
-          </a:p>
-        </p:txBody>
-      </p:sp>
-      <p:sp>
-        <p:nvSpPr>
-          <p:cNvPr id="7" name="Shape 5"/>
-          <p:cNvSpPr/>
-          <p:nvPr/>
-        </p:nvSpPr>
-        <p:spPr>
-          <a:xfrm>
-            <a:off x="566928" y="4553712"/>
-            <a:ext cx="11057839" cy="1325880"/>
-          </a:xfrm>
-          <a:prstGeom prst="roundRect">
-            <a:avLst>
-              <a:gd name="adj" fmla="val 6207"/>
-            </a:avLst>
-          </a:prstGeom>
-          <a:solidFill>
-            <a:srgbClr val="0E3A5F"/>
-          </a:solidFill>
-          <a:ln/>
-          <a:effectLst>
-            <a:outerShdw sx="100000" sy="100000" kx="0" ky="0" algn="bl" rotWithShape="0" blurRad="88900" dist="25400" dir="5400000">
-              <a:srgbClr val="22303C">
-                <a:alpha val="12000"/>
-              </a:srgbClr>
-            </a:outerShdw>
-          </a:effectLst>
-        </p:spPr>
-      </p:sp>
-      <p:sp>
-        <p:nvSpPr>
-          <p:cNvPr id="8" name="Text 6"/>
-          <p:cNvSpPr/>
-          <p:nvPr/>
-        </p:nvSpPr>
-        <p:spPr>
-          <a:xfrm>
-            <a:off x="822960" y="4681728"/>
-            <a:ext cx="640080" cy="960120"/>
-          </a:xfrm>
-          <a:prstGeom prst="rect">
-            <a:avLst/>
-          </a:prstGeom>
-          <a:noFill/>
-          <a:ln/>
-        </p:spPr>
-        <p:txBody>
-          <a:bodyPr wrap="square" lIns="0" tIns="0" rIns="0" bIns="0" rtlCol="0" anchor="ctr"/>
-          <a:lstStyle/>
-          <a:p>
-            <a:pPr algn="ctr" indent="0" marL="0">
-              <a:buNone/>
-            </a:pPr>
-            <a:r>
-              <a:rPr lang="en-US" sz="4000" b="1" dirty="0">
-                <a:solidFill>
-                  <a:srgbClr val="2E7D32"/>
-                </a:solidFill>
-                <a:latin typeface="Calibri" pitchFamily="34" charset="0"/>
-                <a:ea typeface="Calibri" pitchFamily="34" charset="-122"/>
-                <a:cs typeface="Calibri" pitchFamily="34" charset="-120"/>
-              </a:rPr>
-              <a:t>?</a:t>
-            </a:r>
-            <a:endParaRPr lang="en-US" sz="4000" dirty="0"/>
-          </a:p>
-        </p:txBody>
-      </p:sp>
-      <p:sp>
-        <p:nvSpPr>
-          <p:cNvPr id="9" name="Text 7"/>
-          <p:cNvSpPr/>
-          <p:nvPr/>
-        </p:nvSpPr>
-        <p:spPr>
-          <a:xfrm>
-            <a:off x="1618488" y="4553712"/>
-            <a:ext cx="9686239" cy="1325880"/>
-          </a:xfrm>
-          <a:prstGeom prst="rect">
-            <a:avLst/>
-          </a:prstGeom>
-          <a:noFill/>
-          <a:ln/>
-        </p:spPr>
-        <p:txBody>
-          <a:bodyPr wrap="square" lIns="0" tIns="0" rIns="0" bIns="0" rtlCol="0" anchor="ctr"/>
-          <a:lstStyle/>
-          <a:p>
-            <a:pPr algn="l" indent="0" marL="0">
-              <a:buNone/>
-            </a:pPr>
-            <a:r>
-              <a:rPr lang="en-US" sz="1500" b="1" dirty="0">
-                <a:solidFill>
-                  <a:srgbClr val="FFFFFF"/>
-                </a:solidFill>
-                <a:latin typeface="Calibri" pitchFamily="34" charset="0"/>
-                <a:ea typeface="Calibri" pitchFamily="34" charset="-122"/>
-                <a:cs typeface="Calibri" pitchFamily="34" charset="-120"/>
-              </a:rPr>
-              <a:t>What is the working differential, what is the urgent action, and which bench test most quickly narrows it?</a:t>
-            </a:r>
-            <a:endParaRPr lang="en-US" sz="1500" dirty="0"/>
-          </a:p>
-        </p:txBody>
-      </p:sp>
-      <p:sp>
-        <p:nvSpPr>
-          <p:cNvPr id="10" name="Text 8"/>
-          <p:cNvSpPr/>
-          <p:nvPr/>
-        </p:nvSpPr>
-        <p:spPr>
-          <a:xfrm>
-            <a:off x="566928" y="6473952"/>
-            <a:ext cx="7772400" cy="274320"/>
-          </a:xfrm>
-          <a:prstGeom prst="rect">
-            <a:avLst/>
-          </a:prstGeom>
-          <a:noFill/>
-          <a:ln/>
-        </p:spPr>
-        <p:txBody>
-          <a:bodyPr wrap="square" lIns="0" tIns="0" rIns="0" bIns="0" rtlCol="0" anchor="ctr"/>
-          <a:lstStyle/>
-          <a:p>
-            <a:pPr algn="l" indent="0" marL="0">
-              <a:buNone/>
-            </a:pPr>
-            <a:r>
-              <a:rPr lang="en-US" sz="850" dirty="0">
-                <a:solidFill>
-                  <a:srgbClr val="9AA8B4"/>
-                </a:solidFill>
-                <a:latin typeface="Calibri" pitchFamily="34" charset="0"/>
-                <a:ea typeface="Calibri" pitchFamily="34" charset="-122"/>
-                <a:cs typeface="Calibri" pitchFamily="34" charset="-120"/>
-              </a:rPr>
-              <a:t>Makassed General Hospital  ·  Department of Laboratory Medicine</a:t>
-            </a:r>
-            <a:endParaRPr lang="en-US" sz="850" dirty="0"/>
-          </a:p>
-        </p:txBody>
-      </p:sp>
-      <p:sp>
-        <p:nvSpPr>
-          <p:cNvPr id="11" name="Text 9"/>
-          <p:cNvSpPr/>
-          <p:nvPr/>
-        </p:nvSpPr>
-        <p:spPr>
-          <a:xfrm>
-            <a:off x="9814255" y="6473952"/>
-            <a:ext cx="1828800" cy="274320"/>
-          </a:xfrm>
-          <a:prstGeom prst="rect">
-            <a:avLst/>
-          </a:prstGeom>
-          <a:noFill/>
-          <a:ln/>
-        </p:spPr>
-        <p:txBody>
-          <a:bodyPr wrap="square" lIns="0" tIns="0" rIns="0" bIns="0" rtlCol="0" anchor="ctr"/>
-          <a:lstStyle/>
-          <a:p>
-            <a:pPr algn="r" indent="0" marL="0">
-              <a:buNone/>
-            </a:pPr>
-            <a:r>
-              <a:rPr lang="en-US" sz="850" dirty="0">
-                <a:solidFill>
-                  <a:srgbClr val="9AA8B4"/>
-                </a:solidFill>
-                <a:latin typeface="Calibri" pitchFamily="34" charset="0"/>
-                <a:ea typeface="Calibri" pitchFamily="34" charset="-122"/>
-                <a:cs typeface="Calibri" pitchFamily="34" charset="-120"/>
-              </a:rPr>
-              <a:t>CP Lecture Series</a:t>
-            </a:r>
-            <a:pPr algn="r" indent="0" marL="0">
-              <a:buNone/>
-            </a:pPr>
-            <a:r>
-              <a:rPr lang="en-US" sz="850" dirty="0">
-                <a:solidFill>
-                  <a:srgbClr val="DCE4EC"/>
-                </a:solidFill>
-                <a:latin typeface="Calibri" pitchFamily="34" charset="0"/>
-                <a:ea typeface="Calibri" pitchFamily="34" charset="-122"/>
-                <a:cs typeface="Calibri" pitchFamily="34" charset="-120"/>
-              </a:rPr>
-              <a:t>   ·   </a:t>
-            </a:r>
-            <a:pPr algn="r" indent="0" marL="0">
-              <a:buNone/>
-            </a:pPr>
-            <a:r>
-              <a:rPr lang="en-US" sz="850" b="1" dirty="0">
-                <a:solidFill>
-                  <a:srgbClr val="2E7D32"/>
-                </a:solidFill>
-                <a:latin typeface="Calibri" pitchFamily="34" charset="0"/>
-                <a:ea typeface="Calibri" pitchFamily="34" charset="-122"/>
-                <a:cs typeface="Calibri" pitchFamily="34" charset="-120"/>
-              </a:rPr>
-              <a:t>9</a:t>
-            </a:r>
-            <a:endParaRPr lang="en-US" sz="850" dirty="0"/>
           </a:p>
         </p:txBody>
       </p:sp>
@@ -4186,7 +4762,7 @@
                 <a:ea typeface="Calibri" pitchFamily="34" charset="-122"/>
                 <a:cs typeface="Calibri" pitchFamily="34" charset="-120"/>
               </a:rPr>
-              <a:t>MICROBIOLOGY   ·   CASE 1  ·  RESOLUTION</a:t>
+              <a:t>MICROBIOLOGY   ·   LIMITS</a:t>
             </a:r>
             <a:endParaRPr lang="en-US" sz="1100" dirty="0"/>
           </a:p>
@@ -4225,7 +4801,7 @@
                 <a:ea typeface="Calibri" pitchFamily="34" charset="-122"/>
                 <a:cs typeface="Calibri" pitchFamily="34" charset="-120"/>
               </a:rPr>
-              <a:t>Case 1: GPC in Clusters from Blood</a:t>
+              <a:t>Organisms That Escape Routine Methods</a:t>
             </a:r>
             <a:endParaRPr lang="en-US" sz="3000" dirty="0"/>
           </a:p>
@@ -4233,124 +4809,18 @@
       </p:sp>
       <p:sp>
         <p:nvSpPr>
-          <p:cNvPr id="4" name="Text 2"/>
-          <p:cNvSpPr/>
-          <p:nvPr/>
-        </p:nvSpPr>
-        <p:spPr>
-          <a:xfrm>
-            <a:off x="566928" y="1554480"/>
-            <a:ext cx="6413547" cy="4023360"/>
-          </a:xfrm>
-          <a:prstGeom prst="rect">
-            <a:avLst/>
-          </a:prstGeom>
-          <a:noFill/>
-          <a:ln/>
-        </p:spPr>
-        <p:txBody>
-          <a:bodyPr wrap="square" lIns="0" tIns="0" rIns="0" bIns="0" rtlCol="0" anchor="t"/>
-          <a:lstStyle/>
-          <a:p>
-            <a:pPr algn="l" marL="177800" indent="-177800">
-              <a:spcAft>
-                <a:spcPts val="900"/>
-              </a:spcAft>
-              <a:buSzPct val="100000"/>
-              <a:buChar char="•"/>
-            </a:pPr>
-            <a:r>
-              <a:rPr lang="en-US" sz="1400" b="1" dirty="0">
-                <a:solidFill>
-                  <a:srgbClr val="1B2A38"/>
-                </a:solidFill>
-                <a:latin typeface="Calibri" pitchFamily="34" charset="0"/>
-                <a:ea typeface="Calibri" pitchFamily="34" charset="-122"/>
-                <a:cs typeface="Calibri" pitchFamily="34" charset="-120"/>
-              </a:rPr>
-              <a:t>Gram-positive cocci in clusters suggest Staphylococcus — distinguish S. aureus from coagulase-negative staphylococci.</a:t>
-            </a:r>
-            <a:endParaRPr lang="en-US" sz="1400" dirty="0"/>
-          </a:p>
-          <a:p>
-            <a:pPr algn="l" marL="177800" indent="-177800">
-              <a:spcAft>
-                <a:spcPts val="900"/>
-              </a:spcAft>
-              <a:buSzPct val="100000"/>
-              <a:buChar char="•"/>
-            </a:pPr>
-            <a:r>
-              <a:rPr lang="en-US" sz="1400" dirty="0">
-                <a:solidFill>
-                  <a:srgbClr val="33444F"/>
-                </a:solidFill>
-                <a:latin typeface="Calibri" pitchFamily="34" charset="0"/>
-                <a:ea typeface="Calibri" pitchFamily="34" charset="-122"/>
-                <a:cs typeface="Calibri" pitchFamily="34" charset="-120"/>
-              </a:rPr>
-              <a:t>Call the result urgently (positive blood culture from a sterile site in a septic patient).</a:t>
-            </a:r>
-            <a:endParaRPr lang="en-US" sz="1400" dirty="0"/>
-          </a:p>
-          <a:p>
-            <a:pPr algn="l" marL="177800" indent="-177800">
-              <a:spcAft>
-                <a:spcPts val="900"/>
-              </a:spcAft>
-              <a:buSzPct val="100000"/>
-              <a:buChar char="•"/>
-            </a:pPr>
-            <a:r>
-              <a:rPr lang="en-US" sz="1400" dirty="0">
-                <a:solidFill>
-                  <a:srgbClr val="33444F"/>
-                </a:solidFill>
-                <a:latin typeface="Calibri" pitchFamily="34" charset="0"/>
-                <a:ea typeface="Calibri" pitchFamily="34" charset="-122"/>
-                <a:cs typeface="Calibri" pitchFamily="34" charset="-120"/>
-              </a:rPr>
-              <a:t>Catalase (positive = staph) then coagulase / rapid testing separates S. aureus from CoNS.</a:t>
-            </a:r>
-            <a:endParaRPr lang="en-US" sz="1400" dirty="0"/>
-          </a:p>
-          <a:p>
-            <a:pPr algn="l" marL="177800" indent="-177800">
-              <a:spcAft>
-                <a:spcPts val="900"/>
-              </a:spcAft>
-              <a:buSzPct val="100000"/>
-              <a:buChar char="•"/>
-            </a:pPr>
-            <a:r>
-              <a:rPr lang="en-US" sz="1400" dirty="0">
-                <a:solidFill>
-                  <a:srgbClr val="33444F"/>
-                </a:solidFill>
-                <a:latin typeface="Calibri" pitchFamily="34" charset="0"/>
-                <a:ea typeface="Calibri" pitchFamily="34" charset="-122"/>
-                <a:cs typeface="Calibri" pitchFamily="34" charset="-120"/>
-              </a:rPr>
-              <a:t>MALDI-TOF / rapid molecular from the bottle speeds species ID and some resistance markers.</a:t>
-            </a:r>
-            <a:endParaRPr lang="en-US" sz="1400" dirty="0"/>
-          </a:p>
-        </p:txBody>
-      </p:sp>
-      <p:sp>
-        <p:nvSpPr>
-          <p:cNvPr id="5" name="Shape 3"/>
-          <p:cNvSpPr/>
-          <p:nvPr/>
-        </p:nvSpPr>
-        <p:spPr>
-          <a:xfrm>
-            <a:off x="7422788" y="1554480"/>
-            <a:ext cx="4201979" cy="3977640"/>
+          <p:cNvPr id="4" name="Shape 2"/>
+          <p:cNvSpPr/>
+          <p:nvPr/>
+        </p:nvSpPr>
+        <p:spPr>
+          <a:xfrm>
+            <a:off x="566928" y="1517904"/>
+            <a:ext cx="5346040" cy="4114800"/>
           </a:xfrm>
           <a:prstGeom prst="roundRect">
             <a:avLst>
-              <a:gd name="adj" fmla="val 2069"/>
+              <a:gd name="adj" fmla="val 2000"/>
             </a:avLst>
           </a:prstGeom>
           <a:solidFill>
@@ -4368,14 +4838,188 @@
       </p:sp>
       <p:sp>
         <p:nvSpPr>
+          <p:cNvPr id="5" name="Text 3"/>
+          <p:cNvSpPr/>
+          <p:nvPr/>
+        </p:nvSpPr>
+        <p:spPr>
+          <a:xfrm>
+            <a:off x="804672" y="1682496"/>
+            <a:ext cx="4888840" cy="274320"/>
+          </a:xfrm>
+          <a:prstGeom prst="rect">
+            <a:avLst/>
+          </a:prstGeom>
+          <a:noFill/>
+          <a:ln/>
+        </p:spPr>
+        <p:txBody>
+          <a:bodyPr wrap="square" lIns="0" tIns="0" rIns="0" bIns="0" rtlCol="0" anchor="ctr"/>
+          <a:lstStyle/>
+          <a:p>
+            <a:pPr indent="0" marL="0">
+              <a:buNone/>
+            </a:pPr>
+            <a:r>
+              <a:rPr lang="en-US" sz="1200" b="1" spc="100" kern="0" dirty="0">
+                <a:solidFill>
+                  <a:srgbClr val="1F5722"/>
+                </a:solidFill>
+                <a:latin typeface="Calibri" pitchFamily="34" charset="0"/>
+                <a:ea typeface="Calibri" pitchFamily="34" charset="-122"/>
+                <a:cs typeface="Calibri" pitchFamily="34" charset="-120"/>
+              </a:rPr>
+              <a:t>POORLY/NON-CULTURABLE</a:t>
+            </a:r>
+            <a:endParaRPr lang="en-US" sz="1200" dirty="0"/>
+          </a:p>
+        </p:txBody>
+      </p:sp>
+      <p:sp>
+        <p:nvSpPr>
           <p:cNvPr id="6" name="Text 4"/>
           <p:cNvSpPr/>
           <p:nvPr/>
         </p:nvSpPr>
         <p:spPr>
           <a:xfrm>
-            <a:off x="7660532" y="1755648"/>
-            <a:ext cx="3744779" cy="310896"/>
+            <a:off x="804672" y="2029968"/>
+            <a:ext cx="4870552" cy="3474720"/>
+          </a:xfrm>
+          <a:prstGeom prst="rect">
+            <a:avLst/>
+          </a:prstGeom>
+          <a:noFill/>
+          <a:ln/>
+        </p:spPr>
+        <p:txBody>
+          <a:bodyPr wrap="square" lIns="0" tIns="0" rIns="0" bIns="0" rtlCol="0" anchor="t"/>
+          <a:lstStyle/>
+          <a:p>
+            <a:pPr algn="l" marL="177800" indent="-177800">
+              <a:spcAft>
+                <a:spcPts val="900"/>
+              </a:spcAft>
+              <a:buSzPct val="100000"/>
+              <a:buChar char="•"/>
+            </a:pPr>
+            <a:r>
+              <a:rPr lang="en-US" sz="1250" b="1" dirty="0">
+                <a:solidFill>
+                  <a:srgbClr val="1B2A38"/>
+                </a:solidFill>
+                <a:latin typeface="Calibri" pitchFamily="34" charset="0"/>
+                <a:ea typeface="Calibri" pitchFamily="34" charset="-122"/>
+                <a:cs typeface="Calibri" pitchFamily="34" charset="-120"/>
+              </a:rPr>
+              <a:t>Mycoplasma (no cell wall), Chlamydia (intracellular), spirochetes — often serology/NAAT.</a:t>
+            </a:r>
+            <a:endParaRPr lang="en-US" sz="1250" dirty="0"/>
+          </a:p>
+          <a:p>
+            <a:pPr algn="l" marL="177800" indent="-177800">
+              <a:spcAft>
+                <a:spcPts val="900"/>
+              </a:spcAft>
+              <a:buSzPct val="100000"/>
+              <a:buChar char="•"/>
+            </a:pPr>
+            <a:r>
+              <a:rPr lang="en-US" sz="1250" dirty="0">
+                <a:solidFill>
+                  <a:srgbClr val="33444F"/>
+                </a:solidFill>
+                <a:latin typeface="Calibri" pitchFamily="34" charset="0"/>
+                <a:ea typeface="Calibri" pitchFamily="34" charset="-122"/>
+                <a:cs typeface="Calibri" pitchFamily="34" charset="-120"/>
+              </a:rPr>
+              <a:t>Mycobacteria need acid-fast stain and special media.</a:t>
+            </a:r>
+            <a:endParaRPr lang="en-US" sz="1250" dirty="0"/>
+          </a:p>
+          <a:p>
+            <a:pPr algn="l" marL="177800" indent="-177800">
+              <a:spcAft>
+                <a:spcPts val="900"/>
+              </a:spcAft>
+              <a:buSzPct val="100000"/>
+              <a:buChar char="•"/>
+            </a:pPr>
+            <a:r>
+              <a:rPr lang="en-US" sz="1250" dirty="0">
+                <a:solidFill>
+                  <a:srgbClr val="33444F"/>
+                </a:solidFill>
+                <a:latin typeface="Calibri" pitchFamily="34" charset="0"/>
+                <a:ea typeface="Calibri" pitchFamily="34" charset="-122"/>
+                <a:cs typeface="Calibri" pitchFamily="34" charset="-120"/>
+              </a:rPr>
+              <a:t>Legionella needs buffered charcoal yeast extract / urine antigen.</a:t>
+            </a:r>
+            <a:endParaRPr lang="en-US" sz="1250" dirty="0"/>
+          </a:p>
+          <a:p>
+            <a:pPr algn="l" marL="177800" indent="-177800">
+              <a:spcAft>
+                <a:spcPts val="900"/>
+              </a:spcAft>
+              <a:buSzPct val="100000"/>
+              <a:buChar char="•"/>
+            </a:pPr>
+            <a:r>
+              <a:rPr lang="en-US" sz="1250" dirty="0">
+                <a:solidFill>
+                  <a:srgbClr val="33444F"/>
+                </a:solidFill>
+                <a:latin typeface="Calibri" pitchFamily="34" charset="0"/>
+                <a:ea typeface="Calibri" pitchFamily="34" charset="-122"/>
+                <a:cs typeface="Calibri" pitchFamily="34" charset="-120"/>
+              </a:rPr>
+              <a:t>Viruses require molecular or antigen methods.</a:t>
+            </a:r>
+            <a:endParaRPr lang="en-US" sz="1250" dirty="0"/>
+          </a:p>
+        </p:txBody>
+      </p:sp>
+      <p:sp>
+        <p:nvSpPr>
+          <p:cNvPr id="7" name="Shape 5"/>
+          <p:cNvSpPr/>
+          <p:nvPr/>
+        </p:nvSpPr>
+        <p:spPr>
+          <a:xfrm>
+            <a:off x="6278728" y="1517904"/>
+            <a:ext cx="5346040" cy="4114800"/>
+          </a:xfrm>
+          <a:prstGeom prst="roundRect">
+            <a:avLst>
+              <a:gd name="adj" fmla="val 2000"/>
+            </a:avLst>
+          </a:prstGeom>
+          <a:solidFill>
+            <a:srgbClr val="E9F3EA"/>
+          </a:solidFill>
+          <a:ln/>
+          <a:effectLst>
+            <a:outerShdw sx="100000" sy="100000" kx="0" ky="0" algn="bl" rotWithShape="0" blurRad="88900" dist="25400" dir="5400000">
+              <a:srgbClr val="22303C">
+                <a:alpha val="12000"/>
+              </a:srgbClr>
+            </a:outerShdw>
+          </a:effectLst>
+        </p:spPr>
+      </p:sp>
+      <p:sp>
+        <p:nvSpPr>
+          <p:cNvPr id="8" name="Text 6"/>
+          <p:cNvSpPr/>
+          <p:nvPr/>
+        </p:nvSpPr>
+        <p:spPr>
+          <a:xfrm>
+            <a:off x="6516472" y="1682496"/>
+            <a:ext cx="4888840" cy="274320"/>
           </a:xfrm>
           <a:prstGeom prst="rect">
             <a:avLst/>
@@ -4391,30 +5035,30 @@
               <a:buNone/>
             </a:pPr>
             <a:r>
-              <a:rPr lang="en-US" sz="1100" b="1" spc="140" kern="0" dirty="0">
-                <a:solidFill>
-                  <a:srgbClr val="2E7D32"/>
-                </a:solidFill>
-                <a:latin typeface="Calibri" pitchFamily="34" charset="0"/>
-                <a:ea typeface="Calibri" pitchFamily="34" charset="-122"/>
-                <a:cs typeface="Calibri" pitchFamily="34" charset="-120"/>
-              </a:rPr>
-              <a:t>TEACHING POINT</a:t>
-            </a:r>
-            <a:endParaRPr lang="en-US" sz="1100" dirty="0"/>
-          </a:p>
-        </p:txBody>
-      </p:sp>
-      <p:sp>
-        <p:nvSpPr>
-          <p:cNvPr id="7" name="Text 5"/>
-          <p:cNvSpPr/>
-          <p:nvPr/>
-        </p:nvSpPr>
-        <p:spPr>
-          <a:xfrm>
-            <a:off x="7660532" y="2121408"/>
-            <a:ext cx="3726491" cy="3291840"/>
+              <a:rPr lang="en-US" sz="1200" b="1" spc="100" kern="0" dirty="0">
+                <a:solidFill>
+                  <a:srgbClr val="1F5722"/>
+                </a:solidFill>
+                <a:latin typeface="Calibri" pitchFamily="34" charset="0"/>
+                <a:ea typeface="Calibri" pitchFamily="34" charset="-122"/>
+                <a:cs typeface="Calibri" pitchFamily="34" charset="-120"/>
+              </a:rPr>
+              <a:t>WHEN TO ESCALATE</a:t>
+            </a:r>
+            <a:endParaRPr lang="en-US" sz="1200" dirty="0"/>
+          </a:p>
+        </p:txBody>
+      </p:sp>
+      <p:sp>
+        <p:nvSpPr>
+          <p:cNvPr id="9" name="Text 7"/>
+          <p:cNvSpPr/>
+          <p:nvPr/>
+        </p:nvSpPr>
+        <p:spPr>
+          <a:xfrm>
+            <a:off x="6516472" y="2029968"/>
+            <a:ext cx="4870552" cy="3474720"/>
           </a:xfrm>
           <a:prstGeom prst="rect">
             <a:avLst/>
@@ -4426,14 +5070,36 @@
           <a:bodyPr wrap="square" lIns="0" tIns="0" rIns="0" bIns="0" rtlCol="0" anchor="t"/>
           <a:lstStyle/>
           <a:p>
-            <a:pPr algn="l" indent="0" marL="0">
-              <a:lnSpc>
-                <a:spcPct val="110000"/>
-              </a:lnSpc>
-              <a:buNone/>
-            </a:pPr>
-            <a:r>
-              <a:rPr lang="en-US" sz="1350" dirty="0">
+            <a:pPr algn="l" marL="177800" indent="-177800">
+              <a:spcAft>
+                <a:spcPts val="900"/>
+              </a:spcAft>
+              <a:buSzPct val="100000"/>
+              <a:buChar char="•"/>
+            </a:pPr>
+            <a:r>
+              <a:rPr lang="en-US" sz="1250" b="1" dirty="0">
+                <a:solidFill>
+                  <a:srgbClr val="1B2A38"/>
+                </a:solidFill>
+                <a:latin typeface="Calibri" pitchFamily="34" charset="0"/>
+                <a:ea typeface="Calibri" pitchFamily="34" charset="-122"/>
+                <a:cs typeface="Calibri" pitchFamily="34" charset="-120"/>
+              </a:rPr>
+              <a:t>Negative routine cultures with ongoing infection should prompt special methods or molecular testing.</a:t>
+            </a:r>
+            <a:endParaRPr lang="en-US" sz="1250" dirty="0"/>
+          </a:p>
+          <a:p>
+            <a:pPr algn="l" marL="177800" indent="-177800">
+              <a:spcAft>
+                <a:spcPts val="900"/>
+              </a:spcAft>
+              <a:buSzPct val="100000"/>
+              <a:buChar char="•"/>
+            </a:pPr>
+            <a:r>
+              <a:rPr lang="en-US" sz="1250" dirty="0">
                 <a:solidFill>
                   <a:srgbClr val="33444F"/>
                 </a:solidFill>
@@ -4441,15 +5107,57 @@
                 <a:ea typeface="Calibri" pitchFamily="34" charset="-122"/>
                 <a:cs typeface="Calibri" pitchFamily="34" charset="-120"/>
               </a:rPr>
-              <a:t>GPC in clusters from blood = staph until proven otherwise; coagulase (or a rapid equivalent) is the key separator of S. aureus from CoNS.</a:t>
-            </a:r>
-            <a:endParaRPr lang="en-US" sz="1350" dirty="0"/>
-          </a:p>
-        </p:txBody>
-      </p:sp>
-      <p:sp>
-        <p:nvSpPr>
-          <p:cNvPr id="8" name="Text 6"/>
+              <a:t>Communicate with the clinical team about the differential.</a:t>
+            </a:r>
+            <a:endParaRPr lang="en-US" sz="1250" dirty="0"/>
+          </a:p>
+          <a:p>
+            <a:pPr algn="l" marL="177800" indent="-177800">
+              <a:spcAft>
+                <a:spcPts val="900"/>
+              </a:spcAft>
+              <a:buSzPct val="100000"/>
+              <a:buChar char="•"/>
+            </a:pPr>
+            <a:r>
+              <a:rPr lang="en-US" sz="1250" dirty="0">
+                <a:solidFill>
+                  <a:srgbClr val="33444F"/>
+                </a:solidFill>
+                <a:latin typeface="Calibri" pitchFamily="34" charset="0"/>
+                <a:ea typeface="Calibri" pitchFamily="34" charset="-122"/>
+                <a:cs typeface="Calibri" pitchFamily="34" charset="-120"/>
+              </a:rPr>
+              <a:t>Consider prior antibiotics suppressing growth.</a:t>
+            </a:r>
+            <a:endParaRPr lang="en-US" sz="1250" dirty="0"/>
+          </a:p>
+          <a:p>
+            <a:pPr algn="l" marL="177800" indent="-177800">
+              <a:spcAft>
+                <a:spcPts val="900"/>
+              </a:spcAft>
+              <a:buSzPct val="100000"/>
+              <a:buChar char="•"/>
+            </a:pPr>
+            <a:r>
+              <a:rPr lang="en-US" sz="1250" dirty="0">
+                <a:solidFill>
+                  <a:srgbClr val="33444F"/>
+                </a:solidFill>
+                <a:latin typeface="Calibri" pitchFamily="34" charset="0"/>
+                <a:ea typeface="Calibri" pitchFamily="34" charset="-122"/>
+                <a:cs typeface="Calibri" pitchFamily="34" charset="-120"/>
+              </a:rPr>
+              <a:t>Targeted NAAT can identify the non-culturable.</a:t>
+            </a:r>
+            <a:endParaRPr lang="en-US" sz="1250" dirty="0"/>
+          </a:p>
+        </p:txBody>
+      </p:sp>
+      <p:sp>
+        <p:nvSpPr>
+          <p:cNvPr id="10" name="Text 8"/>
           <p:cNvSpPr/>
           <p:nvPr/>
         </p:nvSpPr>
@@ -4488,7 +5196,7 @@
       </p:sp>
       <p:sp>
         <p:nvSpPr>
-          <p:cNvPr id="9" name="Text 7"/>
+          <p:cNvPr id="11" name="Text 9"/>
           <p:cNvSpPr/>
           <p:nvPr/>
         </p:nvSpPr>
@@ -4618,7 +5326,7 @@
                 <a:ea typeface="Calibri" pitchFamily="34" charset="-122"/>
                 <a:cs typeface="Calibri" pitchFamily="34" charset="-120"/>
               </a:rPr>
-              <a:t>MICROBIOLOGY   ·   CASE 2</a:t>
+              <a:t>MICROBIOLOGY   ·   CASE 1</a:t>
             </a:r>
             <a:endParaRPr lang="en-US" sz="1100" dirty="0"/>
           </a:p>
@@ -4657,7 +5365,7 @@
                 <a:ea typeface="Calibri" pitchFamily="34" charset="-122"/>
                 <a:cs typeface="Calibri" pitchFamily="34" charset="-120"/>
               </a:rPr>
-              <a:t>Case 2</a:t>
+              <a:t>Case 1</a:t>
             </a:r>
             <a:endParaRPr lang="en-US" sz="3000" dirty="0"/>
           </a:p>
@@ -4767,7 +5475,7 @@
                 <a:ea typeface="Calibri" pitchFamily="34" charset="-122"/>
                 <a:cs typeface="Calibri" pitchFamily="34" charset="-120"/>
               </a:rPr>
-              <a:t>A urine culture grows lactose-fermenting (pink) colonies on MacConkey from a clean-catch midstream specimen at high colony count in a symptomatic patient.</a:t>
+              <a:t>A blood-culture Gram stain shows gram-positive cocci in clusters. The team asks whether to broaden coverage.</a:t>
             </a:r>
             <a:endParaRPr lang="en-US" sz="1450" dirty="0"/>
           </a:p>
@@ -4874,7 +5582,7 @@
                 <a:ea typeface="Calibri" pitchFamily="34" charset="-122"/>
                 <a:cs typeface="Calibri" pitchFamily="34" charset="-120"/>
               </a:rPr>
-              <a:t>What does the MacConkey reaction suggest, and how does it fit the picture?</a:t>
+              <a:t>What does the morphology suggest, and what bench test refines it?</a:t>
             </a:r>
             <a:endParaRPr lang="en-US" sz="1500" dirty="0"/>
           </a:p>
@@ -5051,7 +5759,7 @@
                 <a:ea typeface="Calibri" pitchFamily="34" charset="-122"/>
                 <a:cs typeface="Calibri" pitchFamily="34" charset="-120"/>
               </a:rPr>
-              <a:t>MICROBIOLOGY   ·   CASE 2  ·  RESOLUTION</a:t>
+              <a:t>MICROBIOLOGY   ·   CASE 1  ·  RESOLUTION</a:t>
             </a:r>
             <a:endParaRPr lang="en-US" sz="1100" dirty="0"/>
           </a:p>
@@ -5090,7 +5798,7 @@
                 <a:ea typeface="Calibri" pitchFamily="34" charset="-122"/>
                 <a:cs typeface="Calibri" pitchFamily="34" charset="-120"/>
               </a:rPr>
-              <a:t>Case 2: Lactose-Fermenting GNR (Likely E. coli)</a:t>
+              <a:t>Case 1: GPC in Clusters</a:t>
             </a:r>
             <a:endParaRPr lang="en-US" sz="3000" dirty="0"/>
           </a:p>
@@ -5133,7 +5841,7 @@
                 <a:ea typeface="Calibri" pitchFamily="34" charset="-122"/>
                 <a:cs typeface="Calibri" pitchFamily="34" charset="-120"/>
               </a:rPr>
-              <a:t>Pink (lactose-fermenting) colonies on MacConkey indicate a lactose-fermenting Gram-negative rod — most often E. coli.</a:t>
+              <a:t>Gram-positive cocci in clusters suggest staphylococci.</a:t>
             </a:r>
             <a:endParaRPr lang="en-US" sz="1400" dirty="0"/>
           </a:p>
@@ -5154,7 +5862,7 @@
                 <a:ea typeface="Calibri" pitchFamily="34" charset="-122"/>
                 <a:cs typeface="Calibri" pitchFamily="34" charset="-120"/>
               </a:rPr>
-              <a:t>High colony count with symptoms supports true UTI rather than contamination.</a:t>
+              <a:t>Catalase (+) supports staph; coagulase/rapid S. aureus testing distinguishes S. aureus from CoNS.</a:t>
             </a:r>
             <a:endParaRPr lang="en-US" sz="1400" dirty="0"/>
           </a:p>
@@ -5175,7 +5883,7 @@
                 <a:ea typeface="Calibri" pitchFamily="34" charset="-122"/>
                 <a:cs typeface="Calibri" pitchFamily="34" charset="-120"/>
               </a:rPr>
-              <a:t>Confirm identity (MALDI-TOF) and perform susceptibility testing.</a:t>
+              <a:t>S. aureus bacteremia is significant and prompts source evaluation.</a:t>
             </a:r>
             <a:endParaRPr lang="en-US" sz="1400" dirty="0"/>
           </a:p>
@@ -5196,7 +5904,7 @@
                 <a:ea typeface="Calibri" pitchFamily="34" charset="-122"/>
                 <a:cs typeface="Calibri" pitchFamily="34" charset="-120"/>
               </a:rPr>
-              <a:t>Report with quantitation and AST to guide therapy.</a:t>
+              <a:t>MALDI-TOF gives a rapid definitive ID from growth.</a:t>
             </a:r>
             <a:endParaRPr lang="en-US" sz="1400" dirty="0"/>
           </a:p>
@@ -5306,7 +6014,7 @@
                 <a:ea typeface="Calibri" pitchFamily="34" charset="-122"/>
                 <a:cs typeface="Calibri" pitchFamily="34" charset="-120"/>
               </a:rPr>
-              <a:t>MacConkey differentiates lactose fermenters (E. coli, Klebsiella) from non-fermenters — a quick clue while ID/AST complete.</a:t>
+              <a:t>Morphology gives the first actionable call; coagulase or rapid molecular testing then separates S. aureus from coagulase-negative staph.</a:t>
             </a:r>
             <a:endParaRPr lang="en-US" sz="1350" dirty="0"/>
           </a:p>
@@ -5483,7 +6191,7 @@
                 <a:ea typeface="Calibri" pitchFamily="34" charset="-122"/>
                 <a:cs typeface="Calibri" pitchFamily="34" charset="-120"/>
               </a:rPr>
-              <a:t>MICROBIOLOGY   ·   BOARD REVIEW  ·  Q1</a:t>
+              <a:t>MICROBIOLOGY   ·   CASE 2</a:t>
             </a:r>
             <a:endParaRPr lang="en-US" sz="1100" dirty="0"/>
           </a:p>
@@ -5514,7 +6222,7 @@
               <a:buNone/>
             </a:pPr>
             <a:r>
-              <a:rPr lang="en-US" sz="2600" b="1" dirty="0">
+              <a:rPr lang="en-US" sz="3000" b="1" dirty="0">
                 <a:solidFill>
                   <a:srgbClr val="0E3A5F"/>
                 </a:solidFill>
@@ -5522,190 +6230,26 @@
                 <a:ea typeface="Calibri" pitchFamily="34" charset="-122"/>
                 <a:cs typeface="Calibri" pitchFamily="34" charset="-120"/>
               </a:rPr>
-              <a:t>Board-Style Review</a:t>
-            </a:r>
-            <a:endParaRPr lang="en-US" sz="2600" dirty="0"/>
-          </a:p>
-        </p:txBody>
-      </p:sp>
-      <p:sp>
-        <p:nvSpPr>
-          <p:cNvPr id="4" name="Text 2"/>
-          <p:cNvSpPr/>
-          <p:nvPr/>
-        </p:nvSpPr>
-        <p:spPr>
-          <a:xfrm>
-            <a:off x="566928" y="1417320"/>
-            <a:ext cx="11057839" cy="914400"/>
-          </a:xfrm>
-          <a:prstGeom prst="rect">
-            <a:avLst/>
-          </a:prstGeom>
-          <a:noFill/>
-          <a:ln/>
-        </p:spPr>
-        <p:txBody>
-          <a:bodyPr wrap="square" lIns="0" tIns="0" rIns="0" bIns="0" rtlCol="0" anchor="t"/>
-          <a:lstStyle/>
-          <a:p>
-            <a:pPr algn="l" indent="0" marL="0">
-              <a:lnSpc>
-                <a:spcPct val="105000"/>
-              </a:lnSpc>
-              <a:buNone/>
-            </a:pPr>
-            <a:r>
-              <a:rPr lang="en-US" sz="1450" b="1" dirty="0">
-                <a:solidFill>
-                  <a:srgbClr val="1B2A38"/>
-                </a:solidFill>
-                <a:latin typeface="Calibri" pitchFamily="34" charset="0"/>
-                <a:ea typeface="Calibri" pitchFamily="34" charset="-122"/>
-                <a:cs typeface="Calibri" pitchFamily="34" charset="-120"/>
-              </a:rPr>
-              <a:t>A catalase-positive, coagulase-positive Gram-positive coccus in clusters is most consistent with:</a:t>
-            </a:r>
-            <a:endParaRPr lang="en-US" sz="1450" dirty="0"/>
-          </a:p>
-        </p:txBody>
-      </p:sp>
-      <p:sp>
-        <p:nvSpPr>
-          <p:cNvPr id="5" name="Text 3"/>
-          <p:cNvSpPr/>
-          <p:nvPr/>
-        </p:nvSpPr>
-        <p:spPr>
-          <a:xfrm>
-            <a:off x="658368" y="2395728"/>
-            <a:ext cx="6192390" cy="3017520"/>
-          </a:xfrm>
-          <a:prstGeom prst="rect">
-            <a:avLst/>
-          </a:prstGeom>
-          <a:noFill/>
-          <a:ln/>
-        </p:spPr>
-        <p:txBody>
-          <a:bodyPr wrap="square" lIns="0" tIns="0" rIns="0" bIns="0" rtlCol="0" anchor="t"/>
-          <a:lstStyle/>
-          <a:p>
-            <a:pPr algn="l" indent="0" marL="0">
-              <a:spcAft>
-                <a:spcPts val="600"/>
-              </a:spcAft>
-              <a:buNone/>
-            </a:pPr>
-            <a:r>
-              <a:rPr lang="en-US" sz="1350" dirty="0">
-                <a:solidFill>
-                  <a:srgbClr val="33444F"/>
-                </a:solidFill>
-                <a:latin typeface="Calibri" pitchFamily="34" charset="0"/>
-                <a:ea typeface="Calibri" pitchFamily="34" charset="-122"/>
-                <a:cs typeface="Calibri" pitchFamily="34" charset="-120"/>
-              </a:rPr>
-              <a:t>A. Streptococcus pyogenes</a:t>
-            </a:r>
-            <a:endParaRPr lang="en-US" sz="1350" dirty="0"/>
-          </a:p>
-          <a:p>
-            <a:pPr algn="l" indent="0" marL="0">
-              <a:spcAft>
-                <a:spcPts val="600"/>
-              </a:spcAft>
-              <a:buNone/>
-            </a:pPr>
-            <a:r>
-              <a:rPr lang="en-US" sz="1350" b="1" dirty="0">
-                <a:solidFill>
-                  <a:srgbClr val="1F5722"/>
-                </a:solidFill>
-                <a:latin typeface="Calibri" pitchFamily="34" charset="0"/>
-                <a:ea typeface="Calibri" pitchFamily="34" charset="-122"/>
-                <a:cs typeface="Calibri" pitchFamily="34" charset="-120"/>
-              </a:rPr>
-              <a:t>B. Staphylococcus aureus</a:t>
-            </a:r>
-            <a:endParaRPr lang="en-US" sz="1350" dirty="0"/>
-          </a:p>
-          <a:p>
-            <a:pPr algn="l" indent="0" marL="0">
-              <a:spcAft>
-                <a:spcPts val="600"/>
-              </a:spcAft>
-              <a:buNone/>
-            </a:pPr>
-            <a:r>
-              <a:rPr lang="en-US" sz="1350" dirty="0">
-                <a:solidFill>
-                  <a:srgbClr val="33444F"/>
-                </a:solidFill>
-                <a:latin typeface="Calibri" pitchFamily="34" charset="0"/>
-                <a:ea typeface="Calibri" pitchFamily="34" charset="-122"/>
-                <a:cs typeface="Calibri" pitchFamily="34" charset="-120"/>
-              </a:rPr>
-              <a:t>C. Enterococcus</a:t>
-            </a:r>
-            <a:endParaRPr lang="en-US" sz="1350" dirty="0"/>
-          </a:p>
-          <a:p>
-            <a:pPr algn="l" indent="0" marL="0">
-              <a:spcAft>
-                <a:spcPts val="600"/>
-              </a:spcAft>
-              <a:buNone/>
-            </a:pPr>
-            <a:r>
-              <a:rPr lang="en-US" sz="1350" dirty="0">
-                <a:solidFill>
-                  <a:srgbClr val="33444F"/>
-                </a:solidFill>
-                <a:latin typeface="Calibri" pitchFamily="34" charset="0"/>
-                <a:ea typeface="Calibri" pitchFamily="34" charset="-122"/>
-                <a:cs typeface="Calibri" pitchFamily="34" charset="-120"/>
-              </a:rPr>
-              <a:t>D. Coagulase-negative staphylococcus</a:t>
-            </a:r>
-            <a:endParaRPr lang="en-US" sz="1350" dirty="0"/>
-          </a:p>
-          <a:p>
-            <a:pPr algn="l" indent="0" marL="0">
-              <a:spcAft>
-                <a:spcPts val="600"/>
-              </a:spcAft>
-              <a:buNone/>
-            </a:pPr>
-            <a:r>
-              <a:rPr lang="en-US" sz="1350" dirty="0">
-                <a:solidFill>
-                  <a:srgbClr val="33444F"/>
-                </a:solidFill>
-                <a:latin typeface="Calibri" pitchFamily="34" charset="0"/>
-                <a:ea typeface="Calibri" pitchFamily="34" charset="-122"/>
-                <a:cs typeface="Calibri" pitchFamily="34" charset="-120"/>
-              </a:rPr>
-              <a:t>E. Streptococcus pneumoniae</a:t>
-            </a:r>
-            <a:endParaRPr lang="en-US" sz="1350" dirty="0"/>
-          </a:p>
-        </p:txBody>
-      </p:sp>
-      <p:sp>
-        <p:nvSpPr>
-          <p:cNvPr id="6" name="Shape 4"/>
-          <p:cNvSpPr/>
-          <p:nvPr/>
-        </p:nvSpPr>
-        <p:spPr>
-          <a:xfrm>
-            <a:off x="7201632" y="2395728"/>
-            <a:ext cx="4423136" cy="3246120"/>
+              <a:t>Case 2</a:t>
+            </a:r>
+            <a:endParaRPr lang="en-US" sz="3000" dirty="0"/>
+          </a:p>
+        </p:txBody>
+      </p:sp>
+      <p:sp>
+        <p:nvSpPr>
+          <p:cNvPr id="4" name="Shape 2"/>
+          <p:cNvSpPr/>
+          <p:nvPr/>
+        </p:nvSpPr>
+        <p:spPr>
+          <a:xfrm>
+            <a:off x="566928" y="1517904"/>
+            <a:ext cx="11057839" cy="2788920"/>
           </a:xfrm>
           <a:prstGeom prst="roundRect">
             <a:avLst>
-              <a:gd name="adj" fmla="val 2535"/>
+              <a:gd name="adj" fmla="val 2951"/>
             </a:avLst>
           </a:prstGeom>
           <a:solidFill>
@@ -5723,14 +6267,14 @@
       </p:sp>
       <p:sp>
         <p:nvSpPr>
-          <p:cNvPr id="7" name="Text 5"/>
-          <p:cNvSpPr/>
-          <p:nvPr/>
-        </p:nvSpPr>
-        <p:spPr>
-          <a:xfrm>
-            <a:off x="7439376" y="2578608"/>
-            <a:ext cx="3965936" cy="457200"/>
+          <p:cNvPr id="5" name="Text 3"/>
+          <p:cNvSpPr/>
+          <p:nvPr/>
+        </p:nvSpPr>
+        <p:spPr>
+          <a:xfrm>
+            <a:off x="841248" y="1700784"/>
+            <a:ext cx="5486400" cy="292608"/>
           </a:xfrm>
           <a:prstGeom prst="rect">
             <a:avLst/>
@@ -5746,7 +6290,7 @@
               <a:buNone/>
             </a:pPr>
             <a:r>
-              <a:rPr lang="en-US" sz="1500" b="1" dirty="0">
+              <a:rPr lang="en-US" sz="1100" b="1" spc="150" kern="0" dirty="0">
                 <a:solidFill>
                   <a:srgbClr val="2E7D32"/>
                 </a:solidFill>
@@ -5754,36 +6298,22 @@
                 <a:ea typeface="Calibri" pitchFamily="34" charset="-122"/>
                 <a:cs typeface="Calibri" pitchFamily="34" charset="-120"/>
               </a:rPr>
-              <a:t>ANSWER  </a:t>
-            </a:r>
-            <a:pPr indent="0" marL="0">
-              <a:buNone/>
-            </a:pPr>
-            <a:r>
-              <a:rPr lang="en-US" sz="1500" b="1" dirty="0">
-                <a:solidFill>
-                  <a:srgbClr val="1B2A38"/>
-                </a:solidFill>
-                <a:latin typeface="Calibri" pitchFamily="34" charset="0"/>
-                <a:ea typeface="Calibri" pitchFamily="34" charset="-122"/>
-                <a:cs typeface="Calibri" pitchFamily="34" charset="-120"/>
-              </a:rPr>
-              <a:t>B — Staphylococcus aureus</a:t>
-            </a:r>
-            <a:endParaRPr lang="en-US" sz="1500" dirty="0"/>
-          </a:p>
-        </p:txBody>
-      </p:sp>
-      <p:sp>
-        <p:nvSpPr>
-          <p:cNvPr id="8" name="Text 6"/>
-          <p:cNvSpPr/>
-          <p:nvPr/>
-        </p:nvSpPr>
-        <p:spPr>
-          <a:xfrm>
-            <a:off x="7439376" y="3127248"/>
-            <a:ext cx="3947648" cy="2377440"/>
+              <a:t>CLINICAL VIGNETTE</a:t>
+            </a:r>
+            <a:endParaRPr lang="en-US" sz="1100" dirty="0"/>
+          </a:p>
+        </p:txBody>
+      </p:sp>
+      <p:sp>
+        <p:nvSpPr>
+          <p:cNvPr id="6" name="Text 4"/>
+          <p:cNvSpPr/>
+          <p:nvPr/>
+        </p:nvSpPr>
+        <p:spPr>
+          <a:xfrm>
+            <a:off x="841248" y="2029968"/>
+            <a:ext cx="10509199" cy="2148840"/>
           </a:xfrm>
           <a:prstGeom prst="rect">
             <a:avLst/>
@@ -5802,7 +6332,7 @@
               <a:buNone/>
             </a:pPr>
             <a:r>
-              <a:rPr lang="en-US" sz="1250" dirty="0">
+              <a:rPr lang="en-US" sz="1450" dirty="0">
                 <a:solidFill>
                   <a:srgbClr val="33444F"/>
                 </a:solidFill>
@@ -5810,15 +6340,122 @@
                 <a:ea typeface="Calibri" pitchFamily="34" charset="-122"/>
                 <a:cs typeface="Calibri" pitchFamily="34" charset="-120"/>
               </a:rPr>
-              <a:t>Catalase positive distinguishes staph from strep; coagulase positive distinguishes S. aureus from coagulase-negative staphylococci.</a:t>
-            </a:r>
-            <a:endParaRPr lang="en-US" sz="1250" dirty="0"/>
+              <a:t>A urine culture on MacConkey grows pink (lactose-fermenting) colonies; the patient has cystitis.</a:t>
+            </a:r>
+            <a:endParaRPr lang="en-US" sz="1450" dirty="0"/>
+          </a:p>
+        </p:txBody>
+      </p:sp>
+      <p:sp>
+        <p:nvSpPr>
+          <p:cNvPr id="7" name="Shape 5"/>
+          <p:cNvSpPr/>
+          <p:nvPr/>
+        </p:nvSpPr>
+        <p:spPr>
+          <a:xfrm>
+            <a:off x="566928" y="4553712"/>
+            <a:ext cx="11057839" cy="1325880"/>
+          </a:xfrm>
+          <a:prstGeom prst="roundRect">
+            <a:avLst>
+              <a:gd name="adj" fmla="val 6207"/>
+            </a:avLst>
+          </a:prstGeom>
+          <a:solidFill>
+            <a:srgbClr val="0E3A5F"/>
+          </a:solidFill>
+          <a:ln/>
+          <a:effectLst>
+            <a:outerShdw sx="100000" sy="100000" kx="0" ky="0" algn="bl" rotWithShape="0" blurRad="88900" dist="25400" dir="5400000">
+              <a:srgbClr val="22303C">
+                <a:alpha val="12000"/>
+              </a:srgbClr>
+            </a:outerShdw>
+          </a:effectLst>
+        </p:spPr>
+      </p:sp>
+      <p:sp>
+        <p:nvSpPr>
+          <p:cNvPr id="8" name="Text 6"/>
+          <p:cNvSpPr/>
+          <p:nvPr/>
+        </p:nvSpPr>
+        <p:spPr>
+          <a:xfrm>
+            <a:off x="822960" y="4681728"/>
+            <a:ext cx="640080" cy="960120"/>
+          </a:xfrm>
+          <a:prstGeom prst="rect">
+            <a:avLst/>
+          </a:prstGeom>
+          <a:noFill/>
+          <a:ln/>
+        </p:spPr>
+        <p:txBody>
+          <a:bodyPr wrap="square" lIns="0" tIns="0" rIns="0" bIns="0" rtlCol="0" anchor="ctr"/>
+          <a:lstStyle/>
+          <a:p>
+            <a:pPr algn="ctr" indent="0" marL="0">
+              <a:buNone/>
+            </a:pPr>
+            <a:r>
+              <a:rPr lang="en-US" sz="4000" b="1" dirty="0">
+                <a:solidFill>
+                  <a:srgbClr val="2E7D32"/>
+                </a:solidFill>
+                <a:latin typeface="Calibri" pitchFamily="34" charset="0"/>
+                <a:ea typeface="Calibri" pitchFamily="34" charset="-122"/>
+                <a:cs typeface="Calibri" pitchFamily="34" charset="-120"/>
+              </a:rPr>
+              <a:t>?</a:t>
+            </a:r>
+            <a:endParaRPr lang="en-US" sz="4000" dirty="0"/>
           </a:p>
         </p:txBody>
       </p:sp>
       <p:sp>
         <p:nvSpPr>
           <p:cNvPr id="9" name="Text 7"/>
+          <p:cNvSpPr/>
+          <p:nvPr/>
+        </p:nvSpPr>
+        <p:spPr>
+          <a:xfrm>
+            <a:off x="1618488" y="4553712"/>
+            <a:ext cx="9686239" cy="1325880"/>
+          </a:xfrm>
+          <a:prstGeom prst="rect">
+            <a:avLst/>
+          </a:prstGeom>
+          <a:noFill/>
+          <a:ln/>
+        </p:spPr>
+        <p:txBody>
+          <a:bodyPr wrap="square" lIns="0" tIns="0" rIns="0" bIns="0" rtlCol="0" anchor="ctr"/>
+          <a:lstStyle/>
+          <a:p>
+            <a:pPr algn="l" indent="0" marL="0">
+              <a:buNone/>
+            </a:pPr>
+            <a:r>
+              <a:rPr lang="en-US" sz="1500" b="1" dirty="0">
+                <a:solidFill>
+                  <a:srgbClr val="FFFFFF"/>
+                </a:solidFill>
+                <a:latin typeface="Calibri" pitchFamily="34" charset="0"/>
+                <a:ea typeface="Calibri" pitchFamily="34" charset="-122"/>
+                <a:cs typeface="Calibri" pitchFamily="34" charset="-120"/>
+              </a:rPr>
+              <a:t>What does lactose fermentation on MacConkey indicate?</a:t>
+            </a:r>
+            <a:endParaRPr lang="en-US" sz="1500" dirty="0"/>
+          </a:p>
+        </p:txBody>
+      </p:sp>
+      <p:sp>
+        <p:nvSpPr>
+          <p:cNvPr id="10" name="Text 8"/>
           <p:cNvSpPr/>
           <p:nvPr/>
         </p:nvSpPr>
@@ -5857,7 +6494,7 @@
       </p:sp>
       <p:sp>
         <p:nvSpPr>
-          <p:cNvPr id="10" name="Text 8"/>
+          <p:cNvPr id="11" name="Text 9"/>
           <p:cNvSpPr/>
           <p:nvPr/>
         </p:nvSpPr>
@@ -5987,7 +6624,7 @@
                 <a:ea typeface="Calibri" pitchFamily="34" charset="-122"/>
                 <a:cs typeface="Calibri" pitchFamily="34" charset="-120"/>
               </a:rPr>
-              <a:t>MICROBIOLOGY   ·   BOARD REVIEW  ·  Q2</a:t>
+              <a:t>MICROBIOLOGY   ·   CASE 2  ·  RESOLUTION</a:t>
             </a:r>
             <a:endParaRPr lang="en-US" sz="1100" dirty="0"/>
           </a:p>
@@ -6018,7 +6655,7 @@
               <a:buNone/>
             </a:pPr>
             <a:r>
-              <a:rPr lang="en-US" sz="2600" b="1" dirty="0">
+              <a:rPr lang="en-US" sz="3000" b="1" dirty="0">
                 <a:solidFill>
                   <a:srgbClr val="0E3A5F"/>
                 </a:solidFill>
@@ -6026,9 +6663,9 @@
                 <a:ea typeface="Calibri" pitchFamily="34" charset="-122"/>
                 <a:cs typeface="Calibri" pitchFamily="34" charset="-120"/>
               </a:rPr>
-              <a:t>Board-Style Review</a:t>
-            </a:r>
-            <a:endParaRPr lang="en-US" sz="2600" dirty="0"/>
+              <a:t>Case 2: Lactose Fermenter on MacConkey</a:t>
+            </a:r>
+            <a:endParaRPr lang="en-US" sz="3000" dirty="0"/>
           </a:p>
         </p:txBody>
       </p:sp>
@@ -6040,8 +6677,8 @@
         </p:nvSpPr>
         <p:spPr>
           <a:xfrm>
-            <a:off x="566928" y="1417320"/>
-            <a:ext cx="11057839" cy="914400"/>
+            <a:off x="566928" y="1554480"/>
+            <a:ext cx="6413547" cy="4023360"/>
           </a:xfrm>
           <a:prstGeom prst="rect">
             <a:avLst/>
@@ -6053,14 +6690,15 @@
           <a:bodyPr wrap="square" lIns="0" tIns="0" rIns="0" bIns="0" rtlCol="0" anchor="t"/>
           <a:lstStyle/>
           <a:p>
-            <a:pPr algn="l" indent="0" marL="0">
-              <a:lnSpc>
-                <a:spcPct val="105000"/>
-              </a:lnSpc>
-              <a:buNone/>
-            </a:pPr>
-            <a:r>
-              <a:rPr lang="en-US" sz="1450" b="1" dirty="0">
+            <a:pPr algn="l" marL="177800" indent="-177800">
+              <a:spcAft>
+                <a:spcPts val="900"/>
+              </a:spcAft>
+              <a:buSzPct val="100000"/>
+              <a:buChar char="•"/>
+            </a:pPr>
+            <a:r>
+              <a:rPr lang="en-US" sz="1400" b="1" dirty="0">
                 <a:solidFill>
                   <a:srgbClr val="1B2A38"/>
                 </a:solidFill>
@@ -6068,41 +6706,20 @@
                 <a:ea typeface="Calibri" pitchFamily="34" charset="-122"/>
                 <a:cs typeface="Calibri" pitchFamily="34" charset="-120"/>
               </a:rPr>
-              <a:t>MALDI-TOF mass spectrometry identifies bacteria by:</a:t>
-            </a:r>
-            <a:endParaRPr lang="en-US" sz="1450" dirty="0"/>
-          </a:p>
-        </p:txBody>
-      </p:sp>
-      <p:sp>
-        <p:nvSpPr>
-          <p:cNvPr id="5" name="Text 3"/>
-          <p:cNvSpPr/>
-          <p:nvPr/>
-        </p:nvSpPr>
-        <p:spPr>
-          <a:xfrm>
-            <a:off x="658368" y="2395728"/>
-            <a:ext cx="6192390" cy="3017520"/>
-          </a:xfrm>
-          <a:prstGeom prst="rect">
-            <a:avLst/>
-          </a:prstGeom>
-          <a:noFill/>
-          <a:ln/>
-        </p:spPr>
-        <p:txBody>
-          <a:bodyPr wrap="square" lIns="0" tIns="0" rIns="0" bIns="0" rtlCol="0" anchor="t"/>
-          <a:lstStyle/>
-          <a:p>
-            <a:pPr algn="l" indent="0" marL="0">
+              <a:t>Pink colonies on MacConkey indicate a lactose-fermenting gram-negative rod (e.g., E. coli, Klebsiella).</a:t>
+            </a:r>
+            <a:endParaRPr lang="en-US" sz="1400" dirty="0"/>
+          </a:p>
+          <a:p>
+            <a:pPr algn="l" marL="177800" indent="-177800">
               <a:spcAft>
-                <a:spcPts val="600"/>
+                <a:spcPts val="900"/>
               </a:spcAft>
-              <a:buNone/>
-            </a:pPr>
-            <a:r>
-              <a:rPr lang="en-US" sz="1350" dirty="0">
+              <a:buSzPct val="100000"/>
+              <a:buChar char="•"/>
+            </a:pPr>
+            <a:r>
+              <a:rPr lang="en-US" sz="1400" dirty="0">
                 <a:solidFill>
                   <a:srgbClr val="33444F"/>
                 </a:solidFill>
@@ -6110,39 +6727,41 @@
                 <a:ea typeface="Calibri" pitchFamily="34" charset="-122"/>
                 <a:cs typeface="Calibri" pitchFamily="34" charset="-120"/>
               </a:rPr>
-              <a:t>A. Antibiotic susceptibility pattern</a:t>
-            </a:r>
-            <a:endParaRPr lang="en-US" sz="1350" dirty="0"/>
-          </a:p>
-          <a:p>
-            <a:pPr algn="l" indent="0" marL="0">
+              <a:t>MacConkey is selective for GNR and differential for lactose fermentation.</a:t>
+            </a:r>
+            <a:endParaRPr lang="en-US" sz="1400" dirty="0"/>
+          </a:p>
+          <a:p>
+            <a:pPr algn="l" marL="177800" indent="-177800">
               <a:spcAft>
-                <a:spcPts val="600"/>
+                <a:spcPts val="900"/>
               </a:spcAft>
-              <a:buNone/>
-            </a:pPr>
-            <a:r>
-              <a:rPr lang="en-US" sz="1350" b="1" dirty="0">
-                <a:solidFill>
-                  <a:srgbClr val="1F5722"/>
-                </a:solidFill>
-                <a:latin typeface="Calibri" pitchFamily="34" charset="0"/>
-                <a:ea typeface="Calibri" pitchFamily="34" charset="-122"/>
-                <a:cs typeface="Calibri" pitchFamily="34" charset="-120"/>
-              </a:rPr>
-              <a:t>B. A species-specific protein (ribosomal) spectral fingerprint</a:t>
-            </a:r>
-            <a:endParaRPr lang="en-US" sz="1350" dirty="0"/>
-          </a:p>
-          <a:p>
-            <a:pPr algn="l" indent="0" marL="0">
+              <a:buSzPct val="100000"/>
+              <a:buChar char="•"/>
+            </a:pPr>
+            <a:r>
+              <a:rPr lang="en-US" sz="1400" dirty="0">
+                <a:solidFill>
+                  <a:srgbClr val="33444F"/>
+                </a:solidFill>
+                <a:latin typeface="Calibri" pitchFamily="34" charset="0"/>
+                <a:ea typeface="Calibri" pitchFamily="34" charset="-122"/>
+                <a:cs typeface="Calibri" pitchFamily="34" charset="-120"/>
+              </a:rPr>
+              <a:t>E. coli is the most common uropathogen.</a:t>
+            </a:r>
+            <a:endParaRPr lang="en-US" sz="1400" dirty="0"/>
+          </a:p>
+          <a:p>
+            <a:pPr algn="l" marL="177800" indent="-177800">
               <a:spcAft>
-                <a:spcPts val="600"/>
+                <a:spcPts val="900"/>
               </a:spcAft>
-              <a:buNone/>
-            </a:pPr>
-            <a:r>
-              <a:rPr lang="en-US" sz="1350" dirty="0">
+              <a:buSzPct val="100000"/>
+              <a:buChar char="•"/>
+            </a:pPr>
+            <a:r>
+              <a:rPr lang="en-US" sz="1400" dirty="0">
                 <a:solidFill>
                   <a:srgbClr val="33444F"/>
                 </a:solidFill>
@@ -6150,66 +6769,26 @@
                 <a:ea typeface="Calibri" pitchFamily="34" charset="-122"/>
                 <a:cs typeface="Calibri" pitchFamily="34" charset="-120"/>
               </a:rPr>
-              <a:t>C. Colony color only</a:t>
-            </a:r>
-            <a:endParaRPr lang="en-US" sz="1350" dirty="0"/>
-          </a:p>
-          <a:p>
-            <a:pPr algn="l" indent="0" marL="0">
-              <a:spcAft>
-                <a:spcPts val="600"/>
-              </a:spcAft>
-              <a:buNone/>
-            </a:pPr>
-            <a:r>
-              <a:rPr lang="en-US" sz="1350" dirty="0">
-                <a:solidFill>
-                  <a:srgbClr val="33444F"/>
-                </a:solidFill>
-                <a:latin typeface="Calibri" pitchFamily="34" charset="0"/>
-                <a:ea typeface="Calibri" pitchFamily="34" charset="-122"/>
-                <a:cs typeface="Calibri" pitchFamily="34" charset="-120"/>
-              </a:rPr>
-              <a:t>D. DNA sequencing of 16S</a:t>
-            </a:r>
-            <a:endParaRPr lang="en-US" sz="1350" dirty="0"/>
-          </a:p>
-          <a:p>
-            <a:pPr algn="l" indent="0" marL="0">
-              <a:spcAft>
-                <a:spcPts val="600"/>
-              </a:spcAft>
-              <a:buNone/>
-            </a:pPr>
-            <a:r>
-              <a:rPr lang="en-US" sz="1350" dirty="0">
-                <a:solidFill>
-                  <a:srgbClr val="33444F"/>
-                </a:solidFill>
-                <a:latin typeface="Calibri" pitchFamily="34" charset="0"/>
-                <a:ea typeface="Calibri" pitchFamily="34" charset="-122"/>
-                <a:cs typeface="Calibri" pitchFamily="34" charset="-120"/>
-              </a:rPr>
-              <a:t>E. Gram reaction</a:t>
-            </a:r>
-            <a:endParaRPr lang="en-US" sz="1350" dirty="0"/>
-          </a:p>
-        </p:txBody>
-      </p:sp>
-      <p:sp>
-        <p:nvSpPr>
-          <p:cNvPr id="6" name="Shape 4"/>
-          <p:cNvSpPr/>
-          <p:nvPr/>
-        </p:nvSpPr>
-        <p:spPr>
-          <a:xfrm>
-            <a:off x="7201632" y="2395728"/>
-            <a:ext cx="4423136" cy="3246120"/>
+              <a:t>Confirm ID (MALDI-TOF) and perform susceptibility testing.</a:t>
+            </a:r>
+            <a:endParaRPr lang="en-US" sz="1400" dirty="0"/>
+          </a:p>
+        </p:txBody>
+      </p:sp>
+      <p:sp>
+        <p:nvSpPr>
+          <p:cNvPr id="5" name="Shape 3"/>
+          <p:cNvSpPr/>
+          <p:nvPr/>
+        </p:nvSpPr>
+        <p:spPr>
+          <a:xfrm>
+            <a:off x="7422788" y="1554480"/>
+            <a:ext cx="4201979" cy="3977640"/>
           </a:xfrm>
           <a:prstGeom prst="roundRect">
             <a:avLst>
-              <a:gd name="adj" fmla="val 2535"/>
+              <a:gd name="adj" fmla="val 2069"/>
             </a:avLst>
           </a:prstGeom>
           <a:solidFill>
@@ -6227,67 +6806,53 @@
       </p:sp>
       <p:sp>
         <p:nvSpPr>
+          <p:cNvPr id="6" name="Text 4"/>
+          <p:cNvSpPr/>
+          <p:nvPr/>
+        </p:nvSpPr>
+        <p:spPr>
+          <a:xfrm>
+            <a:off x="7660532" y="1755648"/>
+            <a:ext cx="3744779" cy="310896"/>
+          </a:xfrm>
+          <a:prstGeom prst="rect">
+            <a:avLst/>
+          </a:prstGeom>
+          <a:noFill/>
+          <a:ln/>
+        </p:spPr>
+        <p:txBody>
+          <a:bodyPr wrap="square" lIns="0" tIns="0" rIns="0" bIns="0" rtlCol="0" anchor="ctr"/>
+          <a:lstStyle/>
+          <a:p>
+            <a:pPr indent="0" marL="0">
+              <a:buNone/>
+            </a:pPr>
+            <a:r>
+              <a:rPr lang="en-US" sz="1100" b="1" spc="140" kern="0" dirty="0">
+                <a:solidFill>
+                  <a:srgbClr val="2E7D32"/>
+                </a:solidFill>
+                <a:latin typeface="Calibri" pitchFamily="34" charset="0"/>
+                <a:ea typeface="Calibri" pitchFamily="34" charset="-122"/>
+                <a:cs typeface="Calibri" pitchFamily="34" charset="-120"/>
+              </a:rPr>
+              <a:t>TEACHING POINT</a:t>
+            </a:r>
+            <a:endParaRPr lang="en-US" sz="1100" dirty="0"/>
+          </a:p>
+        </p:txBody>
+      </p:sp>
+      <p:sp>
+        <p:nvSpPr>
           <p:cNvPr id="7" name="Text 5"/>
           <p:cNvSpPr/>
           <p:nvPr/>
         </p:nvSpPr>
         <p:spPr>
           <a:xfrm>
-            <a:off x="7439376" y="2578608"/>
-            <a:ext cx="3965936" cy="457200"/>
-          </a:xfrm>
-          <a:prstGeom prst="rect">
-            <a:avLst/>
-          </a:prstGeom>
-          <a:noFill/>
-          <a:ln/>
-        </p:spPr>
-        <p:txBody>
-          <a:bodyPr wrap="square" lIns="0" tIns="0" rIns="0" bIns="0" rtlCol="0" anchor="ctr"/>
-          <a:lstStyle/>
-          <a:p>
-            <a:pPr indent="0" marL="0">
-              <a:buNone/>
-            </a:pPr>
-            <a:r>
-              <a:rPr lang="en-US" sz="1500" b="1" dirty="0">
-                <a:solidFill>
-                  <a:srgbClr val="2E7D32"/>
-                </a:solidFill>
-                <a:latin typeface="Calibri" pitchFamily="34" charset="0"/>
-                <a:ea typeface="Calibri" pitchFamily="34" charset="-122"/>
-                <a:cs typeface="Calibri" pitchFamily="34" charset="-120"/>
-              </a:rPr>
-              <a:t>ANSWER  </a:t>
-            </a:r>
-            <a:pPr indent="0" marL="0">
-              <a:buNone/>
-            </a:pPr>
-            <a:r>
-              <a:rPr lang="en-US" sz="1500" b="1" dirty="0">
-                <a:solidFill>
-                  <a:srgbClr val="1B2A38"/>
-                </a:solidFill>
-                <a:latin typeface="Calibri" pitchFamily="34" charset="0"/>
-                <a:ea typeface="Calibri" pitchFamily="34" charset="-122"/>
-                <a:cs typeface="Calibri" pitchFamily="34" charset="-120"/>
-              </a:rPr>
-              <a:t>B — Protein spectral fingerprint</a:t>
-            </a:r>
-            <a:endParaRPr lang="en-US" sz="1500" dirty="0"/>
-          </a:p>
-        </p:txBody>
-      </p:sp>
-      <p:sp>
-        <p:nvSpPr>
-          <p:cNvPr id="8" name="Text 6"/>
-          <p:cNvSpPr/>
-          <p:nvPr/>
-        </p:nvSpPr>
-        <p:spPr>
-          <a:xfrm>
-            <a:off x="7439376" y="3127248"/>
-            <a:ext cx="3947648" cy="2377440"/>
+            <a:off x="7660532" y="2121408"/>
+            <a:ext cx="3726491" cy="3291840"/>
           </a:xfrm>
           <a:prstGeom prst="rect">
             <a:avLst/>
@@ -6301,12 +6866,12 @@
           <a:p>
             <a:pPr algn="l" indent="0" marL="0">
               <a:lnSpc>
-                <a:spcPct val="108000"/>
+                <a:spcPct val="110000"/>
               </a:lnSpc>
               <a:buNone/>
             </a:pPr>
             <a:r>
-              <a:rPr lang="en-US" sz="1250" dirty="0">
+              <a:rPr lang="en-US" sz="1350" dirty="0">
                 <a:solidFill>
                   <a:srgbClr val="33444F"/>
                 </a:solidFill>
@@ -6314,15 +6879,15 @@
                 <a:ea typeface="Calibri" pitchFamily="34" charset="-122"/>
                 <a:cs typeface="Calibri" pitchFamily="34" charset="-120"/>
               </a:rPr>
-              <a:t>MALDI-TOF ionizes mainly ribosomal proteins, producing a species-specific spectrum matched against a reference database; it does not provide susceptibility.</a:t>
-            </a:r>
-            <a:endParaRPr lang="en-US" sz="1250" dirty="0"/>
-          </a:p>
-        </p:txBody>
-      </p:sp>
-      <p:sp>
-        <p:nvSpPr>
-          <p:cNvPr id="9" name="Text 7"/>
+              <a:t>MacConkey both selects gram-negative rods and differentiates lactose fermenters (pink) from non-fermenters — an immediate clue to the organism.</a:t>
+            </a:r>
+            <a:endParaRPr lang="en-US" sz="1350" dirty="0"/>
+          </a:p>
+        </p:txBody>
+      </p:sp>
+      <p:sp>
+        <p:nvSpPr>
+          <p:cNvPr id="8" name="Text 6"/>
           <p:cNvSpPr/>
           <p:nvPr/>
         </p:nvSpPr>
@@ -6361,7 +6926,7 @@
       </p:sp>
       <p:sp>
         <p:nvSpPr>
-          <p:cNvPr id="10" name="Text 8"/>
+          <p:cNvPr id="9" name="Text 7"/>
           <p:cNvSpPr/>
           <p:nvPr/>
         </p:nvSpPr>
@@ -6491,7 +7056,7 @@
                 <a:ea typeface="Calibri" pitchFamily="34" charset="-122"/>
                 <a:cs typeface="Calibri" pitchFamily="34" charset="-120"/>
               </a:rPr>
-              <a:t>MICROBIOLOGY   ·   BOARD REVIEW  ·  Q3</a:t>
+              <a:t>MICROBIOLOGY   ·   CASE 3</a:t>
             </a:r>
             <a:endParaRPr lang="en-US" sz="1100" dirty="0"/>
           </a:p>
@@ -6522,7 +7087,7 @@
               <a:buNone/>
             </a:pPr>
             <a:r>
-              <a:rPr lang="en-US" sz="2600" b="1" dirty="0">
+              <a:rPr lang="en-US" sz="3000" b="1" dirty="0">
                 <a:solidFill>
                   <a:srgbClr val="0E3A5F"/>
                 </a:solidFill>
@@ -6530,190 +7095,26 @@
                 <a:ea typeface="Calibri" pitchFamily="34" charset="-122"/>
                 <a:cs typeface="Calibri" pitchFamily="34" charset="-120"/>
               </a:rPr>
-              <a:t>Board-Style Review</a:t>
-            </a:r>
-            <a:endParaRPr lang="en-US" sz="2600" dirty="0"/>
-          </a:p>
-        </p:txBody>
-      </p:sp>
-      <p:sp>
-        <p:nvSpPr>
-          <p:cNvPr id="4" name="Text 2"/>
-          <p:cNvSpPr/>
-          <p:nvPr/>
-        </p:nvSpPr>
-        <p:spPr>
-          <a:xfrm>
-            <a:off x="566928" y="1417320"/>
-            <a:ext cx="11057839" cy="914400"/>
-          </a:xfrm>
-          <a:prstGeom prst="rect">
-            <a:avLst/>
-          </a:prstGeom>
-          <a:noFill/>
-          <a:ln/>
-        </p:spPr>
-        <p:txBody>
-          <a:bodyPr wrap="square" lIns="0" tIns="0" rIns="0" bIns="0" rtlCol="0" anchor="t"/>
-          <a:lstStyle/>
-          <a:p>
-            <a:pPr algn="l" indent="0" marL="0">
-              <a:lnSpc>
-                <a:spcPct val="105000"/>
-              </a:lnSpc>
-              <a:buNone/>
-            </a:pPr>
-            <a:r>
-              <a:rPr lang="en-US" sz="1450" b="1" dirty="0">
-                <a:solidFill>
-                  <a:srgbClr val="1B2A38"/>
-                </a:solidFill>
-                <a:latin typeface="Calibri" pitchFamily="34" charset="0"/>
-                <a:ea typeface="Calibri" pitchFamily="34" charset="-122"/>
-                <a:cs typeface="Calibri" pitchFamily="34" charset="-120"/>
-              </a:rPr>
-              <a:t>Which result warrants immediate critical-value notification?</a:t>
-            </a:r>
-            <a:endParaRPr lang="en-US" sz="1450" dirty="0"/>
-          </a:p>
-        </p:txBody>
-      </p:sp>
-      <p:sp>
-        <p:nvSpPr>
-          <p:cNvPr id="5" name="Text 3"/>
-          <p:cNvSpPr/>
-          <p:nvPr/>
-        </p:nvSpPr>
-        <p:spPr>
-          <a:xfrm>
-            <a:off x="658368" y="2395728"/>
-            <a:ext cx="6192390" cy="3017520"/>
-          </a:xfrm>
-          <a:prstGeom prst="rect">
-            <a:avLst/>
-          </a:prstGeom>
-          <a:noFill/>
-          <a:ln/>
-        </p:spPr>
-        <p:txBody>
-          <a:bodyPr wrap="square" lIns="0" tIns="0" rIns="0" bIns="0" rtlCol="0" anchor="t"/>
-          <a:lstStyle/>
-          <a:p>
-            <a:pPr algn="l" indent="0" marL="0">
-              <a:spcAft>
-                <a:spcPts val="600"/>
-              </a:spcAft>
-              <a:buNone/>
-            </a:pPr>
-            <a:r>
-              <a:rPr lang="en-US" sz="1350" dirty="0">
-                <a:solidFill>
-                  <a:srgbClr val="33444F"/>
-                </a:solidFill>
-                <a:latin typeface="Calibri" pitchFamily="34" charset="0"/>
-                <a:ea typeface="Calibri" pitchFamily="34" charset="-122"/>
-                <a:cs typeface="Calibri" pitchFamily="34" charset="-120"/>
-              </a:rPr>
-              <a:t>A. Mixed flora in a throat swab</a:t>
-            </a:r>
-            <a:endParaRPr lang="en-US" sz="1350" dirty="0"/>
-          </a:p>
-          <a:p>
-            <a:pPr algn="l" indent="0" marL="0">
-              <a:spcAft>
-                <a:spcPts val="600"/>
-              </a:spcAft>
-              <a:buNone/>
-            </a:pPr>
-            <a:r>
-              <a:rPr lang="en-US" sz="1350" b="1" dirty="0">
-                <a:solidFill>
-                  <a:srgbClr val="1F5722"/>
-                </a:solidFill>
-                <a:latin typeface="Calibri" pitchFamily="34" charset="0"/>
-                <a:ea typeface="Calibri" pitchFamily="34" charset="-122"/>
-                <a:cs typeface="Calibri" pitchFamily="34" charset="-120"/>
-              </a:rPr>
-              <a:t>B. Positive Gram stain from cerebrospinal fluid</a:t>
-            </a:r>
-            <a:endParaRPr lang="en-US" sz="1350" dirty="0"/>
-          </a:p>
-          <a:p>
-            <a:pPr algn="l" indent="0" marL="0">
-              <a:spcAft>
-                <a:spcPts val="600"/>
-              </a:spcAft>
-              <a:buNone/>
-            </a:pPr>
-            <a:r>
-              <a:rPr lang="en-US" sz="1350" dirty="0">
-                <a:solidFill>
-                  <a:srgbClr val="33444F"/>
-                </a:solidFill>
-                <a:latin typeface="Calibri" pitchFamily="34" charset="0"/>
-                <a:ea typeface="Calibri" pitchFamily="34" charset="-122"/>
-                <a:cs typeface="Calibri" pitchFamily="34" charset="-120"/>
-              </a:rPr>
-              <a:t>C. Lactobacillus in vaginal flora</a:t>
-            </a:r>
-            <a:endParaRPr lang="en-US" sz="1350" dirty="0"/>
-          </a:p>
-          <a:p>
-            <a:pPr algn="l" indent="0" marL="0">
-              <a:spcAft>
-                <a:spcPts val="600"/>
-              </a:spcAft>
-              <a:buNone/>
-            </a:pPr>
-            <a:r>
-              <a:rPr lang="en-US" sz="1350" dirty="0">
-                <a:solidFill>
-                  <a:srgbClr val="33444F"/>
-                </a:solidFill>
-                <a:latin typeface="Calibri" pitchFamily="34" charset="0"/>
-                <a:ea typeface="Calibri" pitchFamily="34" charset="-122"/>
-                <a:cs typeface="Calibri" pitchFamily="34" charset="-120"/>
-              </a:rPr>
-              <a:t>D. Coagulase-negative staph from skin swab</a:t>
-            </a:r>
-            <a:endParaRPr lang="en-US" sz="1350" dirty="0"/>
-          </a:p>
-          <a:p>
-            <a:pPr algn="l" indent="0" marL="0">
-              <a:spcAft>
-                <a:spcPts val="600"/>
-              </a:spcAft>
-              <a:buNone/>
-            </a:pPr>
-            <a:r>
-              <a:rPr lang="en-US" sz="1350" dirty="0">
-                <a:solidFill>
-                  <a:srgbClr val="33444F"/>
-                </a:solidFill>
-                <a:latin typeface="Calibri" pitchFamily="34" charset="0"/>
-                <a:ea typeface="Calibri" pitchFamily="34" charset="-122"/>
-                <a:cs typeface="Calibri" pitchFamily="34" charset="-120"/>
-              </a:rPr>
-              <a:t>E. Normal urine flora</a:t>
-            </a:r>
-            <a:endParaRPr lang="en-US" sz="1350" dirty="0"/>
-          </a:p>
-        </p:txBody>
-      </p:sp>
-      <p:sp>
-        <p:nvSpPr>
-          <p:cNvPr id="6" name="Shape 4"/>
-          <p:cNvSpPr/>
-          <p:nvPr/>
-        </p:nvSpPr>
-        <p:spPr>
-          <a:xfrm>
-            <a:off x="7201632" y="2395728"/>
-            <a:ext cx="4423136" cy="3246120"/>
+              <a:t>Case 3</a:t>
+            </a:r>
+            <a:endParaRPr lang="en-US" sz="3000" dirty="0"/>
+          </a:p>
+        </p:txBody>
+      </p:sp>
+      <p:sp>
+        <p:nvSpPr>
+          <p:cNvPr id="4" name="Shape 2"/>
+          <p:cNvSpPr/>
+          <p:nvPr/>
+        </p:nvSpPr>
+        <p:spPr>
+          <a:xfrm>
+            <a:off x="566928" y="1517904"/>
+            <a:ext cx="11057839" cy="2788920"/>
           </a:xfrm>
           <a:prstGeom prst="roundRect">
             <a:avLst>
-              <a:gd name="adj" fmla="val 2535"/>
+              <a:gd name="adj" fmla="val 2951"/>
             </a:avLst>
           </a:prstGeom>
           <a:solidFill>
@@ -6731,14 +7132,14 @@
       </p:sp>
       <p:sp>
         <p:nvSpPr>
-          <p:cNvPr id="7" name="Text 5"/>
-          <p:cNvSpPr/>
-          <p:nvPr/>
-        </p:nvSpPr>
-        <p:spPr>
-          <a:xfrm>
-            <a:off x="7439376" y="2578608"/>
-            <a:ext cx="3965936" cy="457200"/>
+          <p:cNvPr id="5" name="Text 3"/>
+          <p:cNvSpPr/>
+          <p:nvPr/>
+        </p:nvSpPr>
+        <p:spPr>
+          <a:xfrm>
+            <a:off x="841248" y="1700784"/>
+            <a:ext cx="5486400" cy="292608"/>
           </a:xfrm>
           <a:prstGeom prst="rect">
             <a:avLst/>
@@ -6754,7 +7155,7 @@
               <a:buNone/>
             </a:pPr>
             <a:r>
-              <a:rPr lang="en-US" sz="1500" b="1" dirty="0">
+              <a:rPr lang="en-US" sz="1100" b="1" spc="150" kern="0" dirty="0">
                 <a:solidFill>
                   <a:srgbClr val="2E7D32"/>
                 </a:solidFill>
@@ -6762,36 +7163,22 @@
                 <a:ea typeface="Calibri" pitchFamily="34" charset="-122"/>
                 <a:cs typeface="Calibri" pitchFamily="34" charset="-120"/>
               </a:rPr>
-              <a:t>ANSWER  </a:t>
-            </a:r>
-            <a:pPr indent="0" marL="0">
-              <a:buNone/>
-            </a:pPr>
-            <a:r>
-              <a:rPr lang="en-US" sz="1500" b="1" dirty="0">
-                <a:solidFill>
-                  <a:srgbClr val="1B2A38"/>
-                </a:solidFill>
-                <a:latin typeface="Calibri" pitchFamily="34" charset="0"/>
-                <a:ea typeface="Calibri" pitchFamily="34" charset="-122"/>
-                <a:cs typeface="Calibri" pitchFamily="34" charset="-120"/>
-              </a:rPr>
-              <a:t>B — Positive Gram stain from CSF</a:t>
-            </a:r>
-            <a:endParaRPr lang="en-US" sz="1500" dirty="0"/>
-          </a:p>
-        </p:txBody>
-      </p:sp>
-      <p:sp>
-        <p:nvSpPr>
-          <p:cNvPr id="8" name="Text 6"/>
-          <p:cNvSpPr/>
-          <p:nvPr/>
-        </p:nvSpPr>
-        <p:spPr>
-          <a:xfrm>
-            <a:off x="7439376" y="3127248"/>
-            <a:ext cx="3947648" cy="2377440"/>
+              <a:t>CLINICAL VIGNETTE</a:t>
+            </a:r>
+            <a:endParaRPr lang="en-US" sz="1100" dirty="0"/>
+          </a:p>
+        </p:txBody>
+      </p:sp>
+      <p:sp>
+        <p:nvSpPr>
+          <p:cNvPr id="6" name="Text 4"/>
+          <p:cNvSpPr/>
+          <p:nvPr/>
+        </p:nvSpPr>
+        <p:spPr>
+          <a:xfrm>
+            <a:off x="841248" y="2029968"/>
+            <a:ext cx="10509199" cy="2148840"/>
           </a:xfrm>
           <a:prstGeom prst="rect">
             <a:avLst/>
@@ -6810,7 +7197,7 @@
               <a:buNone/>
             </a:pPr>
             <a:r>
-              <a:rPr lang="en-US" sz="1250" dirty="0">
+              <a:rPr lang="en-US" sz="1450" dirty="0">
                 <a:solidFill>
                   <a:srgbClr val="33444F"/>
                 </a:solidFill>
@@ -6818,15 +7205,122 @@
                 <a:ea typeface="Calibri" pitchFamily="34" charset="-122"/>
                 <a:cs typeface="Calibri" pitchFamily="34" charset="-120"/>
               </a:rPr>
-              <a:t>A positive Gram stain from a normally sterile site (CSF) is a critical result requiring urgent communication to guide immediate therapy.</a:t>
-            </a:r>
-            <a:endParaRPr lang="en-US" sz="1250" dirty="0"/>
+              <a:t>A patient with atypical pneumonia has repeatedly negative routine cultures despite clear infection.</a:t>
+            </a:r>
+            <a:endParaRPr lang="en-US" sz="1450" dirty="0"/>
+          </a:p>
+        </p:txBody>
+      </p:sp>
+      <p:sp>
+        <p:nvSpPr>
+          <p:cNvPr id="7" name="Shape 5"/>
+          <p:cNvSpPr/>
+          <p:nvPr/>
+        </p:nvSpPr>
+        <p:spPr>
+          <a:xfrm>
+            <a:off x="566928" y="4553712"/>
+            <a:ext cx="11057839" cy="1325880"/>
+          </a:xfrm>
+          <a:prstGeom prst="roundRect">
+            <a:avLst>
+              <a:gd name="adj" fmla="val 6207"/>
+            </a:avLst>
+          </a:prstGeom>
+          <a:solidFill>
+            <a:srgbClr val="0E3A5F"/>
+          </a:solidFill>
+          <a:ln/>
+          <a:effectLst>
+            <a:outerShdw sx="100000" sy="100000" kx="0" ky="0" algn="bl" rotWithShape="0" blurRad="88900" dist="25400" dir="5400000">
+              <a:srgbClr val="22303C">
+                <a:alpha val="12000"/>
+              </a:srgbClr>
+            </a:outerShdw>
+          </a:effectLst>
+        </p:spPr>
+      </p:sp>
+      <p:sp>
+        <p:nvSpPr>
+          <p:cNvPr id="8" name="Text 6"/>
+          <p:cNvSpPr/>
+          <p:nvPr/>
+        </p:nvSpPr>
+        <p:spPr>
+          <a:xfrm>
+            <a:off x="822960" y="4681728"/>
+            <a:ext cx="640080" cy="960120"/>
+          </a:xfrm>
+          <a:prstGeom prst="rect">
+            <a:avLst/>
+          </a:prstGeom>
+          <a:noFill/>
+          <a:ln/>
+        </p:spPr>
+        <p:txBody>
+          <a:bodyPr wrap="square" lIns="0" tIns="0" rIns="0" bIns="0" rtlCol="0" anchor="ctr"/>
+          <a:lstStyle/>
+          <a:p>
+            <a:pPr algn="ctr" indent="0" marL="0">
+              <a:buNone/>
+            </a:pPr>
+            <a:r>
+              <a:rPr lang="en-US" sz="4000" b="1" dirty="0">
+                <a:solidFill>
+                  <a:srgbClr val="2E7D32"/>
+                </a:solidFill>
+                <a:latin typeface="Calibri" pitchFamily="34" charset="0"/>
+                <a:ea typeface="Calibri" pitchFamily="34" charset="-122"/>
+                <a:cs typeface="Calibri" pitchFamily="34" charset="-120"/>
+              </a:rPr>
+              <a:t>?</a:t>
+            </a:r>
+            <a:endParaRPr lang="en-US" sz="4000" dirty="0"/>
           </a:p>
         </p:txBody>
       </p:sp>
       <p:sp>
         <p:nvSpPr>
           <p:cNvPr id="9" name="Text 7"/>
+          <p:cNvSpPr/>
+          <p:nvPr/>
+        </p:nvSpPr>
+        <p:spPr>
+          <a:xfrm>
+            <a:off x="1618488" y="4553712"/>
+            <a:ext cx="9686239" cy="1325880"/>
+          </a:xfrm>
+          <a:prstGeom prst="rect">
+            <a:avLst/>
+          </a:prstGeom>
+          <a:noFill/>
+          <a:ln/>
+        </p:spPr>
+        <p:txBody>
+          <a:bodyPr wrap="square" lIns="0" tIns="0" rIns="0" bIns="0" rtlCol="0" anchor="ctr"/>
+          <a:lstStyle/>
+          <a:p>
+            <a:pPr algn="l" indent="0" marL="0">
+              <a:buNone/>
+            </a:pPr>
+            <a:r>
+              <a:rPr lang="en-US" sz="1500" b="1" dirty="0">
+                <a:solidFill>
+                  <a:srgbClr val="FFFFFF"/>
+                </a:solidFill>
+                <a:latin typeface="Calibri" pitchFamily="34" charset="0"/>
+                <a:ea typeface="Calibri" pitchFamily="34" charset="-122"/>
+                <a:cs typeface="Calibri" pitchFamily="34" charset="-120"/>
+              </a:rPr>
+              <a:t>Why might routine culture be negative, and what should be done?</a:t>
+            </a:r>
+            <a:endParaRPr lang="en-US" sz="1500" dirty="0"/>
+          </a:p>
+        </p:txBody>
+      </p:sp>
+      <p:sp>
+        <p:nvSpPr>
+          <p:cNvPr id="10" name="Text 8"/>
           <p:cNvSpPr/>
           <p:nvPr/>
         </p:nvSpPr>
@@ -6865,7 +7359,7 @@
       </p:sp>
       <p:sp>
         <p:nvSpPr>
-          <p:cNvPr id="10" name="Text 8"/>
+          <p:cNvPr id="11" name="Text 9"/>
           <p:cNvSpPr/>
           <p:nvPr/>
         </p:nvSpPr>
@@ -6944,7 +7438,7 @@
     <p:bg>
       <p:bgPr>
         <a:solidFill>
-          <a:srgbClr val="0A2A45"/>
+          <a:srgbClr val="FFFFFF"/>
         </a:solidFill>
       </p:bgPr>
     </p:bg>
@@ -6971,7 +7465,7 @@
         <p:spPr>
           <a:xfrm>
             <a:off x="566928" y="329184"/>
-            <a:ext cx="10058400" cy="310896"/>
+            <a:ext cx="10515600" cy="310896"/>
           </a:xfrm>
           <a:prstGeom prst="rect">
             <a:avLst/>
@@ -6983,7 +7477,7 @@
           <a:bodyPr wrap="square" lIns="0" tIns="0" rIns="0" bIns="0" rtlCol="0" anchor="ctr"/>
           <a:lstStyle/>
           <a:p>
-            <a:pPr indent="0" marL="0">
+            <a:pPr algn="l" indent="0" marL="0">
               <a:buNone/>
             </a:pPr>
             <a:r>
@@ -6995,7 +7489,7 @@
                 <a:ea typeface="Calibri" pitchFamily="34" charset="-122"/>
                 <a:cs typeface="Calibri" pitchFamily="34" charset="-120"/>
               </a:rPr>
-              <a:t>MICROBIOLOGY</a:t>
+              <a:t>MICROBIOLOGY   ·   CASE 3  ·  RESOLUTION</a:t>
             </a:r>
             <a:endParaRPr lang="en-US" sz="1100" dirty="0"/>
           </a:p>
@@ -7009,8 +7503,8 @@
         </p:nvSpPr>
         <p:spPr>
           <a:xfrm>
-            <a:off x="566928" y="676656"/>
-            <a:ext cx="10972800" cy="749808"/>
+            <a:off x="566928" y="713232"/>
+            <a:ext cx="11064240" cy="749808"/>
           </a:xfrm>
           <a:prstGeom prst="rect">
             <a:avLst/>
@@ -7022,19 +7516,19 @@
           <a:bodyPr wrap="square" lIns="0" tIns="0" rIns="0" bIns="0" rtlCol="0" anchor="ctr"/>
           <a:lstStyle/>
           <a:p>
-            <a:pPr indent="0" marL="0">
+            <a:pPr algn="l" indent="0" marL="0">
               <a:buNone/>
             </a:pPr>
             <a:r>
               <a:rPr lang="en-US" sz="3000" b="1" dirty="0">
                 <a:solidFill>
-                  <a:srgbClr val="FFFFFF"/>
-                </a:solidFill>
-                <a:latin typeface="Calibri" pitchFamily="34" charset="0"/>
-                <a:ea typeface="Calibri" pitchFamily="34" charset="-122"/>
-                <a:cs typeface="Calibri" pitchFamily="34" charset="-120"/>
-              </a:rPr>
-              <a:t>Key Take-Home Points</a:t>
+                  <a:srgbClr val="0E3A5F"/>
+                </a:solidFill>
+                <a:latin typeface="Calibri" pitchFamily="34" charset="0"/>
+                <a:ea typeface="Calibri" pitchFamily="34" charset="-122"/>
+                <a:cs typeface="Calibri" pitchFamily="34" charset="-120"/>
+              </a:rPr>
+              <a:t>Case 3: The Non-Culturable Pathogen</a:t>
             </a:r>
             <a:endParaRPr lang="en-US" sz="3000" dirty="0"/>
           </a:p>
@@ -7042,42 +7536,128 @@
       </p:sp>
       <p:sp>
         <p:nvSpPr>
-          <p:cNvPr id="4" name="Shape 2"/>
-          <p:cNvSpPr/>
-          <p:nvPr/>
-        </p:nvSpPr>
-        <p:spPr>
-          <a:xfrm>
-            <a:off x="566928" y="1517904"/>
-            <a:ext cx="11057839" cy="841248"/>
+          <p:cNvPr id="4" name="Text 2"/>
+          <p:cNvSpPr/>
+          <p:nvPr/>
+        </p:nvSpPr>
+        <p:spPr>
+          <a:xfrm>
+            <a:off x="566928" y="1554480"/>
+            <a:ext cx="6413547" cy="4023360"/>
+          </a:xfrm>
+          <a:prstGeom prst="rect">
+            <a:avLst/>
+          </a:prstGeom>
+          <a:noFill/>
+          <a:ln/>
+        </p:spPr>
+        <p:txBody>
+          <a:bodyPr wrap="square" lIns="0" tIns="0" rIns="0" bIns="0" rtlCol="0" anchor="t"/>
+          <a:lstStyle/>
+          <a:p>
+            <a:pPr algn="l" marL="177800" indent="-177800">
+              <a:spcAft>
+                <a:spcPts val="900"/>
+              </a:spcAft>
+              <a:buSzPct val="100000"/>
+              <a:buChar char="•"/>
+            </a:pPr>
+            <a:r>
+              <a:rPr lang="en-US" sz="1400" b="1" dirty="0">
+                <a:solidFill>
+                  <a:srgbClr val="1B2A38"/>
+                </a:solidFill>
+                <a:latin typeface="Calibri" pitchFamily="34" charset="0"/>
+                <a:ea typeface="Calibri" pitchFamily="34" charset="-122"/>
+                <a:cs typeface="Calibri" pitchFamily="34" charset="-120"/>
+              </a:rPr>
+              <a:t>Atypical agents (Mycoplasma, Chlamydia, Legionella) often do not grow on routine media.</a:t>
+            </a:r>
+            <a:endParaRPr lang="en-US" sz="1400" dirty="0"/>
+          </a:p>
+          <a:p>
+            <a:pPr algn="l" marL="177800" indent="-177800">
+              <a:spcAft>
+                <a:spcPts val="900"/>
+              </a:spcAft>
+              <a:buSzPct val="100000"/>
+              <a:buChar char="•"/>
+            </a:pPr>
+            <a:r>
+              <a:rPr lang="en-US" sz="1400" dirty="0">
+                <a:solidFill>
+                  <a:srgbClr val="33444F"/>
+                </a:solidFill>
+                <a:latin typeface="Calibri" pitchFamily="34" charset="0"/>
+                <a:ea typeface="Calibri" pitchFamily="34" charset="-122"/>
+                <a:cs typeface="Calibri" pitchFamily="34" charset="-120"/>
+              </a:rPr>
+              <a:t>Use NAAT, serology, or special media/antigen tests as appropriate.</a:t>
+            </a:r>
+            <a:endParaRPr lang="en-US" sz="1400" dirty="0"/>
+          </a:p>
+          <a:p>
+            <a:pPr algn="l" marL="177800" indent="-177800">
+              <a:spcAft>
+                <a:spcPts val="900"/>
+              </a:spcAft>
+              <a:buSzPct val="100000"/>
+              <a:buChar char="•"/>
+            </a:pPr>
+            <a:r>
+              <a:rPr lang="en-US" sz="1400" dirty="0">
+                <a:solidFill>
+                  <a:srgbClr val="33444F"/>
+                </a:solidFill>
+                <a:latin typeface="Calibri" pitchFamily="34" charset="0"/>
+                <a:ea typeface="Calibri" pitchFamily="34" charset="-122"/>
+                <a:cs typeface="Calibri" pitchFamily="34" charset="-120"/>
+              </a:rPr>
+              <a:t>Legionella urine antigen and respiratory NAAT panels help.</a:t>
+            </a:r>
+            <a:endParaRPr lang="en-US" sz="1400" dirty="0"/>
+          </a:p>
+          <a:p>
+            <a:pPr algn="l" marL="177800" indent="-177800">
+              <a:spcAft>
+                <a:spcPts val="900"/>
+              </a:spcAft>
+              <a:buSzPct val="100000"/>
+              <a:buChar char="•"/>
+            </a:pPr>
+            <a:r>
+              <a:rPr lang="en-US" sz="1400" dirty="0">
+                <a:solidFill>
+                  <a:srgbClr val="33444F"/>
+                </a:solidFill>
+                <a:latin typeface="Calibri" pitchFamily="34" charset="0"/>
+                <a:ea typeface="Calibri" pitchFamily="34" charset="-122"/>
+                <a:cs typeface="Calibri" pitchFamily="34" charset="-120"/>
+              </a:rPr>
+              <a:t>Communicate the atypical differential to the team.</a:t>
+            </a:r>
+            <a:endParaRPr lang="en-US" sz="1400" dirty="0"/>
+          </a:p>
+        </p:txBody>
+      </p:sp>
+      <p:sp>
+        <p:nvSpPr>
+          <p:cNvPr id="5" name="Shape 3"/>
+          <p:cNvSpPr/>
+          <p:nvPr/>
+        </p:nvSpPr>
+        <p:spPr>
+          <a:xfrm>
+            <a:off x="7422788" y="1554480"/>
+            <a:ext cx="4201979" cy="3977640"/>
           </a:xfrm>
           <a:prstGeom prst="roundRect">
             <a:avLst>
-              <a:gd name="adj" fmla="val 7609"/>
+              <a:gd name="adj" fmla="val 2069"/>
             </a:avLst>
           </a:prstGeom>
           <a:solidFill>
-            <a:srgbClr val="143651"/>
-          </a:solidFill>
-          <a:ln/>
-        </p:spPr>
-      </p:sp>
-      <p:sp>
-        <p:nvSpPr>
-          <p:cNvPr id="5" name="Shape 3"/>
-          <p:cNvSpPr/>
-          <p:nvPr/>
-        </p:nvSpPr>
-        <p:spPr>
-          <a:xfrm>
-            <a:off x="749808" y="1755648"/>
-            <a:ext cx="365760" cy="365760"/>
-          </a:xfrm>
-          <a:prstGeom prst="ellipse">
-            <a:avLst/>
-          </a:prstGeom>
-          <a:solidFill>
-            <a:srgbClr val="2E7D32"/>
+            <a:srgbClr val="E8F2E9"/>
           </a:solidFill>
           <a:ln/>
           <a:effectLst>
@@ -7097,8 +7677,8 @@
         </p:nvSpPr>
         <p:spPr>
           <a:xfrm>
-            <a:off x="749808" y="1755648"/>
-            <a:ext cx="365760" cy="365760"/>
+            <a:off x="7660532" y="1755648"/>
+            <a:ext cx="3744779" cy="310896"/>
           </a:xfrm>
           <a:prstGeom prst="rect">
             <a:avLst/>
@@ -7110,21 +7690,21 @@
           <a:bodyPr wrap="square" lIns="0" tIns="0" rIns="0" bIns="0" rtlCol="0" anchor="ctr"/>
           <a:lstStyle/>
           <a:p>
-            <a:pPr algn="ctr" indent="0" marL="0">
-              <a:buNone/>
-            </a:pPr>
-            <a:r>
-              <a:rPr lang="en-US" sz="1500" b="1" dirty="0">
-                <a:solidFill>
-                  <a:srgbClr val="FFFFFF"/>
-                </a:solidFill>
-                <a:latin typeface="Calibri" pitchFamily="34" charset="0"/>
-                <a:ea typeface="Calibri" pitchFamily="34" charset="-122"/>
-                <a:cs typeface="Calibri" pitchFamily="34" charset="-120"/>
-              </a:rPr>
-              <a:t>1</a:t>
-            </a:r>
-            <a:endParaRPr lang="en-US" sz="1500" dirty="0"/>
+            <a:pPr indent="0" marL="0">
+              <a:buNone/>
+            </a:pPr>
+            <a:r>
+              <a:rPr lang="en-US" sz="1100" b="1" spc="140" kern="0" dirty="0">
+                <a:solidFill>
+                  <a:srgbClr val="2E7D32"/>
+                </a:solidFill>
+                <a:latin typeface="Calibri" pitchFamily="34" charset="0"/>
+                <a:ea typeface="Calibri" pitchFamily="34" charset="-122"/>
+                <a:cs typeface="Calibri" pitchFamily="34" charset="-120"/>
+              </a:rPr>
+              <a:t>TEACHING POINT</a:t>
+            </a:r>
+            <a:endParaRPr lang="en-US" sz="1100" dirty="0"/>
           </a:p>
         </p:txBody>
       </p:sp>
@@ -7136,8 +7716,50 @@
         </p:nvSpPr>
         <p:spPr>
           <a:xfrm>
-            <a:off x="1280160" y="1517904"/>
-            <a:ext cx="10143439" cy="841248"/>
+            <a:off x="7660532" y="2121408"/>
+            <a:ext cx="3726491" cy="3291840"/>
+          </a:xfrm>
+          <a:prstGeom prst="rect">
+            <a:avLst/>
+          </a:prstGeom>
+          <a:noFill/>
+          <a:ln/>
+        </p:spPr>
+        <p:txBody>
+          <a:bodyPr wrap="square" lIns="0" tIns="0" rIns="0" bIns="0" rtlCol="0" anchor="t"/>
+          <a:lstStyle/>
+          <a:p>
+            <a:pPr algn="l" indent="0" marL="0">
+              <a:lnSpc>
+                <a:spcPct val="110000"/>
+              </a:lnSpc>
+              <a:buNone/>
+            </a:pPr>
+            <a:r>
+              <a:rPr lang="en-US" sz="1350" dirty="0">
+                <a:solidFill>
+                  <a:srgbClr val="33444F"/>
+                </a:solidFill>
+                <a:latin typeface="Calibri" pitchFamily="34" charset="0"/>
+                <a:ea typeface="Calibri" pitchFamily="34" charset="-122"/>
+                <a:cs typeface="Calibri" pitchFamily="34" charset="-120"/>
+              </a:rPr>
+              <a:t>Negative routine cultures with ongoing infection should trigger special stains, media, antigen, or molecular testing for non-culturable organisms.</a:t>
+            </a:r>
+            <a:endParaRPr lang="en-US" sz="1350" dirty="0"/>
+          </a:p>
+        </p:txBody>
+      </p:sp>
+      <p:sp>
+        <p:nvSpPr>
+          <p:cNvPr id="8" name="Text 6"/>
+          <p:cNvSpPr/>
+          <p:nvPr/>
+        </p:nvSpPr>
+        <p:spPr>
+          <a:xfrm>
+            <a:off x="566928" y="6473952"/>
+            <a:ext cx="7772400" cy="274320"/>
           </a:xfrm>
           <a:prstGeom prst="rect">
             <a:avLst/>
@@ -7153,79 +7775,30 @@
               <a:buNone/>
             </a:pPr>
             <a:r>
-              <a:rPr lang="en-US" sz="1350" dirty="0">
-                <a:solidFill>
-                  <a:srgbClr val="E7EEF4"/>
-                </a:solidFill>
-                <a:latin typeface="Calibri" pitchFamily="34" charset="0"/>
-                <a:ea typeface="Calibri" pitchFamily="34" charset="-122"/>
-                <a:cs typeface="Calibri" pitchFamily="34" charset="-120"/>
-              </a:rPr>
-              <a:t>Gram reaction + arrangement + source generates the differential and the urgent call.</a:t>
-            </a:r>
-            <a:endParaRPr lang="en-US" sz="1350" dirty="0"/>
-          </a:p>
-        </p:txBody>
-      </p:sp>
-      <p:sp>
-        <p:nvSpPr>
-          <p:cNvPr id="8" name="Shape 6"/>
-          <p:cNvSpPr/>
-          <p:nvPr/>
-        </p:nvSpPr>
-        <p:spPr>
-          <a:xfrm>
-            <a:off x="566928" y="2505456"/>
-            <a:ext cx="11057839" cy="841248"/>
-          </a:xfrm>
-          <a:prstGeom prst="roundRect">
-            <a:avLst>
-              <a:gd name="adj" fmla="val 7609"/>
-            </a:avLst>
-          </a:prstGeom>
-          <a:solidFill>
-            <a:srgbClr val="143651"/>
-          </a:solidFill>
-          <a:ln/>
-        </p:spPr>
-      </p:sp>
-      <p:sp>
-        <p:nvSpPr>
-          <p:cNvPr id="9" name="Shape 7"/>
-          <p:cNvSpPr/>
-          <p:nvPr/>
-        </p:nvSpPr>
-        <p:spPr>
-          <a:xfrm>
-            <a:off x="749808" y="2743200"/>
-            <a:ext cx="365760" cy="365760"/>
-          </a:xfrm>
-          <a:prstGeom prst="ellipse">
-            <a:avLst/>
-          </a:prstGeom>
-          <a:solidFill>
-            <a:srgbClr val="2E7D32"/>
-          </a:solidFill>
-          <a:ln/>
-          <a:effectLst>
-            <a:outerShdw sx="100000" sy="100000" kx="0" ky="0" algn="bl" rotWithShape="0" blurRad="88900" dist="25400" dir="5400000">
-              <a:srgbClr val="22303C">
-                <a:alpha val="12000"/>
-              </a:srgbClr>
-            </a:outerShdw>
-          </a:effectLst>
-        </p:spPr>
-      </p:sp>
-      <p:sp>
-        <p:nvSpPr>
-          <p:cNvPr id="10" name="Text 8"/>
-          <p:cNvSpPr/>
-          <p:nvPr/>
-        </p:nvSpPr>
-        <p:spPr>
-          <a:xfrm>
-            <a:off x="749808" y="2743200"/>
-            <a:ext cx="365760" cy="365760"/>
+              <a:rPr lang="en-US" sz="850" dirty="0">
+                <a:solidFill>
+                  <a:srgbClr val="9AA8B4"/>
+                </a:solidFill>
+                <a:latin typeface="Calibri" pitchFamily="34" charset="0"/>
+                <a:ea typeface="Calibri" pitchFamily="34" charset="-122"/>
+                <a:cs typeface="Calibri" pitchFamily="34" charset="-120"/>
+              </a:rPr>
+              <a:t>Makassed General Hospital  ·  Department of Laboratory Medicine</a:t>
+            </a:r>
+            <a:endParaRPr lang="en-US" sz="850" dirty="0"/>
+          </a:p>
+        </p:txBody>
+      </p:sp>
+      <p:sp>
+        <p:nvSpPr>
+          <p:cNvPr id="9" name="Text 7"/>
+          <p:cNvSpPr/>
+          <p:nvPr/>
+        </p:nvSpPr>
+        <p:spPr>
+          <a:xfrm>
+            <a:off x="9814255" y="6473952"/>
+            <a:ext cx="1828800" cy="274320"/>
           </a:xfrm>
           <a:prstGeom prst="rect">
             <a:avLst/>
@@ -7237,504 +7810,34 @@
           <a:bodyPr wrap="square" lIns="0" tIns="0" rIns="0" bIns="0" rtlCol="0" anchor="ctr"/>
           <a:lstStyle/>
           <a:p>
-            <a:pPr algn="ctr" indent="0" marL="0">
-              <a:buNone/>
-            </a:pPr>
-            <a:r>
-              <a:rPr lang="en-US" sz="1500" b="1" dirty="0">
-                <a:solidFill>
-                  <a:srgbClr val="FFFFFF"/>
-                </a:solidFill>
-                <a:latin typeface="Calibri" pitchFamily="34" charset="0"/>
-                <a:ea typeface="Calibri" pitchFamily="34" charset="-122"/>
-                <a:cs typeface="Calibri" pitchFamily="34" charset="-120"/>
-              </a:rPr>
-              <a:t>2</a:t>
-            </a:r>
-            <a:endParaRPr lang="en-US" sz="1500" dirty="0"/>
-          </a:p>
-        </p:txBody>
-      </p:sp>
-      <p:sp>
-        <p:nvSpPr>
-          <p:cNvPr id="11" name="Text 9"/>
-          <p:cNvSpPr/>
-          <p:nvPr/>
-        </p:nvSpPr>
-        <p:spPr>
-          <a:xfrm>
-            <a:off x="1280160" y="2505456"/>
-            <a:ext cx="10143439" cy="841248"/>
-          </a:xfrm>
-          <a:prstGeom prst="rect">
-            <a:avLst/>
-          </a:prstGeom>
-          <a:noFill/>
-          <a:ln/>
-        </p:spPr>
-        <p:txBody>
-          <a:bodyPr wrap="square" lIns="0" tIns="0" rIns="0" bIns="0" rtlCol="0" anchor="ctr"/>
-          <a:lstStyle/>
-          <a:p>
-            <a:pPr algn="l" indent="0" marL="0">
-              <a:buNone/>
-            </a:pPr>
-            <a:r>
-              <a:rPr lang="en-US" sz="1350" dirty="0">
-                <a:solidFill>
-                  <a:srgbClr val="E7EEF4"/>
-                </a:solidFill>
-                <a:latin typeface="Calibri" pitchFamily="34" charset="0"/>
-                <a:ea typeface="Calibri" pitchFamily="34" charset="-122"/>
-                <a:cs typeface="Calibri" pitchFamily="34" charset="-120"/>
-              </a:rPr>
-              <a:t>Choose media deliberately: chocolate for fastidious organisms, MacConkey to select/differentiate Gram-negatives.</a:t>
-            </a:r>
-            <a:endParaRPr lang="en-US" sz="1350" dirty="0"/>
-          </a:p>
-        </p:txBody>
-      </p:sp>
-      <p:sp>
-        <p:nvSpPr>
-          <p:cNvPr id="12" name="Shape 10"/>
-          <p:cNvSpPr/>
-          <p:nvPr/>
-        </p:nvSpPr>
-        <p:spPr>
-          <a:xfrm>
-            <a:off x="566928" y="3493008"/>
-            <a:ext cx="11057839" cy="841248"/>
-          </a:xfrm>
-          <a:prstGeom prst="roundRect">
-            <a:avLst>
-              <a:gd name="adj" fmla="val 7609"/>
-            </a:avLst>
-          </a:prstGeom>
-          <a:solidFill>
-            <a:srgbClr val="143651"/>
-          </a:solidFill>
-          <a:ln/>
-        </p:spPr>
-      </p:sp>
-      <p:sp>
-        <p:nvSpPr>
-          <p:cNvPr id="13" name="Shape 11"/>
-          <p:cNvSpPr/>
-          <p:nvPr/>
-        </p:nvSpPr>
-        <p:spPr>
-          <a:xfrm>
-            <a:off x="749808" y="3730752"/>
-            <a:ext cx="365760" cy="365760"/>
-          </a:xfrm>
-          <a:prstGeom prst="ellipse">
-            <a:avLst/>
-          </a:prstGeom>
-          <a:solidFill>
-            <a:srgbClr val="2E7D32"/>
-          </a:solidFill>
-          <a:ln/>
-          <a:effectLst>
-            <a:outerShdw sx="100000" sy="100000" kx="0" ky="0" algn="bl" rotWithShape="0" blurRad="88900" dist="25400" dir="5400000">
-              <a:srgbClr val="22303C">
-                <a:alpha val="12000"/>
-              </a:srgbClr>
-            </a:outerShdw>
-          </a:effectLst>
-        </p:spPr>
-      </p:sp>
-      <p:sp>
-        <p:nvSpPr>
-          <p:cNvPr id="14" name="Text 12"/>
-          <p:cNvSpPr/>
-          <p:nvPr/>
-        </p:nvSpPr>
-        <p:spPr>
-          <a:xfrm>
-            <a:off x="749808" y="3730752"/>
-            <a:ext cx="365760" cy="365760"/>
-          </a:xfrm>
-          <a:prstGeom prst="rect">
-            <a:avLst/>
-          </a:prstGeom>
-          <a:noFill/>
-          <a:ln/>
-        </p:spPr>
-        <p:txBody>
-          <a:bodyPr wrap="square" lIns="0" tIns="0" rIns="0" bIns="0" rtlCol="0" anchor="ctr"/>
-          <a:lstStyle/>
-          <a:p>
-            <a:pPr algn="ctr" indent="0" marL="0">
-              <a:buNone/>
-            </a:pPr>
-            <a:r>
-              <a:rPr lang="en-US" sz="1500" b="1" dirty="0">
-                <a:solidFill>
-                  <a:srgbClr val="FFFFFF"/>
-                </a:solidFill>
-                <a:latin typeface="Calibri" pitchFamily="34" charset="0"/>
-                <a:ea typeface="Calibri" pitchFamily="34" charset="-122"/>
-                <a:cs typeface="Calibri" pitchFamily="34" charset="-120"/>
-              </a:rPr>
-              <a:t>3</a:t>
-            </a:r>
-            <a:endParaRPr lang="en-US" sz="1500" dirty="0"/>
-          </a:p>
-        </p:txBody>
-      </p:sp>
-      <p:sp>
-        <p:nvSpPr>
-          <p:cNvPr id="15" name="Text 13"/>
-          <p:cNvSpPr/>
-          <p:nvPr/>
-        </p:nvSpPr>
-        <p:spPr>
-          <a:xfrm>
-            <a:off x="1280160" y="3493008"/>
-            <a:ext cx="10143439" cy="841248"/>
-          </a:xfrm>
-          <a:prstGeom prst="rect">
-            <a:avLst/>
-          </a:prstGeom>
-          <a:noFill/>
-          <a:ln/>
-        </p:spPr>
-        <p:txBody>
-          <a:bodyPr wrap="square" lIns="0" tIns="0" rIns="0" bIns="0" rtlCol="0" anchor="ctr"/>
-          <a:lstStyle/>
-          <a:p>
-            <a:pPr algn="l" indent="0" marL="0">
-              <a:buNone/>
-            </a:pPr>
-            <a:r>
-              <a:rPr lang="en-US" sz="1350" dirty="0">
-                <a:solidFill>
-                  <a:srgbClr val="E7EEF4"/>
-                </a:solidFill>
-                <a:latin typeface="Calibri" pitchFamily="34" charset="0"/>
-                <a:ea typeface="Calibri" pitchFamily="34" charset="-122"/>
-                <a:cs typeface="Calibri" pitchFamily="34" charset="-120"/>
-              </a:rPr>
-              <a:t>Catalase (staph vs strep) and coagulase (S. aureus vs CoNS) remain fast, high-yield separators.</a:t>
-            </a:r>
-            <a:endParaRPr lang="en-US" sz="1350" dirty="0"/>
-          </a:p>
-        </p:txBody>
-      </p:sp>
-      <p:sp>
-        <p:nvSpPr>
-          <p:cNvPr id="16" name="Shape 14"/>
-          <p:cNvSpPr/>
-          <p:nvPr/>
-        </p:nvSpPr>
-        <p:spPr>
-          <a:xfrm>
-            <a:off x="566928" y="4480560"/>
-            <a:ext cx="11057839" cy="841248"/>
-          </a:xfrm>
-          <a:prstGeom prst="roundRect">
-            <a:avLst>
-              <a:gd name="adj" fmla="val 7609"/>
-            </a:avLst>
-          </a:prstGeom>
-          <a:solidFill>
-            <a:srgbClr val="143651"/>
-          </a:solidFill>
-          <a:ln/>
-        </p:spPr>
-      </p:sp>
-      <p:sp>
-        <p:nvSpPr>
-          <p:cNvPr id="17" name="Shape 15"/>
-          <p:cNvSpPr/>
-          <p:nvPr/>
-        </p:nvSpPr>
-        <p:spPr>
-          <a:xfrm>
-            <a:off x="749808" y="4718304"/>
-            <a:ext cx="365760" cy="365760"/>
-          </a:xfrm>
-          <a:prstGeom prst="ellipse">
-            <a:avLst/>
-          </a:prstGeom>
-          <a:solidFill>
-            <a:srgbClr val="2E7D32"/>
-          </a:solidFill>
-          <a:ln/>
-          <a:effectLst>
-            <a:outerShdw sx="100000" sy="100000" kx="0" ky="0" algn="bl" rotWithShape="0" blurRad="88900" dist="25400" dir="5400000">
-              <a:srgbClr val="22303C">
-                <a:alpha val="12000"/>
-              </a:srgbClr>
-            </a:outerShdw>
-          </a:effectLst>
-        </p:spPr>
-      </p:sp>
-      <p:sp>
-        <p:nvSpPr>
-          <p:cNvPr id="18" name="Text 16"/>
-          <p:cNvSpPr/>
-          <p:nvPr/>
-        </p:nvSpPr>
-        <p:spPr>
-          <a:xfrm>
-            <a:off x="749808" y="4718304"/>
-            <a:ext cx="365760" cy="365760"/>
-          </a:xfrm>
-          <a:prstGeom prst="rect">
-            <a:avLst/>
-          </a:prstGeom>
-          <a:noFill/>
-          <a:ln/>
-        </p:spPr>
-        <p:txBody>
-          <a:bodyPr wrap="square" lIns="0" tIns="0" rIns="0" bIns="0" rtlCol="0" anchor="ctr"/>
-          <a:lstStyle/>
-          <a:p>
-            <a:pPr algn="ctr" indent="0" marL="0">
-              <a:buNone/>
-            </a:pPr>
-            <a:r>
-              <a:rPr lang="en-US" sz="1500" b="1" dirty="0">
-                <a:solidFill>
-                  <a:srgbClr val="FFFFFF"/>
-                </a:solidFill>
-                <a:latin typeface="Calibri" pitchFamily="34" charset="0"/>
-                <a:ea typeface="Calibri" pitchFamily="34" charset="-122"/>
-                <a:cs typeface="Calibri" pitchFamily="34" charset="-120"/>
-              </a:rPr>
-              <a:t>4</a:t>
-            </a:r>
-            <a:endParaRPr lang="en-US" sz="1500" dirty="0"/>
-          </a:p>
-        </p:txBody>
-      </p:sp>
-      <p:sp>
-        <p:nvSpPr>
-          <p:cNvPr id="19" name="Text 17"/>
-          <p:cNvSpPr/>
-          <p:nvPr/>
-        </p:nvSpPr>
-        <p:spPr>
-          <a:xfrm>
-            <a:off x="1280160" y="4480560"/>
-            <a:ext cx="10143439" cy="841248"/>
-          </a:xfrm>
-          <a:prstGeom prst="rect">
-            <a:avLst/>
-          </a:prstGeom>
-          <a:noFill/>
-          <a:ln/>
-        </p:spPr>
-        <p:txBody>
-          <a:bodyPr wrap="square" lIns="0" tIns="0" rIns="0" bIns="0" rtlCol="0" anchor="ctr"/>
-          <a:lstStyle/>
-          <a:p>
-            <a:pPr algn="l" indent="0" marL="0">
-              <a:buNone/>
-            </a:pPr>
-            <a:r>
-              <a:rPr lang="en-US" sz="1350" dirty="0">
-                <a:solidFill>
-                  <a:srgbClr val="E7EEF4"/>
-                </a:solidFill>
-                <a:latin typeface="Calibri" pitchFamily="34" charset="0"/>
-                <a:ea typeface="Calibri" pitchFamily="34" charset="-122"/>
-                <a:cs typeface="Calibri" pitchFamily="34" charset="-120"/>
-              </a:rPr>
-              <a:t>MALDI-TOF gives rapid species ID by protein fingerprint but not susceptibility — AST still required.</a:t>
-            </a:r>
-            <a:endParaRPr lang="en-US" sz="1350" dirty="0"/>
-          </a:p>
-        </p:txBody>
-      </p:sp>
-      <p:sp>
-        <p:nvSpPr>
-          <p:cNvPr id="20" name="Shape 18"/>
-          <p:cNvSpPr/>
-          <p:nvPr/>
-        </p:nvSpPr>
-        <p:spPr>
-          <a:xfrm>
-            <a:off x="566928" y="5468112"/>
-            <a:ext cx="11057839" cy="841248"/>
-          </a:xfrm>
-          <a:prstGeom prst="roundRect">
-            <a:avLst>
-              <a:gd name="adj" fmla="val 7609"/>
-            </a:avLst>
-          </a:prstGeom>
-          <a:solidFill>
-            <a:srgbClr val="143651"/>
-          </a:solidFill>
-          <a:ln/>
-        </p:spPr>
-      </p:sp>
-      <p:sp>
-        <p:nvSpPr>
-          <p:cNvPr id="21" name="Shape 19"/>
-          <p:cNvSpPr/>
-          <p:nvPr/>
-        </p:nvSpPr>
-        <p:spPr>
-          <a:xfrm>
-            <a:off x="749808" y="5705856"/>
-            <a:ext cx="365760" cy="365760"/>
-          </a:xfrm>
-          <a:prstGeom prst="ellipse">
-            <a:avLst/>
-          </a:prstGeom>
-          <a:solidFill>
-            <a:srgbClr val="2E7D32"/>
-          </a:solidFill>
-          <a:ln/>
-          <a:effectLst>
-            <a:outerShdw sx="100000" sy="100000" kx="0" ky="0" algn="bl" rotWithShape="0" blurRad="88900" dist="25400" dir="5400000">
-              <a:srgbClr val="22303C">
-                <a:alpha val="12000"/>
-              </a:srgbClr>
-            </a:outerShdw>
-          </a:effectLst>
-        </p:spPr>
-      </p:sp>
-      <p:sp>
-        <p:nvSpPr>
-          <p:cNvPr id="22" name="Text 20"/>
-          <p:cNvSpPr/>
-          <p:nvPr/>
-        </p:nvSpPr>
-        <p:spPr>
-          <a:xfrm>
-            <a:off x="749808" y="5705856"/>
-            <a:ext cx="365760" cy="365760"/>
-          </a:xfrm>
-          <a:prstGeom prst="rect">
-            <a:avLst/>
-          </a:prstGeom>
-          <a:noFill/>
-          <a:ln/>
-        </p:spPr>
-        <p:txBody>
-          <a:bodyPr wrap="square" lIns="0" tIns="0" rIns="0" bIns="0" rtlCol="0" anchor="ctr"/>
-          <a:lstStyle/>
-          <a:p>
-            <a:pPr algn="ctr" indent="0" marL="0">
-              <a:buNone/>
-            </a:pPr>
-            <a:r>
-              <a:rPr lang="en-US" sz="1500" b="1" dirty="0">
-                <a:solidFill>
-                  <a:srgbClr val="FFFFFF"/>
-                </a:solidFill>
-                <a:latin typeface="Calibri" pitchFamily="34" charset="0"/>
-                <a:ea typeface="Calibri" pitchFamily="34" charset="-122"/>
-                <a:cs typeface="Calibri" pitchFamily="34" charset="-120"/>
-              </a:rPr>
-              <a:t>5</a:t>
-            </a:r>
-            <a:endParaRPr lang="en-US" sz="1500" dirty="0"/>
-          </a:p>
-        </p:txBody>
-      </p:sp>
-      <p:sp>
-        <p:nvSpPr>
-          <p:cNvPr id="23" name="Text 21"/>
-          <p:cNvSpPr/>
-          <p:nvPr/>
-        </p:nvSpPr>
-        <p:spPr>
-          <a:xfrm>
-            <a:off x="1280160" y="5468112"/>
-            <a:ext cx="10143439" cy="841248"/>
-          </a:xfrm>
-          <a:prstGeom prst="rect">
-            <a:avLst/>
-          </a:prstGeom>
-          <a:noFill/>
-          <a:ln/>
-        </p:spPr>
-        <p:txBody>
-          <a:bodyPr wrap="square" lIns="0" tIns="0" rIns="0" bIns="0" rtlCol="0" anchor="ctr"/>
-          <a:lstStyle/>
-          <a:p>
-            <a:pPr algn="l" indent="0" marL="0">
-              <a:buNone/>
-            </a:pPr>
-            <a:r>
-              <a:rPr lang="en-US" sz="1350" dirty="0">
-                <a:solidFill>
-                  <a:srgbClr val="E7EEF4"/>
-                </a:solidFill>
-                <a:latin typeface="Calibri" pitchFamily="34" charset="0"/>
-                <a:ea typeface="Calibri" pitchFamily="34" charset="-122"/>
-                <a:cs typeface="Calibri" pitchFamily="34" charset="-120"/>
-              </a:rPr>
-              <a:t>Positive stain/culture from a sterile site is a critical result — communicate promptly with read-back.</a:t>
-            </a:r>
-            <a:endParaRPr lang="en-US" sz="1350" dirty="0"/>
-          </a:p>
-        </p:txBody>
-      </p:sp>
-      <p:sp>
-        <p:nvSpPr>
-          <p:cNvPr id="24" name="Text 22"/>
-          <p:cNvSpPr/>
-          <p:nvPr/>
-        </p:nvSpPr>
-        <p:spPr>
-          <a:xfrm>
-            <a:off x="566928" y="6473952"/>
-            <a:ext cx="8229600" cy="274320"/>
-          </a:xfrm>
-          <a:prstGeom prst="rect">
-            <a:avLst/>
-          </a:prstGeom>
-          <a:noFill/>
-          <a:ln/>
-        </p:spPr>
-        <p:txBody>
-          <a:bodyPr wrap="square" lIns="0" tIns="0" rIns="0" bIns="0" rtlCol="0" anchor="ctr"/>
-          <a:lstStyle/>
-          <a:p>
-            <a:pPr indent="0" marL="0">
+            <a:pPr algn="r" indent="0" marL="0">
               <a:buNone/>
             </a:pPr>
             <a:r>
               <a:rPr lang="en-US" sz="850" dirty="0">
                 <a:solidFill>
-                  <a:srgbClr val="5E7488"/>
-                </a:solidFill>
-                <a:latin typeface="Calibri" pitchFamily="34" charset="0"/>
-                <a:ea typeface="Calibri" pitchFamily="34" charset="-122"/>
-                <a:cs typeface="Calibri" pitchFamily="34" charset="-120"/>
-              </a:rPr>
-              <a:t>Makassed General Hospital  ·  Department of Laboratory Medicine</a:t>
-            </a:r>
-            <a:endParaRPr lang="en-US" sz="850" dirty="0"/>
-          </a:p>
-        </p:txBody>
-      </p:sp>
-      <p:sp>
-        <p:nvSpPr>
-          <p:cNvPr id="25" name="Text 23"/>
-          <p:cNvSpPr/>
-          <p:nvPr/>
-        </p:nvSpPr>
-        <p:spPr>
-          <a:xfrm>
-            <a:off x="11002975" y="6473952"/>
-            <a:ext cx="640080" cy="274320"/>
-          </a:xfrm>
-          <a:prstGeom prst="rect">
-            <a:avLst/>
-          </a:prstGeom>
-          <a:noFill/>
-          <a:ln/>
-        </p:spPr>
-        <p:txBody>
-          <a:bodyPr wrap="square" lIns="0" tIns="0" rIns="0" bIns="0" rtlCol="0" anchor="ctr"/>
-          <a:lstStyle/>
-          <a:p>
+                  <a:srgbClr val="9AA8B4"/>
+                </a:solidFill>
+                <a:latin typeface="Calibri" pitchFamily="34" charset="0"/>
+                <a:ea typeface="Calibri" pitchFamily="34" charset="-122"/>
+                <a:cs typeface="Calibri" pitchFamily="34" charset="-120"/>
+              </a:rPr>
+              <a:t>CP Lecture Series</a:t>
+            </a:r>
+            <a:pPr algn="r" indent="0" marL="0">
+              <a:buNone/>
+            </a:pPr>
+            <a:r>
+              <a:rPr lang="en-US" sz="850" dirty="0">
+                <a:solidFill>
+                  <a:srgbClr val="DCE4EC"/>
+                </a:solidFill>
+                <a:latin typeface="Calibri" pitchFamily="34" charset="0"/>
+                <a:ea typeface="Calibri" pitchFamily="34" charset="-122"/>
+                <a:cs typeface="Calibri" pitchFamily="34" charset="-120"/>
+              </a:rPr>
+              <a:t>   ·   </a:t>
+            </a:r>
             <a:pPr algn="r" indent="0" marL="0">
               <a:buNone/>
             </a:pPr>
@@ -7964,7 +8067,7 @@
                 <a:ea typeface="Calibri" pitchFamily="34" charset="-122"/>
                 <a:cs typeface="Calibri" pitchFamily="34" charset="-120"/>
               </a:rPr>
-              <a:t>The fastest actionable result in the micro lab</a:t>
+              <a:t>The fastest actionable clue in bacteriology</a:t>
             </a:r>
             <a:endParaRPr lang="en-US" sz="1150" dirty="0"/>
           </a:p>
@@ -8071,7 +8174,7 @@
                 <a:ea typeface="Calibri" pitchFamily="34" charset="-122"/>
                 <a:cs typeface="Calibri" pitchFamily="34" charset="-120"/>
               </a:rPr>
-              <a:t>Mass spectrometry identifies most isolates in minutes</a:t>
+              <a:t>Mass spectrometry IDs colonies in minutes</a:t>
             </a:r>
             <a:endParaRPr lang="en-US" sz="1150" dirty="0"/>
           </a:p>
@@ -8139,7 +8242,7 @@
                 <a:ea typeface="Calibri" pitchFamily="34" charset="-122"/>
                 <a:cs typeface="Calibri" pitchFamily="34" charset="-120"/>
               </a:rPr>
-              <a:t>Call</a:t>
+              <a:t>Media</a:t>
             </a:r>
             <a:endParaRPr lang="en-US" sz="3600" dirty="0"/>
           </a:p>
@@ -8178,7 +8281,7 @@
                 <a:ea typeface="Calibri" pitchFamily="34" charset="-122"/>
                 <a:cs typeface="Calibri" pitchFamily="34" charset="-120"/>
               </a:rPr>
-              <a:t>A positive Gram stain on a sterile site is an urgent phone call</a:t>
+              <a:t>Selective and differential media shape what grows</a:t>
             </a:r>
             <a:endParaRPr lang="en-US" sz="1150" dirty="0"/>
           </a:p>
@@ -8249,7 +8352,7 @@
                 <a:ea typeface="Calibri" pitchFamily="34" charset="-122"/>
                 <a:cs typeface="Calibri" pitchFamily="34" charset="-120"/>
               </a:rPr>
-              <a:t>The Gram stain plus growth on selective media plus rapid identification is the everyday workflow of bacteriology. Reading morphology, choosing media, and knowing how MALDI-TOF works lets you guide therapy hours before final results.</a:t>
+              <a:t>Identification begins with the Gram stain at the bedside of the bench and proceeds through culture media to definitive identification by MALDI-TOF or biochemical methods. Each step narrows the differential.</a:t>
             </a:r>
             <a:endParaRPr lang="en-US" sz="1450" dirty="0"/>
           </a:p>
@@ -8292,7 +8395,7 @@
                 <a:ea typeface="Calibri" pitchFamily="34" charset="-122"/>
                 <a:cs typeface="Calibri" pitchFamily="34" charset="-120"/>
               </a:rPr>
-              <a:t>Morphology (Gram reaction + arrangement) plus the specimen source generates a working differential and the urgent call.</a:t>
+              <a:t>Gram reaction + arrangement + specimen source narrows the differential and drives the first call to the clinical team.</a:t>
             </a:r>
             <a:endParaRPr lang="en-US" sz="1300" dirty="0"/>
           </a:p>
@@ -8469,6 +8572,2845 @@
                 <a:ea typeface="Calibri" pitchFamily="34" charset="-122"/>
                 <a:cs typeface="Calibri" pitchFamily="34" charset="-120"/>
               </a:rPr>
+              <a:t>MICROBIOLOGY   ·   BOARD REVIEW  ·  Q1</a:t>
+            </a:r>
+            <a:endParaRPr lang="en-US" sz="1100" dirty="0"/>
+          </a:p>
+        </p:txBody>
+      </p:sp>
+      <p:sp>
+        <p:nvSpPr>
+          <p:cNvPr id="3" name="Text 1"/>
+          <p:cNvSpPr/>
+          <p:nvPr/>
+        </p:nvSpPr>
+        <p:spPr>
+          <a:xfrm>
+            <a:off x="566928" y="713232"/>
+            <a:ext cx="11064240" cy="749808"/>
+          </a:xfrm>
+          <a:prstGeom prst="rect">
+            <a:avLst/>
+          </a:prstGeom>
+          <a:noFill/>
+          <a:ln/>
+        </p:spPr>
+        <p:txBody>
+          <a:bodyPr wrap="square" lIns="0" tIns="0" rIns="0" bIns="0" rtlCol="0" anchor="ctr"/>
+          <a:lstStyle/>
+          <a:p>
+            <a:pPr algn="l" indent="0" marL="0">
+              <a:buNone/>
+            </a:pPr>
+            <a:r>
+              <a:rPr lang="en-US" sz="2600" b="1" dirty="0">
+                <a:solidFill>
+                  <a:srgbClr val="0E3A5F"/>
+                </a:solidFill>
+                <a:latin typeface="Calibri" pitchFamily="34" charset="0"/>
+                <a:ea typeface="Calibri" pitchFamily="34" charset="-122"/>
+                <a:cs typeface="Calibri" pitchFamily="34" charset="-120"/>
+              </a:rPr>
+              <a:t>Board-Style Review</a:t>
+            </a:r>
+            <a:endParaRPr lang="en-US" sz="2600" dirty="0"/>
+          </a:p>
+        </p:txBody>
+      </p:sp>
+      <p:sp>
+        <p:nvSpPr>
+          <p:cNvPr id="4" name="Text 2"/>
+          <p:cNvSpPr/>
+          <p:nvPr/>
+        </p:nvSpPr>
+        <p:spPr>
+          <a:xfrm>
+            <a:off x="566928" y="1417320"/>
+            <a:ext cx="11057839" cy="914400"/>
+          </a:xfrm>
+          <a:prstGeom prst="rect">
+            <a:avLst/>
+          </a:prstGeom>
+          <a:noFill/>
+          <a:ln/>
+        </p:spPr>
+        <p:txBody>
+          <a:bodyPr wrap="square" lIns="0" tIns="0" rIns="0" bIns="0" rtlCol="0" anchor="t"/>
+          <a:lstStyle/>
+          <a:p>
+            <a:pPr algn="l" indent="0" marL="0">
+              <a:lnSpc>
+                <a:spcPct val="105000"/>
+              </a:lnSpc>
+              <a:buNone/>
+            </a:pPr>
+            <a:r>
+              <a:rPr lang="en-US" sz="1450" b="1" dirty="0">
+                <a:solidFill>
+                  <a:srgbClr val="1B2A38"/>
+                </a:solidFill>
+                <a:latin typeface="Calibri" pitchFamily="34" charset="0"/>
+                <a:ea typeface="Calibri" pitchFamily="34" charset="-122"/>
+                <a:cs typeface="Calibri" pitchFamily="34" charset="-120"/>
+              </a:rPr>
+              <a:t>Catalase distinguishes which two groups of gram-positive cocci?</a:t>
+            </a:r>
+            <a:endParaRPr lang="en-US" sz="1450" dirty="0"/>
+          </a:p>
+        </p:txBody>
+      </p:sp>
+      <p:sp>
+        <p:nvSpPr>
+          <p:cNvPr id="5" name="Text 3"/>
+          <p:cNvSpPr/>
+          <p:nvPr/>
+        </p:nvSpPr>
+        <p:spPr>
+          <a:xfrm>
+            <a:off x="658368" y="2395728"/>
+            <a:ext cx="6192390" cy="3017520"/>
+          </a:xfrm>
+          <a:prstGeom prst="rect">
+            <a:avLst/>
+          </a:prstGeom>
+          <a:noFill/>
+          <a:ln/>
+        </p:spPr>
+        <p:txBody>
+          <a:bodyPr wrap="square" lIns="0" tIns="0" rIns="0" bIns="0" rtlCol="0" anchor="t"/>
+          <a:lstStyle/>
+          <a:p>
+            <a:pPr algn="l" indent="0" marL="0">
+              <a:spcAft>
+                <a:spcPts val="600"/>
+              </a:spcAft>
+              <a:buNone/>
+            </a:pPr>
+            <a:r>
+              <a:rPr lang="en-US" sz="1350" b="1" dirty="0">
+                <a:solidFill>
+                  <a:srgbClr val="1F5722"/>
+                </a:solidFill>
+                <a:latin typeface="Calibri" pitchFamily="34" charset="0"/>
+                <a:ea typeface="Calibri" pitchFamily="34" charset="-122"/>
+                <a:cs typeface="Calibri" pitchFamily="34" charset="-120"/>
+              </a:rPr>
+              <a:t>A. Staphylococci (+) from streptococci (–)</a:t>
+            </a:r>
+            <a:endParaRPr lang="en-US" sz="1350" dirty="0"/>
+          </a:p>
+          <a:p>
+            <a:pPr algn="l" indent="0" marL="0">
+              <a:spcAft>
+                <a:spcPts val="600"/>
+              </a:spcAft>
+              <a:buNone/>
+            </a:pPr>
+            <a:r>
+              <a:rPr lang="en-US" sz="1350" dirty="0">
+                <a:solidFill>
+                  <a:srgbClr val="33444F"/>
+                </a:solidFill>
+                <a:latin typeface="Calibri" pitchFamily="34" charset="0"/>
+                <a:ea typeface="Calibri" pitchFamily="34" charset="-122"/>
+                <a:cs typeface="Calibri" pitchFamily="34" charset="-120"/>
+              </a:rPr>
+              <a:t>B. S. aureus from S. epidermidis</a:t>
+            </a:r>
+            <a:endParaRPr lang="en-US" sz="1350" dirty="0"/>
+          </a:p>
+          <a:p>
+            <a:pPr algn="l" indent="0" marL="0">
+              <a:spcAft>
+                <a:spcPts val="600"/>
+              </a:spcAft>
+              <a:buNone/>
+            </a:pPr>
+            <a:r>
+              <a:rPr lang="en-US" sz="1350" dirty="0">
+                <a:solidFill>
+                  <a:srgbClr val="33444F"/>
+                </a:solidFill>
+                <a:latin typeface="Calibri" pitchFamily="34" charset="0"/>
+                <a:ea typeface="Calibri" pitchFamily="34" charset="-122"/>
+                <a:cs typeface="Calibri" pitchFamily="34" charset="-120"/>
+              </a:rPr>
+              <a:t>C. Group A from group B strep</a:t>
+            </a:r>
+            <a:endParaRPr lang="en-US" sz="1350" dirty="0"/>
+          </a:p>
+          <a:p>
+            <a:pPr algn="l" indent="0" marL="0">
+              <a:spcAft>
+                <a:spcPts val="600"/>
+              </a:spcAft>
+              <a:buNone/>
+            </a:pPr>
+            <a:r>
+              <a:rPr lang="en-US" sz="1350" dirty="0">
+                <a:solidFill>
+                  <a:srgbClr val="33444F"/>
+                </a:solidFill>
+                <a:latin typeface="Calibri" pitchFamily="34" charset="0"/>
+                <a:ea typeface="Calibri" pitchFamily="34" charset="-122"/>
+                <a:cs typeface="Calibri" pitchFamily="34" charset="-120"/>
+              </a:rPr>
+              <a:t>D. Enterococci from pneumococci</a:t>
+            </a:r>
+            <a:endParaRPr lang="en-US" sz="1350" dirty="0"/>
+          </a:p>
+          <a:p>
+            <a:pPr algn="l" indent="0" marL="0">
+              <a:spcAft>
+                <a:spcPts val="600"/>
+              </a:spcAft>
+              <a:buNone/>
+            </a:pPr>
+            <a:r>
+              <a:rPr lang="en-US" sz="1350" dirty="0">
+                <a:solidFill>
+                  <a:srgbClr val="33444F"/>
+                </a:solidFill>
+                <a:latin typeface="Calibri" pitchFamily="34" charset="0"/>
+                <a:ea typeface="Calibri" pitchFamily="34" charset="-122"/>
+                <a:cs typeface="Calibri" pitchFamily="34" charset="-120"/>
+              </a:rPr>
+              <a:t>E. Aerobes from anaerobes</a:t>
+            </a:r>
+            <a:endParaRPr lang="en-US" sz="1350" dirty="0"/>
+          </a:p>
+        </p:txBody>
+      </p:sp>
+      <p:sp>
+        <p:nvSpPr>
+          <p:cNvPr id="6" name="Shape 4"/>
+          <p:cNvSpPr/>
+          <p:nvPr/>
+        </p:nvSpPr>
+        <p:spPr>
+          <a:xfrm>
+            <a:off x="7201632" y="2395728"/>
+            <a:ext cx="4423136" cy="3246120"/>
+          </a:xfrm>
+          <a:prstGeom prst="roundRect">
+            <a:avLst>
+              <a:gd name="adj" fmla="val 2535"/>
+            </a:avLst>
+          </a:prstGeom>
+          <a:solidFill>
+            <a:srgbClr val="E8F2E9"/>
+          </a:solidFill>
+          <a:ln/>
+          <a:effectLst>
+            <a:outerShdw sx="100000" sy="100000" kx="0" ky="0" algn="bl" rotWithShape="0" blurRad="88900" dist="25400" dir="5400000">
+              <a:srgbClr val="22303C">
+                <a:alpha val="12000"/>
+              </a:srgbClr>
+            </a:outerShdw>
+          </a:effectLst>
+        </p:spPr>
+      </p:sp>
+      <p:sp>
+        <p:nvSpPr>
+          <p:cNvPr id="7" name="Text 5"/>
+          <p:cNvSpPr/>
+          <p:nvPr/>
+        </p:nvSpPr>
+        <p:spPr>
+          <a:xfrm>
+            <a:off x="7439376" y="2578608"/>
+            <a:ext cx="3965936" cy="457200"/>
+          </a:xfrm>
+          <a:prstGeom prst="rect">
+            <a:avLst/>
+          </a:prstGeom>
+          <a:noFill/>
+          <a:ln/>
+        </p:spPr>
+        <p:txBody>
+          <a:bodyPr wrap="square" lIns="0" tIns="0" rIns="0" bIns="0" rtlCol="0" anchor="ctr"/>
+          <a:lstStyle/>
+          <a:p>
+            <a:pPr indent="0" marL="0">
+              <a:buNone/>
+            </a:pPr>
+            <a:r>
+              <a:rPr lang="en-US" sz="1500" b="1" dirty="0">
+                <a:solidFill>
+                  <a:srgbClr val="2E7D32"/>
+                </a:solidFill>
+                <a:latin typeface="Calibri" pitchFamily="34" charset="0"/>
+                <a:ea typeface="Calibri" pitchFamily="34" charset="-122"/>
+                <a:cs typeface="Calibri" pitchFamily="34" charset="-120"/>
+              </a:rPr>
+              <a:t>ANSWER  </a:t>
+            </a:r>
+            <a:pPr indent="0" marL="0">
+              <a:buNone/>
+            </a:pPr>
+            <a:r>
+              <a:rPr lang="en-US" sz="1500" b="1" dirty="0">
+                <a:solidFill>
+                  <a:srgbClr val="1B2A38"/>
+                </a:solidFill>
+                <a:latin typeface="Calibri" pitchFamily="34" charset="0"/>
+                <a:ea typeface="Calibri" pitchFamily="34" charset="-122"/>
+                <a:cs typeface="Calibri" pitchFamily="34" charset="-120"/>
+              </a:rPr>
+              <a:t>A — Staphylococci (+) from streptococci (–)</a:t>
+            </a:r>
+            <a:endParaRPr lang="en-US" sz="1500" dirty="0"/>
+          </a:p>
+        </p:txBody>
+      </p:sp>
+      <p:sp>
+        <p:nvSpPr>
+          <p:cNvPr id="8" name="Text 6"/>
+          <p:cNvSpPr/>
+          <p:nvPr/>
+        </p:nvSpPr>
+        <p:spPr>
+          <a:xfrm>
+            <a:off x="7439376" y="3127248"/>
+            <a:ext cx="3947648" cy="2377440"/>
+          </a:xfrm>
+          <a:prstGeom prst="rect">
+            <a:avLst/>
+          </a:prstGeom>
+          <a:noFill/>
+          <a:ln/>
+        </p:spPr>
+        <p:txBody>
+          <a:bodyPr wrap="square" lIns="0" tIns="0" rIns="0" bIns="0" rtlCol="0" anchor="t"/>
+          <a:lstStyle/>
+          <a:p>
+            <a:pPr algn="l" indent="0" marL="0">
+              <a:lnSpc>
+                <a:spcPct val="108000"/>
+              </a:lnSpc>
+              <a:buNone/>
+            </a:pPr>
+            <a:r>
+              <a:rPr lang="en-US" sz="1250" dirty="0">
+                <a:solidFill>
+                  <a:srgbClr val="33444F"/>
+                </a:solidFill>
+                <a:latin typeface="Calibri" pitchFamily="34" charset="0"/>
+                <a:ea typeface="Calibri" pitchFamily="34" charset="-122"/>
+                <a:cs typeface="Calibri" pitchFamily="34" charset="-120"/>
+              </a:rPr>
+              <a:t>Catalase is positive in staphylococci and negative in streptococci; coagulase then separates S. aureus from CoNS.</a:t>
+            </a:r>
+            <a:endParaRPr lang="en-US" sz="1250" dirty="0"/>
+          </a:p>
+        </p:txBody>
+      </p:sp>
+      <p:sp>
+        <p:nvSpPr>
+          <p:cNvPr id="9" name="Text 7"/>
+          <p:cNvSpPr/>
+          <p:nvPr/>
+        </p:nvSpPr>
+        <p:spPr>
+          <a:xfrm>
+            <a:off x="566928" y="6473952"/>
+            <a:ext cx="7772400" cy="274320"/>
+          </a:xfrm>
+          <a:prstGeom prst="rect">
+            <a:avLst/>
+          </a:prstGeom>
+          <a:noFill/>
+          <a:ln/>
+        </p:spPr>
+        <p:txBody>
+          <a:bodyPr wrap="square" lIns="0" tIns="0" rIns="0" bIns="0" rtlCol="0" anchor="ctr"/>
+          <a:lstStyle/>
+          <a:p>
+            <a:pPr algn="l" indent="0" marL="0">
+              <a:buNone/>
+            </a:pPr>
+            <a:r>
+              <a:rPr lang="en-US" sz="850" dirty="0">
+                <a:solidFill>
+                  <a:srgbClr val="9AA8B4"/>
+                </a:solidFill>
+                <a:latin typeface="Calibri" pitchFamily="34" charset="0"/>
+                <a:ea typeface="Calibri" pitchFamily="34" charset="-122"/>
+                <a:cs typeface="Calibri" pitchFamily="34" charset="-120"/>
+              </a:rPr>
+              <a:t>Makassed General Hospital  ·  Department of Laboratory Medicine</a:t>
+            </a:r>
+            <a:endParaRPr lang="en-US" sz="850" dirty="0"/>
+          </a:p>
+        </p:txBody>
+      </p:sp>
+      <p:sp>
+        <p:nvSpPr>
+          <p:cNvPr id="10" name="Text 8"/>
+          <p:cNvSpPr/>
+          <p:nvPr/>
+        </p:nvSpPr>
+        <p:spPr>
+          <a:xfrm>
+            <a:off x="9814255" y="6473952"/>
+            <a:ext cx="1828800" cy="274320"/>
+          </a:xfrm>
+          <a:prstGeom prst="rect">
+            <a:avLst/>
+          </a:prstGeom>
+          <a:noFill/>
+          <a:ln/>
+        </p:spPr>
+        <p:txBody>
+          <a:bodyPr wrap="square" lIns="0" tIns="0" rIns="0" bIns="0" rtlCol="0" anchor="ctr"/>
+          <a:lstStyle/>
+          <a:p>
+            <a:pPr algn="r" indent="0" marL="0">
+              <a:buNone/>
+            </a:pPr>
+            <a:r>
+              <a:rPr lang="en-US" sz="850" dirty="0">
+                <a:solidFill>
+                  <a:srgbClr val="9AA8B4"/>
+                </a:solidFill>
+                <a:latin typeface="Calibri" pitchFamily="34" charset="0"/>
+                <a:ea typeface="Calibri" pitchFamily="34" charset="-122"/>
+                <a:cs typeface="Calibri" pitchFamily="34" charset="-120"/>
+              </a:rPr>
+              <a:t>CP Lecture Series</a:t>
+            </a:r>
+            <a:pPr algn="r" indent="0" marL="0">
+              <a:buNone/>
+            </a:pPr>
+            <a:r>
+              <a:rPr lang="en-US" sz="850" dirty="0">
+                <a:solidFill>
+                  <a:srgbClr val="DCE4EC"/>
+                </a:solidFill>
+                <a:latin typeface="Calibri" pitchFamily="34" charset="0"/>
+                <a:ea typeface="Calibri" pitchFamily="34" charset="-122"/>
+                <a:cs typeface="Calibri" pitchFamily="34" charset="-120"/>
+              </a:rPr>
+              <a:t>   ·   </a:t>
+            </a:r>
+            <a:pPr algn="r" indent="0" marL="0">
+              <a:buNone/>
+            </a:pPr>
+            <a:r>
+              <a:rPr lang="en-US" sz="850" b="1" dirty="0">
+                <a:solidFill>
+                  <a:srgbClr val="2E7D32"/>
+                </a:solidFill>
+                <a:latin typeface="Calibri" pitchFamily="34" charset="0"/>
+                <a:ea typeface="Calibri" pitchFamily="34" charset="-122"/>
+                <a:cs typeface="Calibri" pitchFamily="34" charset="-120"/>
+              </a:rPr>
+              <a:t>17</a:t>
+            </a:r>
+            <a:endParaRPr lang="en-US" sz="850" dirty="0"/>
+          </a:p>
+        </p:txBody>
+      </p:sp>
+    </p:spTree>
+  </p:cSld>
+  <p:clrMapOvr>
+    <a:masterClrMapping/>
+  </p:clrMapOvr>
+</p:sld>
+</file>
+
+<file path=ppt/slides/slide21.xml><?xml version="1.0" encoding="utf-8"?>
+<p:sld xmlns:a="http://schemas.openxmlformats.org/drawingml/2006/main" xmlns:r="http://schemas.openxmlformats.org/officeDocument/2006/relationships" xmlns:p="http://schemas.openxmlformats.org/presentationml/2006/main">
+  <p:cSld name="Slide 21">
+    <p:bg>
+      <p:bgPr>
+        <a:solidFill>
+          <a:srgbClr val="FFFFFF"/>
+        </a:solidFill>
+      </p:bgPr>
+    </p:bg>
+    <p:spTree>
+      <p:nvGrpSpPr>
+        <p:cNvPr id="1" name=""/>
+        <p:cNvGrpSpPr/>
+        <p:nvPr/>
+      </p:nvGrpSpPr>
+      <p:grpSpPr>
+        <a:xfrm>
+          <a:off x="0" y="0"/>
+          <a:ext cx="0" cy="0"/>
+          <a:chOff x="0" y="0"/>
+          <a:chExt cx="0" cy="0"/>
+        </a:xfrm>
+      </p:grpSpPr>
+      <p:sp>
+        <p:nvSpPr>
+          <p:cNvPr id="2" name="Text 0"/>
+          <p:cNvSpPr/>
+          <p:nvPr/>
+        </p:nvSpPr>
+        <p:spPr>
+          <a:xfrm>
+            <a:off x="566928" y="329184"/>
+            <a:ext cx="10515600" cy="310896"/>
+          </a:xfrm>
+          <a:prstGeom prst="rect">
+            <a:avLst/>
+          </a:prstGeom>
+          <a:noFill/>
+          <a:ln/>
+        </p:spPr>
+        <p:txBody>
+          <a:bodyPr wrap="square" lIns="0" tIns="0" rIns="0" bIns="0" rtlCol="0" anchor="ctr"/>
+          <a:lstStyle/>
+          <a:p>
+            <a:pPr algn="l" indent="0" marL="0">
+              <a:buNone/>
+            </a:pPr>
+            <a:r>
+              <a:rPr lang="en-US" sz="1100" b="1" spc="150" kern="0" dirty="0">
+                <a:solidFill>
+                  <a:srgbClr val="2E7D32"/>
+                </a:solidFill>
+                <a:latin typeface="Calibri" pitchFamily="34" charset="0"/>
+                <a:ea typeface="Calibri" pitchFamily="34" charset="-122"/>
+                <a:cs typeface="Calibri" pitchFamily="34" charset="-120"/>
+              </a:rPr>
+              <a:t>MICROBIOLOGY   ·   BOARD REVIEW  ·  Q2</a:t>
+            </a:r>
+            <a:endParaRPr lang="en-US" sz="1100" dirty="0"/>
+          </a:p>
+        </p:txBody>
+      </p:sp>
+      <p:sp>
+        <p:nvSpPr>
+          <p:cNvPr id="3" name="Text 1"/>
+          <p:cNvSpPr/>
+          <p:nvPr/>
+        </p:nvSpPr>
+        <p:spPr>
+          <a:xfrm>
+            <a:off x="566928" y="713232"/>
+            <a:ext cx="11064240" cy="749808"/>
+          </a:xfrm>
+          <a:prstGeom prst="rect">
+            <a:avLst/>
+          </a:prstGeom>
+          <a:noFill/>
+          <a:ln/>
+        </p:spPr>
+        <p:txBody>
+          <a:bodyPr wrap="square" lIns="0" tIns="0" rIns="0" bIns="0" rtlCol="0" anchor="ctr"/>
+          <a:lstStyle/>
+          <a:p>
+            <a:pPr algn="l" indent="0" marL="0">
+              <a:buNone/>
+            </a:pPr>
+            <a:r>
+              <a:rPr lang="en-US" sz="2600" b="1" dirty="0">
+                <a:solidFill>
+                  <a:srgbClr val="0E3A5F"/>
+                </a:solidFill>
+                <a:latin typeface="Calibri" pitchFamily="34" charset="0"/>
+                <a:ea typeface="Calibri" pitchFamily="34" charset="-122"/>
+                <a:cs typeface="Calibri" pitchFamily="34" charset="-120"/>
+              </a:rPr>
+              <a:t>Board-Style Review</a:t>
+            </a:r>
+            <a:endParaRPr lang="en-US" sz="2600" dirty="0"/>
+          </a:p>
+        </p:txBody>
+      </p:sp>
+      <p:sp>
+        <p:nvSpPr>
+          <p:cNvPr id="4" name="Text 2"/>
+          <p:cNvSpPr/>
+          <p:nvPr/>
+        </p:nvSpPr>
+        <p:spPr>
+          <a:xfrm>
+            <a:off x="566928" y="1417320"/>
+            <a:ext cx="11057839" cy="914400"/>
+          </a:xfrm>
+          <a:prstGeom prst="rect">
+            <a:avLst/>
+          </a:prstGeom>
+          <a:noFill/>
+          <a:ln/>
+        </p:spPr>
+        <p:txBody>
+          <a:bodyPr wrap="square" lIns="0" tIns="0" rIns="0" bIns="0" rtlCol="0" anchor="t"/>
+          <a:lstStyle/>
+          <a:p>
+            <a:pPr algn="l" indent="0" marL="0">
+              <a:lnSpc>
+                <a:spcPct val="105000"/>
+              </a:lnSpc>
+              <a:buNone/>
+            </a:pPr>
+            <a:r>
+              <a:rPr lang="en-US" sz="1450" b="1" dirty="0">
+                <a:solidFill>
+                  <a:srgbClr val="1B2A38"/>
+                </a:solidFill>
+                <a:latin typeface="Calibri" pitchFamily="34" charset="0"/>
+                <a:ea typeface="Calibri" pitchFamily="34" charset="-122"/>
+                <a:cs typeface="Calibri" pitchFamily="34" charset="-120"/>
+              </a:rPr>
+              <a:t>Pink colonies on MacConkey agar indicate:</a:t>
+            </a:r>
+            <a:endParaRPr lang="en-US" sz="1450" dirty="0"/>
+          </a:p>
+        </p:txBody>
+      </p:sp>
+      <p:sp>
+        <p:nvSpPr>
+          <p:cNvPr id="5" name="Text 3"/>
+          <p:cNvSpPr/>
+          <p:nvPr/>
+        </p:nvSpPr>
+        <p:spPr>
+          <a:xfrm>
+            <a:off x="658368" y="2395728"/>
+            <a:ext cx="6192390" cy="3017520"/>
+          </a:xfrm>
+          <a:prstGeom prst="rect">
+            <a:avLst/>
+          </a:prstGeom>
+          <a:noFill/>
+          <a:ln/>
+        </p:spPr>
+        <p:txBody>
+          <a:bodyPr wrap="square" lIns="0" tIns="0" rIns="0" bIns="0" rtlCol="0" anchor="t"/>
+          <a:lstStyle/>
+          <a:p>
+            <a:pPr algn="l" indent="0" marL="0">
+              <a:spcAft>
+                <a:spcPts val="600"/>
+              </a:spcAft>
+              <a:buNone/>
+            </a:pPr>
+            <a:r>
+              <a:rPr lang="en-US" sz="1350" dirty="0">
+                <a:solidFill>
+                  <a:srgbClr val="33444F"/>
+                </a:solidFill>
+                <a:latin typeface="Calibri" pitchFamily="34" charset="0"/>
+                <a:ea typeface="Calibri" pitchFamily="34" charset="-122"/>
+                <a:cs typeface="Calibri" pitchFamily="34" charset="-120"/>
+              </a:rPr>
+              <a:t>A. A gram-positive organism</a:t>
+            </a:r>
+            <a:endParaRPr lang="en-US" sz="1350" dirty="0"/>
+          </a:p>
+          <a:p>
+            <a:pPr algn="l" indent="0" marL="0">
+              <a:spcAft>
+                <a:spcPts val="600"/>
+              </a:spcAft>
+              <a:buNone/>
+            </a:pPr>
+            <a:r>
+              <a:rPr lang="en-US" sz="1350" dirty="0">
+                <a:solidFill>
+                  <a:srgbClr val="33444F"/>
+                </a:solidFill>
+                <a:latin typeface="Calibri" pitchFamily="34" charset="0"/>
+                <a:ea typeface="Calibri" pitchFamily="34" charset="-122"/>
+                <a:cs typeface="Calibri" pitchFamily="34" charset="-120"/>
+              </a:rPr>
+              <a:t>B. A non-lactose fermenter</a:t>
+            </a:r>
+            <a:endParaRPr lang="en-US" sz="1350" dirty="0"/>
+          </a:p>
+          <a:p>
+            <a:pPr algn="l" indent="0" marL="0">
+              <a:spcAft>
+                <a:spcPts val="600"/>
+              </a:spcAft>
+              <a:buNone/>
+            </a:pPr>
+            <a:r>
+              <a:rPr lang="en-US" sz="1350" b="1" dirty="0">
+                <a:solidFill>
+                  <a:srgbClr val="1F5722"/>
+                </a:solidFill>
+                <a:latin typeface="Calibri" pitchFamily="34" charset="0"/>
+                <a:ea typeface="Calibri" pitchFamily="34" charset="-122"/>
+                <a:cs typeface="Calibri" pitchFamily="34" charset="-120"/>
+              </a:rPr>
+              <a:t>C. A lactose-fermenting gram-negative rod</a:t>
+            </a:r>
+            <a:endParaRPr lang="en-US" sz="1350" dirty="0"/>
+          </a:p>
+          <a:p>
+            <a:pPr algn="l" indent="0" marL="0">
+              <a:spcAft>
+                <a:spcPts val="600"/>
+              </a:spcAft>
+              <a:buNone/>
+            </a:pPr>
+            <a:r>
+              <a:rPr lang="en-US" sz="1350" dirty="0">
+                <a:solidFill>
+                  <a:srgbClr val="33444F"/>
+                </a:solidFill>
+                <a:latin typeface="Calibri" pitchFamily="34" charset="0"/>
+                <a:ea typeface="Calibri" pitchFamily="34" charset="-122"/>
+                <a:cs typeface="Calibri" pitchFamily="34" charset="-120"/>
+              </a:rPr>
+              <a:t>D. A fungus</a:t>
+            </a:r>
+            <a:endParaRPr lang="en-US" sz="1350" dirty="0"/>
+          </a:p>
+          <a:p>
+            <a:pPr algn="l" indent="0" marL="0">
+              <a:spcAft>
+                <a:spcPts val="600"/>
+              </a:spcAft>
+              <a:buNone/>
+            </a:pPr>
+            <a:r>
+              <a:rPr lang="en-US" sz="1350" dirty="0">
+                <a:solidFill>
+                  <a:srgbClr val="33444F"/>
+                </a:solidFill>
+                <a:latin typeface="Calibri" pitchFamily="34" charset="0"/>
+                <a:ea typeface="Calibri" pitchFamily="34" charset="-122"/>
+                <a:cs typeface="Calibri" pitchFamily="34" charset="-120"/>
+              </a:rPr>
+              <a:t>E. An anaerobe</a:t>
+            </a:r>
+            <a:endParaRPr lang="en-US" sz="1350" dirty="0"/>
+          </a:p>
+        </p:txBody>
+      </p:sp>
+      <p:sp>
+        <p:nvSpPr>
+          <p:cNvPr id="6" name="Shape 4"/>
+          <p:cNvSpPr/>
+          <p:nvPr/>
+        </p:nvSpPr>
+        <p:spPr>
+          <a:xfrm>
+            <a:off x="7201632" y="2395728"/>
+            <a:ext cx="4423136" cy="3246120"/>
+          </a:xfrm>
+          <a:prstGeom prst="roundRect">
+            <a:avLst>
+              <a:gd name="adj" fmla="val 2535"/>
+            </a:avLst>
+          </a:prstGeom>
+          <a:solidFill>
+            <a:srgbClr val="E8F2E9"/>
+          </a:solidFill>
+          <a:ln/>
+          <a:effectLst>
+            <a:outerShdw sx="100000" sy="100000" kx="0" ky="0" algn="bl" rotWithShape="0" blurRad="88900" dist="25400" dir="5400000">
+              <a:srgbClr val="22303C">
+                <a:alpha val="12000"/>
+              </a:srgbClr>
+            </a:outerShdw>
+          </a:effectLst>
+        </p:spPr>
+      </p:sp>
+      <p:sp>
+        <p:nvSpPr>
+          <p:cNvPr id="7" name="Text 5"/>
+          <p:cNvSpPr/>
+          <p:nvPr/>
+        </p:nvSpPr>
+        <p:spPr>
+          <a:xfrm>
+            <a:off x="7439376" y="2578608"/>
+            <a:ext cx="3965936" cy="457200"/>
+          </a:xfrm>
+          <a:prstGeom prst="rect">
+            <a:avLst/>
+          </a:prstGeom>
+          <a:noFill/>
+          <a:ln/>
+        </p:spPr>
+        <p:txBody>
+          <a:bodyPr wrap="square" lIns="0" tIns="0" rIns="0" bIns="0" rtlCol="0" anchor="ctr"/>
+          <a:lstStyle/>
+          <a:p>
+            <a:pPr indent="0" marL="0">
+              <a:buNone/>
+            </a:pPr>
+            <a:r>
+              <a:rPr lang="en-US" sz="1500" b="1" dirty="0">
+                <a:solidFill>
+                  <a:srgbClr val="2E7D32"/>
+                </a:solidFill>
+                <a:latin typeface="Calibri" pitchFamily="34" charset="0"/>
+                <a:ea typeface="Calibri" pitchFamily="34" charset="-122"/>
+                <a:cs typeface="Calibri" pitchFamily="34" charset="-120"/>
+              </a:rPr>
+              <a:t>ANSWER  </a:t>
+            </a:r>
+            <a:pPr indent="0" marL="0">
+              <a:buNone/>
+            </a:pPr>
+            <a:r>
+              <a:rPr lang="en-US" sz="1500" b="1" dirty="0">
+                <a:solidFill>
+                  <a:srgbClr val="1B2A38"/>
+                </a:solidFill>
+                <a:latin typeface="Calibri" pitchFamily="34" charset="0"/>
+                <a:ea typeface="Calibri" pitchFamily="34" charset="-122"/>
+                <a:cs typeface="Calibri" pitchFamily="34" charset="-120"/>
+              </a:rPr>
+              <a:t>C — Lactose-fermenting GNR</a:t>
+            </a:r>
+            <a:endParaRPr lang="en-US" sz="1500" dirty="0"/>
+          </a:p>
+        </p:txBody>
+      </p:sp>
+      <p:sp>
+        <p:nvSpPr>
+          <p:cNvPr id="8" name="Text 6"/>
+          <p:cNvSpPr/>
+          <p:nvPr/>
+        </p:nvSpPr>
+        <p:spPr>
+          <a:xfrm>
+            <a:off x="7439376" y="3127248"/>
+            <a:ext cx="3947648" cy="2377440"/>
+          </a:xfrm>
+          <a:prstGeom prst="rect">
+            <a:avLst/>
+          </a:prstGeom>
+          <a:noFill/>
+          <a:ln/>
+        </p:spPr>
+        <p:txBody>
+          <a:bodyPr wrap="square" lIns="0" tIns="0" rIns="0" bIns="0" rtlCol="0" anchor="t"/>
+          <a:lstStyle/>
+          <a:p>
+            <a:pPr algn="l" indent="0" marL="0">
+              <a:lnSpc>
+                <a:spcPct val="108000"/>
+              </a:lnSpc>
+              <a:buNone/>
+            </a:pPr>
+            <a:r>
+              <a:rPr lang="en-US" sz="1250" dirty="0">
+                <a:solidFill>
+                  <a:srgbClr val="33444F"/>
+                </a:solidFill>
+                <a:latin typeface="Calibri" pitchFamily="34" charset="0"/>
+                <a:ea typeface="Calibri" pitchFamily="34" charset="-122"/>
+                <a:cs typeface="Calibri" pitchFamily="34" charset="-120"/>
+              </a:rPr>
+              <a:t>MacConkey selects gram-negative rods and turns pink with lactose fermentation (e.g., E. coli, Klebsiella).</a:t>
+            </a:r>
+            <a:endParaRPr lang="en-US" sz="1250" dirty="0"/>
+          </a:p>
+        </p:txBody>
+      </p:sp>
+      <p:sp>
+        <p:nvSpPr>
+          <p:cNvPr id="9" name="Text 7"/>
+          <p:cNvSpPr/>
+          <p:nvPr/>
+        </p:nvSpPr>
+        <p:spPr>
+          <a:xfrm>
+            <a:off x="566928" y="6473952"/>
+            <a:ext cx="7772400" cy="274320"/>
+          </a:xfrm>
+          <a:prstGeom prst="rect">
+            <a:avLst/>
+          </a:prstGeom>
+          <a:noFill/>
+          <a:ln/>
+        </p:spPr>
+        <p:txBody>
+          <a:bodyPr wrap="square" lIns="0" tIns="0" rIns="0" bIns="0" rtlCol="0" anchor="ctr"/>
+          <a:lstStyle/>
+          <a:p>
+            <a:pPr algn="l" indent="0" marL="0">
+              <a:buNone/>
+            </a:pPr>
+            <a:r>
+              <a:rPr lang="en-US" sz="850" dirty="0">
+                <a:solidFill>
+                  <a:srgbClr val="9AA8B4"/>
+                </a:solidFill>
+                <a:latin typeface="Calibri" pitchFamily="34" charset="0"/>
+                <a:ea typeface="Calibri" pitchFamily="34" charset="-122"/>
+                <a:cs typeface="Calibri" pitchFamily="34" charset="-120"/>
+              </a:rPr>
+              <a:t>Makassed General Hospital  ·  Department of Laboratory Medicine</a:t>
+            </a:r>
+            <a:endParaRPr lang="en-US" sz="850" dirty="0"/>
+          </a:p>
+        </p:txBody>
+      </p:sp>
+      <p:sp>
+        <p:nvSpPr>
+          <p:cNvPr id="10" name="Text 8"/>
+          <p:cNvSpPr/>
+          <p:nvPr/>
+        </p:nvSpPr>
+        <p:spPr>
+          <a:xfrm>
+            <a:off x="9814255" y="6473952"/>
+            <a:ext cx="1828800" cy="274320"/>
+          </a:xfrm>
+          <a:prstGeom prst="rect">
+            <a:avLst/>
+          </a:prstGeom>
+          <a:noFill/>
+          <a:ln/>
+        </p:spPr>
+        <p:txBody>
+          <a:bodyPr wrap="square" lIns="0" tIns="0" rIns="0" bIns="0" rtlCol="0" anchor="ctr"/>
+          <a:lstStyle/>
+          <a:p>
+            <a:pPr algn="r" indent="0" marL="0">
+              <a:buNone/>
+            </a:pPr>
+            <a:r>
+              <a:rPr lang="en-US" sz="850" dirty="0">
+                <a:solidFill>
+                  <a:srgbClr val="9AA8B4"/>
+                </a:solidFill>
+                <a:latin typeface="Calibri" pitchFamily="34" charset="0"/>
+                <a:ea typeface="Calibri" pitchFamily="34" charset="-122"/>
+                <a:cs typeface="Calibri" pitchFamily="34" charset="-120"/>
+              </a:rPr>
+              <a:t>CP Lecture Series</a:t>
+            </a:r>
+            <a:pPr algn="r" indent="0" marL="0">
+              <a:buNone/>
+            </a:pPr>
+            <a:r>
+              <a:rPr lang="en-US" sz="850" dirty="0">
+                <a:solidFill>
+                  <a:srgbClr val="DCE4EC"/>
+                </a:solidFill>
+                <a:latin typeface="Calibri" pitchFamily="34" charset="0"/>
+                <a:ea typeface="Calibri" pitchFamily="34" charset="-122"/>
+                <a:cs typeface="Calibri" pitchFamily="34" charset="-120"/>
+              </a:rPr>
+              <a:t>   ·   </a:t>
+            </a:r>
+            <a:pPr algn="r" indent="0" marL="0">
+              <a:buNone/>
+            </a:pPr>
+            <a:r>
+              <a:rPr lang="en-US" sz="850" b="1" dirty="0">
+                <a:solidFill>
+                  <a:srgbClr val="2E7D32"/>
+                </a:solidFill>
+                <a:latin typeface="Calibri" pitchFamily="34" charset="0"/>
+                <a:ea typeface="Calibri" pitchFamily="34" charset="-122"/>
+                <a:cs typeface="Calibri" pitchFamily="34" charset="-120"/>
+              </a:rPr>
+              <a:t>18</a:t>
+            </a:r>
+            <a:endParaRPr lang="en-US" sz="850" dirty="0"/>
+          </a:p>
+        </p:txBody>
+      </p:sp>
+    </p:spTree>
+  </p:cSld>
+  <p:clrMapOvr>
+    <a:masterClrMapping/>
+  </p:clrMapOvr>
+</p:sld>
+</file>
+
+<file path=ppt/slides/slide22.xml><?xml version="1.0" encoding="utf-8"?>
+<p:sld xmlns:a="http://schemas.openxmlformats.org/drawingml/2006/main" xmlns:r="http://schemas.openxmlformats.org/officeDocument/2006/relationships" xmlns:p="http://schemas.openxmlformats.org/presentationml/2006/main">
+  <p:cSld name="Slide 22">
+    <p:bg>
+      <p:bgPr>
+        <a:solidFill>
+          <a:srgbClr val="FFFFFF"/>
+        </a:solidFill>
+      </p:bgPr>
+    </p:bg>
+    <p:spTree>
+      <p:nvGrpSpPr>
+        <p:cNvPr id="1" name=""/>
+        <p:cNvGrpSpPr/>
+        <p:nvPr/>
+      </p:nvGrpSpPr>
+      <p:grpSpPr>
+        <a:xfrm>
+          <a:off x="0" y="0"/>
+          <a:ext cx="0" cy="0"/>
+          <a:chOff x="0" y="0"/>
+          <a:chExt cx="0" cy="0"/>
+        </a:xfrm>
+      </p:grpSpPr>
+      <p:sp>
+        <p:nvSpPr>
+          <p:cNvPr id="2" name="Text 0"/>
+          <p:cNvSpPr/>
+          <p:nvPr/>
+        </p:nvSpPr>
+        <p:spPr>
+          <a:xfrm>
+            <a:off x="566928" y="329184"/>
+            <a:ext cx="10515600" cy="310896"/>
+          </a:xfrm>
+          <a:prstGeom prst="rect">
+            <a:avLst/>
+          </a:prstGeom>
+          <a:noFill/>
+          <a:ln/>
+        </p:spPr>
+        <p:txBody>
+          <a:bodyPr wrap="square" lIns="0" tIns="0" rIns="0" bIns="0" rtlCol="0" anchor="ctr"/>
+          <a:lstStyle/>
+          <a:p>
+            <a:pPr algn="l" indent="0" marL="0">
+              <a:buNone/>
+            </a:pPr>
+            <a:r>
+              <a:rPr lang="en-US" sz="1100" b="1" spc="150" kern="0" dirty="0">
+                <a:solidFill>
+                  <a:srgbClr val="2E7D32"/>
+                </a:solidFill>
+                <a:latin typeface="Calibri" pitchFamily="34" charset="0"/>
+                <a:ea typeface="Calibri" pitchFamily="34" charset="-122"/>
+                <a:cs typeface="Calibri" pitchFamily="34" charset="-120"/>
+              </a:rPr>
+              <a:t>MICROBIOLOGY   ·   BOARD REVIEW  ·  Q3</a:t>
+            </a:r>
+            <a:endParaRPr lang="en-US" sz="1100" dirty="0"/>
+          </a:p>
+        </p:txBody>
+      </p:sp>
+      <p:sp>
+        <p:nvSpPr>
+          <p:cNvPr id="3" name="Text 1"/>
+          <p:cNvSpPr/>
+          <p:nvPr/>
+        </p:nvSpPr>
+        <p:spPr>
+          <a:xfrm>
+            <a:off x="566928" y="713232"/>
+            <a:ext cx="11064240" cy="749808"/>
+          </a:xfrm>
+          <a:prstGeom prst="rect">
+            <a:avLst/>
+          </a:prstGeom>
+          <a:noFill/>
+          <a:ln/>
+        </p:spPr>
+        <p:txBody>
+          <a:bodyPr wrap="square" lIns="0" tIns="0" rIns="0" bIns="0" rtlCol="0" anchor="ctr"/>
+          <a:lstStyle/>
+          <a:p>
+            <a:pPr algn="l" indent="0" marL="0">
+              <a:buNone/>
+            </a:pPr>
+            <a:r>
+              <a:rPr lang="en-US" sz="2600" b="1" dirty="0">
+                <a:solidFill>
+                  <a:srgbClr val="0E3A5F"/>
+                </a:solidFill>
+                <a:latin typeface="Calibri" pitchFamily="34" charset="0"/>
+                <a:ea typeface="Calibri" pitchFamily="34" charset="-122"/>
+                <a:cs typeface="Calibri" pitchFamily="34" charset="-120"/>
+              </a:rPr>
+              <a:t>Board-Style Review</a:t>
+            </a:r>
+            <a:endParaRPr lang="en-US" sz="2600" dirty="0"/>
+          </a:p>
+        </p:txBody>
+      </p:sp>
+      <p:sp>
+        <p:nvSpPr>
+          <p:cNvPr id="4" name="Text 2"/>
+          <p:cNvSpPr/>
+          <p:nvPr/>
+        </p:nvSpPr>
+        <p:spPr>
+          <a:xfrm>
+            <a:off x="566928" y="1417320"/>
+            <a:ext cx="11057839" cy="914400"/>
+          </a:xfrm>
+          <a:prstGeom prst="rect">
+            <a:avLst/>
+          </a:prstGeom>
+          <a:noFill/>
+          <a:ln/>
+        </p:spPr>
+        <p:txBody>
+          <a:bodyPr wrap="square" lIns="0" tIns="0" rIns="0" bIns="0" rtlCol="0" anchor="t"/>
+          <a:lstStyle/>
+          <a:p>
+            <a:pPr algn="l" indent="0" marL="0">
+              <a:lnSpc>
+                <a:spcPct val="105000"/>
+              </a:lnSpc>
+              <a:buNone/>
+            </a:pPr>
+            <a:r>
+              <a:rPr lang="en-US" sz="1450" b="1" dirty="0">
+                <a:solidFill>
+                  <a:srgbClr val="1B2A38"/>
+                </a:solidFill>
+                <a:latin typeface="Calibri" pitchFamily="34" charset="0"/>
+                <a:ea typeface="Calibri" pitchFamily="34" charset="-122"/>
+                <a:cs typeface="Calibri" pitchFamily="34" charset="-120"/>
+              </a:rPr>
+              <a:t>MALDI-TOF identifies organisms primarily by:</a:t>
+            </a:r>
+            <a:endParaRPr lang="en-US" sz="1450" dirty="0"/>
+          </a:p>
+        </p:txBody>
+      </p:sp>
+      <p:sp>
+        <p:nvSpPr>
+          <p:cNvPr id="5" name="Text 3"/>
+          <p:cNvSpPr/>
+          <p:nvPr/>
+        </p:nvSpPr>
+        <p:spPr>
+          <a:xfrm>
+            <a:off x="658368" y="2395728"/>
+            <a:ext cx="6192390" cy="3017520"/>
+          </a:xfrm>
+          <a:prstGeom prst="rect">
+            <a:avLst/>
+          </a:prstGeom>
+          <a:noFill/>
+          <a:ln/>
+        </p:spPr>
+        <p:txBody>
+          <a:bodyPr wrap="square" lIns="0" tIns="0" rIns="0" bIns="0" rtlCol="0" anchor="t"/>
+          <a:lstStyle/>
+          <a:p>
+            <a:pPr algn="l" indent="0" marL="0">
+              <a:spcAft>
+                <a:spcPts val="600"/>
+              </a:spcAft>
+              <a:buNone/>
+            </a:pPr>
+            <a:r>
+              <a:rPr lang="en-US" sz="1350" dirty="0">
+                <a:solidFill>
+                  <a:srgbClr val="33444F"/>
+                </a:solidFill>
+                <a:latin typeface="Calibri" pitchFamily="34" charset="0"/>
+                <a:ea typeface="Calibri" pitchFamily="34" charset="-122"/>
+                <a:cs typeface="Calibri" pitchFamily="34" charset="-120"/>
+              </a:rPr>
+              <a:t>A. DNA sequencing</a:t>
+            </a:r>
+            <a:endParaRPr lang="en-US" sz="1350" dirty="0"/>
+          </a:p>
+          <a:p>
+            <a:pPr algn="l" indent="0" marL="0">
+              <a:spcAft>
+                <a:spcPts val="600"/>
+              </a:spcAft>
+              <a:buNone/>
+            </a:pPr>
+            <a:r>
+              <a:rPr lang="en-US" sz="1350" dirty="0">
+                <a:solidFill>
+                  <a:srgbClr val="33444F"/>
+                </a:solidFill>
+                <a:latin typeface="Calibri" pitchFamily="34" charset="0"/>
+                <a:ea typeface="Calibri" pitchFamily="34" charset="-122"/>
+                <a:cs typeface="Calibri" pitchFamily="34" charset="-120"/>
+              </a:rPr>
+              <a:t>B. Antibody binding</a:t>
+            </a:r>
+            <a:endParaRPr lang="en-US" sz="1350" dirty="0"/>
+          </a:p>
+          <a:p>
+            <a:pPr algn="l" indent="0" marL="0">
+              <a:spcAft>
+                <a:spcPts val="600"/>
+              </a:spcAft>
+              <a:buNone/>
+            </a:pPr>
+            <a:r>
+              <a:rPr lang="en-US" sz="1350" b="1" dirty="0">
+                <a:solidFill>
+                  <a:srgbClr val="1F5722"/>
+                </a:solidFill>
+                <a:latin typeface="Calibri" pitchFamily="34" charset="0"/>
+                <a:ea typeface="Calibri" pitchFamily="34" charset="-122"/>
+                <a:cs typeface="Calibri" pitchFamily="34" charset="-120"/>
+              </a:rPr>
+              <a:t>C. Protein mass-spectral fingerprint</a:t>
+            </a:r>
+            <a:endParaRPr lang="en-US" sz="1350" dirty="0"/>
+          </a:p>
+          <a:p>
+            <a:pPr algn="l" indent="0" marL="0">
+              <a:spcAft>
+                <a:spcPts val="600"/>
+              </a:spcAft>
+              <a:buNone/>
+            </a:pPr>
+            <a:r>
+              <a:rPr lang="en-US" sz="1350" dirty="0">
+                <a:solidFill>
+                  <a:srgbClr val="33444F"/>
+                </a:solidFill>
+                <a:latin typeface="Calibri" pitchFamily="34" charset="0"/>
+                <a:ea typeface="Calibri" pitchFamily="34" charset="-122"/>
+                <a:cs typeface="Calibri" pitchFamily="34" charset="-120"/>
+              </a:rPr>
+              <a:t>D. Colony color</a:t>
+            </a:r>
+            <a:endParaRPr lang="en-US" sz="1350" dirty="0"/>
+          </a:p>
+          <a:p>
+            <a:pPr algn="l" indent="0" marL="0">
+              <a:spcAft>
+                <a:spcPts val="600"/>
+              </a:spcAft>
+              <a:buNone/>
+            </a:pPr>
+            <a:r>
+              <a:rPr lang="en-US" sz="1350" dirty="0">
+                <a:solidFill>
+                  <a:srgbClr val="33444F"/>
+                </a:solidFill>
+                <a:latin typeface="Calibri" pitchFamily="34" charset="0"/>
+                <a:ea typeface="Calibri" pitchFamily="34" charset="-122"/>
+                <a:cs typeface="Calibri" pitchFamily="34" charset="-120"/>
+              </a:rPr>
+              <a:t>E. Gram reaction</a:t>
+            </a:r>
+            <a:endParaRPr lang="en-US" sz="1350" dirty="0"/>
+          </a:p>
+        </p:txBody>
+      </p:sp>
+      <p:sp>
+        <p:nvSpPr>
+          <p:cNvPr id="6" name="Shape 4"/>
+          <p:cNvSpPr/>
+          <p:nvPr/>
+        </p:nvSpPr>
+        <p:spPr>
+          <a:xfrm>
+            <a:off x="7201632" y="2395728"/>
+            <a:ext cx="4423136" cy="3246120"/>
+          </a:xfrm>
+          <a:prstGeom prst="roundRect">
+            <a:avLst>
+              <a:gd name="adj" fmla="val 2535"/>
+            </a:avLst>
+          </a:prstGeom>
+          <a:solidFill>
+            <a:srgbClr val="E8F2E9"/>
+          </a:solidFill>
+          <a:ln/>
+          <a:effectLst>
+            <a:outerShdw sx="100000" sy="100000" kx="0" ky="0" algn="bl" rotWithShape="0" blurRad="88900" dist="25400" dir="5400000">
+              <a:srgbClr val="22303C">
+                <a:alpha val="12000"/>
+              </a:srgbClr>
+            </a:outerShdw>
+          </a:effectLst>
+        </p:spPr>
+      </p:sp>
+      <p:sp>
+        <p:nvSpPr>
+          <p:cNvPr id="7" name="Text 5"/>
+          <p:cNvSpPr/>
+          <p:nvPr/>
+        </p:nvSpPr>
+        <p:spPr>
+          <a:xfrm>
+            <a:off x="7439376" y="2578608"/>
+            <a:ext cx="3965936" cy="457200"/>
+          </a:xfrm>
+          <a:prstGeom prst="rect">
+            <a:avLst/>
+          </a:prstGeom>
+          <a:noFill/>
+          <a:ln/>
+        </p:spPr>
+        <p:txBody>
+          <a:bodyPr wrap="square" lIns="0" tIns="0" rIns="0" bIns="0" rtlCol="0" anchor="ctr"/>
+          <a:lstStyle/>
+          <a:p>
+            <a:pPr indent="0" marL="0">
+              <a:buNone/>
+            </a:pPr>
+            <a:r>
+              <a:rPr lang="en-US" sz="1500" b="1" dirty="0">
+                <a:solidFill>
+                  <a:srgbClr val="2E7D32"/>
+                </a:solidFill>
+                <a:latin typeface="Calibri" pitchFamily="34" charset="0"/>
+                <a:ea typeface="Calibri" pitchFamily="34" charset="-122"/>
+                <a:cs typeface="Calibri" pitchFamily="34" charset="-120"/>
+              </a:rPr>
+              <a:t>ANSWER  </a:t>
+            </a:r>
+            <a:pPr indent="0" marL="0">
+              <a:buNone/>
+            </a:pPr>
+            <a:r>
+              <a:rPr lang="en-US" sz="1500" b="1" dirty="0">
+                <a:solidFill>
+                  <a:srgbClr val="1B2A38"/>
+                </a:solidFill>
+                <a:latin typeface="Calibri" pitchFamily="34" charset="0"/>
+                <a:ea typeface="Calibri" pitchFamily="34" charset="-122"/>
+                <a:cs typeface="Calibri" pitchFamily="34" charset="-120"/>
+              </a:rPr>
+              <a:t>C — Protein mass-spectral fingerprint</a:t>
+            </a:r>
+            <a:endParaRPr lang="en-US" sz="1500" dirty="0"/>
+          </a:p>
+        </p:txBody>
+      </p:sp>
+      <p:sp>
+        <p:nvSpPr>
+          <p:cNvPr id="8" name="Text 6"/>
+          <p:cNvSpPr/>
+          <p:nvPr/>
+        </p:nvSpPr>
+        <p:spPr>
+          <a:xfrm>
+            <a:off x="7439376" y="3127248"/>
+            <a:ext cx="3947648" cy="2377440"/>
+          </a:xfrm>
+          <a:prstGeom prst="rect">
+            <a:avLst/>
+          </a:prstGeom>
+          <a:noFill/>
+          <a:ln/>
+        </p:spPr>
+        <p:txBody>
+          <a:bodyPr wrap="square" lIns="0" tIns="0" rIns="0" bIns="0" rtlCol="0" anchor="t"/>
+          <a:lstStyle/>
+          <a:p>
+            <a:pPr algn="l" indent="0" marL="0">
+              <a:lnSpc>
+                <a:spcPct val="108000"/>
+              </a:lnSpc>
+              <a:buNone/>
+            </a:pPr>
+            <a:r>
+              <a:rPr lang="en-US" sz="1250" dirty="0">
+                <a:solidFill>
+                  <a:srgbClr val="33444F"/>
+                </a:solidFill>
+                <a:latin typeface="Calibri" pitchFamily="34" charset="0"/>
+                <a:ea typeface="Calibri" pitchFamily="34" charset="-122"/>
+                <a:cs typeface="Calibri" pitchFamily="34" charset="-120"/>
+              </a:rPr>
+              <a:t>MALDI-TOF matches an organism’s ribosomal protein spectrum against a database for rapid identification from growth.</a:t>
+            </a:r>
+            <a:endParaRPr lang="en-US" sz="1250" dirty="0"/>
+          </a:p>
+        </p:txBody>
+      </p:sp>
+      <p:sp>
+        <p:nvSpPr>
+          <p:cNvPr id="9" name="Text 7"/>
+          <p:cNvSpPr/>
+          <p:nvPr/>
+        </p:nvSpPr>
+        <p:spPr>
+          <a:xfrm>
+            <a:off x="566928" y="6473952"/>
+            <a:ext cx="7772400" cy="274320"/>
+          </a:xfrm>
+          <a:prstGeom prst="rect">
+            <a:avLst/>
+          </a:prstGeom>
+          <a:noFill/>
+          <a:ln/>
+        </p:spPr>
+        <p:txBody>
+          <a:bodyPr wrap="square" lIns="0" tIns="0" rIns="0" bIns="0" rtlCol="0" anchor="ctr"/>
+          <a:lstStyle/>
+          <a:p>
+            <a:pPr algn="l" indent="0" marL="0">
+              <a:buNone/>
+            </a:pPr>
+            <a:r>
+              <a:rPr lang="en-US" sz="850" dirty="0">
+                <a:solidFill>
+                  <a:srgbClr val="9AA8B4"/>
+                </a:solidFill>
+                <a:latin typeface="Calibri" pitchFamily="34" charset="0"/>
+                <a:ea typeface="Calibri" pitchFamily="34" charset="-122"/>
+                <a:cs typeface="Calibri" pitchFamily="34" charset="-120"/>
+              </a:rPr>
+              <a:t>Makassed General Hospital  ·  Department of Laboratory Medicine</a:t>
+            </a:r>
+            <a:endParaRPr lang="en-US" sz="850" dirty="0"/>
+          </a:p>
+        </p:txBody>
+      </p:sp>
+      <p:sp>
+        <p:nvSpPr>
+          <p:cNvPr id="10" name="Text 8"/>
+          <p:cNvSpPr/>
+          <p:nvPr/>
+        </p:nvSpPr>
+        <p:spPr>
+          <a:xfrm>
+            <a:off x="9814255" y="6473952"/>
+            <a:ext cx="1828800" cy="274320"/>
+          </a:xfrm>
+          <a:prstGeom prst="rect">
+            <a:avLst/>
+          </a:prstGeom>
+          <a:noFill/>
+          <a:ln/>
+        </p:spPr>
+        <p:txBody>
+          <a:bodyPr wrap="square" lIns="0" tIns="0" rIns="0" bIns="0" rtlCol="0" anchor="ctr"/>
+          <a:lstStyle/>
+          <a:p>
+            <a:pPr algn="r" indent="0" marL="0">
+              <a:buNone/>
+            </a:pPr>
+            <a:r>
+              <a:rPr lang="en-US" sz="850" dirty="0">
+                <a:solidFill>
+                  <a:srgbClr val="9AA8B4"/>
+                </a:solidFill>
+                <a:latin typeface="Calibri" pitchFamily="34" charset="0"/>
+                <a:ea typeface="Calibri" pitchFamily="34" charset="-122"/>
+                <a:cs typeface="Calibri" pitchFamily="34" charset="-120"/>
+              </a:rPr>
+              <a:t>CP Lecture Series</a:t>
+            </a:r>
+            <a:pPr algn="r" indent="0" marL="0">
+              <a:buNone/>
+            </a:pPr>
+            <a:r>
+              <a:rPr lang="en-US" sz="850" dirty="0">
+                <a:solidFill>
+                  <a:srgbClr val="DCE4EC"/>
+                </a:solidFill>
+                <a:latin typeface="Calibri" pitchFamily="34" charset="0"/>
+                <a:ea typeface="Calibri" pitchFamily="34" charset="-122"/>
+                <a:cs typeface="Calibri" pitchFamily="34" charset="-120"/>
+              </a:rPr>
+              <a:t>   ·   </a:t>
+            </a:r>
+            <a:pPr algn="r" indent="0" marL="0">
+              <a:buNone/>
+            </a:pPr>
+            <a:r>
+              <a:rPr lang="en-US" sz="850" b="1" dirty="0">
+                <a:solidFill>
+                  <a:srgbClr val="2E7D32"/>
+                </a:solidFill>
+                <a:latin typeface="Calibri" pitchFamily="34" charset="0"/>
+                <a:ea typeface="Calibri" pitchFamily="34" charset="-122"/>
+                <a:cs typeface="Calibri" pitchFamily="34" charset="-120"/>
+              </a:rPr>
+              <a:t>19</a:t>
+            </a:r>
+            <a:endParaRPr lang="en-US" sz="850" dirty="0"/>
+          </a:p>
+        </p:txBody>
+      </p:sp>
+    </p:spTree>
+  </p:cSld>
+  <p:clrMapOvr>
+    <a:masterClrMapping/>
+  </p:clrMapOvr>
+</p:sld>
+</file>
+
+<file path=ppt/slides/slide23.xml><?xml version="1.0" encoding="utf-8"?>
+<p:sld xmlns:a="http://schemas.openxmlformats.org/drawingml/2006/main" xmlns:r="http://schemas.openxmlformats.org/officeDocument/2006/relationships" xmlns:p="http://schemas.openxmlformats.org/presentationml/2006/main">
+  <p:cSld name="Slide 23">
+    <p:bg>
+      <p:bgPr>
+        <a:solidFill>
+          <a:srgbClr val="FFFFFF"/>
+        </a:solidFill>
+      </p:bgPr>
+    </p:bg>
+    <p:spTree>
+      <p:nvGrpSpPr>
+        <p:cNvPr id="1" name=""/>
+        <p:cNvGrpSpPr/>
+        <p:nvPr/>
+      </p:nvGrpSpPr>
+      <p:grpSpPr>
+        <a:xfrm>
+          <a:off x="0" y="0"/>
+          <a:ext cx="0" cy="0"/>
+          <a:chOff x="0" y="0"/>
+          <a:chExt cx="0" cy="0"/>
+        </a:xfrm>
+      </p:grpSpPr>
+      <p:sp>
+        <p:nvSpPr>
+          <p:cNvPr id="2" name="Text 0"/>
+          <p:cNvSpPr/>
+          <p:nvPr/>
+        </p:nvSpPr>
+        <p:spPr>
+          <a:xfrm>
+            <a:off x="566928" y="329184"/>
+            <a:ext cx="10515600" cy="310896"/>
+          </a:xfrm>
+          <a:prstGeom prst="rect">
+            <a:avLst/>
+          </a:prstGeom>
+          <a:noFill/>
+          <a:ln/>
+        </p:spPr>
+        <p:txBody>
+          <a:bodyPr wrap="square" lIns="0" tIns="0" rIns="0" bIns="0" rtlCol="0" anchor="ctr"/>
+          <a:lstStyle/>
+          <a:p>
+            <a:pPr algn="l" indent="0" marL="0">
+              <a:buNone/>
+            </a:pPr>
+            <a:r>
+              <a:rPr lang="en-US" sz="1100" b="1" spc="150" kern="0" dirty="0">
+                <a:solidFill>
+                  <a:srgbClr val="2E7D32"/>
+                </a:solidFill>
+                <a:latin typeface="Calibri" pitchFamily="34" charset="0"/>
+                <a:ea typeface="Calibri" pitchFamily="34" charset="-122"/>
+                <a:cs typeface="Calibri" pitchFamily="34" charset="-120"/>
+              </a:rPr>
+              <a:t>MICROBIOLOGY   ·   BOARD REVIEW  ·  Q4</a:t>
+            </a:r>
+            <a:endParaRPr lang="en-US" sz="1100" dirty="0"/>
+          </a:p>
+        </p:txBody>
+      </p:sp>
+      <p:sp>
+        <p:nvSpPr>
+          <p:cNvPr id="3" name="Text 1"/>
+          <p:cNvSpPr/>
+          <p:nvPr/>
+        </p:nvSpPr>
+        <p:spPr>
+          <a:xfrm>
+            <a:off x="566928" y="713232"/>
+            <a:ext cx="11064240" cy="749808"/>
+          </a:xfrm>
+          <a:prstGeom prst="rect">
+            <a:avLst/>
+          </a:prstGeom>
+          <a:noFill/>
+          <a:ln/>
+        </p:spPr>
+        <p:txBody>
+          <a:bodyPr wrap="square" lIns="0" tIns="0" rIns="0" bIns="0" rtlCol="0" anchor="ctr"/>
+          <a:lstStyle/>
+          <a:p>
+            <a:pPr algn="l" indent="0" marL="0">
+              <a:buNone/>
+            </a:pPr>
+            <a:r>
+              <a:rPr lang="en-US" sz="2600" b="1" dirty="0">
+                <a:solidFill>
+                  <a:srgbClr val="0E3A5F"/>
+                </a:solidFill>
+                <a:latin typeface="Calibri" pitchFamily="34" charset="0"/>
+                <a:ea typeface="Calibri" pitchFamily="34" charset="-122"/>
+                <a:cs typeface="Calibri" pitchFamily="34" charset="-120"/>
+              </a:rPr>
+              <a:t>Board-Style Review</a:t>
+            </a:r>
+            <a:endParaRPr lang="en-US" sz="2600" dirty="0"/>
+          </a:p>
+        </p:txBody>
+      </p:sp>
+      <p:sp>
+        <p:nvSpPr>
+          <p:cNvPr id="4" name="Text 2"/>
+          <p:cNvSpPr/>
+          <p:nvPr/>
+        </p:nvSpPr>
+        <p:spPr>
+          <a:xfrm>
+            <a:off x="566928" y="1417320"/>
+            <a:ext cx="11057839" cy="914400"/>
+          </a:xfrm>
+          <a:prstGeom prst="rect">
+            <a:avLst/>
+          </a:prstGeom>
+          <a:noFill/>
+          <a:ln/>
+        </p:spPr>
+        <p:txBody>
+          <a:bodyPr wrap="square" lIns="0" tIns="0" rIns="0" bIns="0" rtlCol="0" anchor="t"/>
+          <a:lstStyle/>
+          <a:p>
+            <a:pPr algn="l" indent="0" marL="0">
+              <a:lnSpc>
+                <a:spcPct val="105000"/>
+              </a:lnSpc>
+              <a:buNone/>
+            </a:pPr>
+            <a:r>
+              <a:rPr lang="en-US" sz="1450" b="1" dirty="0">
+                <a:solidFill>
+                  <a:srgbClr val="1B2A38"/>
+                </a:solidFill>
+                <a:latin typeface="Calibri" pitchFamily="34" charset="0"/>
+                <a:ea typeface="Calibri" pitchFamily="34" charset="-122"/>
+                <a:cs typeface="Calibri" pitchFamily="34" charset="-120"/>
+              </a:rPr>
+              <a:t>Which organism characteristically does NOT grow on standard bacterial media?</a:t>
+            </a:r>
+            <a:endParaRPr lang="en-US" sz="1450" dirty="0"/>
+          </a:p>
+        </p:txBody>
+      </p:sp>
+      <p:sp>
+        <p:nvSpPr>
+          <p:cNvPr id="5" name="Text 3"/>
+          <p:cNvSpPr/>
+          <p:nvPr/>
+        </p:nvSpPr>
+        <p:spPr>
+          <a:xfrm>
+            <a:off x="658368" y="2395728"/>
+            <a:ext cx="6192390" cy="3017520"/>
+          </a:xfrm>
+          <a:prstGeom prst="rect">
+            <a:avLst/>
+          </a:prstGeom>
+          <a:noFill/>
+          <a:ln/>
+        </p:spPr>
+        <p:txBody>
+          <a:bodyPr wrap="square" lIns="0" tIns="0" rIns="0" bIns="0" rtlCol="0" anchor="t"/>
+          <a:lstStyle/>
+          <a:p>
+            <a:pPr algn="l" indent="0" marL="0">
+              <a:spcAft>
+                <a:spcPts val="600"/>
+              </a:spcAft>
+              <a:buNone/>
+            </a:pPr>
+            <a:r>
+              <a:rPr lang="en-US" sz="1350" dirty="0">
+                <a:solidFill>
+                  <a:srgbClr val="33444F"/>
+                </a:solidFill>
+                <a:latin typeface="Calibri" pitchFamily="34" charset="0"/>
+                <a:ea typeface="Calibri" pitchFamily="34" charset="-122"/>
+                <a:cs typeface="Calibri" pitchFamily="34" charset="-120"/>
+              </a:rPr>
+              <a:t>A. Escherichia coli</a:t>
+            </a:r>
+            <a:endParaRPr lang="en-US" sz="1350" dirty="0"/>
+          </a:p>
+          <a:p>
+            <a:pPr algn="l" indent="0" marL="0">
+              <a:spcAft>
+                <a:spcPts val="600"/>
+              </a:spcAft>
+              <a:buNone/>
+            </a:pPr>
+            <a:r>
+              <a:rPr lang="en-US" sz="1350" dirty="0">
+                <a:solidFill>
+                  <a:srgbClr val="33444F"/>
+                </a:solidFill>
+                <a:latin typeface="Calibri" pitchFamily="34" charset="0"/>
+                <a:ea typeface="Calibri" pitchFamily="34" charset="-122"/>
+                <a:cs typeface="Calibri" pitchFamily="34" charset="-120"/>
+              </a:rPr>
+              <a:t>B. Staphylococcus aureus</a:t>
+            </a:r>
+            <a:endParaRPr lang="en-US" sz="1350" dirty="0"/>
+          </a:p>
+          <a:p>
+            <a:pPr algn="l" indent="0" marL="0">
+              <a:spcAft>
+                <a:spcPts val="600"/>
+              </a:spcAft>
+              <a:buNone/>
+            </a:pPr>
+            <a:r>
+              <a:rPr lang="en-US" sz="1350" b="1" dirty="0">
+                <a:solidFill>
+                  <a:srgbClr val="1F5722"/>
+                </a:solidFill>
+                <a:latin typeface="Calibri" pitchFamily="34" charset="0"/>
+                <a:ea typeface="Calibri" pitchFamily="34" charset="-122"/>
+                <a:cs typeface="Calibri" pitchFamily="34" charset="-120"/>
+              </a:rPr>
+              <a:t>C. Mycoplasma pneumoniae</a:t>
+            </a:r>
+            <a:endParaRPr lang="en-US" sz="1350" dirty="0"/>
+          </a:p>
+          <a:p>
+            <a:pPr algn="l" indent="0" marL="0">
+              <a:spcAft>
+                <a:spcPts val="600"/>
+              </a:spcAft>
+              <a:buNone/>
+            </a:pPr>
+            <a:r>
+              <a:rPr lang="en-US" sz="1350" dirty="0">
+                <a:solidFill>
+                  <a:srgbClr val="33444F"/>
+                </a:solidFill>
+                <a:latin typeface="Calibri" pitchFamily="34" charset="0"/>
+                <a:ea typeface="Calibri" pitchFamily="34" charset="-122"/>
+                <a:cs typeface="Calibri" pitchFamily="34" charset="-120"/>
+              </a:rPr>
+              <a:t>D. Klebsiella pneumoniae</a:t>
+            </a:r>
+            <a:endParaRPr lang="en-US" sz="1350" dirty="0"/>
+          </a:p>
+          <a:p>
+            <a:pPr algn="l" indent="0" marL="0">
+              <a:spcAft>
+                <a:spcPts val="600"/>
+              </a:spcAft>
+              <a:buNone/>
+            </a:pPr>
+            <a:r>
+              <a:rPr lang="en-US" sz="1350" dirty="0">
+                <a:solidFill>
+                  <a:srgbClr val="33444F"/>
+                </a:solidFill>
+                <a:latin typeface="Calibri" pitchFamily="34" charset="0"/>
+                <a:ea typeface="Calibri" pitchFamily="34" charset="-122"/>
+                <a:cs typeface="Calibri" pitchFamily="34" charset="-120"/>
+              </a:rPr>
+              <a:t>E. Pseudomonas aeruginosa</a:t>
+            </a:r>
+            <a:endParaRPr lang="en-US" sz="1350" dirty="0"/>
+          </a:p>
+        </p:txBody>
+      </p:sp>
+      <p:sp>
+        <p:nvSpPr>
+          <p:cNvPr id="6" name="Shape 4"/>
+          <p:cNvSpPr/>
+          <p:nvPr/>
+        </p:nvSpPr>
+        <p:spPr>
+          <a:xfrm>
+            <a:off x="7201632" y="2395728"/>
+            <a:ext cx="4423136" cy="3246120"/>
+          </a:xfrm>
+          <a:prstGeom prst="roundRect">
+            <a:avLst>
+              <a:gd name="adj" fmla="val 2535"/>
+            </a:avLst>
+          </a:prstGeom>
+          <a:solidFill>
+            <a:srgbClr val="E8F2E9"/>
+          </a:solidFill>
+          <a:ln/>
+          <a:effectLst>
+            <a:outerShdw sx="100000" sy="100000" kx="0" ky="0" algn="bl" rotWithShape="0" blurRad="88900" dist="25400" dir="5400000">
+              <a:srgbClr val="22303C">
+                <a:alpha val="12000"/>
+              </a:srgbClr>
+            </a:outerShdw>
+          </a:effectLst>
+        </p:spPr>
+      </p:sp>
+      <p:sp>
+        <p:nvSpPr>
+          <p:cNvPr id="7" name="Text 5"/>
+          <p:cNvSpPr/>
+          <p:nvPr/>
+        </p:nvSpPr>
+        <p:spPr>
+          <a:xfrm>
+            <a:off x="7439376" y="2578608"/>
+            <a:ext cx="3965936" cy="457200"/>
+          </a:xfrm>
+          <a:prstGeom prst="rect">
+            <a:avLst/>
+          </a:prstGeom>
+          <a:noFill/>
+          <a:ln/>
+        </p:spPr>
+        <p:txBody>
+          <a:bodyPr wrap="square" lIns="0" tIns="0" rIns="0" bIns="0" rtlCol="0" anchor="ctr"/>
+          <a:lstStyle/>
+          <a:p>
+            <a:pPr indent="0" marL="0">
+              <a:buNone/>
+            </a:pPr>
+            <a:r>
+              <a:rPr lang="en-US" sz="1500" b="1" dirty="0">
+                <a:solidFill>
+                  <a:srgbClr val="2E7D32"/>
+                </a:solidFill>
+                <a:latin typeface="Calibri" pitchFamily="34" charset="0"/>
+                <a:ea typeface="Calibri" pitchFamily="34" charset="-122"/>
+                <a:cs typeface="Calibri" pitchFamily="34" charset="-120"/>
+              </a:rPr>
+              <a:t>ANSWER  </a:t>
+            </a:r>
+            <a:pPr indent="0" marL="0">
+              <a:buNone/>
+            </a:pPr>
+            <a:r>
+              <a:rPr lang="en-US" sz="1500" b="1" dirty="0">
+                <a:solidFill>
+                  <a:srgbClr val="1B2A38"/>
+                </a:solidFill>
+                <a:latin typeface="Calibri" pitchFamily="34" charset="0"/>
+                <a:ea typeface="Calibri" pitchFamily="34" charset="-122"/>
+                <a:cs typeface="Calibri" pitchFamily="34" charset="-120"/>
+              </a:rPr>
+              <a:t>C — Mycoplasma pneumoniae</a:t>
+            </a:r>
+            <a:endParaRPr lang="en-US" sz="1500" dirty="0"/>
+          </a:p>
+        </p:txBody>
+      </p:sp>
+      <p:sp>
+        <p:nvSpPr>
+          <p:cNvPr id="8" name="Text 6"/>
+          <p:cNvSpPr/>
+          <p:nvPr/>
+        </p:nvSpPr>
+        <p:spPr>
+          <a:xfrm>
+            <a:off x="7439376" y="3127248"/>
+            <a:ext cx="3947648" cy="2377440"/>
+          </a:xfrm>
+          <a:prstGeom prst="rect">
+            <a:avLst/>
+          </a:prstGeom>
+          <a:noFill/>
+          <a:ln/>
+        </p:spPr>
+        <p:txBody>
+          <a:bodyPr wrap="square" lIns="0" tIns="0" rIns="0" bIns="0" rtlCol="0" anchor="t"/>
+          <a:lstStyle/>
+          <a:p>
+            <a:pPr algn="l" indent="0" marL="0">
+              <a:lnSpc>
+                <a:spcPct val="108000"/>
+              </a:lnSpc>
+              <a:buNone/>
+            </a:pPr>
+            <a:r>
+              <a:rPr lang="en-US" sz="1250" dirty="0">
+                <a:solidFill>
+                  <a:srgbClr val="33444F"/>
+                </a:solidFill>
+                <a:latin typeface="Calibri" pitchFamily="34" charset="0"/>
+                <a:ea typeface="Calibri" pitchFamily="34" charset="-122"/>
+                <a:cs typeface="Calibri" pitchFamily="34" charset="-120"/>
+              </a:rPr>
+              <a:t>Mycoplasma lacks a cell wall and does not grow on routine media; diagnosis relies on serology or molecular methods.</a:t>
+            </a:r>
+            <a:endParaRPr lang="en-US" sz="1250" dirty="0"/>
+          </a:p>
+        </p:txBody>
+      </p:sp>
+      <p:sp>
+        <p:nvSpPr>
+          <p:cNvPr id="9" name="Text 7"/>
+          <p:cNvSpPr/>
+          <p:nvPr/>
+        </p:nvSpPr>
+        <p:spPr>
+          <a:xfrm>
+            <a:off x="566928" y="6473952"/>
+            <a:ext cx="7772400" cy="274320"/>
+          </a:xfrm>
+          <a:prstGeom prst="rect">
+            <a:avLst/>
+          </a:prstGeom>
+          <a:noFill/>
+          <a:ln/>
+        </p:spPr>
+        <p:txBody>
+          <a:bodyPr wrap="square" lIns="0" tIns="0" rIns="0" bIns="0" rtlCol="0" anchor="ctr"/>
+          <a:lstStyle/>
+          <a:p>
+            <a:pPr algn="l" indent="0" marL="0">
+              <a:buNone/>
+            </a:pPr>
+            <a:r>
+              <a:rPr lang="en-US" sz="850" dirty="0">
+                <a:solidFill>
+                  <a:srgbClr val="9AA8B4"/>
+                </a:solidFill>
+                <a:latin typeface="Calibri" pitchFamily="34" charset="0"/>
+                <a:ea typeface="Calibri" pitchFamily="34" charset="-122"/>
+                <a:cs typeface="Calibri" pitchFamily="34" charset="-120"/>
+              </a:rPr>
+              <a:t>Makassed General Hospital  ·  Department of Laboratory Medicine</a:t>
+            </a:r>
+            <a:endParaRPr lang="en-US" sz="850" dirty="0"/>
+          </a:p>
+        </p:txBody>
+      </p:sp>
+      <p:sp>
+        <p:nvSpPr>
+          <p:cNvPr id="10" name="Text 8"/>
+          <p:cNvSpPr/>
+          <p:nvPr/>
+        </p:nvSpPr>
+        <p:spPr>
+          <a:xfrm>
+            <a:off x="9814255" y="6473952"/>
+            <a:ext cx="1828800" cy="274320"/>
+          </a:xfrm>
+          <a:prstGeom prst="rect">
+            <a:avLst/>
+          </a:prstGeom>
+          <a:noFill/>
+          <a:ln/>
+        </p:spPr>
+        <p:txBody>
+          <a:bodyPr wrap="square" lIns="0" tIns="0" rIns="0" bIns="0" rtlCol="0" anchor="ctr"/>
+          <a:lstStyle/>
+          <a:p>
+            <a:pPr algn="r" indent="0" marL="0">
+              <a:buNone/>
+            </a:pPr>
+            <a:r>
+              <a:rPr lang="en-US" sz="850" dirty="0">
+                <a:solidFill>
+                  <a:srgbClr val="9AA8B4"/>
+                </a:solidFill>
+                <a:latin typeface="Calibri" pitchFamily="34" charset="0"/>
+                <a:ea typeface="Calibri" pitchFamily="34" charset="-122"/>
+                <a:cs typeface="Calibri" pitchFamily="34" charset="-120"/>
+              </a:rPr>
+              <a:t>CP Lecture Series</a:t>
+            </a:r>
+            <a:pPr algn="r" indent="0" marL="0">
+              <a:buNone/>
+            </a:pPr>
+            <a:r>
+              <a:rPr lang="en-US" sz="850" dirty="0">
+                <a:solidFill>
+                  <a:srgbClr val="DCE4EC"/>
+                </a:solidFill>
+                <a:latin typeface="Calibri" pitchFamily="34" charset="0"/>
+                <a:ea typeface="Calibri" pitchFamily="34" charset="-122"/>
+                <a:cs typeface="Calibri" pitchFamily="34" charset="-120"/>
+              </a:rPr>
+              <a:t>   ·   </a:t>
+            </a:r>
+            <a:pPr algn="r" indent="0" marL="0">
+              <a:buNone/>
+            </a:pPr>
+            <a:r>
+              <a:rPr lang="en-US" sz="850" b="1" dirty="0">
+                <a:solidFill>
+                  <a:srgbClr val="2E7D32"/>
+                </a:solidFill>
+                <a:latin typeface="Calibri" pitchFamily="34" charset="0"/>
+                <a:ea typeface="Calibri" pitchFamily="34" charset="-122"/>
+                <a:cs typeface="Calibri" pitchFamily="34" charset="-120"/>
+              </a:rPr>
+              <a:t>20</a:t>
+            </a:r>
+            <a:endParaRPr lang="en-US" sz="850" dirty="0"/>
+          </a:p>
+        </p:txBody>
+      </p:sp>
+    </p:spTree>
+  </p:cSld>
+  <p:clrMapOvr>
+    <a:masterClrMapping/>
+  </p:clrMapOvr>
+</p:sld>
+</file>
+
+<file path=ppt/slides/slide24.xml><?xml version="1.0" encoding="utf-8"?>
+<p:sld xmlns:a="http://schemas.openxmlformats.org/drawingml/2006/main" xmlns:r="http://schemas.openxmlformats.org/officeDocument/2006/relationships" xmlns:p="http://schemas.openxmlformats.org/presentationml/2006/main">
+  <p:cSld name="Slide 24">
+    <p:bg>
+      <p:bgPr>
+        <a:solidFill>
+          <a:srgbClr val="0A2A45"/>
+        </a:solidFill>
+      </p:bgPr>
+    </p:bg>
+    <p:spTree>
+      <p:nvGrpSpPr>
+        <p:cNvPr id="1" name=""/>
+        <p:cNvGrpSpPr/>
+        <p:nvPr/>
+      </p:nvGrpSpPr>
+      <p:grpSpPr>
+        <a:xfrm>
+          <a:off x="0" y="0"/>
+          <a:ext cx="0" cy="0"/>
+          <a:chOff x="0" y="0"/>
+          <a:chExt cx="0" cy="0"/>
+        </a:xfrm>
+      </p:grpSpPr>
+      <p:sp>
+        <p:nvSpPr>
+          <p:cNvPr id="2" name="Text 0"/>
+          <p:cNvSpPr/>
+          <p:nvPr/>
+        </p:nvSpPr>
+        <p:spPr>
+          <a:xfrm>
+            <a:off x="566928" y="329184"/>
+            <a:ext cx="10058400" cy="310896"/>
+          </a:xfrm>
+          <a:prstGeom prst="rect">
+            <a:avLst/>
+          </a:prstGeom>
+          <a:noFill/>
+          <a:ln/>
+        </p:spPr>
+        <p:txBody>
+          <a:bodyPr wrap="square" lIns="0" tIns="0" rIns="0" bIns="0" rtlCol="0" anchor="ctr"/>
+          <a:lstStyle/>
+          <a:p>
+            <a:pPr indent="0" marL="0">
+              <a:buNone/>
+            </a:pPr>
+            <a:r>
+              <a:rPr lang="en-US" sz="1100" b="1" spc="150" kern="0" dirty="0">
+                <a:solidFill>
+                  <a:srgbClr val="2E7D32"/>
+                </a:solidFill>
+                <a:latin typeface="Calibri" pitchFamily="34" charset="0"/>
+                <a:ea typeface="Calibri" pitchFamily="34" charset="-122"/>
+                <a:cs typeface="Calibri" pitchFamily="34" charset="-120"/>
+              </a:rPr>
+              <a:t>MICROBIOLOGY</a:t>
+            </a:r>
+            <a:endParaRPr lang="en-US" sz="1100" dirty="0"/>
+          </a:p>
+        </p:txBody>
+      </p:sp>
+      <p:sp>
+        <p:nvSpPr>
+          <p:cNvPr id="3" name="Text 1"/>
+          <p:cNvSpPr/>
+          <p:nvPr/>
+        </p:nvSpPr>
+        <p:spPr>
+          <a:xfrm>
+            <a:off x="566928" y="676656"/>
+            <a:ext cx="10972800" cy="749808"/>
+          </a:xfrm>
+          <a:prstGeom prst="rect">
+            <a:avLst/>
+          </a:prstGeom>
+          <a:noFill/>
+          <a:ln/>
+        </p:spPr>
+        <p:txBody>
+          <a:bodyPr wrap="square" lIns="0" tIns="0" rIns="0" bIns="0" rtlCol="0" anchor="ctr"/>
+          <a:lstStyle/>
+          <a:p>
+            <a:pPr indent="0" marL="0">
+              <a:buNone/>
+            </a:pPr>
+            <a:r>
+              <a:rPr lang="en-US" sz="3000" b="1" dirty="0">
+                <a:solidFill>
+                  <a:srgbClr val="FFFFFF"/>
+                </a:solidFill>
+                <a:latin typeface="Calibri" pitchFamily="34" charset="0"/>
+                <a:ea typeface="Calibri" pitchFamily="34" charset="-122"/>
+                <a:cs typeface="Calibri" pitchFamily="34" charset="-120"/>
+              </a:rPr>
+              <a:t>Key Take-Home Points</a:t>
+            </a:r>
+            <a:endParaRPr lang="en-US" sz="3000" dirty="0"/>
+          </a:p>
+        </p:txBody>
+      </p:sp>
+      <p:sp>
+        <p:nvSpPr>
+          <p:cNvPr id="4" name="Shape 2"/>
+          <p:cNvSpPr/>
+          <p:nvPr/>
+        </p:nvSpPr>
+        <p:spPr>
+          <a:xfrm>
+            <a:off x="566928" y="1517904"/>
+            <a:ext cx="11057839" cy="841248"/>
+          </a:xfrm>
+          <a:prstGeom prst="roundRect">
+            <a:avLst>
+              <a:gd name="adj" fmla="val 7609"/>
+            </a:avLst>
+          </a:prstGeom>
+          <a:solidFill>
+            <a:srgbClr val="143651"/>
+          </a:solidFill>
+          <a:ln/>
+        </p:spPr>
+      </p:sp>
+      <p:sp>
+        <p:nvSpPr>
+          <p:cNvPr id="5" name="Shape 3"/>
+          <p:cNvSpPr/>
+          <p:nvPr/>
+        </p:nvSpPr>
+        <p:spPr>
+          <a:xfrm>
+            <a:off x="749808" y="1755648"/>
+            <a:ext cx="365760" cy="365760"/>
+          </a:xfrm>
+          <a:prstGeom prst="ellipse">
+            <a:avLst/>
+          </a:prstGeom>
+          <a:solidFill>
+            <a:srgbClr val="2E7D32"/>
+          </a:solidFill>
+          <a:ln/>
+          <a:effectLst>
+            <a:outerShdw sx="100000" sy="100000" kx="0" ky="0" algn="bl" rotWithShape="0" blurRad="88900" dist="25400" dir="5400000">
+              <a:srgbClr val="22303C">
+                <a:alpha val="12000"/>
+              </a:srgbClr>
+            </a:outerShdw>
+          </a:effectLst>
+        </p:spPr>
+      </p:sp>
+      <p:sp>
+        <p:nvSpPr>
+          <p:cNvPr id="6" name="Text 4"/>
+          <p:cNvSpPr/>
+          <p:nvPr/>
+        </p:nvSpPr>
+        <p:spPr>
+          <a:xfrm>
+            <a:off x="749808" y="1755648"/>
+            <a:ext cx="365760" cy="365760"/>
+          </a:xfrm>
+          <a:prstGeom prst="rect">
+            <a:avLst/>
+          </a:prstGeom>
+          <a:noFill/>
+          <a:ln/>
+        </p:spPr>
+        <p:txBody>
+          <a:bodyPr wrap="square" lIns="0" tIns="0" rIns="0" bIns="0" rtlCol="0" anchor="ctr"/>
+          <a:lstStyle/>
+          <a:p>
+            <a:pPr algn="ctr" indent="0" marL="0">
+              <a:buNone/>
+            </a:pPr>
+            <a:r>
+              <a:rPr lang="en-US" sz="1500" b="1" dirty="0">
+                <a:solidFill>
+                  <a:srgbClr val="FFFFFF"/>
+                </a:solidFill>
+                <a:latin typeface="Calibri" pitchFamily="34" charset="0"/>
+                <a:ea typeface="Calibri" pitchFamily="34" charset="-122"/>
+                <a:cs typeface="Calibri" pitchFamily="34" charset="-120"/>
+              </a:rPr>
+              <a:t>1</a:t>
+            </a:r>
+            <a:endParaRPr lang="en-US" sz="1500" dirty="0"/>
+          </a:p>
+        </p:txBody>
+      </p:sp>
+      <p:sp>
+        <p:nvSpPr>
+          <p:cNvPr id="7" name="Text 5"/>
+          <p:cNvSpPr/>
+          <p:nvPr/>
+        </p:nvSpPr>
+        <p:spPr>
+          <a:xfrm>
+            <a:off x="1280160" y="1517904"/>
+            <a:ext cx="10143439" cy="841248"/>
+          </a:xfrm>
+          <a:prstGeom prst="rect">
+            <a:avLst/>
+          </a:prstGeom>
+          <a:noFill/>
+          <a:ln/>
+        </p:spPr>
+        <p:txBody>
+          <a:bodyPr wrap="square" lIns="0" tIns="0" rIns="0" bIns="0" rtlCol="0" anchor="ctr"/>
+          <a:lstStyle/>
+          <a:p>
+            <a:pPr algn="l" indent="0" marL="0">
+              <a:buNone/>
+            </a:pPr>
+            <a:r>
+              <a:rPr lang="en-US" sz="1350" dirty="0">
+                <a:solidFill>
+                  <a:srgbClr val="E7EEF4"/>
+                </a:solidFill>
+                <a:latin typeface="Calibri" pitchFamily="34" charset="0"/>
+                <a:ea typeface="Calibri" pitchFamily="34" charset="-122"/>
+                <a:cs typeface="Calibri" pitchFamily="34" charset="-120"/>
+              </a:rPr>
+              <a:t>Gram reaction + arrangement + source gives the fastest actionable differential; beware decolorization and prior antibiotics.</a:t>
+            </a:r>
+            <a:endParaRPr lang="en-US" sz="1350" dirty="0"/>
+          </a:p>
+        </p:txBody>
+      </p:sp>
+      <p:sp>
+        <p:nvSpPr>
+          <p:cNvPr id="8" name="Shape 6"/>
+          <p:cNvSpPr/>
+          <p:nvPr/>
+        </p:nvSpPr>
+        <p:spPr>
+          <a:xfrm>
+            <a:off x="566928" y="2505456"/>
+            <a:ext cx="11057839" cy="841248"/>
+          </a:xfrm>
+          <a:prstGeom prst="roundRect">
+            <a:avLst>
+              <a:gd name="adj" fmla="val 7609"/>
+            </a:avLst>
+          </a:prstGeom>
+          <a:solidFill>
+            <a:srgbClr val="143651"/>
+          </a:solidFill>
+          <a:ln/>
+        </p:spPr>
+      </p:sp>
+      <p:sp>
+        <p:nvSpPr>
+          <p:cNvPr id="9" name="Shape 7"/>
+          <p:cNvSpPr/>
+          <p:nvPr/>
+        </p:nvSpPr>
+        <p:spPr>
+          <a:xfrm>
+            <a:off x="749808" y="2743200"/>
+            <a:ext cx="365760" cy="365760"/>
+          </a:xfrm>
+          <a:prstGeom prst="ellipse">
+            <a:avLst/>
+          </a:prstGeom>
+          <a:solidFill>
+            <a:srgbClr val="2E7D32"/>
+          </a:solidFill>
+          <a:ln/>
+          <a:effectLst>
+            <a:outerShdw sx="100000" sy="100000" kx="0" ky="0" algn="bl" rotWithShape="0" blurRad="88900" dist="25400" dir="5400000">
+              <a:srgbClr val="22303C">
+                <a:alpha val="12000"/>
+              </a:srgbClr>
+            </a:outerShdw>
+          </a:effectLst>
+        </p:spPr>
+      </p:sp>
+      <p:sp>
+        <p:nvSpPr>
+          <p:cNvPr id="10" name="Text 8"/>
+          <p:cNvSpPr/>
+          <p:nvPr/>
+        </p:nvSpPr>
+        <p:spPr>
+          <a:xfrm>
+            <a:off x="749808" y="2743200"/>
+            <a:ext cx="365760" cy="365760"/>
+          </a:xfrm>
+          <a:prstGeom prst="rect">
+            <a:avLst/>
+          </a:prstGeom>
+          <a:noFill/>
+          <a:ln/>
+        </p:spPr>
+        <p:txBody>
+          <a:bodyPr wrap="square" lIns="0" tIns="0" rIns="0" bIns="0" rtlCol="0" anchor="ctr"/>
+          <a:lstStyle/>
+          <a:p>
+            <a:pPr algn="ctr" indent="0" marL="0">
+              <a:buNone/>
+            </a:pPr>
+            <a:r>
+              <a:rPr lang="en-US" sz="1500" b="1" dirty="0">
+                <a:solidFill>
+                  <a:srgbClr val="FFFFFF"/>
+                </a:solidFill>
+                <a:latin typeface="Calibri" pitchFamily="34" charset="0"/>
+                <a:ea typeface="Calibri" pitchFamily="34" charset="-122"/>
+                <a:cs typeface="Calibri" pitchFamily="34" charset="-120"/>
+              </a:rPr>
+              <a:t>2</a:t>
+            </a:r>
+            <a:endParaRPr lang="en-US" sz="1500" dirty="0"/>
+          </a:p>
+        </p:txBody>
+      </p:sp>
+      <p:sp>
+        <p:nvSpPr>
+          <p:cNvPr id="11" name="Text 9"/>
+          <p:cNvSpPr/>
+          <p:nvPr/>
+        </p:nvSpPr>
+        <p:spPr>
+          <a:xfrm>
+            <a:off x="1280160" y="2505456"/>
+            <a:ext cx="10143439" cy="841248"/>
+          </a:xfrm>
+          <a:prstGeom prst="rect">
+            <a:avLst/>
+          </a:prstGeom>
+          <a:noFill/>
+          <a:ln/>
+        </p:spPr>
+        <p:txBody>
+          <a:bodyPr wrap="square" lIns="0" tIns="0" rIns="0" bIns="0" rtlCol="0" anchor="ctr"/>
+          <a:lstStyle/>
+          <a:p>
+            <a:pPr algn="l" indent="0" marL="0">
+              <a:buNone/>
+            </a:pPr>
+            <a:r>
+              <a:rPr lang="en-US" sz="1350" dirty="0">
+                <a:solidFill>
+                  <a:srgbClr val="E7EEF4"/>
+                </a:solidFill>
+                <a:latin typeface="Calibri" pitchFamily="34" charset="0"/>
+                <a:ea typeface="Calibri" pitchFamily="34" charset="-122"/>
+                <a:cs typeface="Calibri" pitchFamily="34" charset="-120"/>
+              </a:rPr>
+              <a:t>Selective media suppress flora; differential media reveal a property (lactose fermentation on MacConkey).</a:t>
+            </a:r>
+            <a:endParaRPr lang="en-US" sz="1350" dirty="0"/>
+          </a:p>
+        </p:txBody>
+      </p:sp>
+      <p:sp>
+        <p:nvSpPr>
+          <p:cNvPr id="12" name="Shape 10"/>
+          <p:cNvSpPr/>
+          <p:nvPr/>
+        </p:nvSpPr>
+        <p:spPr>
+          <a:xfrm>
+            <a:off x="566928" y="3493008"/>
+            <a:ext cx="11057839" cy="841248"/>
+          </a:xfrm>
+          <a:prstGeom prst="roundRect">
+            <a:avLst>
+              <a:gd name="adj" fmla="val 7609"/>
+            </a:avLst>
+          </a:prstGeom>
+          <a:solidFill>
+            <a:srgbClr val="143651"/>
+          </a:solidFill>
+          <a:ln/>
+        </p:spPr>
+      </p:sp>
+      <p:sp>
+        <p:nvSpPr>
+          <p:cNvPr id="13" name="Shape 11"/>
+          <p:cNvSpPr/>
+          <p:nvPr/>
+        </p:nvSpPr>
+        <p:spPr>
+          <a:xfrm>
+            <a:off x="749808" y="3730752"/>
+            <a:ext cx="365760" cy="365760"/>
+          </a:xfrm>
+          <a:prstGeom prst="ellipse">
+            <a:avLst/>
+          </a:prstGeom>
+          <a:solidFill>
+            <a:srgbClr val="2E7D32"/>
+          </a:solidFill>
+          <a:ln/>
+          <a:effectLst>
+            <a:outerShdw sx="100000" sy="100000" kx="0" ky="0" algn="bl" rotWithShape="0" blurRad="88900" dist="25400" dir="5400000">
+              <a:srgbClr val="22303C">
+                <a:alpha val="12000"/>
+              </a:srgbClr>
+            </a:outerShdw>
+          </a:effectLst>
+        </p:spPr>
+      </p:sp>
+      <p:sp>
+        <p:nvSpPr>
+          <p:cNvPr id="14" name="Text 12"/>
+          <p:cNvSpPr/>
+          <p:nvPr/>
+        </p:nvSpPr>
+        <p:spPr>
+          <a:xfrm>
+            <a:off x="749808" y="3730752"/>
+            <a:ext cx="365760" cy="365760"/>
+          </a:xfrm>
+          <a:prstGeom prst="rect">
+            <a:avLst/>
+          </a:prstGeom>
+          <a:noFill/>
+          <a:ln/>
+        </p:spPr>
+        <p:txBody>
+          <a:bodyPr wrap="square" lIns="0" tIns="0" rIns="0" bIns="0" rtlCol="0" anchor="ctr"/>
+          <a:lstStyle/>
+          <a:p>
+            <a:pPr algn="ctr" indent="0" marL="0">
+              <a:buNone/>
+            </a:pPr>
+            <a:r>
+              <a:rPr lang="en-US" sz="1500" b="1" dirty="0">
+                <a:solidFill>
+                  <a:srgbClr val="FFFFFF"/>
+                </a:solidFill>
+                <a:latin typeface="Calibri" pitchFamily="34" charset="0"/>
+                <a:ea typeface="Calibri" pitchFamily="34" charset="-122"/>
+                <a:cs typeface="Calibri" pitchFamily="34" charset="-120"/>
+              </a:rPr>
+              <a:t>3</a:t>
+            </a:r>
+            <a:endParaRPr lang="en-US" sz="1500" dirty="0"/>
+          </a:p>
+        </p:txBody>
+      </p:sp>
+      <p:sp>
+        <p:nvSpPr>
+          <p:cNvPr id="15" name="Text 13"/>
+          <p:cNvSpPr/>
+          <p:nvPr/>
+        </p:nvSpPr>
+        <p:spPr>
+          <a:xfrm>
+            <a:off x="1280160" y="3493008"/>
+            <a:ext cx="10143439" cy="841248"/>
+          </a:xfrm>
+          <a:prstGeom prst="rect">
+            <a:avLst/>
+          </a:prstGeom>
+          <a:noFill/>
+          <a:ln/>
+        </p:spPr>
+        <p:txBody>
+          <a:bodyPr wrap="square" lIns="0" tIns="0" rIns="0" bIns="0" rtlCol="0" anchor="ctr"/>
+          <a:lstStyle/>
+          <a:p>
+            <a:pPr algn="l" indent="0" marL="0">
+              <a:buNone/>
+            </a:pPr>
+            <a:r>
+              <a:rPr lang="en-US" sz="1350" dirty="0">
+                <a:solidFill>
+                  <a:srgbClr val="E7EEF4"/>
+                </a:solidFill>
+                <a:latin typeface="Calibri" pitchFamily="34" charset="0"/>
+                <a:ea typeface="Calibri" pitchFamily="34" charset="-122"/>
+                <a:cs typeface="Calibri" pitchFamily="34" charset="-120"/>
+              </a:rPr>
+              <a:t>Catalase/coagulase/oxidase and MALDI-TOF move quickly from colony to named organism.</a:t>
+            </a:r>
+            <a:endParaRPr lang="en-US" sz="1350" dirty="0"/>
+          </a:p>
+        </p:txBody>
+      </p:sp>
+      <p:sp>
+        <p:nvSpPr>
+          <p:cNvPr id="16" name="Shape 14"/>
+          <p:cNvSpPr/>
+          <p:nvPr/>
+        </p:nvSpPr>
+        <p:spPr>
+          <a:xfrm>
+            <a:off x="566928" y="4480560"/>
+            <a:ext cx="11057839" cy="841248"/>
+          </a:xfrm>
+          <a:prstGeom prst="roundRect">
+            <a:avLst>
+              <a:gd name="adj" fmla="val 7609"/>
+            </a:avLst>
+          </a:prstGeom>
+          <a:solidFill>
+            <a:srgbClr val="143651"/>
+          </a:solidFill>
+          <a:ln/>
+        </p:spPr>
+      </p:sp>
+      <p:sp>
+        <p:nvSpPr>
+          <p:cNvPr id="17" name="Shape 15"/>
+          <p:cNvSpPr/>
+          <p:nvPr/>
+        </p:nvSpPr>
+        <p:spPr>
+          <a:xfrm>
+            <a:off x="749808" y="4718304"/>
+            <a:ext cx="365760" cy="365760"/>
+          </a:xfrm>
+          <a:prstGeom prst="ellipse">
+            <a:avLst/>
+          </a:prstGeom>
+          <a:solidFill>
+            <a:srgbClr val="2E7D32"/>
+          </a:solidFill>
+          <a:ln/>
+          <a:effectLst>
+            <a:outerShdw sx="100000" sy="100000" kx="0" ky="0" algn="bl" rotWithShape="0" blurRad="88900" dist="25400" dir="5400000">
+              <a:srgbClr val="22303C">
+                <a:alpha val="12000"/>
+              </a:srgbClr>
+            </a:outerShdw>
+          </a:effectLst>
+        </p:spPr>
+      </p:sp>
+      <p:sp>
+        <p:nvSpPr>
+          <p:cNvPr id="18" name="Text 16"/>
+          <p:cNvSpPr/>
+          <p:nvPr/>
+        </p:nvSpPr>
+        <p:spPr>
+          <a:xfrm>
+            <a:off x="749808" y="4718304"/>
+            <a:ext cx="365760" cy="365760"/>
+          </a:xfrm>
+          <a:prstGeom prst="rect">
+            <a:avLst/>
+          </a:prstGeom>
+          <a:noFill/>
+          <a:ln/>
+        </p:spPr>
+        <p:txBody>
+          <a:bodyPr wrap="square" lIns="0" tIns="0" rIns="0" bIns="0" rtlCol="0" anchor="ctr"/>
+          <a:lstStyle/>
+          <a:p>
+            <a:pPr algn="ctr" indent="0" marL="0">
+              <a:buNone/>
+            </a:pPr>
+            <a:r>
+              <a:rPr lang="en-US" sz="1500" b="1" dirty="0">
+                <a:solidFill>
+                  <a:srgbClr val="FFFFFF"/>
+                </a:solidFill>
+                <a:latin typeface="Calibri" pitchFamily="34" charset="0"/>
+                <a:ea typeface="Calibri" pitchFamily="34" charset="-122"/>
+                <a:cs typeface="Calibri" pitchFamily="34" charset="-120"/>
+              </a:rPr>
+              <a:t>4</a:t>
+            </a:r>
+            <a:endParaRPr lang="en-US" sz="1500" dirty="0"/>
+          </a:p>
+        </p:txBody>
+      </p:sp>
+      <p:sp>
+        <p:nvSpPr>
+          <p:cNvPr id="19" name="Text 17"/>
+          <p:cNvSpPr/>
+          <p:nvPr/>
+        </p:nvSpPr>
+        <p:spPr>
+          <a:xfrm>
+            <a:off x="1280160" y="4480560"/>
+            <a:ext cx="10143439" cy="841248"/>
+          </a:xfrm>
+          <a:prstGeom prst="rect">
+            <a:avLst/>
+          </a:prstGeom>
+          <a:noFill/>
+          <a:ln/>
+        </p:spPr>
+        <p:txBody>
+          <a:bodyPr wrap="square" lIns="0" tIns="0" rIns="0" bIns="0" rtlCol="0" anchor="ctr"/>
+          <a:lstStyle/>
+          <a:p>
+            <a:pPr algn="l" indent="0" marL="0">
+              <a:buNone/>
+            </a:pPr>
+            <a:r>
+              <a:rPr lang="en-US" sz="1350" dirty="0">
+                <a:solidFill>
+                  <a:srgbClr val="E7EEF4"/>
+                </a:solidFill>
+                <a:latin typeface="Calibri" pitchFamily="34" charset="0"/>
+                <a:ea typeface="Calibri" pitchFamily="34" charset="-122"/>
+                <a:cs typeface="Calibri" pitchFamily="34" charset="-120"/>
+              </a:rPr>
+              <a:t>Interpret IDs against the source and clinical syndrome; sterile-site isolates carry more weight.</a:t>
+            </a:r>
+            <a:endParaRPr lang="en-US" sz="1350" dirty="0"/>
+          </a:p>
+        </p:txBody>
+      </p:sp>
+      <p:sp>
+        <p:nvSpPr>
+          <p:cNvPr id="20" name="Shape 18"/>
+          <p:cNvSpPr/>
+          <p:nvPr/>
+        </p:nvSpPr>
+        <p:spPr>
+          <a:xfrm>
+            <a:off x="566928" y="5468112"/>
+            <a:ext cx="11057839" cy="841248"/>
+          </a:xfrm>
+          <a:prstGeom prst="roundRect">
+            <a:avLst>
+              <a:gd name="adj" fmla="val 7609"/>
+            </a:avLst>
+          </a:prstGeom>
+          <a:solidFill>
+            <a:srgbClr val="143651"/>
+          </a:solidFill>
+          <a:ln/>
+        </p:spPr>
+      </p:sp>
+      <p:sp>
+        <p:nvSpPr>
+          <p:cNvPr id="21" name="Shape 19"/>
+          <p:cNvSpPr/>
+          <p:nvPr/>
+        </p:nvSpPr>
+        <p:spPr>
+          <a:xfrm>
+            <a:off x="749808" y="5705856"/>
+            <a:ext cx="365760" cy="365760"/>
+          </a:xfrm>
+          <a:prstGeom prst="ellipse">
+            <a:avLst/>
+          </a:prstGeom>
+          <a:solidFill>
+            <a:srgbClr val="2E7D32"/>
+          </a:solidFill>
+          <a:ln/>
+          <a:effectLst>
+            <a:outerShdw sx="100000" sy="100000" kx="0" ky="0" algn="bl" rotWithShape="0" blurRad="88900" dist="25400" dir="5400000">
+              <a:srgbClr val="22303C">
+                <a:alpha val="12000"/>
+              </a:srgbClr>
+            </a:outerShdw>
+          </a:effectLst>
+        </p:spPr>
+      </p:sp>
+      <p:sp>
+        <p:nvSpPr>
+          <p:cNvPr id="22" name="Text 20"/>
+          <p:cNvSpPr/>
+          <p:nvPr/>
+        </p:nvSpPr>
+        <p:spPr>
+          <a:xfrm>
+            <a:off x="749808" y="5705856"/>
+            <a:ext cx="365760" cy="365760"/>
+          </a:xfrm>
+          <a:prstGeom prst="rect">
+            <a:avLst/>
+          </a:prstGeom>
+          <a:noFill/>
+          <a:ln/>
+        </p:spPr>
+        <p:txBody>
+          <a:bodyPr wrap="square" lIns="0" tIns="0" rIns="0" bIns="0" rtlCol="0" anchor="ctr"/>
+          <a:lstStyle/>
+          <a:p>
+            <a:pPr algn="ctr" indent="0" marL="0">
+              <a:buNone/>
+            </a:pPr>
+            <a:r>
+              <a:rPr lang="en-US" sz="1500" b="1" dirty="0">
+                <a:solidFill>
+                  <a:srgbClr val="FFFFFF"/>
+                </a:solidFill>
+                <a:latin typeface="Calibri" pitchFamily="34" charset="0"/>
+                <a:ea typeface="Calibri" pitchFamily="34" charset="-122"/>
+                <a:cs typeface="Calibri" pitchFamily="34" charset="-120"/>
+              </a:rPr>
+              <a:t>5</a:t>
+            </a:r>
+            <a:endParaRPr lang="en-US" sz="1500" dirty="0"/>
+          </a:p>
+        </p:txBody>
+      </p:sp>
+      <p:sp>
+        <p:nvSpPr>
+          <p:cNvPr id="23" name="Text 21"/>
+          <p:cNvSpPr/>
+          <p:nvPr/>
+        </p:nvSpPr>
+        <p:spPr>
+          <a:xfrm>
+            <a:off x="1280160" y="5468112"/>
+            <a:ext cx="10143439" cy="841248"/>
+          </a:xfrm>
+          <a:prstGeom prst="rect">
+            <a:avLst/>
+          </a:prstGeom>
+          <a:noFill/>
+          <a:ln/>
+        </p:spPr>
+        <p:txBody>
+          <a:bodyPr wrap="square" lIns="0" tIns="0" rIns="0" bIns="0" rtlCol="0" anchor="ctr"/>
+          <a:lstStyle/>
+          <a:p>
+            <a:pPr algn="l" indent="0" marL="0">
+              <a:buNone/>
+            </a:pPr>
+            <a:r>
+              <a:rPr lang="en-US" sz="1350" dirty="0">
+                <a:solidFill>
+                  <a:srgbClr val="E7EEF4"/>
+                </a:solidFill>
+                <a:latin typeface="Calibri" pitchFamily="34" charset="0"/>
+                <a:ea typeface="Calibri" pitchFamily="34" charset="-122"/>
+                <a:cs typeface="Calibri" pitchFamily="34" charset="-120"/>
+              </a:rPr>
+              <a:t>Atypical and fastidious organisms escape routine culture — escalate to special stains, antigen, or NAAT.</a:t>
+            </a:r>
+            <a:endParaRPr lang="en-US" sz="1350" dirty="0"/>
+          </a:p>
+        </p:txBody>
+      </p:sp>
+      <p:sp>
+        <p:nvSpPr>
+          <p:cNvPr id="24" name="Text 22"/>
+          <p:cNvSpPr/>
+          <p:nvPr/>
+        </p:nvSpPr>
+        <p:spPr>
+          <a:xfrm>
+            <a:off x="566928" y="6473952"/>
+            <a:ext cx="8229600" cy="274320"/>
+          </a:xfrm>
+          <a:prstGeom prst="rect">
+            <a:avLst/>
+          </a:prstGeom>
+          <a:noFill/>
+          <a:ln/>
+        </p:spPr>
+        <p:txBody>
+          <a:bodyPr wrap="square" lIns="0" tIns="0" rIns="0" bIns="0" rtlCol="0" anchor="ctr"/>
+          <a:lstStyle/>
+          <a:p>
+            <a:pPr indent="0" marL="0">
+              <a:buNone/>
+            </a:pPr>
+            <a:r>
+              <a:rPr lang="en-US" sz="850" dirty="0">
+                <a:solidFill>
+                  <a:srgbClr val="5E7488"/>
+                </a:solidFill>
+                <a:latin typeface="Calibri" pitchFamily="34" charset="0"/>
+                <a:ea typeface="Calibri" pitchFamily="34" charset="-122"/>
+                <a:cs typeface="Calibri" pitchFamily="34" charset="-120"/>
+              </a:rPr>
+              <a:t>Makassed General Hospital  ·  Department of Laboratory Medicine</a:t>
+            </a:r>
+            <a:endParaRPr lang="en-US" sz="850" dirty="0"/>
+          </a:p>
+        </p:txBody>
+      </p:sp>
+      <p:sp>
+        <p:nvSpPr>
+          <p:cNvPr id="25" name="Text 23"/>
+          <p:cNvSpPr/>
+          <p:nvPr/>
+        </p:nvSpPr>
+        <p:spPr>
+          <a:xfrm>
+            <a:off x="11002975" y="6473952"/>
+            <a:ext cx="640080" cy="274320"/>
+          </a:xfrm>
+          <a:prstGeom prst="rect">
+            <a:avLst/>
+          </a:prstGeom>
+          <a:noFill/>
+          <a:ln/>
+        </p:spPr>
+        <p:txBody>
+          <a:bodyPr wrap="square" lIns="0" tIns="0" rIns="0" bIns="0" rtlCol="0" anchor="ctr"/>
+          <a:lstStyle/>
+          <a:p>
+            <a:pPr algn="r" indent="0" marL="0">
+              <a:buNone/>
+            </a:pPr>
+            <a:r>
+              <a:rPr lang="en-US" sz="850" b="1" dirty="0">
+                <a:solidFill>
+                  <a:srgbClr val="2E7D32"/>
+                </a:solidFill>
+                <a:latin typeface="Calibri" pitchFamily="34" charset="0"/>
+                <a:ea typeface="Calibri" pitchFamily="34" charset="-122"/>
+                <a:cs typeface="Calibri" pitchFamily="34" charset="-120"/>
+              </a:rPr>
+              <a:t>21</a:t>
+            </a:r>
+            <a:endParaRPr lang="en-US" sz="850" dirty="0"/>
+          </a:p>
+        </p:txBody>
+      </p:sp>
+    </p:spTree>
+  </p:cSld>
+  <p:clrMapOvr>
+    <a:masterClrMapping/>
+  </p:clrMapOvr>
+</p:sld>
+</file>
+
+<file path=ppt/slides/slide25.xml><?xml version="1.0" encoding="utf-8"?>
+<p:sld xmlns:a="http://schemas.openxmlformats.org/drawingml/2006/main" xmlns:r="http://schemas.openxmlformats.org/officeDocument/2006/relationships" xmlns:p="http://schemas.openxmlformats.org/presentationml/2006/main">
+  <p:cSld name="Slide 25">
+    <p:bg>
+      <p:bgPr>
+        <a:solidFill>
+          <a:srgbClr val="FFFFFF"/>
+        </a:solidFill>
+      </p:bgPr>
+    </p:bg>
+    <p:spTree>
+      <p:nvGrpSpPr>
+        <p:cNvPr id="1" name=""/>
+        <p:cNvGrpSpPr/>
+        <p:nvPr/>
+      </p:nvGrpSpPr>
+      <p:grpSpPr>
+        <a:xfrm>
+          <a:off x="0" y="0"/>
+          <a:ext cx="0" cy="0"/>
+          <a:chOff x="0" y="0"/>
+          <a:chExt cx="0" cy="0"/>
+        </a:xfrm>
+      </p:grpSpPr>
+      <p:sp>
+        <p:nvSpPr>
+          <p:cNvPr id="2" name="Text 0"/>
+          <p:cNvSpPr/>
+          <p:nvPr/>
+        </p:nvSpPr>
+        <p:spPr>
+          <a:xfrm>
+            <a:off x="566928" y="329184"/>
+            <a:ext cx="10515600" cy="310896"/>
+          </a:xfrm>
+          <a:prstGeom prst="rect">
+            <a:avLst/>
+          </a:prstGeom>
+          <a:noFill/>
+          <a:ln/>
+        </p:spPr>
+        <p:txBody>
+          <a:bodyPr wrap="square" lIns="0" tIns="0" rIns="0" bIns="0" rtlCol="0" anchor="ctr"/>
+          <a:lstStyle/>
+          <a:p>
+            <a:pPr algn="l" indent="0" marL="0">
+              <a:buNone/>
+            </a:pPr>
+            <a:r>
+              <a:rPr lang="en-US" sz="1100" b="1" spc="150" kern="0" dirty="0">
+                <a:solidFill>
+                  <a:srgbClr val="2E7D32"/>
+                </a:solidFill>
+                <a:latin typeface="Calibri" pitchFamily="34" charset="0"/>
+                <a:ea typeface="Calibri" pitchFamily="34" charset="-122"/>
+                <a:cs typeface="Calibri" pitchFamily="34" charset="-120"/>
+              </a:rPr>
               <a:t>MICROBIOLOGY   ·   REFERENCES &amp; FURTHER READING</a:t>
             </a:r>
             <a:endParaRPr lang="en-US" sz="1100" dirty="0"/>
@@ -8550,7 +11492,7 @@
                 <a:ea typeface="Calibri" pitchFamily="34" charset="-122"/>
                 <a:cs typeface="Calibri" pitchFamily="34" charset="-120"/>
               </a:rPr>
-              <a:t>1.   Carroll KC, et al. Manual of Clinical Microbiology, 12th ed. ASM Press, 2019.</a:t>
+              <a:t>1.   Carroll KC, et al. Manual of Clinical Microbiology, 12th ed. ASM Press.</a:t>
             </a:r>
             <a:endParaRPr lang="en-US" sz="1150" dirty="0"/>
           </a:p>
@@ -8570,7 +11512,7 @@
                 <a:ea typeface="Calibri" pitchFamily="34" charset="-122"/>
                 <a:cs typeface="Calibri" pitchFamily="34" charset="-120"/>
               </a:rPr>
-              <a:t>2.   Leber AL (ed). Clinical Microbiology Procedures Handbook, ASM Press.</a:t>
+              <a:t>2.   Tille P. Bailey &amp; Scott’s Diagnostic Microbiology, 15th ed.</a:t>
             </a:r>
             <a:endParaRPr lang="en-US" sz="1150" dirty="0"/>
           </a:p>
@@ -8590,7 +11532,7 @@
                 <a:ea typeface="Calibri" pitchFamily="34" charset="-122"/>
                 <a:cs typeface="Calibri" pitchFamily="34" charset="-120"/>
               </a:rPr>
-              <a:t>3.   Patel R. MALDI-TOF MS for clinical microbiology. Clin Chem. 2015.</a:t>
+              <a:t>3.   CLSI M07/M02 (reference methods).</a:t>
             </a:r>
             <a:endParaRPr lang="en-US" sz="1150" dirty="0"/>
           </a:p>
@@ -8610,7 +11552,7 @@
                 <a:ea typeface="Calibri" pitchFamily="34" charset="-122"/>
                 <a:cs typeface="Calibri" pitchFamily="34" charset="-120"/>
               </a:rPr>
-              <a:t>4.   CLSI M07/M02 (AST methods, referenced).</a:t>
+              <a:t>4.   Miller JM, et al. IDSA/ASM Utilization Guide. Clin Infect Dis.</a:t>
             </a:r>
             <a:endParaRPr lang="en-US" sz="1150" dirty="0"/>
           </a:p>
@@ -8716,7 +11658,7 @@
                 <a:ea typeface="Calibri" pitchFamily="34" charset="-122"/>
                 <a:cs typeface="Calibri" pitchFamily="34" charset="-120"/>
               </a:rPr>
-              <a:t>17</a:t>
+              <a:t>22</a:t>
             </a:r>
             <a:endParaRPr lang="en-US" sz="850" dirty="0"/>
           </a:p>
@@ -8960,7 +11902,7 @@
                 <a:ea typeface="Calibri" pitchFamily="34" charset="-122"/>
                 <a:cs typeface="Calibri" pitchFamily="34" charset="-120"/>
               </a:rPr>
-              <a:t>Interpret Gram-stain morphology and link it to likely organisms.</a:t>
+              <a:t>Interpret Gram-stain morphology and arrangement.</a:t>
             </a:r>
             <a:endParaRPr lang="en-US" sz="1350" dirty="0"/>
           </a:p>
@@ -9094,7 +12036,7 @@
                 <a:ea typeface="Calibri" pitchFamily="34" charset="-122"/>
                 <a:cs typeface="Calibri" pitchFamily="34" charset="-120"/>
               </a:rPr>
-              <a:t>Follow bench logic from primary culture to identification.</a:t>
+              <a:t>Select and read selective, differential, and enriched media.</a:t>
             </a:r>
             <a:endParaRPr lang="en-US" sz="1350" dirty="0"/>
           </a:p>
@@ -9228,7 +12170,7 @@
                 <a:ea typeface="Calibri" pitchFamily="34" charset="-122"/>
                 <a:cs typeface="Calibri" pitchFamily="34" charset="-120"/>
               </a:rPr>
-              <a:t>Select primary and selective/differential media appropriately.</a:t>
+              <a:t>Describe colony morphology and key rapid tests (catalase, coagulase, oxidase).</a:t>
             </a:r>
             <a:endParaRPr lang="en-US" sz="1350" dirty="0"/>
           </a:p>
@@ -9362,7 +12304,7 @@
                 <a:ea typeface="Calibri" pitchFamily="34" charset="-122"/>
                 <a:cs typeface="Calibri" pitchFamily="34" charset="-120"/>
               </a:rPr>
-              <a:t>Describe MALDI-TOF mass spectrometry and its limits.</a:t>
+              <a:t>Explain MALDI-TOF identification and its limits.</a:t>
             </a:r>
             <a:endParaRPr lang="en-US" sz="1350" dirty="0"/>
           </a:p>
@@ -9496,7 +12438,7 @@
                 <a:ea typeface="Calibri" pitchFamily="34" charset="-122"/>
                 <a:cs typeface="Calibri" pitchFamily="34" charset="-120"/>
               </a:rPr>
-              <a:t>Use key biochemical/rapid tests (catalase, coagulase, oxidase).</a:t>
+              <a:t>Integrate identification with the clinical context.</a:t>
             </a:r>
             <a:endParaRPr lang="en-US" sz="1350" dirty="0"/>
           </a:p>
@@ -9630,7 +12572,7 @@
                 <a:ea typeface="Calibri" pitchFamily="34" charset="-122"/>
                 <a:cs typeface="Calibri" pitchFamily="34" charset="-120"/>
               </a:rPr>
-              <a:t>Communicate urgent stain and culture findings.</a:t>
+              <a:t>Recognize organisms that evade Gram stain or routine culture.</a:t>
             </a:r>
             <a:endParaRPr lang="en-US" sz="1350" dirty="0"/>
           </a:p>
@@ -9980,7 +12922,7 @@
                 <a:ea typeface="Calibri" pitchFamily="34" charset="-122"/>
                 <a:cs typeface="Calibri" pitchFamily="34" charset="-120"/>
               </a:rPr>
-              <a:t>The Gram stain</a:t>
+              <a:t>Gram stain</a:t>
             </a:r>
             <a:pPr algn="l" indent="0" marL="0">
               <a:buNone/>
@@ -9994,7 +12936,7 @@
                 <a:ea typeface="Calibri" pitchFamily="34" charset="-122"/>
                 <a:cs typeface="Calibri" pitchFamily="34" charset="-120"/>
               </a:rPr>
-              <a:t>   —  morphology and the differential</a:t>
+              <a:t>   —  morphology and arrangement</a:t>
             </a:r>
             <a:endParaRPr lang="en-US" sz="1400" dirty="0"/>
           </a:p>
@@ -10121,7 +13063,7 @@
                 <a:ea typeface="Calibri" pitchFamily="34" charset="-122"/>
                 <a:cs typeface="Calibri" pitchFamily="34" charset="-120"/>
               </a:rPr>
-              <a:t>Culture workflow</a:t>
+              <a:t>Culture media</a:t>
             </a:r>
             <a:pPr algn="l" indent="0" marL="0">
               <a:buNone/>
@@ -10135,7 +13077,7 @@
                 <a:ea typeface="Calibri" pitchFamily="34" charset="-122"/>
                 <a:cs typeface="Calibri" pitchFamily="34" charset="-120"/>
               </a:rPr>
-              <a:t>   —  media and colony logic</a:t>
+              <a:t>   —  selective/differential/enriched</a:t>
             </a:r>
             <a:endParaRPr lang="en-US" sz="1400" dirty="0"/>
           </a:p>
@@ -10283,7 +13225,7 @@
                 <a:ea typeface="Calibri" pitchFamily="34" charset="-122"/>
                 <a:cs typeface="Calibri" pitchFamily="34" charset="-120"/>
               </a:rPr>
-              <a:t>   —  biochemicals and MALDI-TOF</a:t>
+              <a:t>   —  rapid tests and MALDI-TOF</a:t>
             </a:r>
             <a:endParaRPr lang="en-US" sz="1400" dirty="0"/>
           </a:p>
@@ -10410,7 +13352,7 @@
                 <a:ea typeface="Calibri" pitchFamily="34" charset="-122"/>
                 <a:cs typeface="Calibri" pitchFamily="34" charset="-120"/>
               </a:rPr>
-              <a:t>Communication</a:t>
+              <a:t>Limits &amp; pitfalls</a:t>
             </a:r>
             <a:pPr algn="l" indent="0" marL="0">
               <a:buNone/>
@@ -10424,7 +13366,7 @@
                 <a:ea typeface="Calibri" pitchFamily="34" charset="-122"/>
                 <a:cs typeface="Calibri" pitchFamily="34" charset="-120"/>
               </a:rPr>
-              <a:t>   —  critical results</a:t>
+              <a:t>   —  non-culturable / atypical</a:t>
             </a:r>
             <a:endParaRPr lang="en-US" sz="1400" dirty="0"/>
           </a:p>
@@ -10558,7 +13500,7 @@
                 <a:ea typeface="Calibri" pitchFamily="34" charset="-122"/>
                 <a:cs typeface="Calibri" pitchFamily="34" charset="-120"/>
               </a:rPr>
-              <a:t>Cases &amp; board</a:t>
+              <a:t>Cases &amp; board review</a:t>
             </a:r>
             <a:endParaRPr lang="en-US" sz="1400" dirty="0"/>
           </a:p>
@@ -10857,7 +13799,7 @@
                 <a:ea typeface="Calibri" pitchFamily="34" charset="-122"/>
                 <a:cs typeface="Calibri" pitchFamily="34" charset="-120"/>
               </a:rPr>
-              <a:t>The Gram Stain &amp; Culture</a:t>
+              <a:t>The Gram Stain</a:t>
             </a:r>
             <a:endParaRPr lang="en-US" sz="3800" dirty="0"/>
           </a:p>
@@ -10981,12 +13923,12 @@
         </p:nvSpPr>
         <p:spPr>
           <a:xfrm>
-            <a:off x="1066648" y="1481328"/>
-            <a:ext cx="10058400" cy="4288536"/>
+            <a:off x="792328" y="1481328"/>
+            <a:ext cx="10607040" cy="4526280"/>
           </a:xfrm>
           <a:prstGeom prst="roundRect">
             <a:avLst>
-              <a:gd name="adj" fmla="val 1919"/>
+              <a:gd name="adj" fmla="val 1818"/>
             </a:avLst>
           </a:prstGeom>
           <a:solidFill>
@@ -11023,8 +13965,8 @@
         </p:blipFill>
         <p:spPr>
           <a:xfrm>
-            <a:off x="1194664" y="1609344"/>
-            <a:ext cx="9802368" cy="4032504"/>
+            <a:off x="920344" y="1609344"/>
+            <a:ext cx="10351008" cy="4270248"/>
           </a:xfrm>
           <a:prstGeom prst="rect">
             <a:avLst/>
@@ -11039,7 +13981,7 @@
         </p:nvSpPr>
         <p:spPr>
           <a:xfrm>
-            <a:off x="566928" y="5843016"/>
+            <a:off x="566928" y="6080760"/>
             <a:ext cx="11057839" cy="365760"/>
           </a:xfrm>
           <a:prstGeom prst="rect">
@@ -11064,7 +14006,7 @@
                 <a:ea typeface="Calibri" pitchFamily="34" charset="-122"/>
                 <a:cs typeface="Calibri" pitchFamily="34" charset="-120"/>
               </a:rPr>
-              <a:t>Original schematic. Gram reaction and arrangement, with the specimen source, generate the working differential.</a:t>
+              <a:t>Original schematic. Gram reaction plus arrangement (clusters vs chains, rods) gives an immediate, actionable differential.</a:t>
             </a:r>
             <a:endParaRPr lang="en-US" sz="1150" dirty="0"/>
           </a:p>
@@ -11241,7 +14183,7 @@
                 <a:ea typeface="Calibri" pitchFamily="34" charset="-122"/>
                 <a:cs typeface="Calibri" pitchFamily="34" charset="-120"/>
               </a:rPr>
-              <a:t>MICROBIOLOGY   ·   CULTURE</a:t>
+              <a:t>MICROBIOLOGY   ·   GRAM STAIN</a:t>
             </a:r>
             <a:endParaRPr lang="en-US" sz="1100" dirty="0"/>
           </a:p>
@@ -11280,7 +14222,7 @@
                 <a:ea typeface="Calibri" pitchFamily="34" charset="-122"/>
                 <a:cs typeface="Calibri" pitchFamily="34" charset="-120"/>
               </a:rPr>
-              <a:t>Media and Colony Logic</a:t>
+              <a:t>Reading the Smear</a:t>
             </a:r>
             <a:endParaRPr lang="en-US" sz="3000" dirty="0"/>
           </a:p>
@@ -11348,7 +14290,7 @@
                 <a:ea typeface="Calibri" pitchFamily="34" charset="-122"/>
                 <a:cs typeface="Calibri" pitchFamily="34" charset="-120"/>
               </a:rPr>
-              <a:t>PRIMARY &amp; SELECTIVE MEDIA</a:t>
+              <a:t>REACTION &amp; ARRANGEMENT</a:t>
             </a:r>
             <a:endParaRPr lang="en-US" sz="1200" dirty="0"/>
           </a:p>
@@ -11391,7 +14333,7 @@
                 <a:ea typeface="Calibri" pitchFamily="34" charset="-122"/>
                 <a:cs typeface="Calibri" pitchFamily="34" charset="-120"/>
               </a:rPr>
-              <a:t>Blood agar (general growth, hemolysis), chocolate agar (fastidious: Haemophilus, Neisseria).</a:t>
+              <a:t>Gram-positive (purple) vs gram-negative (pink) reflects cell-wall peptidoglycan.</a:t>
             </a:r>
             <a:endParaRPr lang="en-US" sz="1250" dirty="0"/>
           </a:p>
@@ -11412,7 +14354,7 @@
                 <a:ea typeface="Calibri" pitchFamily="34" charset="-122"/>
                 <a:cs typeface="Calibri" pitchFamily="34" charset="-120"/>
               </a:rPr>
-              <a:t>MacConkey selects Gram-negatives and differentiates lactose fermenters (pink).</a:t>
+              <a:t>Cocci in clusters: staphylococci; in chains/pairs: strepto-/enterococci, pneumococci.</a:t>
             </a:r>
             <a:endParaRPr lang="en-US" sz="1250" dirty="0"/>
           </a:p>
@@ -11433,7 +14375,7 @@
                 <a:ea typeface="Calibri" pitchFamily="34" charset="-122"/>
                 <a:cs typeface="Calibri" pitchFamily="34" charset="-120"/>
               </a:rPr>
-              <a:t>Selective media suppress flora (e.g., CNA for Gram-positives; Hektoen/XLD for enterics).</a:t>
+              <a:t>Rods: Enterobacterales, Pseudomonas (GNR); Listeria, Clostridium (GPR).</a:t>
             </a:r>
             <a:endParaRPr lang="en-US" sz="1250" dirty="0"/>
           </a:p>
@@ -11454,7 +14396,7 @@
                 <a:ea typeface="Calibri" pitchFamily="34" charset="-122"/>
                 <a:cs typeface="Calibri" pitchFamily="34" charset="-120"/>
               </a:rPr>
-              <a:t>Set up by specimen and suspected pathogen.</a:t>
+              <a:t>Yeast, hyphae, and host cells are also reported.</a:t>
             </a:r>
             <a:endParaRPr lang="en-US" sz="1250" dirty="0"/>
           </a:p>
@@ -11477,7 +14419,7 @@
             </a:avLst>
           </a:prstGeom>
           <a:solidFill>
-            <a:srgbClr val="E8F2E9"/>
+            <a:srgbClr val="E9F3EA"/>
           </a:solidFill>
           <a:ln/>
           <a:effectLst>
@@ -11522,7 +14464,7 @@
                 <a:ea typeface="Calibri" pitchFamily="34" charset="-122"/>
                 <a:cs typeface="Calibri" pitchFamily="34" charset="-120"/>
               </a:rPr>
-              <a:t>READING COLONIES</a:t>
+              <a:t>PITFALLS</a:t>
             </a:r>
             <a:endParaRPr lang="en-US" sz="1200" dirty="0"/>
           </a:p>
@@ -11565,7 +14507,7 @@
                 <a:ea typeface="Calibri" pitchFamily="34" charset="-122"/>
                 <a:cs typeface="Calibri" pitchFamily="34" charset="-120"/>
               </a:rPr>
-              <a:t>Colony morphology, hemolysis, odor, and pigment narrow identity.</a:t>
+              <a:t>Over-decolorization makes gram-positives appear gram-negative.</a:t>
             </a:r>
             <a:endParaRPr lang="en-US" sz="1250" dirty="0"/>
           </a:p>
@@ -11586,7 +14528,7 @@
                 <a:ea typeface="Calibri" pitchFamily="34" charset="-122"/>
                 <a:cs typeface="Calibri" pitchFamily="34" charset="-120"/>
               </a:rPr>
-              <a:t>Beta-hemolysis (Strep), green alpha-hemolysis (S. pneumoniae, viridans), swarming Proteus.</a:t>
+              <a:t>Prior antibiotics distort morphology.</a:t>
             </a:r>
             <a:endParaRPr lang="en-US" sz="1250" dirty="0"/>
           </a:p>
@@ -11607,7 +14549,7 @@
                 <a:ea typeface="Calibri" pitchFamily="34" charset="-122"/>
                 <a:cs typeface="Calibri" pitchFamily="34" charset="-120"/>
               </a:rPr>
-              <a:t>Lactose fermentation on MacConkey (E. coli vs non-fermenters).</a:t>
+              <a:t>Some organisms stain poorly (mycobacteria, Mycoplasma, spirochetes).</a:t>
             </a:r>
             <a:endParaRPr lang="en-US" sz="1250" dirty="0"/>
           </a:p>
@@ -11628,7 +14570,7 @@
                 <a:ea typeface="Calibri" pitchFamily="34" charset="-122"/>
                 <a:cs typeface="Calibri" pitchFamily="34" charset="-120"/>
               </a:rPr>
-              <a:t>Pure vs mixed growth guides interpretation.</a:t>
+              <a:t>Always correlate the smear with culture and clinical picture.</a:t>
             </a:r>
             <a:endParaRPr lang="en-US" sz="1250" dirty="0"/>
           </a:p>
@@ -11927,7 +14869,7 @@
                 <a:ea typeface="Calibri" pitchFamily="34" charset="-122"/>
                 <a:cs typeface="Calibri" pitchFamily="34" charset="-120"/>
               </a:rPr>
-              <a:t>Identification &amp; Communication</a:t>
+              <a:t>Culture &amp; Identification</a:t>
             </a:r>
             <a:endParaRPr lang="en-US" sz="3800" dirty="0"/>
           </a:p>
@@ -11998,7 +14940,7 @@
                 <a:ea typeface="Calibri" pitchFamily="34" charset="-122"/>
                 <a:cs typeface="Calibri" pitchFamily="34" charset="-120"/>
               </a:rPr>
-              <a:t>MICROBIOLOGY   ·   IDENTIFICATION</a:t>
+              <a:t>MICROBIOLOGY   ·   CULTURE MEDIA</a:t>
             </a:r>
             <a:endParaRPr lang="en-US" sz="1100" dirty="0"/>
           </a:p>
@@ -12037,51 +14979,1495 @@
                 <a:ea typeface="Calibri" pitchFamily="34" charset="-122"/>
                 <a:cs typeface="Calibri" pitchFamily="34" charset="-120"/>
               </a:rPr>
-              <a:t>Biochemicals and MALDI-TOF</a:t>
+              <a:t>Common Media and What They Reveal</a:t>
             </a:r>
             <a:endParaRPr lang="en-US" sz="3000" dirty="0"/>
           </a:p>
         </p:txBody>
       </p:sp>
-      <p:sp>
-        <p:nvSpPr>
-          <p:cNvPr id="4" name="Shape 2"/>
-          <p:cNvSpPr/>
-          <p:nvPr/>
-        </p:nvSpPr>
-        <p:spPr>
-          <a:xfrm>
-            <a:off x="566928" y="1517904"/>
-            <a:ext cx="5346040" cy="4114800"/>
-          </a:xfrm>
-          <a:prstGeom prst="roundRect">
-            <a:avLst>
-              <a:gd name="adj" fmla="val 2000"/>
-            </a:avLst>
-          </a:prstGeom>
-          <a:solidFill>
-            <a:srgbClr val="E8F2E9"/>
-          </a:solidFill>
-          <a:ln/>
-          <a:effectLst>
-            <a:outerShdw sx="100000" sy="100000" kx="0" ky="0" algn="bl" rotWithShape="0" blurRad="88900" dist="25400" dir="5400000">
-              <a:srgbClr val="22303C">
-                <a:alpha val="12000"/>
-              </a:srgbClr>
-            </a:outerShdw>
-          </a:effectLst>
-        </p:spPr>
-      </p:sp>
-      <p:sp>
-        <p:nvSpPr>
-          <p:cNvPr id="5" name="Text 3"/>
-          <p:cNvSpPr/>
-          <p:nvPr/>
-        </p:nvSpPr>
-        <p:spPr>
-          <a:xfrm>
-            <a:off x="804672" y="1682496"/>
-            <a:ext cx="4888840" cy="274320"/>
+      <p:graphicFrame>
+        <p:nvGraphicFramePr>
+          <p:cNvPr id="10" name="Table 0"/>
+          <p:cNvGraphicFramePr>
+            <a:graphicFrameLocks noGrp="1"/>
+          </p:cNvGraphicFramePr>
+          <p:nvPr>
+            <p:extLst>
+              <p:ext uri="{D42A27DB-BD31-4B8C-83A1-F6EECF244321}">
+                <p14:modId xmlns:p14="http://schemas.microsoft.com/office/powerpoint/2010/main" val="1579011935"/>
+              </p:ext>
+            </p:extLst>
+          </p:nvPr>
+        </p:nvGraphicFramePr>
+        <p:xfrm>
+          <a:off x="566928" y="1463040"/>
+          <a:ext cx="11057839" cy="914400"/>
+        </p:xfrm>
+        <a:graphic>
+          <a:graphicData uri="http://schemas.openxmlformats.org/drawingml/2006/table">
+            <a:tbl>
+              <a:tblPr/>
+              <a:tblGrid>
+                <a:gridCol w="2743200"/>
+                <a:gridCol w="2468880"/>
+                <a:gridCol w="4480560"/>
+              </a:tblGrid>
+              <a:tr h="457200">
+                <a:tc>
+                  <a:txBody>
+                    <a:bodyPr/>
+                    <a:lstStyle/>
+                    <a:p>
+                      <a:pPr algn="ctr" indent="0" marL="0">
+                        <a:buNone/>
+                      </a:pPr>
+                      <a:r>
+                        <a:rPr lang="en-US" sz="1200" b="1" dirty="0">
+                          <a:solidFill>
+                            <a:srgbClr val="FFFFFF"/>
+                          </a:solidFill>
+                          <a:latin typeface="Calibri" pitchFamily="34" charset="0"/>
+                          <a:ea typeface="Calibri" pitchFamily="34" charset="-122"/>
+                          <a:cs typeface="Calibri" pitchFamily="34" charset="-120"/>
+                        </a:rPr>
+                        <a:t>Medium</a:t>
+                      </a:r>
+                      <a:endParaRPr lang="en-US" sz="1200" dirty="0">
+                        <a:latin typeface="Calibri" charset="0"/>
+                        <a:ea typeface="Calibri" charset="0"/>
+                        <a:cs typeface="Calibri" charset="0"/>
+                      </a:endParaRPr>
+                    </a:p>
+                  </a:txBody>
+                  <a:tcPr marL="91440" marR="91440" marT="45720" marB="45720" anchor="ctr">
+                    <a:lnL w="9525" cap="flat" cmpd="sng" algn="ctr">
+                      <a:solidFill>
+                        <a:srgbClr val="DCE4EC"/>
+                      </a:solidFill>
+                      <a:prstDash val="solid"/>
+                      <a:round/>
+                      <a:headEnd type="none" w="med" len="med"/>
+                      <a:tailEnd type="none" w="med" len="med"/>
+                    </a:lnL>
+                    <a:lnR w="9525" cap="flat" cmpd="sng" algn="ctr">
+                      <a:solidFill>
+                        <a:srgbClr val="DCE4EC"/>
+                      </a:solidFill>
+                      <a:prstDash val="solid"/>
+                      <a:round/>
+                      <a:headEnd type="none" w="med" len="med"/>
+                      <a:tailEnd type="none" w="med" len="med"/>
+                    </a:lnR>
+                    <a:lnT w="9525" cap="flat" cmpd="sng" algn="ctr">
+                      <a:solidFill>
+                        <a:srgbClr val="DCE4EC"/>
+                      </a:solidFill>
+                      <a:prstDash val="solid"/>
+                      <a:round/>
+                      <a:headEnd type="none" w="med" len="med"/>
+                      <a:tailEnd type="none" w="med" len="med"/>
+                    </a:lnT>
+                    <a:lnB w="9525" cap="flat" cmpd="sng" algn="ctr">
+                      <a:solidFill>
+                        <a:srgbClr val="DCE4EC"/>
+                      </a:solidFill>
+                      <a:prstDash val="solid"/>
+                      <a:round/>
+                      <a:headEnd type="none" w="med" len="med"/>
+                      <a:tailEnd type="none" w="med" len="med"/>
+                    </a:lnB>
+                    <a:solidFill>
+                      <a:srgbClr val="2E7D32"/>
+                    </a:solidFill>
+                  </a:tcPr>
+                </a:tc>
+                <a:tc>
+                  <a:txBody>
+                    <a:bodyPr/>
+                    <a:lstStyle/>
+                    <a:p>
+                      <a:pPr algn="ctr" indent="0" marL="0">
+                        <a:buNone/>
+                      </a:pPr>
+                      <a:r>
+                        <a:rPr lang="en-US" sz="1200" b="1" dirty="0">
+                          <a:solidFill>
+                            <a:srgbClr val="FFFFFF"/>
+                          </a:solidFill>
+                          <a:latin typeface="Calibri" pitchFamily="34" charset="0"/>
+                          <a:ea typeface="Calibri" pitchFamily="34" charset="-122"/>
+                          <a:cs typeface="Calibri" pitchFamily="34" charset="-120"/>
+                        </a:rPr>
+                        <a:t>Type</a:t>
+                      </a:r>
+                      <a:endParaRPr lang="en-US" sz="1200" dirty="0">
+                        <a:latin typeface="Calibri" charset="0"/>
+                        <a:ea typeface="Calibri" charset="0"/>
+                        <a:cs typeface="Calibri" charset="0"/>
+                      </a:endParaRPr>
+                    </a:p>
+                  </a:txBody>
+                  <a:tcPr marL="91440" marR="91440" marT="45720" marB="45720" anchor="ctr">
+                    <a:lnL w="9525" cap="flat" cmpd="sng" algn="ctr">
+                      <a:solidFill>
+                        <a:srgbClr val="DCE4EC"/>
+                      </a:solidFill>
+                      <a:prstDash val="solid"/>
+                      <a:round/>
+                      <a:headEnd type="none" w="med" len="med"/>
+                      <a:tailEnd type="none" w="med" len="med"/>
+                    </a:lnL>
+                    <a:lnR w="9525" cap="flat" cmpd="sng" algn="ctr">
+                      <a:solidFill>
+                        <a:srgbClr val="DCE4EC"/>
+                      </a:solidFill>
+                      <a:prstDash val="solid"/>
+                      <a:round/>
+                      <a:headEnd type="none" w="med" len="med"/>
+                      <a:tailEnd type="none" w="med" len="med"/>
+                    </a:lnR>
+                    <a:lnT w="9525" cap="flat" cmpd="sng" algn="ctr">
+                      <a:solidFill>
+                        <a:srgbClr val="DCE4EC"/>
+                      </a:solidFill>
+                      <a:prstDash val="solid"/>
+                      <a:round/>
+                      <a:headEnd type="none" w="med" len="med"/>
+                      <a:tailEnd type="none" w="med" len="med"/>
+                    </a:lnT>
+                    <a:lnB w="9525" cap="flat" cmpd="sng" algn="ctr">
+                      <a:solidFill>
+                        <a:srgbClr val="DCE4EC"/>
+                      </a:solidFill>
+                      <a:prstDash val="solid"/>
+                      <a:round/>
+                      <a:headEnd type="none" w="med" len="med"/>
+                      <a:tailEnd type="none" w="med" len="med"/>
+                    </a:lnB>
+                    <a:solidFill>
+                      <a:srgbClr val="2E7D32"/>
+                    </a:solidFill>
+                  </a:tcPr>
+                </a:tc>
+                <a:tc>
+                  <a:txBody>
+                    <a:bodyPr/>
+                    <a:lstStyle/>
+                    <a:p>
+                      <a:pPr algn="ctr" indent="0" marL="0">
+                        <a:buNone/>
+                      </a:pPr>
+                      <a:r>
+                        <a:rPr lang="en-US" sz="1200" b="1" dirty="0">
+                          <a:solidFill>
+                            <a:srgbClr val="FFFFFF"/>
+                          </a:solidFill>
+                          <a:latin typeface="Calibri" pitchFamily="34" charset="0"/>
+                          <a:ea typeface="Calibri" pitchFamily="34" charset="-122"/>
+                          <a:cs typeface="Calibri" pitchFamily="34" charset="-120"/>
+                        </a:rPr>
+                        <a:t>Use / readout</a:t>
+                      </a:r>
+                      <a:endParaRPr lang="en-US" sz="1200" dirty="0">
+                        <a:latin typeface="Calibri" charset="0"/>
+                        <a:ea typeface="Calibri" charset="0"/>
+                        <a:cs typeface="Calibri" charset="0"/>
+                      </a:endParaRPr>
+                    </a:p>
+                  </a:txBody>
+                  <a:tcPr marL="91440" marR="91440" marT="45720" marB="45720" anchor="ctr">
+                    <a:lnL w="9525" cap="flat" cmpd="sng" algn="ctr">
+                      <a:solidFill>
+                        <a:srgbClr val="DCE4EC"/>
+                      </a:solidFill>
+                      <a:prstDash val="solid"/>
+                      <a:round/>
+                      <a:headEnd type="none" w="med" len="med"/>
+                      <a:tailEnd type="none" w="med" len="med"/>
+                    </a:lnL>
+                    <a:lnR w="9525" cap="flat" cmpd="sng" algn="ctr">
+                      <a:solidFill>
+                        <a:srgbClr val="DCE4EC"/>
+                      </a:solidFill>
+                      <a:prstDash val="solid"/>
+                      <a:round/>
+                      <a:headEnd type="none" w="med" len="med"/>
+                      <a:tailEnd type="none" w="med" len="med"/>
+                    </a:lnR>
+                    <a:lnT w="9525" cap="flat" cmpd="sng" algn="ctr">
+                      <a:solidFill>
+                        <a:srgbClr val="DCE4EC"/>
+                      </a:solidFill>
+                      <a:prstDash val="solid"/>
+                      <a:round/>
+                      <a:headEnd type="none" w="med" len="med"/>
+                      <a:tailEnd type="none" w="med" len="med"/>
+                    </a:lnT>
+                    <a:lnB w="9525" cap="flat" cmpd="sng" algn="ctr">
+                      <a:solidFill>
+                        <a:srgbClr val="DCE4EC"/>
+                      </a:solidFill>
+                      <a:prstDash val="solid"/>
+                      <a:round/>
+                      <a:headEnd type="none" w="med" len="med"/>
+                      <a:tailEnd type="none" w="med" len="med"/>
+                    </a:lnB>
+                    <a:solidFill>
+                      <a:srgbClr val="2E7D32"/>
+                    </a:solidFill>
+                  </a:tcPr>
+                </a:tc>
+              </a:tr>
+              <a:tr h="457200">
+                <a:tc>
+                  <a:txBody>
+                    <a:bodyPr/>
+                    <a:lstStyle/>
+                    <a:p>
+                      <a:pPr algn="l" indent="0" marL="0">
+                        <a:buNone/>
+                      </a:pPr>
+                      <a:r>
+                        <a:rPr lang="en-US" sz="1100" b="1" dirty="0">
+                          <a:solidFill>
+                            <a:srgbClr val="1B2A38"/>
+                          </a:solidFill>
+                          <a:latin typeface="Calibri" pitchFamily="34" charset="0"/>
+                          <a:ea typeface="Calibri" pitchFamily="34" charset="-122"/>
+                          <a:cs typeface="Calibri" pitchFamily="34" charset="-120"/>
+                        </a:rPr>
+                        <a:t>Blood agar</a:t>
+                      </a:r>
+                      <a:endParaRPr lang="en-US" sz="1100" dirty="0">
+                        <a:latin typeface="Calibri" charset="0"/>
+                        <a:ea typeface="Calibri" charset="0"/>
+                        <a:cs typeface="Calibri" charset="0"/>
+                      </a:endParaRPr>
+                    </a:p>
+                  </a:txBody>
+                  <a:tcPr marL="91440" marR="91440" marT="45720" marB="45720" anchor="ctr">
+                    <a:lnL w="9525" cap="flat" cmpd="sng" algn="ctr">
+                      <a:solidFill>
+                        <a:srgbClr val="DCE4EC"/>
+                      </a:solidFill>
+                      <a:prstDash val="solid"/>
+                      <a:round/>
+                      <a:headEnd type="none" w="med" len="med"/>
+                      <a:tailEnd type="none" w="med" len="med"/>
+                    </a:lnL>
+                    <a:lnR w="9525" cap="flat" cmpd="sng" algn="ctr">
+                      <a:solidFill>
+                        <a:srgbClr val="DCE4EC"/>
+                      </a:solidFill>
+                      <a:prstDash val="solid"/>
+                      <a:round/>
+                      <a:headEnd type="none" w="med" len="med"/>
+                      <a:tailEnd type="none" w="med" len="med"/>
+                    </a:lnR>
+                    <a:lnT w="9525" cap="flat" cmpd="sng" algn="ctr">
+                      <a:solidFill>
+                        <a:srgbClr val="DCE4EC"/>
+                      </a:solidFill>
+                      <a:prstDash val="solid"/>
+                      <a:round/>
+                      <a:headEnd type="none" w="med" len="med"/>
+                      <a:tailEnd type="none" w="med" len="med"/>
+                    </a:lnT>
+                    <a:lnB w="9525" cap="flat" cmpd="sng" algn="ctr">
+                      <a:solidFill>
+                        <a:srgbClr val="DCE4EC"/>
+                      </a:solidFill>
+                      <a:prstDash val="solid"/>
+                      <a:round/>
+                      <a:headEnd type="none" w="med" len="med"/>
+                      <a:tailEnd type="none" w="med" len="med"/>
+                    </a:lnB>
+                    <a:solidFill>
+                      <a:srgbClr val="F3F7FA"/>
+                    </a:solidFill>
+                  </a:tcPr>
+                </a:tc>
+                <a:tc>
+                  <a:txBody>
+                    <a:bodyPr/>
+                    <a:lstStyle/>
+                    <a:p>
+                      <a:pPr algn="ctr" indent="0" marL="0">
+                        <a:buNone/>
+                      </a:pPr>
+                      <a:r>
+                        <a:rPr lang="en-US" sz="1100" dirty="0">
+                          <a:solidFill>
+                            <a:srgbClr val="33444F"/>
+                          </a:solidFill>
+                          <a:latin typeface="Calibri" pitchFamily="34" charset="0"/>
+                          <a:ea typeface="Calibri" pitchFamily="34" charset="-122"/>
+                          <a:cs typeface="Calibri" pitchFamily="34" charset="-120"/>
+                        </a:rPr>
+                        <a:t>Enriched</a:t>
+                      </a:r>
+                      <a:endParaRPr lang="en-US" sz="1100" dirty="0">
+                        <a:latin typeface="Calibri" charset="0"/>
+                        <a:ea typeface="Calibri" charset="0"/>
+                        <a:cs typeface="Calibri" charset="0"/>
+                      </a:endParaRPr>
+                    </a:p>
+                  </a:txBody>
+                  <a:tcPr marL="91440" marR="91440" marT="45720" marB="45720" anchor="ctr">
+                    <a:lnL w="9525" cap="flat" cmpd="sng" algn="ctr">
+                      <a:solidFill>
+                        <a:srgbClr val="DCE4EC"/>
+                      </a:solidFill>
+                      <a:prstDash val="solid"/>
+                      <a:round/>
+                      <a:headEnd type="none" w="med" len="med"/>
+                      <a:tailEnd type="none" w="med" len="med"/>
+                    </a:lnL>
+                    <a:lnR w="9525" cap="flat" cmpd="sng" algn="ctr">
+                      <a:solidFill>
+                        <a:srgbClr val="DCE4EC"/>
+                      </a:solidFill>
+                      <a:prstDash val="solid"/>
+                      <a:round/>
+                      <a:headEnd type="none" w="med" len="med"/>
+                      <a:tailEnd type="none" w="med" len="med"/>
+                    </a:lnR>
+                    <a:lnT w="9525" cap="flat" cmpd="sng" algn="ctr">
+                      <a:solidFill>
+                        <a:srgbClr val="DCE4EC"/>
+                      </a:solidFill>
+                      <a:prstDash val="solid"/>
+                      <a:round/>
+                      <a:headEnd type="none" w="med" len="med"/>
+                      <a:tailEnd type="none" w="med" len="med"/>
+                    </a:lnT>
+                    <a:lnB w="9525" cap="flat" cmpd="sng" algn="ctr">
+                      <a:solidFill>
+                        <a:srgbClr val="DCE4EC"/>
+                      </a:solidFill>
+                      <a:prstDash val="solid"/>
+                      <a:round/>
+                      <a:headEnd type="none" w="med" len="med"/>
+                      <a:tailEnd type="none" w="med" len="med"/>
+                    </a:lnB>
+                    <a:solidFill>
+                      <a:srgbClr val="F3F7FA"/>
+                    </a:solidFill>
+                  </a:tcPr>
+                </a:tc>
+                <a:tc>
+                  <a:txBody>
+                    <a:bodyPr/>
+                    <a:lstStyle/>
+                    <a:p>
+                      <a:pPr algn="ctr" indent="0" marL="0">
+                        <a:buNone/>
+                      </a:pPr>
+                      <a:r>
+                        <a:rPr lang="en-US" sz="1100" dirty="0">
+                          <a:solidFill>
+                            <a:srgbClr val="33444F"/>
+                          </a:solidFill>
+                          <a:latin typeface="Calibri" pitchFamily="34" charset="0"/>
+                          <a:ea typeface="Calibri" pitchFamily="34" charset="-122"/>
+                          <a:cs typeface="Calibri" pitchFamily="34" charset="-120"/>
+                        </a:rPr>
+                        <a:t>Hemolysis (α/β/γ)</a:t>
+                      </a:r>
+                      <a:endParaRPr lang="en-US" sz="1100" dirty="0">
+                        <a:latin typeface="Calibri" charset="0"/>
+                        <a:ea typeface="Calibri" charset="0"/>
+                        <a:cs typeface="Calibri" charset="0"/>
+                      </a:endParaRPr>
+                    </a:p>
+                  </a:txBody>
+                  <a:tcPr marL="91440" marR="91440" marT="45720" marB="45720" anchor="ctr">
+                    <a:lnL w="9525" cap="flat" cmpd="sng" algn="ctr">
+                      <a:solidFill>
+                        <a:srgbClr val="DCE4EC"/>
+                      </a:solidFill>
+                      <a:prstDash val="solid"/>
+                      <a:round/>
+                      <a:headEnd type="none" w="med" len="med"/>
+                      <a:tailEnd type="none" w="med" len="med"/>
+                    </a:lnL>
+                    <a:lnR w="9525" cap="flat" cmpd="sng" algn="ctr">
+                      <a:solidFill>
+                        <a:srgbClr val="DCE4EC"/>
+                      </a:solidFill>
+                      <a:prstDash val="solid"/>
+                      <a:round/>
+                      <a:headEnd type="none" w="med" len="med"/>
+                      <a:tailEnd type="none" w="med" len="med"/>
+                    </a:lnR>
+                    <a:lnT w="9525" cap="flat" cmpd="sng" algn="ctr">
+                      <a:solidFill>
+                        <a:srgbClr val="DCE4EC"/>
+                      </a:solidFill>
+                      <a:prstDash val="solid"/>
+                      <a:round/>
+                      <a:headEnd type="none" w="med" len="med"/>
+                      <a:tailEnd type="none" w="med" len="med"/>
+                    </a:lnT>
+                    <a:lnB w="9525" cap="flat" cmpd="sng" algn="ctr">
+                      <a:solidFill>
+                        <a:srgbClr val="DCE4EC"/>
+                      </a:solidFill>
+                      <a:prstDash val="solid"/>
+                      <a:round/>
+                      <a:headEnd type="none" w="med" len="med"/>
+                      <a:tailEnd type="none" w="med" len="med"/>
+                    </a:lnB>
+                    <a:solidFill>
+                      <a:srgbClr val="F3F7FA"/>
+                    </a:solidFill>
+                  </a:tcPr>
+                </a:tc>
+              </a:tr>
+              <a:tr h="457200">
+                <a:tc>
+                  <a:txBody>
+                    <a:bodyPr/>
+                    <a:lstStyle/>
+                    <a:p>
+                      <a:pPr algn="l" indent="0" marL="0">
+                        <a:buNone/>
+                      </a:pPr>
+                      <a:r>
+                        <a:rPr lang="en-US" sz="1100" b="1" dirty="0">
+                          <a:solidFill>
+                            <a:srgbClr val="1B2A38"/>
+                          </a:solidFill>
+                          <a:latin typeface="Calibri" pitchFamily="34" charset="0"/>
+                          <a:ea typeface="Calibri" pitchFamily="34" charset="-122"/>
+                          <a:cs typeface="Calibri" pitchFamily="34" charset="-120"/>
+                        </a:rPr>
+                        <a:t>MacConkey</a:t>
+                      </a:r>
+                      <a:endParaRPr lang="en-US" sz="1100" dirty="0">
+                        <a:latin typeface="Calibri" charset="0"/>
+                        <a:ea typeface="Calibri" charset="0"/>
+                        <a:cs typeface="Calibri" charset="0"/>
+                      </a:endParaRPr>
+                    </a:p>
+                  </a:txBody>
+                  <a:tcPr marL="91440" marR="91440" marT="45720" marB="45720" anchor="ctr">
+                    <a:lnL w="9525" cap="flat" cmpd="sng" algn="ctr">
+                      <a:solidFill>
+                        <a:srgbClr val="DCE4EC"/>
+                      </a:solidFill>
+                      <a:prstDash val="solid"/>
+                      <a:round/>
+                      <a:headEnd type="none" w="med" len="med"/>
+                      <a:tailEnd type="none" w="med" len="med"/>
+                    </a:lnL>
+                    <a:lnR w="9525" cap="flat" cmpd="sng" algn="ctr">
+                      <a:solidFill>
+                        <a:srgbClr val="DCE4EC"/>
+                      </a:solidFill>
+                      <a:prstDash val="solid"/>
+                      <a:round/>
+                      <a:headEnd type="none" w="med" len="med"/>
+                      <a:tailEnd type="none" w="med" len="med"/>
+                    </a:lnR>
+                    <a:lnT w="9525" cap="flat" cmpd="sng" algn="ctr">
+                      <a:solidFill>
+                        <a:srgbClr val="DCE4EC"/>
+                      </a:solidFill>
+                      <a:prstDash val="solid"/>
+                      <a:round/>
+                      <a:headEnd type="none" w="med" len="med"/>
+                      <a:tailEnd type="none" w="med" len="med"/>
+                    </a:lnT>
+                    <a:lnB w="9525" cap="flat" cmpd="sng" algn="ctr">
+                      <a:solidFill>
+                        <a:srgbClr val="DCE4EC"/>
+                      </a:solidFill>
+                      <a:prstDash val="solid"/>
+                      <a:round/>
+                      <a:headEnd type="none" w="med" len="med"/>
+                      <a:tailEnd type="none" w="med" len="med"/>
+                    </a:lnB>
+                    <a:solidFill>
+                      <a:srgbClr val="FFFFFF"/>
+                    </a:solidFill>
+                  </a:tcPr>
+                </a:tc>
+                <a:tc>
+                  <a:txBody>
+                    <a:bodyPr/>
+                    <a:lstStyle/>
+                    <a:p>
+                      <a:pPr algn="ctr" indent="0" marL="0">
+                        <a:buNone/>
+                      </a:pPr>
+                      <a:r>
+                        <a:rPr lang="en-US" sz="1100" dirty="0">
+                          <a:solidFill>
+                            <a:srgbClr val="33444F"/>
+                          </a:solidFill>
+                          <a:latin typeface="Calibri" pitchFamily="34" charset="0"/>
+                          <a:ea typeface="Calibri" pitchFamily="34" charset="-122"/>
+                          <a:cs typeface="Calibri" pitchFamily="34" charset="-120"/>
+                        </a:rPr>
+                        <a:t>Selective/differential</a:t>
+                      </a:r>
+                      <a:endParaRPr lang="en-US" sz="1100" dirty="0">
+                        <a:latin typeface="Calibri" charset="0"/>
+                        <a:ea typeface="Calibri" charset="0"/>
+                        <a:cs typeface="Calibri" charset="0"/>
+                      </a:endParaRPr>
+                    </a:p>
+                  </a:txBody>
+                  <a:tcPr marL="91440" marR="91440" marT="45720" marB="45720" anchor="ctr">
+                    <a:lnL w="9525" cap="flat" cmpd="sng" algn="ctr">
+                      <a:solidFill>
+                        <a:srgbClr val="DCE4EC"/>
+                      </a:solidFill>
+                      <a:prstDash val="solid"/>
+                      <a:round/>
+                      <a:headEnd type="none" w="med" len="med"/>
+                      <a:tailEnd type="none" w="med" len="med"/>
+                    </a:lnL>
+                    <a:lnR w="9525" cap="flat" cmpd="sng" algn="ctr">
+                      <a:solidFill>
+                        <a:srgbClr val="DCE4EC"/>
+                      </a:solidFill>
+                      <a:prstDash val="solid"/>
+                      <a:round/>
+                      <a:headEnd type="none" w="med" len="med"/>
+                      <a:tailEnd type="none" w="med" len="med"/>
+                    </a:lnR>
+                    <a:lnT w="9525" cap="flat" cmpd="sng" algn="ctr">
+                      <a:solidFill>
+                        <a:srgbClr val="DCE4EC"/>
+                      </a:solidFill>
+                      <a:prstDash val="solid"/>
+                      <a:round/>
+                      <a:headEnd type="none" w="med" len="med"/>
+                      <a:tailEnd type="none" w="med" len="med"/>
+                    </a:lnT>
+                    <a:lnB w="9525" cap="flat" cmpd="sng" algn="ctr">
+                      <a:solidFill>
+                        <a:srgbClr val="DCE4EC"/>
+                      </a:solidFill>
+                      <a:prstDash val="solid"/>
+                      <a:round/>
+                      <a:headEnd type="none" w="med" len="med"/>
+                      <a:tailEnd type="none" w="med" len="med"/>
+                    </a:lnB>
+                    <a:solidFill>
+                      <a:srgbClr val="FFFFFF"/>
+                    </a:solidFill>
+                  </a:tcPr>
+                </a:tc>
+                <a:tc>
+                  <a:txBody>
+                    <a:bodyPr/>
+                    <a:lstStyle/>
+                    <a:p>
+                      <a:pPr algn="ctr" indent="0" marL="0">
+                        <a:buNone/>
+                      </a:pPr>
+                      <a:r>
+                        <a:rPr lang="en-US" sz="1100" dirty="0">
+                          <a:solidFill>
+                            <a:srgbClr val="33444F"/>
+                          </a:solidFill>
+                          <a:latin typeface="Calibri" pitchFamily="34" charset="0"/>
+                          <a:ea typeface="Calibri" pitchFamily="34" charset="-122"/>
+                          <a:cs typeface="Calibri" pitchFamily="34" charset="-120"/>
+                        </a:rPr>
+                        <a:t>GNR; lactose fermentation (pink)</a:t>
+                      </a:r>
+                      <a:endParaRPr lang="en-US" sz="1100" dirty="0">
+                        <a:latin typeface="Calibri" charset="0"/>
+                        <a:ea typeface="Calibri" charset="0"/>
+                        <a:cs typeface="Calibri" charset="0"/>
+                      </a:endParaRPr>
+                    </a:p>
+                  </a:txBody>
+                  <a:tcPr marL="91440" marR="91440" marT="45720" marB="45720" anchor="ctr">
+                    <a:lnL w="9525" cap="flat" cmpd="sng" algn="ctr">
+                      <a:solidFill>
+                        <a:srgbClr val="DCE4EC"/>
+                      </a:solidFill>
+                      <a:prstDash val="solid"/>
+                      <a:round/>
+                      <a:headEnd type="none" w="med" len="med"/>
+                      <a:tailEnd type="none" w="med" len="med"/>
+                    </a:lnL>
+                    <a:lnR w="9525" cap="flat" cmpd="sng" algn="ctr">
+                      <a:solidFill>
+                        <a:srgbClr val="DCE4EC"/>
+                      </a:solidFill>
+                      <a:prstDash val="solid"/>
+                      <a:round/>
+                      <a:headEnd type="none" w="med" len="med"/>
+                      <a:tailEnd type="none" w="med" len="med"/>
+                    </a:lnR>
+                    <a:lnT w="9525" cap="flat" cmpd="sng" algn="ctr">
+                      <a:solidFill>
+                        <a:srgbClr val="DCE4EC"/>
+                      </a:solidFill>
+                      <a:prstDash val="solid"/>
+                      <a:round/>
+                      <a:headEnd type="none" w="med" len="med"/>
+                      <a:tailEnd type="none" w="med" len="med"/>
+                    </a:lnT>
+                    <a:lnB w="9525" cap="flat" cmpd="sng" algn="ctr">
+                      <a:solidFill>
+                        <a:srgbClr val="DCE4EC"/>
+                      </a:solidFill>
+                      <a:prstDash val="solid"/>
+                      <a:round/>
+                      <a:headEnd type="none" w="med" len="med"/>
+                      <a:tailEnd type="none" w="med" len="med"/>
+                    </a:lnB>
+                    <a:solidFill>
+                      <a:srgbClr val="FFFFFF"/>
+                    </a:solidFill>
+                  </a:tcPr>
+                </a:tc>
+              </a:tr>
+              <a:tr h="457200">
+                <a:tc>
+                  <a:txBody>
+                    <a:bodyPr/>
+                    <a:lstStyle/>
+                    <a:p>
+                      <a:pPr algn="l" indent="0" marL="0">
+                        <a:buNone/>
+                      </a:pPr>
+                      <a:r>
+                        <a:rPr lang="en-US" sz="1100" b="1" dirty="0">
+                          <a:solidFill>
+                            <a:srgbClr val="1B2A38"/>
+                          </a:solidFill>
+                          <a:latin typeface="Calibri" pitchFamily="34" charset="0"/>
+                          <a:ea typeface="Calibri" pitchFamily="34" charset="-122"/>
+                          <a:cs typeface="Calibri" pitchFamily="34" charset="-120"/>
+                        </a:rPr>
+                        <a:t>Chocolate</a:t>
+                      </a:r>
+                      <a:endParaRPr lang="en-US" sz="1100" dirty="0">
+                        <a:latin typeface="Calibri" charset="0"/>
+                        <a:ea typeface="Calibri" charset="0"/>
+                        <a:cs typeface="Calibri" charset="0"/>
+                      </a:endParaRPr>
+                    </a:p>
+                  </a:txBody>
+                  <a:tcPr marL="91440" marR="91440" marT="45720" marB="45720" anchor="ctr">
+                    <a:lnL w="9525" cap="flat" cmpd="sng" algn="ctr">
+                      <a:solidFill>
+                        <a:srgbClr val="DCE4EC"/>
+                      </a:solidFill>
+                      <a:prstDash val="solid"/>
+                      <a:round/>
+                      <a:headEnd type="none" w="med" len="med"/>
+                      <a:tailEnd type="none" w="med" len="med"/>
+                    </a:lnL>
+                    <a:lnR w="9525" cap="flat" cmpd="sng" algn="ctr">
+                      <a:solidFill>
+                        <a:srgbClr val="DCE4EC"/>
+                      </a:solidFill>
+                      <a:prstDash val="solid"/>
+                      <a:round/>
+                      <a:headEnd type="none" w="med" len="med"/>
+                      <a:tailEnd type="none" w="med" len="med"/>
+                    </a:lnR>
+                    <a:lnT w="9525" cap="flat" cmpd="sng" algn="ctr">
+                      <a:solidFill>
+                        <a:srgbClr val="DCE4EC"/>
+                      </a:solidFill>
+                      <a:prstDash val="solid"/>
+                      <a:round/>
+                      <a:headEnd type="none" w="med" len="med"/>
+                      <a:tailEnd type="none" w="med" len="med"/>
+                    </a:lnT>
+                    <a:lnB w="9525" cap="flat" cmpd="sng" algn="ctr">
+                      <a:solidFill>
+                        <a:srgbClr val="DCE4EC"/>
+                      </a:solidFill>
+                      <a:prstDash val="solid"/>
+                      <a:round/>
+                      <a:headEnd type="none" w="med" len="med"/>
+                      <a:tailEnd type="none" w="med" len="med"/>
+                    </a:lnB>
+                    <a:solidFill>
+                      <a:srgbClr val="F3F7FA"/>
+                    </a:solidFill>
+                  </a:tcPr>
+                </a:tc>
+                <a:tc>
+                  <a:txBody>
+                    <a:bodyPr/>
+                    <a:lstStyle/>
+                    <a:p>
+                      <a:pPr algn="ctr" indent="0" marL="0">
+                        <a:buNone/>
+                      </a:pPr>
+                      <a:r>
+                        <a:rPr lang="en-US" sz="1100" dirty="0">
+                          <a:solidFill>
+                            <a:srgbClr val="33444F"/>
+                          </a:solidFill>
+                          <a:latin typeface="Calibri" pitchFamily="34" charset="0"/>
+                          <a:ea typeface="Calibri" pitchFamily="34" charset="-122"/>
+                          <a:cs typeface="Calibri" pitchFamily="34" charset="-120"/>
+                        </a:rPr>
+                        <a:t>Enriched</a:t>
+                      </a:r>
+                      <a:endParaRPr lang="en-US" sz="1100" dirty="0">
+                        <a:latin typeface="Calibri" charset="0"/>
+                        <a:ea typeface="Calibri" charset="0"/>
+                        <a:cs typeface="Calibri" charset="0"/>
+                      </a:endParaRPr>
+                    </a:p>
+                  </a:txBody>
+                  <a:tcPr marL="91440" marR="91440" marT="45720" marB="45720" anchor="ctr">
+                    <a:lnL w="9525" cap="flat" cmpd="sng" algn="ctr">
+                      <a:solidFill>
+                        <a:srgbClr val="DCE4EC"/>
+                      </a:solidFill>
+                      <a:prstDash val="solid"/>
+                      <a:round/>
+                      <a:headEnd type="none" w="med" len="med"/>
+                      <a:tailEnd type="none" w="med" len="med"/>
+                    </a:lnL>
+                    <a:lnR w="9525" cap="flat" cmpd="sng" algn="ctr">
+                      <a:solidFill>
+                        <a:srgbClr val="DCE4EC"/>
+                      </a:solidFill>
+                      <a:prstDash val="solid"/>
+                      <a:round/>
+                      <a:headEnd type="none" w="med" len="med"/>
+                      <a:tailEnd type="none" w="med" len="med"/>
+                    </a:lnR>
+                    <a:lnT w="9525" cap="flat" cmpd="sng" algn="ctr">
+                      <a:solidFill>
+                        <a:srgbClr val="DCE4EC"/>
+                      </a:solidFill>
+                      <a:prstDash val="solid"/>
+                      <a:round/>
+                      <a:headEnd type="none" w="med" len="med"/>
+                      <a:tailEnd type="none" w="med" len="med"/>
+                    </a:lnT>
+                    <a:lnB w="9525" cap="flat" cmpd="sng" algn="ctr">
+                      <a:solidFill>
+                        <a:srgbClr val="DCE4EC"/>
+                      </a:solidFill>
+                      <a:prstDash val="solid"/>
+                      <a:round/>
+                      <a:headEnd type="none" w="med" len="med"/>
+                      <a:tailEnd type="none" w="med" len="med"/>
+                    </a:lnB>
+                    <a:solidFill>
+                      <a:srgbClr val="F3F7FA"/>
+                    </a:solidFill>
+                  </a:tcPr>
+                </a:tc>
+                <a:tc>
+                  <a:txBody>
+                    <a:bodyPr/>
+                    <a:lstStyle/>
+                    <a:p>
+                      <a:pPr algn="ctr" indent="0" marL="0">
+                        <a:buNone/>
+                      </a:pPr>
+                      <a:r>
+                        <a:rPr lang="en-US" sz="1100" dirty="0">
+                          <a:solidFill>
+                            <a:srgbClr val="33444F"/>
+                          </a:solidFill>
+                          <a:latin typeface="Calibri" pitchFamily="34" charset="0"/>
+                          <a:ea typeface="Calibri" pitchFamily="34" charset="-122"/>
+                          <a:cs typeface="Calibri" pitchFamily="34" charset="-120"/>
+                        </a:rPr>
+                        <a:t>Haemophilus, Neisseria</a:t>
+                      </a:r>
+                      <a:endParaRPr lang="en-US" sz="1100" dirty="0">
+                        <a:latin typeface="Calibri" charset="0"/>
+                        <a:ea typeface="Calibri" charset="0"/>
+                        <a:cs typeface="Calibri" charset="0"/>
+                      </a:endParaRPr>
+                    </a:p>
+                  </a:txBody>
+                  <a:tcPr marL="91440" marR="91440" marT="45720" marB="45720" anchor="ctr">
+                    <a:lnL w="9525" cap="flat" cmpd="sng" algn="ctr">
+                      <a:solidFill>
+                        <a:srgbClr val="DCE4EC"/>
+                      </a:solidFill>
+                      <a:prstDash val="solid"/>
+                      <a:round/>
+                      <a:headEnd type="none" w="med" len="med"/>
+                      <a:tailEnd type="none" w="med" len="med"/>
+                    </a:lnL>
+                    <a:lnR w="9525" cap="flat" cmpd="sng" algn="ctr">
+                      <a:solidFill>
+                        <a:srgbClr val="DCE4EC"/>
+                      </a:solidFill>
+                      <a:prstDash val="solid"/>
+                      <a:round/>
+                      <a:headEnd type="none" w="med" len="med"/>
+                      <a:tailEnd type="none" w="med" len="med"/>
+                    </a:lnR>
+                    <a:lnT w="9525" cap="flat" cmpd="sng" algn="ctr">
+                      <a:solidFill>
+                        <a:srgbClr val="DCE4EC"/>
+                      </a:solidFill>
+                      <a:prstDash val="solid"/>
+                      <a:round/>
+                      <a:headEnd type="none" w="med" len="med"/>
+                      <a:tailEnd type="none" w="med" len="med"/>
+                    </a:lnT>
+                    <a:lnB w="9525" cap="flat" cmpd="sng" algn="ctr">
+                      <a:solidFill>
+                        <a:srgbClr val="DCE4EC"/>
+                      </a:solidFill>
+                      <a:prstDash val="solid"/>
+                      <a:round/>
+                      <a:headEnd type="none" w="med" len="med"/>
+                      <a:tailEnd type="none" w="med" len="med"/>
+                    </a:lnB>
+                    <a:solidFill>
+                      <a:srgbClr val="F3F7FA"/>
+                    </a:solidFill>
+                  </a:tcPr>
+                </a:tc>
+              </a:tr>
+              <a:tr h="457200">
+                <a:tc>
+                  <a:txBody>
+                    <a:bodyPr/>
+                    <a:lstStyle/>
+                    <a:p>
+                      <a:pPr algn="l" indent="0" marL="0">
+                        <a:buNone/>
+                      </a:pPr>
+                      <a:r>
+                        <a:rPr lang="en-US" sz="1100" b="1" dirty="0">
+                          <a:solidFill>
+                            <a:srgbClr val="1B2A38"/>
+                          </a:solidFill>
+                          <a:latin typeface="Calibri" pitchFamily="34" charset="0"/>
+                          <a:ea typeface="Calibri" pitchFamily="34" charset="-122"/>
+                          <a:cs typeface="Calibri" pitchFamily="34" charset="-120"/>
+                        </a:rPr>
+                        <a:t>CNA / PEA</a:t>
+                      </a:r>
+                      <a:endParaRPr lang="en-US" sz="1100" dirty="0">
+                        <a:latin typeface="Calibri" charset="0"/>
+                        <a:ea typeface="Calibri" charset="0"/>
+                        <a:cs typeface="Calibri" charset="0"/>
+                      </a:endParaRPr>
+                    </a:p>
+                  </a:txBody>
+                  <a:tcPr marL="91440" marR="91440" marT="45720" marB="45720" anchor="ctr">
+                    <a:lnL w="9525" cap="flat" cmpd="sng" algn="ctr">
+                      <a:solidFill>
+                        <a:srgbClr val="DCE4EC"/>
+                      </a:solidFill>
+                      <a:prstDash val="solid"/>
+                      <a:round/>
+                      <a:headEnd type="none" w="med" len="med"/>
+                      <a:tailEnd type="none" w="med" len="med"/>
+                    </a:lnL>
+                    <a:lnR w="9525" cap="flat" cmpd="sng" algn="ctr">
+                      <a:solidFill>
+                        <a:srgbClr val="DCE4EC"/>
+                      </a:solidFill>
+                      <a:prstDash val="solid"/>
+                      <a:round/>
+                      <a:headEnd type="none" w="med" len="med"/>
+                      <a:tailEnd type="none" w="med" len="med"/>
+                    </a:lnR>
+                    <a:lnT w="9525" cap="flat" cmpd="sng" algn="ctr">
+                      <a:solidFill>
+                        <a:srgbClr val="DCE4EC"/>
+                      </a:solidFill>
+                      <a:prstDash val="solid"/>
+                      <a:round/>
+                      <a:headEnd type="none" w="med" len="med"/>
+                      <a:tailEnd type="none" w="med" len="med"/>
+                    </a:lnT>
+                    <a:lnB w="9525" cap="flat" cmpd="sng" algn="ctr">
+                      <a:solidFill>
+                        <a:srgbClr val="DCE4EC"/>
+                      </a:solidFill>
+                      <a:prstDash val="solid"/>
+                      <a:round/>
+                      <a:headEnd type="none" w="med" len="med"/>
+                      <a:tailEnd type="none" w="med" len="med"/>
+                    </a:lnB>
+                    <a:solidFill>
+                      <a:srgbClr val="FFFFFF"/>
+                    </a:solidFill>
+                  </a:tcPr>
+                </a:tc>
+                <a:tc>
+                  <a:txBody>
+                    <a:bodyPr/>
+                    <a:lstStyle/>
+                    <a:p>
+                      <a:pPr algn="ctr" indent="0" marL="0">
+                        <a:buNone/>
+                      </a:pPr>
+                      <a:r>
+                        <a:rPr lang="en-US" sz="1100" dirty="0">
+                          <a:solidFill>
+                            <a:srgbClr val="33444F"/>
+                          </a:solidFill>
+                          <a:latin typeface="Calibri" pitchFamily="34" charset="0"/>
+                          <a:ea typeface="Calibri" pitchFamily="34" charset="-122"/>
+                          <a:cs typeface="Calibri" pitchFamily="34" charset="-120"/>
+                        </a:rPr>
+                        <a:t>Selective</a:t>
+                      </a:r>
+                      <a:endParaRPr lang="en-US" sz="1100" dirty="0">
+                        <a:latin typeface="Calibri" charset="0"/>
+                        <a:ea typeface="Calibri" charset="0"/>
+                        <a:cs typeface="Calibri" charset="0"/>
+                      </a:endParaRPr>
+                    </a:p>
+                  </a:txBody>
+                  <a:tcPr marL="91440" marR="91440" marT="45720" marB="45720" anchor="ctr">
+                    <a:lnL w="9525" cap="flat" cmpd="sng" algn="ctr">
+                      <a:solidFill>
+                        <a:srgbClr val="DCE4EC"/>
+                      </a:solidFill>
+                      <a:prstDash val="solid"/>
+                      <a:round/>
+                      <a:headEnd type="none" w="med" len="med"/>
+                      <a:tailEnd type="none" w="med" len="med"/>
+                    </a:lnL>
+                    <a:lnR w="9525" cap="flat" cmpd="sng" algn="ctr">
+                      <a:solidFill>
+                        <a:srgbClr val="DCE4EC"/>
+                      </a:solidFill>
+                      <a:prstDash val="solid"/>
+                      <a:round/>
+                      <a:headEnd type="none" w="med" len="med"/>
+                      <a:tailEnd type="none" w="med" len="med"/>
+                    </a:lnR>
+                    <a:lnT w="9525" cap="flat" cmpd="sng" algn="ctr">
+                      <a:solidFill>
+                        <a:srgbClr val="DCE4EC"/>
+                      </a:solidFill>
+                      <a:prstDash val="solid"/>
+                      <a:round/>
+                      <a:headEnd type="none" w="med" len="med"/>
+                      <a:tailEnd type="none" w="med" len="med"/>
+                    </a:lnT>
+                    <a:lnB w="9525" cap="flat" cmpd="sng" algn="ctr">
+                      <a:solidFill>
+                        <a:srgbClr val="DCE4EC"/>
+                      </a:solidFill>
+                      <a:prstDash val="solid"/>
+                      <a:round/>
+                      <a:headEnd type="none" w="med" len="med"/>
+                      <a:tailEnd type="none" w="med" len="med"/>
+                    </a:lnB>
+                    <a:solidFill>
+                      <a:srgbClr val="FFFFFF"/>
+                    </a:solidFill>
+                  </a:tcPr>
+                </a:tc>
+                <a:tc>
+                  <a:txBody>
+                    <a:bodyPr/>
+                    <a:lstStyle/>
+                    <a:p>
+                      <a:pPr algn="ctr" indent="0" marL="0">
+                        <a:buNone/>
+                      </a:pPr>
+                      <a:r>
+                        <a:rPr lang="en-US" sz="1100" dirty="0">
+                          <a:solidFill>
+                            <a:srgbClr val="33444F"/>
+                          </a:solidFill>
+                          <a:latin typeface="Calibri" pitchFamily="34" charset="0"/>
+                          <a:ea typeface="Calibri" pitchFamily="34" charset="-122"/>
+                          <a:cs typeface="Calibri" pitchFamily="34" charset="-120"/>
+                        </a:rPr>
+                        <a:t>Gram-positives</a:t>
+                      </a:r>
+                      <a:endParaRPr lang="en-US" sz="1100" dirty="0">
+                        <a:latin typeface="Calibri" charset="0"/>
+                        <a:ea typeface="Calibri" charset="0"/>
+                        <a:cs typeface="Calibri" charset="0"/>
+                      </a:endParaRPr>
+                    </a:p>
+                  </a:txBody>
+                  <a:tcPr marL="91440" marR="91440" marT="45720" marB="45720" anchor="ctr">
+                    <a:lnL w="9525" cap="flat" cmpd="sng" algn="ctr">
+                      <a:solidFill>
+                        <a:srgbClr val="DCE4EC"/>
+                      </a:solidFill>
+                      <a:prstDash val="solid"/>
+                      <a:round/>
+                      <a:headEnd type="none" w="med" len="med"/>
+                      <a:tailEnd type="none" w="med" len="med"/>
+                    </a:lnL>
+                    <a:lnR w="9525" cap="flat" cmpd="sng" algn="ctr">
+                      <a:solidFill>
+                        <a:srgbClr val="DCE4EC"/>
+                      </a:solidFill>
+                      <a:prstDash val="solid"/>
+                      <a:round/>
+                      <a:headEnd type="none" w="med" len="med"/>
+                      <a:tailEnd type="none" w="med" len="med"/>
+                    </a:lnR>
+                    <a:lnT w="9525" cap="flat" cmpd="sng" algn="ctr">
+                      <a:solidFill>
+                        <a:srgbClr val="DCE4EC"/>
+                      </a:solidFill>
+                      <a:prstDash val="solid"/>
+                      <a:round/>
+                      <a:headEnd type="none" w="med" len="med"/>
+                      <a:tailEnd type="none" w="med" len="med"/>
+                    </a:lnT>
+                    <a:lnB w="9525" cap="flat" cmpd="sng" algn="ctr">
+                      <a:solidFill>
+                        <a:srgbClr val="DCE4EC"/>
+                      </a:solidFill>
+                      <a:prstDash val="solid"/>
+                      <a:round/>
+                      <a:headEnd type="none" w="med" len="med"/>
+                      <a:tailEnd type="none" w="med" len="med"/>
+                    </a:lnB>
+                    <a:solidFill>
+                      <a:srgbClr val="FFFFFF"/>
+                    </a:solidFill>
+                  </a:tcPr>
+                </a:tc>
+              </a:tr>
+              <a:tr h="457200">
+                <a:tc>
+                  <a:txBody>
+                    <a:bodyPr/>
+                    <a:lstStyle/>
+                    <a:p>
+                      <a:pPr algn="l" indent="0" marL="0">
+                        <a:buNone/>
+                      </a:pPr>
+                      <a:r>
+                        <a:rPr lang="en-US" sz="1100" b="1" dirty="0">
+                          <a:solidFill>
+                            <a:srgbClr val="1B2A38"/>
+                          </a:solidFill>
+                          <a:latin typeface="Calibri" pitchFamily="34" charset="0"/>
+                          <a:ea typeface="Calibri" pitchFamily="34" charset="-122"/>
+                          <a:cs typeface="Calibri" pitchFamily="34" charset="-120"/>
+                        </a:rPr>
+                        <a:t>Sabouraud</a:t>
+                      </a:r>
+                      <a:endParaRPr lang="en-US" sz="1100" dirty="0">
+                        <a:latin typeface="Calibri" charset="0"/>
+                        <a:ea typeface="Calibri" charset="0"/>
+                        <a:cs typeface="Calibri" charset="0"/>
+                      </a:endParaRPr>
+                    </a:p>
+                  </a:txBody>
+                  <a:tcPr marL="91440" marR="91440" marT="45720" marB="45720" anchor="ctr">
+                    <a:lnL w="9525" cap="flat" cmpd="sng" algn="ctr">
+                      <a:solidFill>
+                        <a:srgbClr val="DCE4EC"/>
+                      </a:solidFill>
+                      <a:prstDash val="solid"/>
+                      <a:round/>
+                      <a:headEnd type="none" w="med" len="med"/>
+                      <a:tailEnd type="none" w="med" len="med"/>
+                    </a:lnL>
+                    <a:lnR w="9525" cap="flat" cmpd="sng" algn="ctr">
+                      <a:solidFill>
+                        <a:srgbClr val="DCE4EC"/>
+                      </a:solidFill>
+                      <a:prstDash val="solid"/>
+                      <a:round/>
+                      <a:headEnd type="none" w="med" len="med"/>
+                      <a:tailEnd type="none" w="med" len="med"/>
+                    </a:lnR>
+                    <a:lnT w="9525" cap="flat" cmpd="sng" algn="ctr">
+                      <a:solidFill>
+                        <a:srgbClr val="DCE4EC"/>
+                      </a:solidFill>
+                      <a:prstDash val="solid"/>
+                      <a:round/>
+                      <a:headEnd type="none" w="med" len="med"/>
+                      <a:tailEnd type="none" w="med" len="med"/>
+                    </a:lnT>
+                    <a:lnB w="9525" cap="flat" cmpd="sng" algn="ctr">
+                      <a:solidFill>
+                        <a:srgbClr val="DCE4EC"/>
+                      </a:solidFill>
+                      <a:prstDash val="solid"/>
+                      <a:round/>
+                      <a:headEnd type="none" w="med" len="med"/>
+                      <a:tailEnd type="none" w="med" len="med"/>
+                    </a:lnB>
+                    <a:solidFill>
+                      <a:srgbClr val="F3F7FA"/>
+                    </a:solidFill>
+                  </a:tcPr>
+                </a:tc>
+                <a:tc>
+                  <a:txBody>
+                    <a:bodyPr/>
+                    <a:lstStyle/>
+                    <a:p>
+                      <a:pPr algn="ctr" indent="0" marL="0">
+                        <a:buNone/>
+                      </a:pPr>
+                      <a:r>
+                        <a:rPr lang="en-US" sz="1100" dirty="0">
+                          <a:solidFill>
+                            <a:srgbClr val="33444F"/>
+                          </a:solidFill>
+                          <a:latin typeface="Calibri" pitchFamily="34" charset="0"/>
+                          <a:ea typeface="Calibri" pitchFamily="34" charset="-122"/>
+                          <a:cs typeface="Calibri" pitchFamily="34" charset="-120"/>
+                        </a:rPr>
+                        <a:t>Selective</a:t>
+                      </a:r>
+                      <a:endParaRPr lang="en-US" sz="1100" dirty="0">
+                        <a:latin typeface="Calibri" charset="0"/>
+                        <a:ea typeface="Calibri" charset="0"/>
+                        <a:cs typeface="Calibri" charset="0"/>
+                      </a:endParaRPr>
+                    </a:p>
+                  </a:txBody>
+                  <a:tcPr marL="91440" marR="91440" marT="45720" marB="45720" anchor="ctr">
+                    <a:lnL w="9525" cap="flat" cmpd="sng" algn="ctr">
+                      <a:solidFill>
+                        <a:srgbClr val="DCE4EC"/>
+                      </a:solidFill>
+                      <a:prstDash val="solid"/>
+                      <a:round/>
+                      <a:headEnd type="none" w="med" len="med"/>
+                      <a:tailEnd type="none" w="med" len="med"/>
+                    </a:lnL>
+                    <a:lnR w="9525" cap="flat" cmpd="sng" algn="ctr">
+                      <a:solidFill>
+                        <a:srgbClr val="DCE4EC"/>
+                      </a:solidFill>
+                      <a:prstDash val="solid"/>
+                      <a:round/>
+                      <a:headEnd type="none" w="med" len="med"/>
+                      <a:tailEnd type="none" w="med" len="med"/>
+                    </a:lnR>
+                    <a:lnT w="9525" cap="flat" cmpd="sng" algn="ctr">
+                      <a:solidFill>
+                        <a:srgbClr val="DCE4EC"/>
+                      </a:solidFill>
+                      <a:prstDash val="solid"/>
+                      <a:round/>
+                      <a:headEnd type="none" w="med" len="med"/>
+                      <a:tailEnd type="none" w="med" len="med"/>
+                    </a:lnT>
+                    <a:lnB w="9525" cap="flat" cmpd="sng" algn="ctr">
+                      <a:solidFill>
+                        <a:srgbClr val="DCE4EC"/>
+                      </a:solidFill>
+                      <a:prstDash val="solid"/>
+                      <a:round/>
+                      <a:headEnd type="none" w="med" len="med"/>
+                      <a:tailEnd type="none" w="med" len="med"/>
+                    </a:lnB>
+                    <a:solidFill>
+                      <a:srgbClr val="F3F7FA"/>
+                    </a:solidFill>
+                  </a:tcPr>
+                </a:tc>
+                <a:tc>
+                  <a:txBody>
+                    <a:bodyPr/>
+                    <a:lstStyle/>
+                    <a:p>
+                      <a:pPr algn="ctr" indent="0" marL="0">
+                        <a:buNone/>
+                      </a:pPr>
+                      <a:r>
+                        <a:rPr lang="en-US" sz="1100" dirty="0">
+                          <a:solidFill>
+                            <a:srgbClr val="33444F"/>
+                          </a:solidFill>
+                          <a:latin typeface="Calibri" pitchFamily="34" charset="0"/>
+                          <a:ea typeface="Calibri" pitchFamily="34" charset="-122"/>
+                          <a:cs typeface="Calibri" pitchFamily="34" charset="-120"/>
+                        </a:rPr>
+                        <a:t>Fungi</a:t>
+                      </a:r>
+                      <a:endParaRPr lang="en-US" sz="1100" dirty="0">
+                        <a:latin typeface="Calibri" charset="0"/>
+                        <a:ea typeface="Calibri" charset="0"/>
+                        <a:cs typeface="Calibri" charset="0"/>
+                      </a:endParaRPr>
+                    </a:p>
+                  </a:txBody>
+                  <a:tcPr marL="91440" marR="91440" marT="45720" marB="45720" anchor="ctr">
+                    <a:lnL w="9525" cap="flat" cmpd="sng" algn="ctr">
+                      <a:solidFill>
+                        <a:srgbClr val="DCE4EC"/>
+                      </a:solidFill>
+                      <a:prstDash val="solid"/>
+                      <a:round/>
+                      <a:headEnd type="none" w="med" len="med"/>
+                      <a:tailEnd type="none" w="med" len="med"/>
+                    </a:lnL>
+                    <a:lnR w="9525" cap="flat" cmpd="sng" algn="ctr">
+                      <a:solidFill>
+                        <a:srgbClr val="DCE4EC"/>
+                      </a:solidFill>
+                      <a:prstDash val="solid"/>
+                      <a:round/>
+                      <a:headEnd type="none" w="med" len="med"/>
+                      <a:tailEnd type="none" w="med" len="med"/>
+                    </a:lnR>
+                    <a:lnT w="9525" cap="flat" cmpd="sng" algn="ctr">
+                      <a:solidFill>
+                        <a:srgbClr val="DCE4EC"/>
+                      </a:solidFill>
+                      <a:prstDash val="solid"/>
+                      <a:round/>
+                      <a:headEnd type="none" w="med" len="med"/>
+                      <a:tailEnd type="none" w="med" len="med"/>
+                    </a:lnT>
+                    <a:lnB w="9525" cap="flat" cmpd="sng" algn="ctr">
+                      <a:solidFill>
+                        <a:srgbClr val="DCE4EC"/>
+                      </a:solidFill>
+                      <a:prstDash val="solid"/>
+                      <a:round/>
+                      <a:headEnd type="none" w="med" len="med"/>
+                      <a:tailEnd type="none" w="med" len="med"/>
+                    </a:lnB>
+                    <a:solidFill>
+                      <a:srgbClr val="F3F7FA"/>
+                    </a:solidFill>
+                  </a:tcPr>
+                </a:tc>
+              </a:tr>
+              <a:tr h="457200">
+                <a:tc>
+                  <a:txBody>
+                    <a:bodyPr/>
+                    <a:lstStyle/>
+                    <a:p>
+                      <a:pPr algn="l" indent="0" marL="0">
+                        <a:buNone/>
+                      </a:pPr>
+                      <a:r>
+                        <a:rPr lang="en-US" sz="1100" b="1" dirty="0">
+                          <a:solidFill>
+                            <a:srgbClr val="1B2A38"/>
+                          </a:solidFill>
+                          <a:latin typeface="Calibri" pitchFamily="34" charset="0"/>
+                          <a:ea typeface="Calibri" pitchFamily="34" charset="-122"/>
+                          <a:cs typeface="Calibri" pitchFamily="34" charset="-120"/>
+                        </a:rPr>
+                        <a:t>Thayer-Martin</a:t>
+                      </a:r>
+                      <a:endParaRPr lang="en-US" sz="1100" dirty="0">
+                        <a:latin typeface="Calibri" charset="0"/>
+                        <a:ea typeface="Calibri" charset="0"/>
+                        <a:cs typeface="Calibri" charset="0"/>
+                      </a:endParaRPr>
+                    </a:p>
+                  </a:txBody>
+                  <a:tcPr marL="91440" marR="91440" marT="45720" marB="45720" anchor="ctr">
+                    <a:lnL w="9525" cap="flat" cmpd="sng" algn="ctr">
+                      <a:solidFill>
+                        <a:srgbClr val="DCE4EC"/>
+                      </a:solidFill>
+                      <a:prstDash val="solid"/>
+                      <a:round/>
+                      <a:headEnd type="none" w="med" len="med"/>
+                      <a:tailEnd type="none" w="med" len="med"/>
+                    </a:lnL>
+                    <a:lnR w="9525" cap="flat" cmpd="sng" algn="ctr">
+                      <a:solidFill>
+                        <a:srgbClr val="DCE4EC"/>
+                      </a:solidFill>
+                      <a:prstDash val="solid"/>
+                      <a:round/>
+                      <a:headEnd type="none" w="med" len="med"/>
+                      <a:tailEnd type="none" w="med" len="med"/>
+                    </a:lnR>
+                    <a:lnT w="9525" cap="flat" cmpd="sng" algn="ctr">
+                      <a:solidFill>
+                        <a:srgbClr val="DCE4EC"/>
+                      </a:solidFill>
+                      <a:prstDash val="solid"/>
+                      <a:round/>
+                      <a:headEnd type="none" w="med" len="med"/>
+                      <a:tailEnd type="none" w="med" len="med"/>
+                    </a:lnT>
+                    <a:lnB w="9525" cap="flat" cmpd="sng" algn="ctr">
+                      <a:solidFill>
+                        <a:srgbClr val="DCE4EC"/>
+                      </a:solidFill>
+                      <a:prstDash val="solid"/>
+                      <a:round/>
+                      <a:headEnd type="none" w="med" len="med"/>
+                      <a:tailEnd type="none" w="med" len="med"/>
+                    </a:lnB>
+                    <a:solidFill>
+                      <a:srgbClr val="FFFFFF"/>
+                    </a:solidFill>
+                  </a:tcPr>
+                </a:tc>
+                <a:tc>
+                  <a:txBody>
+                    <a:bodyPr/>
+                    <a:lstStyle/>
+                    <a:p>
+                      <a:pPr algn="ctr" indent="0" marL="0">
+                        <a:buNone/>
+                      </a:pPr>
+                      <a:r>
+                        <a:rPr lang="en-US" sz="1100" dirty="0">
+                          <a:solidFill>
+                            <a:srgbClr val="33444F"/>
+                          </a:solidFill>
+                          <a:latin typeface="Calibri" pitchFamily="34" charset="0"/>
+                          <a:ea typeface="Calibri" pitchFamily="34" charset="-122"/>
+                          <a:cs typeface="Calibri" pitchFamily="34" charset="-120"/>
+                        </a:rPr>
+                        <a:t>Selective</a:t>
+                      </a:r>
+                      <a:endParaRPr lang="en-US" sz="1100" dirty="0">
+                        <a:latin typeface="Calibri" charset="0"/>
+                        <a:ea typeface="Calibri" charset="0"/>
+                        <a:cs typeface="Calibri" charset="0"/>
+                      </a:endParaRPr>
+                    </a:p>
+                  </a:txBody>
+                  <a:tcPr marL="91440" marR="91440" marT="45720" marB="45720" anchor="ctr">
+                    <a:lnL w="9525" cap="flat" cmpd="sng" algn="ctr">
+                      <a:solidFill>
+                        <a:srgbClr val="DCE4EC"/>
+                      </a:solidFill>
+                      <a:prstDash val="solid"/>
+                      <a:round/>
+                      <a:headEnd type="none" w="med" len="med"/>
+                      <a:tailEnd type="none" w="med" len="med"/>
+                    </a:lnL>
+                    <a:lnR w="9525" cap="flat" cmpd="sng" algn="ctr">
+                      <a:solidFill>
+                        <a:srgbClr val="DCE4EC"/>
+                      </a:solidFill>
+                      <a:prstDash val="solid"/>
+                      <a:round/>
+                      <a:headEnd type="none" w="med" len="med"/>
+                      <a:tailEnd type="none" w="med" len="med"/>
+                    </a:lnR>
+                    <a:lnT w="9525" cap="flat" cmpd="sng" algn="ctr">
+                      <a:solidFill>
+                        <a:srgbClr val="DCE4EC"/>
+                      </a:solidFill>
+                      <a:prstDash val="solid"/>
+                      <a:round/>
+                      <a:headEnd type="none" w="med" len="med"/>
+                      <a:tailEnd type="none" w="med" len="med"/>
+                    </a:lnT>
+                    <a:lnB w="9525" cap="flat" cmpd="sng" algn="ctr">
+                      <a:solidFill>
+                        <a:srgbClr val="DCE4EC"/>
+                      </a:solidFill>
+                      <a:prstDash val="solid"/>
+                      <a:round/>
+                      <a:headEnd type="none" w="med" len="med"/>
+                      <a:tailEnd type="none" w="med" len="med"/>
+                    </a:lnB>
+                    <a:solidFill>
+                      <a:srgbClr val="FFFFFF"/>
+                    </a:solidFill>
+                  </a:tcPr>
+                </a:tc>
+                <a:tc>
+                  <a:txBody>
+                    <a:bodyPr/>
+                    <a:lstStyle/>
+                    <a:p>
+                      <a:pPr algn="ctr" indent="0" marL="0">
+                        <a:buNone/>
+                      </a:pPr>
+                      <a:r>
+                        <a:rPr lang="en-US" sz="1100" dirty="0">
+                          <a:solidFill>
+                            <a:srgbClr val="33444F"/>
+                          </a:solidFill>
+                          <a:latin typeface="Calibri" pitchFamily="34" charset="0"/>
+                          <a:ea typeface="Calibri" pitchFamily="34" charset="-122"/>
+                          <a:cs typeface="Calibri" pitchFamily="34" charset="-120"/>
+                        </a:rPr>
+                        <a:t>Pathogenic Neisseria</a:t>
+                      </a:r>
+                      <a:endParaRPr lang="en-US" sz="1100" dirty="0">
+                        <a:latin typeface="Calibri" charset="0"/>
+                        <a:ea typeface="Calibri" charset="0"/>
+                        <a:cs typeface="Calibri" charset="0"/>
+                      </a:endParaRPr>
+                    </a:p>
+                  </a:txBody>
+                  <a:tcPr marL="91440" marR="91440" marT="45720" marB="45720" anchor="ctr">
+                    <a:lnL w="9525" cap="flat" cmpd="sng" algn="ctr">
+                      <a:solidFill>
+                        <a:srgbClr val="DCE4EC"/>
+                      </a:solidFill>
+                      <a:prstDash val="solid"/>
+                      <a:round/>
+                      <a:headEnd type="none" w="med" len="med"/>
+                      <a:tailEnd type="none" w="med" len="med"/>
+                    </a:lnL>
+                    <a:lnR w="9525" cap="flat" cmpd="sng" algn="ctr">
+                      <a:solidFill>
+                        <a:srgbClr val="DCE4EC"/>
+                      </a:solidFill>
+                      <a:prstDash val="solid"/>
+                      <a:round/>
+                      <a:headEnd type="none" w="med" len="med"/>
+                      <a:tailEnd type="none" w="med" len="med"/>
+                    </a:lnR>
+                    <a:lnT w="9525" cap="flat" cmpd="sng" algn="ctr">
+                      <a:solidFill>
+                        <a:srgbClr val="DCE4EC"/>
+                      </a:solidFill>
+                      <a:prstDash val="solid"/>
+                      <a:round/>
+                      <a:headEnd type="none" w="med" len="med"/>
+                      <a:tailEnd type="none" w="med" len="med"/>
+                    </a:lnT>
+                    <a:lnB w="9525" cap="flat" cmpd="sng" algn="ctr">
+                      <a:solidFill>
+                        <a:srgbClr val="DCE4EC"/>
+                      </a:solidFill>
+                      <a:prstDash val="solid"/>
+                      <a:round/>
+                      <a:headEnd type="none" w="med" len="med"/>
+                      <a:tailEnd type="none" w="med" len="med"/>
+                    </a:lnB>
+                    <a:solidFill>
+                      <a:srgbClr val="FFFFFF"/>
+                    </a:solidFill>
+                  </a:tcPr>
+                </a:tc>
+              </a:tr>
+            </a:tbl>
+          </a:graphicData>
+        </a:graphic>
+      </p:graphicFrame>
+      <p:sp>
+        <p:nvSpPr>
+          <p:cNvPr id="5" name="Text 2"/>
+          <p:cNvSpPr/>
+          <p:nvPr/>
+        </p:nvSpPr>
+        <p:spPr>
+          <a:xfrm>
+            <a:off x="566928" y="6016752"/>
+            <a:ext cx="11057839" cy="365760"/>
           </a:xfrm>
           <a:prstGeom prst="rect">
             <a:avLst/>
@@ -12093,307 +16479,27 @@
           <a:bodyPr wrap="square" lIns="0" tIns="0" rIns="0" bIns="0" rtlCol="0" anchor="ctr"/>
           <a:lstStyle/>
           <a:p>
-            <a:pPr indent="0" marL="0">
-              <a:buNone/>
-            </a:pPr>
-            <a:r>
-              <a:rPr lang="en-US" sz="1200" b="1" spc="100" kern="0" dirty="0">
-                <a:solidFill>
-                  <a:srgbClr val="1F5722"/>
-                </a:solidFill>
-                <a:latin typeface="Calibri" pitchFamily="34" charset="0"/>
-                <a:ea typeface="Calibri" pitchFamily="34" charset="-122"/>
-                <a:cs typeface="Calibri" pitchFamily="34" charset="-120"/>
-              </a:rPr>
-              <a:t>CLASSIC BENCH TESTS</a:t>
-            </a:r>
-            <a:endParaRPr lang="en-US" sz="1200" dirty="0"/>
-          </a:p>
-        </p:txBody>
-      </p:sp>
-      <p:sp>
-        <p:nvSpPr>
-          <p:cNvPr id="6" name="Text 4"/>
-          <p:cNvSpPr/>
-          <p:nvPr/>
-        </p:nvSpPr>
-        <p:spPr>
-          <a:xfrm>
-            <a:off x="804672" y="2029968"/>
-            <a:ext cx="4870552" cy="3474720"/>
-          </a:xfrm>
-          <a:prstGeom prst="rect">
-            <a:avLst/>
-          </a:prstGeom>
-          <a:noFill/>
-          <a:ln/>
-        </p:spPr>
-        <p:txBody>
-          <a:bodyPr wrap="square" lIns="0" tIns="0" rIns="0" bIns="0" rtlCol="0" anchor="t"/>
-          <a:lstStyle/>
-          <a:p>
-            <a:pPr algn="l" marL="177800" indent="-177800">
-              <a:spcAft>
-                <a:spcPts val="900"/>
-              </a:spcAft>
-              <a:buSzPct val="100000"/>
-              <a:buChar char="•"/>
-            </a:pPr>
-            <a:r>
-              <a:rPr lang="en-US" sz="1250" b="1" dirty="0">
-                <a:solidFill>
-                  <a:srgbClr val="1B2A38"/>
-                </a:solidFill>
-                <a:latin typeface="Calibri" pitchFamily="34" charset="0"/>
-                <a:ea typeface="Calibri" pitchFamily="34" charset="-122"/>
-                <a:cs typeface="Calibri" pitchFamily="34" charset="-120"/>
-              </a:rPr>
-              <a:t>Catalase separates staphylococci (positive) from streptococci (negative).</a:t>
-            </a:r>
-            <a:endParaRPr lang="en-US" sz="1250" dirty="0"/>
-          </a:p>
-          <a:p>
-            <a:pPr algn="l" marL="177800" indent="-177800">
-              <a:spcAft>
-                <a:spcPts val="900"/>
-              </a:spcAft>
-              <a:buSzPct val="100000"/>
-              <a:buChar char="•"/>
-            </a:pPr>
-            <a:r>
-              <a:rPr lang="en-US" sz="1250" dirty="0">
-                <a:solidFill>
-                  <a:srgbClr val="33444F"/>
-                </a:solidFill>
-                <a:latin typeface="Calibri" pitchFamily="34" charset="0"/>
-                <a:ea typeface="Calibri" pitchFamily="34" charset="-122"/>
-                <a:cs typeface="Calibri" pitchFamily="34" charset="-120"/>
-              </a:rPr>
-              <a:t>Coagulase separates S. aureus (positive) from coagulase-negative staphylococci.</a:t>
-            </a:r>
-            <a:endParaRPr lang="en-US" sz="1250" dirty="0"/>
-          </a:p>
-          <a:p>
-            <a:pPr algn="l" marL="177800" indent="-177800">
-              <a:spcAft>
-                <a:spcPts val="900"/>
-              </a:spcAft>
-              <a:buSzPct val="100000"/>
-              <a:buChar char="•"/>
-            </a:pPr>
-            <a:r>
-              <a:rPr lang="en-US" sz="1250" dirty="0">
-                <a:solidFill>
-                  <a:srgbClr val="33444F"/>
-                </a:solidFill>
-                <a:latin typeface="Calibri" pitchFamily="34" charset="0"/>
-                <a:ea typeface="Calibri" pitchFamily="34" charset="-122"/>
-                <a:cs typeface="Calibri" pitchFamily="34" charset="-120"/>
-              </a:rPr>
-              <a:t>Oxidase positive: Pseudomonas, Neisseria, etc.</a:t>
-            </a:r>
-            <a:endParaRPr lang="en-US" sz="1250" dirty="0"/>
-          </a:p>
-          <a:p>
-            <a:pPr algn="l" marL="177800" indent="-177800">
-              <a:spcAft>
-                <a:spcPts val="900"/>
-              </a:spcAft>
-              <a:buSzPct val="100000"/>
-              <a:buChar char="•"/>
-            </a:pPr>
-            <a:r>
-              <a:rPr lang="en-US" sz="1250" dirty="0">
-                <a:solidFill>
-                  <a:srgbClr val="33444F"/>
-                </a:solidFill>
-                <a:latin typeface="Calibri" pitchFamily="34" charset="0"/>
-                <a:ea typeface="Calibri" pitchFamily="34" charset="-122"/>
-                <a:cs typeface="Calibri" pitchFamily="34" charset="-120"/>
-              </a:rPr>
-              <a:t>Lactose fermentation, indole, urease and others build the identification.</a:t>
-            </a:r>
-            <a:endParaRPr lang="en-US" sz="1250" dirty="0"/>
-          </a:p>
-        </p:txBody>
-      </p:sp>
-      <p:sp>
-        <p:nvSpPr>
-          <p:cNvPr id="7" name="Shape 5"/>
-          <p:cNvSpPr/>
-          <p:nvPr/>
-        </p:nvSpPr>
-        <p:spPr>
-          <a:xfrm>
-            <a:off x="6278728" y="1517904"/>
-            <a:ext cx="5346040" cy="4114800"/>
-          </a:xfrm>
-          <a:prstGeom prst="roundRect">
-            <a:avLst>
-              <a:gd name="adj" fmla="val 2000"/>
-            </a:avLst>
-          </a:prstGeom>
-          <a:solidFill>
-            <a:srgbClr val="E8F2E9"/>
-          </a:solidFill>
-          <a:ln/>
-          <a:effectLst>
-            <a:outerShdw sx="100000" sy="100000" kx="0" ky="0" algn="bl" rotWithShape="0" blurRad="88900" dist="25400" dir="5400000">
-              <a:srgbClr val="22303C">
-                <a:alpha val="12000"/>
-              </a:srgbClr>
-            </a:outerShdw>
-          </a:effectLst>
-        </p:spPr>
-      </p:sp>
-      <p:sp>
-        <p:nvSpPr>
-          <p:cNvPr id="8" name="Text 6"/>
-          <p:cNvSpPr/>
-          <p:nvPr/>
-        </p:nvSpPr>
-        <p:spPr>
-          <a:xfrm>
-            <a:off x="6516472" y="1682496"/>
-            <a:ext cx="4888840" cy="274320"/>
-          </a:xfrm>
-          <a:prstGeom prst="rect">
-            <a:avLst/>
-          </a:prstGeom>
-          <a:noFill/>
-          <a:ln/>
-        </p:spPr>
-        <p:txBody>
-          <a:bodyPr wrap="square" lIns="0" tIns="0" rIns="0" bIns="0" rtlCol="0" anchor="ctr"/>
-          <a:lstStyle/>
-          <a:p>
-            <a:pPr indent="0" marL="0">
-              <a:buNone/>
-            </a:pPr>
-            <a:r>
-              <a:rPr lang="en-US" sz="1200" b="1" spc="100" kern="0" dirty="0">
-                <a:solidFill>
-                  <a:srgbClr val="1F5722"/>
-                </a:solidFill>
-                <a:latin typeface="Calibri" pitchFamily="34" charset="0"/>
-                <a:ea typeface="Calibri" pitchFamily="34" charset="-122"/>
-                <a:cs typeface="Calibri" pitchFamily="34" charset="-120"/>
-              </a:rPr>
-              <a:t>MALDI-TOF MASS SPECTROMETRY</a:t>
-            </a:r>
-            <a:endParaRPr lang="en-US" sz="1200" dirty="0"/>
-          </a:p>
-        </p:txBody>
-      </p:sp>
-      <p:sp>
-        <p:nvSpPr>
-          <p:cNvPr id="9" name="Text 7"/>
-          <p:cNvSpPr/>
-          <p:nvPr/>
-        </p:nvSpPr>
-        <p:spPr>
-          <a:xfrm>
-            <a:off x="6516472" y="2029968"/>
-            <a:ext cx="4870552" cy="3474720"/>
-          </a:xfrm>
-          <a:prstGeom prst="rect">
-            <a:avLst/>
-          </a:prstGeom>
-          <a:noFill/>
-          <a:ln/>
-        </p:spPr>
-        <p:txBody>
-          <a:bodyPr wrap="square" lIns="0" tIns="0" rIns="0" bIns="0" rtlCol="0" anchor="t"/>
-          <a:lstStyle/>
-          <a:p>
-            <a:pPr algn="l" marL="177800" indent="-177800">
-              <a:spcAft>
-                <a:spcPts val="900"/>
-              </a:spcAft>
-              <a:buSzPct val="100000"/>
-              <a:buChar char="•"/>
-            </a:pPr>
-            <a:r>
-              <a:rPr lang="en-US" sz="1250" b="1" dirty="0">
-                <a:solidFill>
-                  <a:srgbClr val="1B2A38"/>
-                </a:solidFill>
-                <a:latin typeface="Calibri" pitchFamily="34" charset="0"/>
-                <a:ea typeface="Calibri" pitchFamily="34" charset="-122"/>
-                <a:cs typeface="Calibri" pitchFamily="34" charset="-120"/>
-              </a:rPr>
-              <a:t>Ionizes ribosomal proteins to generate a species-specific spectral fingerprint, matched to a database.</a:t>
-            </a:r>
-            <a:endParaRPr lang="en-US" sz="1250" dirty="0"/>
-          </a:p>
-          <a:p>
-            <a:pPr algn="l" marL="177800" indent="-177800">
-              <a:spcAft>
-                <a:spcPts val="900"/>
-              </a:spcAft>
-              <a:buSzPct val="100000"/>
-              <a:buChar char="•"/>
-            </a:pPr>
-            <a:r>
-              <a:rPr lang="en-US" sz="1250" dirty="0">
-                <a:solidFill>
-                  <a:srgbClr val="33444F"/>
-                </a:solidFill>
-                <a:latin typeface="Calibri" pitchFamily="34" charset="0"/>
-                <a:ea typeface="Calibri" pitchFamily="34" charset="-122"/>
-                <a:cs typeface="Calibri" pitchFamily="34" charset="-120"/>
-              </a:rPr>
-              <a:t>Fast (minutes) and inexpensive per test; transformed routine ID.</a:t>
-            </a:r>
-            <a:endParaRPr lang="en-US" sz="1250" dirty="0"/>
-          </a:p>
-          <a:p>
-            <a:pPr algn="l" marL="177800" indent="-177800">
-              <a:spcAft>
-                <a:spcPts val="900"/>
-              </a:spcAft>
-              <a:buSzPct val="100000"/>
-              <a:buChar char="•"/>
-            </a:pPr>
-            <a:r>
-              <a:rPr lang="en-US" sz="1250" dirty="0">
-                <a:solidFill>
-                  <a:srgbClr val="33444F"/>
-                </a:solidFill>
-                <a:latin typeface="Calibri" pitchFamily="34" charset="0"/>
-                <a:ea typeface="Calibri" pitchFamily="34" charset="-122"/>
-                <a:cs typeface="Calibri" pitchFamily="34" charset="-120"/>
-              </a:rPr>
-              <a:t>Limits: some closely related species, certain mycobacteria/fungi, and database gaps.</a:t>
-            </a:r>
-            <a:endParaRPr lang="en-US" sz="1250" dirty="0"/>
-          </a:p>
-          <a:p>
-            <a:pPr algn="l" marL="177800" indent="-177800">
-              <a:spcAft>
-                <a:spcPts val="900"/>
-              </a:spcAft>
-              <a:buSzPct val="100000"/>
-              <a:buChar char="•"/>
-            </a:pPr>
-            <a:r>
-              <a:rPr lang="en-US" sz="1250" dirty="0">
-                <a:solidFill>
-                  <a:srgbClr val="33444F"/>
-                </a:solidFill>
-                <a:latin typeface="Calibri" pitchFamily="34" charset="0"/>
-                <a:ea typeface="Calibri" pitchFamily="34" charset="-122"/>
-                <a:cs typeface="Calibri" pitchFamily="34" charset="-120"/>
-              </a:rPr>
-              <a:t>Does not by itself give susceptibility — AST still required.</a:t>
-            </a:r>
-            <a:endParaRPr lang="en-US" sz="1250" dirty="0"/>
-          </a:p>
-        </p:txBody>
-      </p:sp>
-      <p:sp>
-        <p:nvSpPr>
-          <p:cNvPr id="10" name="Text 8"/>
+            <a:pPr algn="l" indent="0" marL="0">
+              <a:buNone/>
+            </a:pPr>
+            <a:r>
+              <a:rPr lang="en-US" sz="1050" i="1" dirty="0">
+                <a:solidFill>
+                  <a:srgbClr val="6B7B8A"/>
+                </a:solidFill>
+                <a:latin typeface="Calibri" pitchFamily="34" charset="0"/>
+                <a:ea typeface="Calibri" pitchFamily="34" charset="-122"/>
+                <a:cs typeface="Calibri" pitchFamily="34" charset="-120"/>
+              </a:rPr>
+              <a:t>Selective media suppress unwanted flora; differential media reveal a metabolic property (e.g., lactose fermentation).</a:t>
+            </a:r>
+            <a:endParaRPr lang="en-US" sz="1050" dirty="0"/>
+          </a:p>
+        </p:txBody>
+      </p:sp>
+      <p:sp>
+        <p:nvSpPr>
+          <p:cNvPr id="6" name="Text 3"/>
           <p:cNvSpPr/>
           <p:nvPr/>
         </p:nvSpPr>
@@ -12432,7 +16538,7 @@
       </p:sp>
       <p:sp>
         <p:nvSpPr>
-          <p:cNvPr id="11" name="Text 9"/>
+          <p:cNvPr id="7" name="Text 4"/>
           <p:cNvSpPr/>
           <p:nvPr/>
         </p:nvSpPr>

--- a/decks/Micro_02_Gram-Stain-Culture-Identification.pptx
+++ b/decks/Micro_02_Gram-Stain-Culture-Identification.pptx
@@ -25,9 +25,13 @@
     <p:sldId id="273" r:id="rId19"/>
     <p:sldId id="274" r:id="rId20"/>
     <p:sldId id="275" r:id="rId21"/>
+    <p:sldId id="284" r:id="rId35"/>
     <p:sldId id="276" r:id="rId22"/>
+    <p:sldId id="283" r:id="rId34"/>
     <p:sldId id="277" r:id="rId23"/>
+    <p:sldId id="282" r:id="rId33"/>
     <p:sldId id="278" r:id="rId24"/>
+    <p:sldId id="281" r:id="rId32"/>
     <p:sldId id="279" r:id="rId25"/>
     <p:sldId id="280" r:id="rId26"/>
   </p:sldIdLst>
@@ -3032,6 +3036,10 @@
           </a:solidFill>
           <a:ln/>
         </p:spPr>
+        <p:txBody>
+          <a:bodyPr/>
+          <a:p/>
+        </p:txBody>
       </p:sp>
       <p:sp>
         <p:nvSpPr>
@@ -3054,6 +3062,10 @@
           </a:solidFill>
           <a:ln/>
         </p:spPr>
+        <p:txBody>
+          <a:bodyPr/>
+          <a:p/>
+        </p:txBody>
       </p:sp>
       <p:sp>
         <p:nvSpPr>
@@ -3076,6 +3088,10 @@
           </a:solidFill>
           <a:ln/>
         </p:spPr>
+        <p:txBody>
+          <a:bodyPr/>
+          <a:p/>
+        </p:txBody>
       </p:sp>
       <p:sp>
         <p:nvSpPr>
@@ -3098,6 +3114,10 @@
           </a:solidFill>
           <a:ln/>
         </p:spPr>
+        <p:txBody>
+          <a:bodyPr/>
+          <a:p/>
+        </p:txBody>
       </p:sp>
       <p:sp>
         <p:nvSpPr>
@@ -3514,6 +3534,10 @@
             </a:outerShdw>
           </a:effectLst>
         </p:spPr>
+        <p:txBody>
+          <a:bodyPr/>
+          <a:p/>
+        </p:txBody>
       </p:sp>
       <p:sp>
         <p:nvSpPr>
@@ -3688,6 +3712,10 @@
             </a:outerShdw>
           </a:effectLst>
         </p:spPr>
+        <p:txBody>
+          <a:bodyPr/>
+          <a:p/>
+        </p:txBody>
       </p:sp>
       <p:sp>
         <p:nvSpPr>
@@ -4078,6 +4106,10 @@
             </a:outerShdw>
           </a:effectLst>
         </p:spPr>
+        <p:txBody>
+          <a:bodyPr/>
+          <a:p/>
+        </p:txBody>
       </p:sp>
       <p:sp>
         <p:nvSpPr>
@@ -4252,6 +4284,10 @@
             </a:outerShdw>
           </a:effectLst>
         </p:spPr>
+        <p:txBody>
+          <a:bodyPr/>
+          <a:p/>
+        </p:txBody>
       </p:sp>
       <p:sp>
         <p:nvSpPr>
@@ -4557,6 +4593,10 @@
           </a:solidFill>
           <a:ln/>
         </p:spPr>
+        <p:txBody>
+          <a:bodyPr/>
+          <a:p/>
+        </p:txBody>
       </p:sp>
       <p:sp>
         <p:nvSpPr>
@@ -4579,6 +4619,10 @@
           </a:solidFill>
           <a:ln/>
         </p:spPr>
+        <p:txBody>
+          <a:bodyPr/>
+          <a:p/>
+        </p:txBody>
       </p:sp>
       <p:sp>
         <p:nvSpPr>
@@ -4835,6 +4879,10 @@
             </a:outerShdw>
           </a:effectLst>
         </p:spPr>
+        <p:txBody>
+          <a:bodyPr/>
+          <a:p/>
+        </p:txBody>
       </p:sp>
       <p:sp>
         <p:nvSpPr>
@@ -5009,6 +5057,10 @@
             </a:outerShdw>
           </a:effectLst>
         </p:spPr>
+        <p:txBody>
+          <a:bodyPr/>
+          <a:p/>
+        </p:txBody>
       </p:sp>
       <p:sp>
         <p:nvSpPr>
@@ -5399,6 +5451,10 @@
             </a:outerShdw>
           </a:effectLst>
         </p:spPr>
+        <p:txBody>
+          <a:bodyPr/>
+          <a:p/>
+        </p:txBody>
       </p:sp>
       <p:sp>
         <p:nvSpPr>
@@ -5509,6 +5565,10 @@
             </a:outerShdw>
           </a:effectLst>
         </p:spPr>
+        <p:txBody>
+          <a:bodyPr/>
+          <a:p/>
+        </p:txBody>
       </p:sp>
       <p:sp>
         <p:nvSpPr>
@@ -5938,6 +5998,10 @@
             </a:outerShdw>
           </a:effectLst>
         </p:spPr>
+        <p:txBody>
+          <a:bodyPr/>
+          <a:p/>
+        </p:txBody>
       </p:sp>
       <p:sp>
         <p:nvSpPr>
@@ -6264,6 +6328,10 @@
             </a:outerShdw>
           </a:effectLst>
         </p:spPr>
+        <p:txBody>
+          <a:bodyPr/>
+          <a:p/>
+        </p:txBody>
       </p:sp>
       <p:sp>
         <p:nvSpPr>
@@ -6374,6 +6442,10 @@
             </a:outerShdw>
           </a:effectLst>
         </p:spPr>
+        <p:txBody>
+          <a:bodyPr/>
+          <a:p/>
+        </p:txBody>
       </p:sp>
       <p:sp>
         <p:nvSpPr>
@@ -6803,6 +6875,10 @@
             </a:outerShdw>
           </a:effectLst>
         </p:spPr>
+        <p:txBody>
+          <a:bodyPr/>
+          <a:p/>
+        </p:txBody>
       </p:sp>
       <p:sp>
         <p:nvSpPr>
@@ -7129,6 +7205,10 @@
             </a:outerShdw>
           </a:effectLst>
         </p:spPr>
+        <p:txBody>
+          <a:bodyPr/>
+          <a:p/>
+        </p:txBody>
       </p:sp>
       <p:sp>
         <p:nvSpPr>
@@ -7239,6 +7319,10 @@
             </a:outerShdw>
           </a:effectLst>
         </p:spPr>
+        <p:txBody>
+          <a:bodyPr/>
+          <a:p/>
+        </p:txBody>
       </p:sp>
       <p:sp>
         <p:nvSpPr>
@@ -7668,6 +7752,10 @@
             </a:outerShdw>
           </a:effectLst>
         </p:spPr>
+        <p:txBody>
+          <a:bodyPr/>
+          <a:p/>
+        </p:txBody>
       </p:sp>
       <p:sp>
         <p:nvSpPr>
@@ -7994,6 +8082,10 @@
             </a:outerShdw>
           </a:effectLst>
         </p:spPr>
+        <p:txBody>
+          <a:bodyPr/>
+          <a:p/>
+        </p:txBody>
       </p:sp>
       <p:sp>
         <p:nvSpPr>
@@ -8101,6 +8193,10 @@
             </a:outerShdw>
           </a:effectLst>
         </p:spPr>
+        <p:txBody>
+          <a:bodyPr/>
+          <a:p/>
+        </p:txBody>
       </p:sp>
       <p:sp>
         <p:nvSpPr>
@@ -8208,6 +8304,10 @@
             </a:outerShdw>
           </a:effectLst>
         </p:spPr>
+        <p:txBody>
+          <a:bodyPr/>
+          <a:p/>
+        </p:txBody>
       </p:sp>
       <p:sp>
         <p:nvSpPr>
@@ -8315,6 +8415,10 @@
             </a:outerShdw>
           </a:effectLst>
         </p:spPr>
+        <p:txBody>
+          <a:bodyPr/>
+          <a:p/>
+        </p:txBody>
       </p:sp>
       <p:sp>
         <p:nvSpPr>
@@ -8687,9 +8791,9 @@
               <a:buNone/>
             </a:pPr>
             <a:r>
-              <a:rPr lang="en-US" sz="1350" b="1" dirty="0">
-                <a:solidFill>
-                  <a:srgbClr val="1F5722"/>
+              <a:rPr lang="en-US" sz="1350" b="0" dirty="0">
+                <a:solidFill>
+                  <a:srgbClr val="33444F"/>
                 </a:solidFill>
                 <a:latin typeface="Calibri" pitchFamily="34" charset="0"/>
                 <a:ea typeface="Calibri" pitchFamily="34" charset="-122"/>
@@ -8778,130 +8882,6 @@
               <a:t>E. Aerobes from anaerobes</a:t>
             </a:r>
             <a:endParaRPr lang="en-US" sz="1350" dirty="0"/>
-          </a:p>
-        </p:txBody>
-      </p:sp>
-      <p:sp>
-        <p:nvSpPr>
-          <p:cNvPr id="6" name="Shape 4"/>
-          <p:cNvSpPr/>
-          <p:nvPr/>
-        </p:nvSpPr>
-        <p:spPr>
-          <a:xfrm>
-            <a:off x="7201632" y="2395728"/>
-            <a:ext cx="4423136" cy="3246120"/>
-          </a:xfrm>
-          <a:prstGeom prst="roundRect">
-            <a:avLst>
-              <a:gd name="adj" fmla="val 2535"/>
-            </a:avLst>
-          </a:prstGeom>
-          <a:solidFill>
-            <a:srgbClr val="E8F2E9"/>
-          </a:solidFill>
-          <a:ln/>
-          <a:effectLst>
-            <a:outerShdw sx="100000" sy="100000" kx="0" ky="0" algn="bl" rotWithShape="0" blurRad="88900" dist="25400" dir="5400000">
-              <a:srgbClr val="22303C">
-                <a:alpha val="12000"/>
-              </a:srgbClr>
-            </a:outerShdw>
-          </a:effectLst>
-        </p:spPr>
-      </p:sp>
-      <p:sp>
-        <p:nvSpPr>
-          <p:cNvPr id="7" name="Text 5"/>
-          <p:cNvSpPr/>
-          <p:nvPr/>
-        </p:nvSpPr>
-        <p:spPr>
-          <a:xfrm>
-            <a:off x="7439376" y="2578608"/>
-            <a:ext cx="3965936" cy="457200"/>
-          </a:xfrm>
-          <a:prstGeom prst="rect">
-            <a:avLst/>
-          </a:prstGeom>
-          <a:noFill/>
-          <a:ln/>
-        </p:spPr>
-        <p:txBody>
-          <a:bodyPr wrap="square" lIns="0" tIns="0" rIns="0" bIns="0" rtlCol="0" anchor="ctr"/>
-          <a:lstStyle/>
-          <a:p>
-            <a:pPr indent="0" marL="0">
-              <a:buNone/>
-            </a:pPr>
-            <a:r>
-              <a:rPr lang="en-US" sz="1500" b="1" dirty="0">
-                <a:solidFill>
-                  <a:srgbClr val="2E7D32"/>
-                </a:solidFill>
-                <a:latin typeface="Calibri" pitchFamily="34" charset="0"/>
-                <a:ea typeface="Calibri" pitchFamily="34" charset="-122"/>
-                <a:cs typeface="Calibri" pitchFamily="34" charset="-120"/>
-              </a:rPr>
-              <a:t>ANSWER  </a:t>
-            </a:r>
-            <a:pPr indent="0" marL="0">
-              <a:buNone/>
-            </a:pPr>
-            <a:r>
-              <a:rPr lang="en-US" sz="1500" b="1" dirty="0">
-                <a:solidFill>
-                  <a:srgbClr val="1B2A38"/>
-                </a:solidFill>
-                <a:latin typeface="Calibri" pitchFamily="34" charset="0"/>
-                <a:ea typeface="Calibri" pitchFamily="34" charset="-122"/>
-                <a:cs typeface="Calibri" pitchFamily="34" charset="-120"/>
-              </a:rPr>
-              <a:t>A — Staphylococci (+) from streptococci (–)</a:t>
-            </a:r>
-            <a:endParaRPr lang="en-US" sz="1500" dirty="0"/>
-          </a:p>
-        </p:txBody>
-      </p:sp>
-      <p:sp>
-        <p:nvSpPr>
-          <p:cNvPr id="8" name="Text 6"/>
-          <p:cNvSpPr/>
-          <p:nvPr/>
-        </p:nvSpPr>
-        <p:spPr>
-          <a:xfrm>
-            <a:off x="7439376" y="3127248"/>
-            <a:ext cx="3947648" cy="2377440"/>
-          </a:xfrm>
-          <a:prstGeom prst="rect">
-            <a:avLst/>
-          </a:prstGeom>
-          <a:noFill/>
-          <a:ln/>
-        </p:spPr>
-        <p:txBody>
-          <a:bodyPr wrap="square" lIns="0" tIns="0" rIns="0" bIns="0" rtlCol="0" anchor="t"/>
-          <a:lstStyle/>
-          <a:p>
-            <a:pPr algn="l" indent="0" marL="0">
-              <a:lnSpc>
-                <a:spcPct val="108000"/>
-              </a:lnSpc>
-              <a:buNone/>
-            </a:pPr>
-            <a:r>
-              <a:rPr lang="en-US" sz="1250" dirty="0">
-                <a:solidFill>
-                  <a:srgbClr val="33444F"/>
-                </a:solidFill>
-                <a:latin typeface="Calibri" pitchFamily="34" charset="0"/>
-                <a:ea typeface="Calibri" pitchFamily="34" charset="-122"/>
-                <a:cs typeface="Calibri" pitchFamily="34" charset="-120"/>
-              </a:rPr>
-              <a:t>Catalase is positive in staphylococci and negative in streptococci; coagulase then separates S. aureus from CoNS.</a:t>
-            </a:r>
-            <a:endParaRPr lang="en-US" sz="1250" dirty="0"/>
           </a:p>
         </p:txBody>
       </p:sp>
@@ -9231,9 +9211,9 @@
               <a:buNone/>
             </a:pPr>
             <a:r>
-              <a:rPr lang="en-US" sz="1350" b="1" dirty="0">
-                <a:solidFill>
-                  <a:srgbClr val="1F5722"/>
+              <a:rPr lang="en-US" sz="1350" b="0" dirty="0">
+                <a:solidFill>
+                  <a:srgbClr val="33444F"/>
                 </a:solidFill>
                 <a:latin typeface="Calibri" pitchFamily="34" charset="0"/>
                 <a:ea typeface="Calibri" pitchFamily="34" charset="-122"/>
@@ -9282,130 +9262,6 @@
               <a:t>E. An anaerobe</a:t>
             </a:r>
             <a:endParaRPr lang="en-US" sz="1350" dirty="0"/>
-          </a:p>
-        </p:txBody>
-      </p:sp>
-      <p:sp>
-        <p:nvSpPr>
-          <p:cNvPr id="6" name="Shape 4"/>
-          <p:cNvSpPr/>
-          <p:nvPr/>
-        </p:nvSpPr>
-        <p:spPr>
-          <a:xfrm>
-            <a:off x="7201632" y="2395728"/>
-            <a:ext cx="4423136" cy="3246120"/>
-          </a:xfrm>
-          <a:prstGeom prst="roundRect">
-            <a:avLst>
-              <a:gd name="adj" fmla="val 2535"/>
-            </a:avLst>
-          </a:prstGeom>
-          <a:solidFill>
-            <a:srgbClr val="E8F2E9"/>
-          </a:solidFill>
-          <a:ln/>
-          <a:effectLst>
-            <a:outerShdw sx="100000" sy="100000" kx="0" ky="0" algn="bl" rotWithShape="0" blurRad="88900" dist="25400" dir="5400000">
-              <a:srgbClr val="22303C">
-                <a:alpha val="12000"/>
-              </a:srgbClr>
-            </a:outerShdw>
-          </a:effectLst>
-        </p:spPr>
-      </p:sp>
-      <p:sp>
-        <p:nvSpPr>
-          <p:cNvPr id="7" name="Text 5"/>
-          <p:cNvSpPr/>
-          <p:nvPr/>
-        </p:nvSpPr>
-        <p:spPr>
-          <a:xfrm>
-            <a:off x="7439376" y="2578608"/>
-            <a:ext cx="3965936" cy="457200"/>
-          </a:xfrm>
-          <a:prstGeom prst="rect">
-            <a:avLst/>
-          </a:prstGeom>
-          <a:noFill/>
-          <a:ln/>
-        </p:spPr>
-        <p:txBody>
-          <a:bodyPr wrap="square" lIns="0" tIns="0" rIns="0" bIns="0" rtlCol="0" anchor="ctr"/>
-          <a:lstStyle/>
-          <a:p>
-            <a:pPr indent="0" marL="0">
-              <a:buNone/>
-            </a:pPr>
-            <a:r>
-              <a:rPr lang="en-US" sz="1500" b="1" dirty="0">
-                <a:solidFill>
-                  <a:srgbClr val="2E7D32"/>
-                </a:solidFill>
-                <a:latin typeface="Calibri" pitchFamily="34" charset="0"/>
-                <a:ea typeface="Calibri" pitchFamily="34" charset="-122"/>
-                <a:cs typeface="Calibri" pitchFamily="34" charset="-120"/>
-              </a:rPr>
-              <a:t>ANSWER  </a:t>
-            </a:r>
-            <a:pPr indent="0" marL="0">
-              <a:buNone/>
-            </a:pPr>
-            <a:r>
-              <a:rPr lang="en-US" sz="1500" b="1" dirty="0">
-                <a:solidFill>
-                  <a:srgbClr val="1B2A38"/>
-                </a:solidFill>
-                <a:latin typeface="Calibri" pitchFamily="34" charset="0"/>
-                <a:ea typeface="Calibri" pitchFamily="34" charset="-122"/>
-                <a:cs typeface="Calibri" pitchFamily="34" charset="-120"/>
-              </a:rPr>
-              <a:t>C — Lactose-fermenting GNR</a:t>
-            </a:r>
-            <a:endParaRPr lang="en-US" sz="1500" dirty="0"/>
-          </a:p>
-        </p:txBody>
-      </p:sp>
-      <p:sp>
-        <p:nvSpPr>
-          <p:cNvPr id="8" name="Text 6"/>
-          <p:cNvSpPr/>
-          <p:nvPr/>
-        </p:nvSpPr>
-        <p:spPr>
-          <a:xfrm>
-            <a:off x="7439376" y="3127248"/>
-            <a:ext cx="3947648" cy="2377440"/>
-          </a:xfrm>
-          <a:prstGeom prst="rect">
-            <a:avLst/>
-          </a:prstGeom>
-          <a:noFill/>
-          <a:ln/>
-        </p:spPr>
-        <p:txBody>
-          <a:bodyPr wrap="square" lIns="0" tIns="0" rIns="0" bIns="0" rtlCol="0" anchor="t"/>
-          <a:lstStyle/>
-          <a:p>
-            <a:pPr algn="l" indent="0" marL="0">
-              <a:lnSpc>
-                <a:spcPct val="108000"/>
-              </a:lnSpc>
-              <a:buNone/>
-            </a:pPr>
-            <a:r>
-              <a:rPr lang="en-US" sz="1250" dirty="0">
-                <a:solidFill>
-                  <a:srgbClr val="33444F"/>
-                </a:solidFill>
-                <a:latin typeface="Calibri" pitchFamily="34" charset="0"/>
-                <a:ea typeface="Calibri" pitchFamily="34" charset="-122"/>
-                <a:cs typeface="Calibri" pitchFamily="34" charset="-120"/>
-              </a:rPr>
-              <a:t>MacConkey selects gram-negative rods and turns pink with lactose fermentation (e.g., E. coli, Klebsiella).</a:t>
-            </a:r>
-            <a:endParaRPr lang="en-US" sz="1250" dirty="0"/>
           </a:p>
         </p:txBody>
       </p:sp>
@@ -9735,9 +9591,9 @@
               <a:buNone/>
             </a:pPr>
             <a:r>
-              <a:rPr lang="en-US" sz="1350" b="1" dirty="0">
-                <a:solidFill>
-                  <a:srgbClr val="1F5722"/>
+              <a:rPr lang="en-US" sz="1350" b="0" dirty="0">
+                <a:solidFill>
+                  <a:srgbClr val="33444F"/>
                 </a:solidFill>
                 <a:latin typeface="Calibri" pitchFamily="34" charset="0"/>
                 <a:ea typeface="Calibri" pitchFamily="34" charset="-122"/>
@@ -9786,130 +9642,6 @@
               <a:t>E. Gram reaction</a:t>
             </a:r>
             <a:endParaRPr lang="en-US" sz="1350" dirty="0"/>
-          </a:p>
-        </p:txBody>
-      </p:sp>
-      <p:sp>
-        <p:nvSpPr>
-          <p:cNvPr id="6" name="Shape 4"/>
-          <p:cNvSpPr/>
-          <p:nvPr/>
-        </p:nvSpPr>
-        <p:spPr>
-          <a:xfrm>
-            <a:off x="7201632" y="2395728"/>
-            <a:ext cx="4423136" cy="3246120"/>
-          </a:xfrm>
-          <a:prstGeom prst="roundRect">
-            <a:avLst>
-              <a:gd name="adj" fmla="val 2535"/>
-            </a:avLst>
-          </a:prstGeom>
-          <a:solidFill>
-            <a:srgbClr val="E8F2E9"/>
-          </a:solidFill>
-          <a:ln/>
-          <a:effectLst>
-            <a:outerShdw sx="100000" sy="100000" kx="0" ky="0" algn="bl" rotWithShape="0" blurRad="88900" dist="25400" dir="5400000">
-              <a:srgbClr val="22303C">
-                <a:alpha val="12000"/>
-              </a:srgbClr>
-            </a:outerShdw>
-          </a:effectLst>
-        </p:spPr>
-      </p:sp>
-      <p:sp>
-        <p:nvSpPr>
-          <p:cNvPr id="7" name="Text 5"/>
-          <p:cNvSpPr/>
-          <p:nvPr/>
-        </p:nvSpPr>
-        <p:spPr>
-          <a:xfrm>
-            <a:off x="7439376" y="2578608"/>
-            <a:ext cx="3965936" cy="457200"/>
-          </a:xfrm>
-          <a:prstGeom prst="rect">
-            <a:avLst/>
-          </a:prstGeom>
-          <a:noFill/>
-          <a:ln/>
-        </p:spPr>
-        <p:txBody>
-          <a:bodyPr wrap="square" lIns="0" tIns="0" rIns="0" bIns="0" rtlCol="0" anchor="ctr"/>
-          <a:lstStyle/>
-          <a:p>
-            <a:pPr indent="0" marL="0">
-              <a:buNone/>
-            </a:pPr>
-            <a:r>
-              <a:rPr lang="en-US" sz="1500" b="1" dirty="0">
-                <a:solidFill>
-                  <a:srgbClr val="2E7D32"/>
-                </a:solidFill>
-                <a:latin typeface="Calibri" pitchFamily="34" charset="0"/>
-                <a:ea typeface="Calibri" pitchFamily="34" charset="-122"/>
-                <a:cs typeface="Calibri" pitchFamily="34" charset="-120"/>
-              </a:rPr>
-              <a:t>ANSWER  </a:t>
-            </a:r>
-            <a:pPr indent="0" marL="0">
-              <a:buNone/>
-            </a:pPr>
-            <a:r>
-              <a:rPr lang="en-US" sz="1500" b="1" dirty="0">
-                <a:solidFill>
-                  <a:srgbClr val="1B2A38"/>
-                </a:solidFill>
-                <a:latin typeface="Calibri" pitchFamily="34" charset="0"/>
-                <a:ea typeface="Calibri" pitchFamily="34" charset="-122"/>
-                <a:cs typeface="Calibri" pitchFamily="34" charset="-120"/>
-              </a:rPr>
-              <a:t>C — Protein mass-spectral fingerprint</a:t>
-            </a:r>
-            <a:endParaRPr lang="en-US" sz="1500" dirty="0"/>
-          </a:p>
-        </p:txBody>
-      </p:sp>
-      <p:sp>
-        <p:nvSpPr>
-          <p:cNvPr id="8" name="Text 6"/>
-          <p:cNvSpPr/>
-          <p:nvPr/>
-        </p:nvSpPr>
-        <p:spPr>
-          <a:xfrm>
-            <a:off x="7439376" y="3127248"/>
-            <a:ext cx="3947648" cy="2377440"/>
-          </a:xfrm>
-          <a:prstGeom prst="rect">
-            <a:avLst/>
-          </a:prstGeom>
-          <a:noFill/>
-          <a:ln/>
-        </p:spPr>
-        <p:txBody>
-          <a:bodyPr wrap="square" lIns="0" tIns="0" rIns="0" bIns="0" rtlCol="0" anchor="t"/>
-          <a:lstStyle/>
-          <a:p>
-            <a:pPr algn="l" indent="0" marL="0">
-              <a:lnSpc>
-                <a:spcPct val="108000"/>
-              </a:lnSpc>
-              <a:buNone/>
-            </a:pPr>
-            <a:r>
-              <a:rPr lang="en-US" sz="1250" dirty="0">
-                <a:solidFill>
-                  <a:srgbClr val="33444F"/>
-                </a:solidFill>
-                <a:latin typeface="Calibri" pitchFamily="34" charset="0"/>
-                <a:ea typeface="Calibri" pitchFamily="34" charset="-122"/>
-                <a:cs typeface="Calibri" pitchFamily="34" charset="-120"/>
-              </a:rPr>
-              <a:t>MALDI-TOF matches an organism’s ribosomal protein spectrum against a database for rapid identification from growth.</a:t>
-            </a:r>
-            <a:endParaRPr lang="en-US" sz="1250" dirty="0"/>
           </a:p>
         </p:txBody>
       </p:sp>
@@ -10239,9 +9971,9 @@
               <a:buNone/>
             </a:pPr>
             <a:r>
-              <a:rPr lang="en-US" sz="1350" b="1" dirty="0">
-                <a:solidFill>
-                  <a:srgbClr val="1F5722"/>
+              <a:rPr lang="en-US" sz="1350" b="0" dirty="0">
+                <a:solidFill>
+                  <a:srgbClr val="33444F"/>
                 </a:solidFill>
                 <a:latin typeface="Calibri" pitchFamily="34" charset="0"/>
                 <a:ea typeface="Calibri" pitchFamily="34" charset="-122"/>
@@ -10290,130 +10022,6 @@
               <a:t>E. Pseudomonas aeruginosa</a:t>
             </a:r>
             <a:endParaRPr lang="en-US" sz="1350" dirty="0"/>
-          </a:p>
-        </p:txBody>
-      </p:sp>
-      <p:sp>
-        <p:nvSpPr>
-          <p:cNvPr id="6" name="Shape 4"/>
-          <p:cNvSpPr/>
-          <p:nvPr/>
-        </p:nvSpPr>
-        <p:spPr>
-          <a:xfrm>
-            <a:off x="7201632" y="2395728"/>
-            <a:ext cx="4423136" cy="3246120"/>
-          </a:xfrm>
-          <a:prstGeom prst="roundRect">
-            <a:avLst>
-              <a:gd name="adj" fmla="val 2535"/>
-            </a:avLst>
-          </a:prstGeom>
-          <a:solidFill>
-            <a:srgbClr val="E8F2E9"/>
-          </a:solidFill>
-          <a:ln/>
-          <a:effectLst>
-            <a:outerShdw sx="100000" sy="100000" kx="0" ky="0" algn="bl" rotWithShape="0" blurRad="88900" dist="25400" dir="5400000">
-              <a:srgbClr val="22303C">
-                <a:alpha val="12000"/>
-              </a:srgbClr>
-            </a:outerShdw>
-          </a:effectLst>
-        </p:spPr>
-      </p:sp>
-      <p:sp>
-        <p:nvSpPr>
-          <p:cNvPr id="7" name="Text 5"/>
-          <p:cNvSpPr/>
-          <p:nvPr/>
-        </p:nvSpPr>
-        <p:spPr>
-          <a:xfrm>
-            <a:off x="7439376" y="2578608"/>
-            <a:ext cx="3965936" cy="457200"/>
-          </a:xfrm>
-          <a:prstGeom prst="rect">
-            <a:avLst/>
-          </a:prstGeom>
-          <a:noFill/>
-          <a:ln/>
-        </p:spPr>
-        <p:txBody>
-          <a:bodyPr wrap="square" lIns="0" tIns="0" rIns="0" bIns="0" rtlCol="0" anchor="ctr"/>
-          <a:lstStyle/>
-          <a:p>
-            <a:pPr indent="0" marL="0">
-              <a:buNone/>
-            </a:pPr>
-            <a:r>
-              <a:rPr lang="en-US" sz="1500" b="1" dirty="0">
-                <a:solidFill>
-                  <a:srgbClr val="2E7D32"/>
-                </a:solidFill>
-                <a:latin typeface="Calibri" pitchFamily="34" charset="0"/>
-                <a:ea typeface="Calibri" pitchFamily="34" charset="-122"/>
-                <a:cs typeface="Calibri" pitchFamily="34" charset="-120"/>
-              </a:rPr>
-              <a:t>ANSWER  </a:t>
-            </a:r>
-            <a:pPr indent="0" marL="0">
-              <a:buNone/>
-            </a:pPr>
-            <a:r>
-              <a:rPr lang="en-US" sz="1500" b="1" dirty="0">
-                <a:solidFill>
-                  <a:srgbClr val="1B2A38"/>
-                </a:solidFill>
-                <a:latin typeface="Calibri" pitchFamily="34" charset="0"/>
-                <a:ea typeface="Calibri" pitchFamily="34" charset="-122"/>
-                <a:cs typeface="Calibri" pitchFamily="34" charset="-120"/>
-              </a:rPr>
-              <a:t>C — Mycoplasma pneumoniae</a:t>
-            </a:r>
-            <a:endParaRPr lang="en-US" sz="1500" dirty="0"/>
-          </a:p>
-        </p:txBody>
-      </p:sp>
-      <p:sp>
-        <p:nvSpPr>
-          <p:cNvPr id="8" name="Text 6"/>
-          <p:cNvSpPr/>
-          <p:nvPr/>
-        </p:nvSpPr>
-        <p:spPr>
-          <a:xfrm>
-            <a:off x="7439376" y="3127248"/>
-            <a:ext cx="3947648" cy="2377440"/>
-          </a:xfrm>
-          <a:prstGeom prst="rect">
-            <a:avLst/>
-          </a:prstGeom>
-          <a:noFill/>
-          <a:ln/>
-        </p:spPr>
-        <p:txBody>
-          <a:bodyPr wrap="square" lIns="0" tIns="0" rIns="0" bIns="0" rtlCol="0" anchor="t"/>
-          <a:lstStyle/>
-          <a:p>
-            <a:pPr algn="l" indent="0" marL="0">
-              <a:lnSpc>
-                <a:spcPct val="108000"/>
-              </a:lnSpc>
-              <a:buNone/>
-            </a:pPr>
-            <a:r>
-              <a:rPr lang="en-US" sz="1250" dirty="0">
-                <a:solidFill>
-                  <a:srgbClr val="33444F"/>
-                </a:solidFill>
-                <a:latin typeface="Calibri" pitchFamily="34" charset="0"/>
-                <a:ea typeface="Calibri" pitchFamily="34" charset="-122"/>
-                <a:cs typeface="Calibri" pitchFamily="34" charset="-120"/>
-              </a:rPr>
-              <a:t>Mycoplasma lacks a cell wall and does not grow on routine media; diagnosis relies on serology or molecular methods.</a:t>
-            </a:r>
-            <a:endParaRPr lang="en-US" sz="1250" dirty="0"/>
           </a:p>
         </p:txBody>
       </p:sp>
@@ -10654,6 +10262,10 @@
           </a:solidFill>
           <a:ln/>
         </p:spPr>
+        <p:txBody>
+          <a:bodyPr/>
+          <a:p/>
+        </p:txBody>
       </p:sp>
       <p:sp>
         <p:nvSpPr>
@@ -10681,6 +10293,10 @@
             </a:outerShdw>
           </a:effectLst>
         </p:spPr>
+        <p:txBody>
+          <a:bodyPr/>
+          <a:p/>
+        </p:txBody>
       </p:sp>
       <p:sp>
         <p:nvSpPr>
@@ -10781,6 +10397,10 @@
           </a:solidFill>
           <a:ln/>
         </p:spPr>
+        <p:txBody>
+          <a:bodyPr/>
+          <a:p/>
+        </p:txBody>
       </p:sp>
       <p:sp>
         <p:nvSpPr>
@@ -10808,6 +10428,10 @@
             </a:outerShdw>
           </a:effectLst>
         </p:spPr>
+        <p:txBody>
+          <a:bodyPr/>
+          <a:p/>
+        </p:txBody>
       </p:sp>
       <p:sp>
         <p:nvSpPr>
@@ -10908,6 +10532,10 @@
           </a:solidFill>
           <a:ln/>
         </p:spPr>
+        <p:txBody>
+          <a:bodyPr/>
+          <a:p/>
+        </p:txBody>
       </p:sp>
       <p:sp>
         <p:nvSpPr>
@@ -10935,6 +10563,10 @@
             </a:outerShdw>
           </a:effectLst>
         </p:spPr>
+        <p:txBody>
+          <a:bodyPr/>
+          <a:p/>
+        </p:txBody>
       </p:sp>
       <p:sp>
         <p:nvSpPr>
@@ -11035,6 +10667,10 @@
           </a:solidFill>
           <a:ln/>
         </p:spPr>
+        <p:txBody>
+          <a:bodyPr/>
+          <a:p/>
+        </p:txBody>
       </p:sp>
       <p:sp>
         <p:nvSpPr>
@@ -11062,6 +10698,10 @@
             </a:outerShdw>
           </a:effectLst>
         </p:spPr>
+        <p:txBody>
+          <a:bodyPr/>
+          <a:p/>
+        </p:txBody>
       </p:sp>
       <p:sp>
         <p:nvSpPr>
@@ -11162,6 +10802,10 @@
           </a:solidFill>
           <a:ln/>
         </p:spPr>
+        <p:txBody>
+          <a:bodyPr/>
+          <a:p/>
+        </p:txBody>
       </p:sp>
       <p:sp>
         <p:nvSpPr>
@@ -11189,6 +10833,10 @@
             </a:outerShdw>
           </a:effectLst>
         </p:spPr>
+        <p:txBody>
+          <a:bodyPr/>
+          <a:p/>
+        </p:txBody>
       </p:sp>
       <p:sp>
         <p:nvSpPr>
@@ -11672,6 +11320,1982 @@
 </p:sld>
 </file>
 
+<file path=ppt/slides/slide26.xml><?xml version="1.0" encoding="utf-8"?>
+<p:sld xmlns:a="http://schemas.openxmlformats.org/drawingml/2006/main" xmlns:p="http://schemas.openxmlformats.org/presentationml/2006/main" xmlns:r="http://schemas.openxmlformats.org/officeDocument/2006/relationships">
+  <p:cSld>
+    <p:spTree>
+      <p:nvGrpSpPr>
+        <p:cNvPr id="1" name=""/>
+        <p:cNvGrpSpPr/>
+        <p:nvPr/>
+      </p:nvGrpSpPr>
+      <p:grpSpPr/>
+      <p:sp>
+        <p:nvSpPr>
+          <p:cNvPr id="2" name="Text 0"/>
+          <p:cNvSpPr/>
+          <p:nvPr/>
+        </p:nvSpPr>
+        <p:spPr>
+          <a:xfrm>
+            <a:off x="566928" y="329184"/>
+            <a:ext cx="10515600" cy="310896"/>
+          </a:xfrm>
+          <a:prstGeom prst="rect">
+            <a:avLst/>
+          </a:prstGeom>
+          <a:noFill/>
+          <a:ln/>
+        </p:spPr>
+        <p:txBody>
+          <a:bodyPr wrap="square" lIns="0" tIns="0" rIns="0" bIns="0" rtlCol="0" anchor="ctr"/>
+          <a:lstStyle/>
+          <a:p>
+            <a:pPr algn="l" indent="0" marL="0">
+              <a:buNone/>
+            </a:pPr>
+            <a:r>
+              <a:rPr lang="en-US" sz="1100" b="1" spc="150" kern="0" dirty="0">
+                <a:solidFill>
+                  <a:srgbClr val="2E7D32"/>
+                </a:solidFill>
+                <a:latin typeface="Calibri" pitchFamily="34" charset="0"/>
+                <a:ea typeface="Calibri" pitchFamily="34" charset="-122"/>
+                <a:cs typeface="Calibri" pitchFamily="34" charset="-120"/>
+              </a:rPr>
+              <a:t>MICROBIOLOGY   ·   BOARD REVIEW  ·  Q4</a:t>
+            </a:r>
+            <a:endParaRPr lang="en-US" sz="1100" dirty="0"/>
+          </a:p>
+        </p:txBody>
+      </p:sp>
+      <p:sp>
+        <p:nvSpPr>
+          <p:cNvPr id="3" name="Text 1"/>
+          <p:cNvSpPr/>
+          <p:nvPr/>
+        </p:nvSpPr>
+        <p:spPr>
+          <a:xfrm>
+            <a:off x="566928" y="713232"/>
+            <a:ext cx="11064240" cy="749808"/>
+          </a:xfrm>
+          <a:prstGeom prst="rect">
+            <a:avLst/>
+          </a:prstGeom>
+          <a:noFill/>
+          <a:ln/>
+        </p:spPr>
+        <p:txBody>
+          <a:bodyPr wrap="square" lIns="0" tIns="0" rIns="0" bIns="0" rtlCol="0" anchor="ctr"/>
+          <a:lstStyle/>
+          <a:p>
+            <a:pPr algn="l" indent="0" marL="0">
+              <a:buNone/>
+            </a:pPr>
+            <a:r>
+              <a:rPr lang="en-US" sz="2600" b="1" dirty="0">
+                <a:solidFill>
+                  <a:srgbClr val="0E3A5F"/>
+                </a:solidFill>
+                <a:latin typeface="Calibri" pitchFamily="34" charset="0"/>
+                <a:ea typeface="Calibri" pitchFamily="34" charset="-122"/>
+                <a:cs typeface="Calibri" pitchFamily="34" charset="-120"/>
+              </a:rPr>
+              <a:t>Board-Style Review</a:t>
+            </a:r>
+            <a:endParaRPr lang="en-US" sz="2600" dirty="0"/>
+          </a:p>
+        </p:txBody>
+      </p:sp>
+      <p:sp>
+        <p:nvSpPr>
+          <p:cNvPr id="4" name="Text 2"/>
+          <p:cNvSpPr/>
+          <p:nvPr/>
+        </p:nvSpPr>
+        <p:spPr>
+          <a:xfrm>
+            <a:off x="566928" y="1417320"/>
+            <a:ext cx="11057839" cy="914400"/>
+          </a:xfrm>
+          <a:prstGeom prst="rect">
+            <a:avLst/>
+          </a:prstGeom>
+          <a:noFill/>
+          <a:ln/>
+        </p:spPr>
+        <p:txBody>
+          <a:bodyPr wrap="square" lIns="0" tIns="0" rIns="0" bIns="0" rtlCol="0" anchor="t"/>
+          <a:lstStyle/>
+          <a:p>
+            <a:pPr algn="l" indent="0" marL="0">
+              <a:lnSpc>
+                <a:spcPct val="105000"/>
+              </a:lnSpc>
+              <a:buNone/>
+            </a:pPr>
+            <a:r>
+              <a:rPr lang="en-US" sz="1450" b="1" dirty="0">
+                <a:solidFill>
+                  <a:srgbClr val="1B2A38"/>
+                </a:solidFill>
+                <a:latin typeface="Calibri" pitchFamily="34" charset="0"/>
+                <a:ea typeface="Calibri" pitchFamily="34" charset="-122"/>
+                <a:cs typeface="Calibri" pitchFamily="34" charset="-120"/>
+              </a:rPr>
+              <a:t>Which organism characteristically does NOT grow on standard bacterial media?</a:t>
+            </a:r>
+            <a:endParaRPr lang="en-US" sz="1450" dirty="0"/>
+          </a:p>
+        </p:txBody>
+      </p:sp>
+      <p:sp>
+        <p:nvSpPr>
+          <p:cNvPr id="5" name="Text 3"/>
+          <p:cNvSpPr/>
+          <p:nvPr/>
+        </p:nvSpPr>
+        <p:spPr>
+          <a:xfrm>
+            <a:off x="658368" y="2395728"/>
+            <a:ext cx="6192390" cy="3017520"/>
+          </a:xfrm>
+          <a:prstGeom prst="rect">
+            <a:avLst/>
+          </a:prstGeom>
+          <a:noFill/>
+          <a:ln/>
+        </p:spPr>
+        <p:txBody>
+          <a:bodyPr wrap="square" lIns="0" tIns="0" rIns="0" bIns="0" rtlCol="0" anchor="t"/>
+          <a:lstStyle/>
+          <a:p>
+            <a:pPr algn="l" indent="0" marL="0">
+              <a:spcAft>
+                <a:spcPts val="600"/>
+              </a:spcAft>
+              <a:buNone/>
+            </a:pPr>
+            <a:r>
+              <a:rPr lang="en-US" sz="1350" dirty="0">
+                <a:solidFill>
+                  <a:srgbClr val="33444F"/>
+                </a:solidFill>
+                <a:latin typeface="Calibri" pitchFamily="34" charset="0"/>
+                <a:ea typeface="Calibri" pitchFamily="34" charset="-122"/>
+                <a:cs typeface="Calibri" pitchFamily="34" charset="-120"/>
+              </a:rPr>
+              <a:t>A. Escherichia coli</a:t>
+            </a:r>
+            <a:endParaRPr lang="en-US" sz="1350" dirty="0"/>
+          </a:p>
+          <a:p>
+            <a:pPr algn="l" indent="0" marL="0">
+              <a:spcAft>
+                <a:spcPts val="600"/>
+              </a:spcAft>
+              <a:buNone/>
+            </a:pPr>
+            <a:r>
+              <a:rPr lang="en-US" sz="1350" dirty="0">
+                <a:solidFill>
+                  <a:srgbClr val="33444F"/>
+                </a:solidFill>
+                <a:latin typeface="Calibri" pitchFamily="34" charset="0"/>
+                <a:ea typeface="Calibri" pitchFamily="34" charset="-122"/>
+                <a:cs typeface="Calibri" pitchFamily="34" charset="-120"/>
+              </a:rPr>
+              <a:t>B. Staphylococcus aureus</a:t>
+            </a:r>
+            <a:endParaRPr lang="en-US" sz="1350" dirty="0"/>
+          </a:p>
+          <a:p>
+            <a:pPr algn="l" indent="0" marL="0">
+              <a:spcAft>
+                <a:spcPts val="600"/>
+              </a:spcAft>
+              <a:buNone/>
+            </a:pPr>
+            <a:r>
+              <a:rPr lang="en-US" sz="1350" b="1" dirty="0">
+                <a:solidFill>
+                  <a:srgbClr val="1F5722"/>
+                </a:solidFill>
+                <a:latin typeface="Calibri" pitchFamily="34" charset="0"/>
+                <a:ea typeface="Calibri" pitchFamily="34" charset="-122"/>
+                <a:cs typeface="Calibri" pitchFamily="34" charset="-120"/>
+              </a:rPr>
+              <a:t>C. Mycoplasma pneumoniae</a:t>
+            </a:r>
+            <a:endParaRPr lang="en-US" sz="1350" dirty="0"/>
+          </a:p>
+          <a:p>
+            <a:pPr algn="l" indent="0" marL="0">
+              <a:spcAft>
+                <a:spcPts val="600"/>
+              </a:spcAft>
+              <a:buNone/>
+            </a:pPr>
+            <a:r>
+              <a:rPr lang="en-US" sz="1350" dirty="0">
+                <a:solidFill>
+                  <a:srgbClr val="33444F"/>
+                </a:solidFill>
+                <a:latin typeface="Calibri" pitchFamily="34" charset="0"/>
+                <a:ea typeface="Calibri" pitchFamily="34" charset="-122"/>
+                <a:cs typeface="Calibri" pitchFamily="34" charset="-120"/>
+              </a:rPr>
+              <a:t>D. Klebsiella pneumoniae</a:t>
+            </a:r>
+            <a:endParaRPr lang="en-US" sz="1350" dirty="0"/>
+          </a:p>
+          <a:p>
+            <a:pPr algn="l" indent="0" marL="0">
+              <a:spcAft>
+                <a:spcPts val="600"/>
+              </a:spcAft>
+              <a:buNone/>
+            </a:pPr>
+            <a:r>
+              <a:rPr lang="en-US" sz="1350" dirty="0">
+                <a:solidFill>
+                  <a:srgbClr val="33444F"/>
+                </a:solidFill>
+                <a:latin typeface="Calibri" pitchFamily="34" charset="0"/>
+                <a:ea typeface="Calibri" pitchFamily="34" charset="-122"/>
+                <a:cs typeface="Calibri" pitchFamily="34" charset="-120"/>
+              </a:rPr>
+              <a:t>E. Pseudomonas aeruginosa</a:t>
+            </a:r>
+            <a:endParaRPr lang="en-US" sz="1350" dirty="0"/>
+          </a:p>
+        </p:txBody>
+      </p:sp>
+      <p:sp>
+        <p:nvSpPr>
+          <p:cNvPr id="6" name="Shape 4"/>
+          <p:cNvSpPr/>
+          <p:nvPr/>
+        </p:nvSpPr>
+        <p:spPr>
+          <a:xfrm>
+            <a:off x="7201632" y="2395728"/>
+            <a:ext cx="4423136" cy="3246120"/>
+          </a:xfrm>
+          <a:prstGeom prst="roundRect">
+            <a:avLst>
+              <a:gd name="adj" fmla="val 2535"/>
+            </a:avLst>
+          </a:prstGeom>
+          <a:solidFill>
+            <a:srgbClr val="E8F2E9"/>
+          </a:solidFill>
+          <a:ln/>
+          <a:effectLst>
+            <a:outerShdw sx="100000" sy="100000" kx="0" ky="0" algn="bl" rotWithShape="0" blurRad="88900" dist="25400" dir="5400000">
+              <a:srgbClr val="22303C">
+                <a:alpha val="12000"/>
+              </a:srgbClr>
+            </a:outerShdw>
+          </a:effectLst>
+        </p:spPr>
+        <p:txBody>
+          <a:bodyPr/>
+          <a:p/>
+        </p:txBody>
+      </p:sp>
+      <p:sp>
+        <p:nvSpPr>
+          <p:cNvPr id="7" name="Text 5"/>
+          <p:cNvSpPr/>
+          <p:nvPr/>
+        </p:nvSpPr>
+        <p:spPr>
+          <a:xfrm>
+            <a:off x="7439376" y="2578608"/>
+            <a:ext cx="3965936" cy="457200"/>
+          </a:xfrm>
+          <a:prstGeom prst="rect">
+            <a:avLst/>
+          </a:prstGeom>
+          <a:noFill/>
+          <a:ln/>
+        </p:spPr>
+        <p:txBody>
+          <a:bodyPr wrap="square" lIns="0" tIns="0" rIns="0" bIns="0" rtlCol="0" anchor="ctr"/>
+          <a:lstStyle/>
+          <a:p>
+            <a:pPr indent="0" marL="0">
+              <a:buNone/>
+            </a:pPr>
+            <a:r>
+              <a:rPr lang="en-US" sz="1500" b="1" dirty="0">
+                <a:solidFill>
+                  <a:srgbClr val="2E7D32"/>
+                </a:solidFill>
+                <a:latin typeface="Calibri" pitchFamily="34" charset="0"/>
+                <a:ea typeface="Calibri" pitchFamily="34" charset="-122"/>
+                <a:cs typeface="Calibri" pitchFamily="34" charset="-120"/>
+              </a:rPr>
+              <a:t>ANSWER  </a:t>
+            </a:r>
+            <a:pPr indent="0" marL="0">
+              <a:buNone/>
+            </a:pPr>
+            <a:r>
+              <a:rPr lang="en-US" sz="1500" b="1" dirty="0">
+                <a:solidFill>
+                  <a:srgbClr val="1B2A38"/>
+                </a:solidFill>
+                <a:latin typeface="Calibri" pitchFamily="34" charset="0"/>
+                <a:ea typeface="Calibri" pitchFamily="34" charset="-122"/>
+                <a:cs typeface="Calibri" pitchFamily="34" charset="-120"/>
+              </a:rPr>
+              <a:t>C — Mycoplasma pneumoniae</a:t>
+            </a:r>
+            <a:endParaRPr lang="en-US" sz="1500" dirty="0"/>
+          </a:p>
+        </p:txBody>
+      </p:sp>
+      <p:sp>
+        <p:nvSpPr>
+          <p:cNvPr id="8" name="Text 6"/>
+          <p:cNvSpPr/>
+          <p:nvPr/>
+        </p:nvSpPr>
+        <p:spPr>
+          <a:xfrm>
+            <a:off x="7439376" y="3127248"/>
+            <a:ext cx="3947648" cy="2377440"/>
+          </a:xfrm>
+          <a:prstGeom prst="rect">
+            <a:avLst/>
+          </a:prstGeom>
+          <a:noFill/>
+          <a:ln/>
+        </p:spPr>
+        <p:txBody>
+          <a:bodyPr wrap="square" lIns="0" tIns="0" rIns="0" bIns="0" rtlCol="0" anchor="t"/>
+          <a:lstStyle/>
+          <a:p>
+            <a:pPr algn="l" indent="0" marL="0">
+              <a:lnSpc>
+                <a:spcPct val="108000"/>
+              </a:lnSpc>
+              <a:buNone/>
+            </a:pPr>
+            <a:r>
+              <a:rPr lang="en-US" sz="1250" dirty="0">
+                <a:solidFill>
+                  <a:srgbClr val="33444F"/>
+                </a:solidFill>
+                <a:latin typeface="Calibri" pitchFamily="34" charset="0"/>
+                <a:ea typeface="Calibri" pitchFamily="34" charset="-122"/>
+                <a:cs typeface="Calibri" pitchFamily="34" charset="-120"/>
+              </a:rPr>
+              <a:t>Mycoplasma lacks a cell wall and does not grow on routine media; diagnosis relies on serology or molecular methods.</a:t>
+            </a:r>
+            <a:endParaRPr lang="en-US" sz="1250" dirty="0"/>
+          </a:p>
+        </p:txBody>
+      </p:sp>
+      <p:sp>
+        <p:nvSpPr>
+          <p:cNvPr id="9" name="Text 7"/>
+          <p:cNvSpPr/>
+          <p:nvPr/>
+        </p:nvSpPr>
+        <p:spPr>
+          <a:xfrm>
+            <a:off x="566928" y="6473952"/>
+            <a:ext cx="7772400" cy="274320"/>
+          </a:xfrm>
+          <a:prstGeom prst="rect">
+            <a:avLst/>
+          </a:prstGeom>
+          <a:noFill/>
+          <a:ln/>
+        </p:spPr>
+        <p:txBody>
+          <a:bodyPr wrap="square" lIns="0" tIns="0" rIns="0" bIns="0" rtlCol="0" anchor="ctr"/>
+          <a:lstStyle/>
+          <a:p>
+            <a:pPr algn="l" indent="0" marL="0">
+              <a:buNone/>
+            </a:pPr>
+            <a:r>
+              <a:rPr lang="en-US" sz="850" dirty="0">
+                <a:solidFill>
+                  <a:srgbClr val="9AA8B4"/>
+                </a:solidFill>
+                <a:latin typeface="Calibri" pitchFamily="34" charset="0"/>
+                <a:ea typeface="Calibri" pitchFamily="34" charset="-122"/>
+                <a:cs typeface="Calibri" pitchFamily="34" charset="-120"/>
+              </a:rPr>
+              <a:t>Makassed General Hospital  ·  Department of Laboratory Medicine</a:t>
+            </a:r>
+            <a:endParaRPr lang="en-US" sz="850" dirty="0"/>
+          </a:p>
+        </p:txBody>
+      </p:sp>
+      <p:sp>
+        <p:nvSpPr>
+          <p:cNvPr id="10" name="Text 8"/>
+          <p:cNvSpPr/>
+          <p:nvPr/>
+        </p:nvSpPr>
+        <p:spPr>
+          <a:xfrm>
+            <a:off x="9814255" y="6473952"/>
+            <a:ext cx="1828800" cy="274320"/>
+          </a:xfrm>
+          <a:prstGeom prst="rect">
+            <a:avLst/>
+          </a:prstGeom>
+          <a:noFill/>
+          <a:ln/>
+        </p:spPr>
+        <p:txBody>
+          <a:bodyPr wrap="square" lIns="0" tIns="0" rIns="0" bIns="0" rtlCol="0" anchor="ctr"/>
+          <a:lstStyle/>
+          <a:p>
+            <a:pPr algn="r" indent="0" marL="0">
+              <a:buNone/>
+            </a:pPr>
+            <a:r>
+              <a:rPr lang="en-US" sz="850" dirty="0">
+                <a:solidFill>
+                  <a:srgbClr val="9AA8B4"/>
+                </a:solidFill>
+                <a:latin typeface="Calibri" pitchFamily="34" charset="0"/>
+                <a:ea typeface="Calibri" pitchFamily="34" charset="-122"/>
+                <a:cs typeface="Calibri" pitchFamily="34" charset="-120"/>
+              </a:rPr>
+              <a:t>CP Lecture Series</a:t>
+            </a:r>
+            <a:pPr algn="r" indent="0" marL="0">
+              <a:buNone/>
+            </a:pPr>
+            <a:r>
+              <a:rPr lang="en-US" sz="850" dirty="0">
+                <a:solidFill>
+                  <a:srgbClr val="DCE4EC"/>
+                </a:solidFill>
+                <a:latin typeface="Calibri" pitchFamily="34" charset="0"/>
+                <a:ea typeface="Calibri" pitchFamily="34" charset="-122"/>
+                <a:cs typeface="Calibri" pitchFamily="34" charset="-120"/>
+              </a:rPr>
+              <a:t>   ·   </a:t>
+            </a:r>
+            <a:pPr algn="r" indent="0" marL="0">
+              <a:buNone/>
+            </a:pPr>
+            <a:r>
+              <a:rPr lang="en-US" sz="850" b="1" dirty="0">
+                <a:solidFill>
+                  <a:srgbClr val="2E7D32"/>
+                </a:solidFill>
+                <a:latin typeface="Calibri" pitchFamily="34" charset="0"/>
+                <a:ea typeface="Calibri" pitchFamily="34" charset="-122"/>
+                <a:cs typeface="Calibri" pitchFamily="34" charset="-120"/>
+              </a:rPr>
+              <a:t>20</a:t>
+            </a:r>
+            <a:endParaRPr lang="en-US" sz="850" dirty="0"/>
+          </a:p>
+        </p:txBody>
+      </p:sp>
+    </p:spTree>
+  </p:cSld>
+  <p:clrMapOvr>
+    <a:masterClrMapping/>
+  </p:clrMapOvr>
+</p:sld>
+</file>
+
+<file path=ppt/slides/slide27.xml><?xml version="1.0" encoding="utf-8"?>
+<p:sld xmlns:a="http://schemas.openxmlformats.org/drawingml/2006/main" xmlns:p="http://schemas.openxmlformats.org/presentationml/2006/main" xmlns:r="http://schemas.openxmlformats.org/officeDocument/2006/relationships">
+  <p:cSld>
+    <p:spTree>
+      <p:nvGrpSpPr>
+        <p:cNvPr id="1" name=""/>
+        <p:cNvGrpSpPr/>
+        <p:nvPr/>
+      </p:nvGrpSpPr>
+      <p:grpSpPr/>
+      <p:sp>
+        <p:nvSpPr>
+          <p:cNvPr id="2" name="Text 0"/>
+          <p:cNvSpPr/>
+          <p:nvPr/>
+        </p:nvSpPr>
+        <p:spPr>
+          <a:xfrm>
+            <a:off x="566928" y="329184"/>
+            <a:ext cx="10515600" cy="310896"/>
+          </a:xfrm>
+          <a:prstGeom prst="rect">
+            <a:avLst/>
+          </a:prstGeom>
+          <a:noFill/>
+          <a:ln/>
+        </p:spPr>
+        <p:txBody>
+          <a:bodyPr wrap="square" lIns="0" tIns="0" rIns="0" bIns="0" rtlCol="0" anchor="ctr"/>
+          <a:lstStyle/>
+          <a:p>
+            <a:pPr algn="l" indent="0" marL="0">
+              <a:buNone/>
+            </a:pPr>
+            <a:r>
+              <a:rPr lang="en-US" sz="1100" b="1" spc="150" kern="0" dirty="0">
+                <a:solidFill>
+                  <a:srgbClr val="2E7D32"/>
+                </a:solidFill>
+                <a:latin typeface="Calibri" pitchFamily="34" charset="0"/>
+                <a:ea typeface="Calibri" pitchFamily="34" charset="-122"/>
+                <a:cs typeface="Calibri" pitchFamily="34" charset="-120"/>
+              </a:rPr>
+              <a:t>MICROBIOLOGY   ·   BOARD REVIEW  ·  Q3</a:t>
+            </a:r>
+            <a:endParaRPr lang="en-US" sz="1100" dirty="0"/>
+          </a:p>
+        </p:txBody>
+      </p:sp>
+      <p:sp>
+        <p:nvSpPr>
+          <p:cNvPr id="3" name="Text 1"/>
+          <p:cNvSpPr/>
+          <p:nvPr/>
+        </p:nvSpPr>
+        <p:spPr>
+          <a:xfrm>
+            <a:off x="566928" y="713232"/>
+            <a:ext cx="11064240" cy="749808"/>
+          </a:xfrm>
+          <a:prstGeom prst="rect">
+            <a:avLst/>
+          </a:prstGeom>
+          <a:noFill/>
+          <a:ln/>
+        </p:spPr>
+        <p:txBody>
+          <a:bodyPr wrap="square" lIns="0" tIns="0" rIns="0" bIns="0" rtlCol="0" anchor="ctr"/>
+          <a:lstStyle/>
+          <a:p>
+            <a:pPr algn="l" indent="0" marL="0">
+              <a:buNone/>
+            </a:pPr>
+            <a:r>
+              <a:rPr lang="en-US" sz="2600" b="1" dirty="0">
+                <a:solidFill>
+                  <a:srgbClr val="0E3A5F"/>
+                </a:solidFill>
+                <a:latin typeface="Calibri" pitchFamily="34" charset="0"/>
+                <a:ea typeface="Calibri" pitchFamily="34" charset="-122"/>
+                <a:cs typeface="Calibri" pitchFamily="34" charset="-120"/>
+              </a:rPr>
+              <a:t>Board-Style Review</a:t>
+            </a:r>
+            <a:endParaRPr lang="en-US" sz="2600" dirty="0"/>
+          </a:p>
+        </p:txBody>
+      </p:sp>
+      <p:sp>
+        <p:nvSpPr>
+          <p:cNvPr id="4" name="Text 2"/>
+          <p:cNvSpPr/>
+          <p:nvPr/>
+        </p:nvSpPr>
+        <p:spPr>
+          <a:xfrm>
+            <a:off x="566928" y="1417320"/>
+            <a:ext cx="11057839" cy="914400"/>
+          </a:xfrm>
+          <a:prstGeom prst="rect">
+            <a:avLst/>
+          </a:prstGeom>
+          <a:noFill/>
+          <a:ln/>
+        </p:spPr>
+        <p:txBody>
+          <a:bodyPr wrap="square" lIns="0" tIns="0" rIns="0" bIns="0" rtlCol="0" anchor="t"/>
+          <a:lstStyle/>
+          <a:p>
+            <a:pPr algn="l" indent="0" marL="0">
+              <a:lnSpc>
+                <a:spcPct val="105000"/>
+              </a:lnSpc>
+              <a:buNone/>
+            </a:pPr>
+            <a:r>
+              <a:rPr lang="en-US" sz="1450" b="1" dirty="0">
+                <a:solidFill>
+                  <a:srgbClr val="1B2A38"/>
+                </a:solidFill>
+                <a:latin typeface="Calibri" pitchFamily="34" charset="0"/>
+                <a:ea typeface="Calibri" pitchFamily="34" charset="-122"/>
+                <a:cs typeface="Calibri" pitchFamily="34" charset="-120"/>
+              </a:rPr>
+              <a:t>MALDI-TOF identifies organisms primarily by:</a:t>
+            </a:r>
+            <a:endParaRPr lang="en-US" sz="1450" dirty="0"/>
+          </a:p>
+        </p:txBody>
+      </p:sp>
+      <p:sp>
+        <p:nvSpPr>
+          <p:cNvPr id="5" name="Text 3"/>
+          <p:cNvSpPr/>
+          <p:nvPr/>
+        </p:nvSpPr>
+        <p:spPr>
+          <a:xfrm>
+            <a:off x="658368" y="2395728"/>
+            <a:ext cx="6192390" cy="3017520"/>
+          </a:xfrm>
+          <a:prstGeom prst="rect">
+            <a:avLst/>
+          </a:prstGeom>
+          <a:noFill/>
+          <a:ln/>
+        </p:spPr>
+        <p:txBody>
+          <a:bodyPr wrap="square" lIns="0" tIns="0" rIns="0" bIns="0" rtlCol="0" anchor="t"/>
+          <a:lstStyle/>
+          <a:p>
+            <a:pPr algn="l" indent="0" marL="0">
+              <a:spcAft>
+                <a:spcPts val="600"/>
+              </a:spcAft>
+              <a:buNone/>
+            </a:pPr>
+            <a:r>
+              <a:rPr lang="en-US" sz="1350" dirty="0">
+                <a:solidFill>
+                  <a:srgbClr val="33444F"/>
+                </a:solidFill>
+                <a:latin typeface="Calibri" pitchFamily="34" charset="0"/>
+                <a:ea typeface="Calibri" pitchFamily="34" charset="-122"/>
+                <a:cs typeface="Calibri" pitchFamily="34" charset="-120"/>
+              </a:rPr>
+              <a:t>A. DNA sequencing</a:t>
+            </a:r>
+            <a:endParaRPr lang="en-US" sz="1350" dirty="0"/>
+          </a:p>
+          <a:p>
+            <a:pPr algn="l" indent="0" marL="0">
+              <a:spcAft>
+                <a:spcPts val="600"/>
+              </a:spcAft>
+              <a:buNone/>
+            </a:pPr>
+            <a:r>
+              <a:rPr lang="en-US" sz="1350" dirty="0">
+                <a:solidFill>
+                  <a:srgbClr val="33444F"/>
+                </a:solidFill>
+                <a:latin typeface="Calibri" pitchFamily="34" charset="0"/>
+                <a:ea typeface="Calibri" pitchFamily="34" charset="-122"/>
+                <a:cs typeface="Calibri" pitchFamily="34" charset="-120"/>
+              </a:rPr>
+              <a:t>B. Antibody binding</a:t>
+            </a:r>
+            <a:endParaRPr lang="en-US" sz="1350" dirty="0"/>
+          </a:p>
+          <a:p>
+            <a:pPr algn="l" indent="0" marL="0">
+              <a:spcAft>
+                <a:spcPts val="600"/>
+              </a:spcAft>
+              <a:buNone/>
+            </a:pPr>
+            <a:r>
+              <a:rPr lang="en-US" sz="1350" b="1" dirty="0">
+                <a:solidFill>
+                  <a:srgbClr val="1F5722"/>
+                </a:solidFill>
+                <a:latin typeface="Calibri" pitchFamily="34" charset="0"/>
+                <a:ea typeface="Calibri" pitchFamily="34" charset="-122"/>
+                <a:cs typeface="Calibri" pitchFamily="34" charset="-120"/>
+              </a:rPr>
+              <a:t>C. Protein mass-spectral fingerprint</a:t>
+            </a:r>
+            <a:endParaRPr lang="en-US" sz="1350" dirty="0"/>
+          </a:p>
+          <a:p>
+            <a:pPr algn="l" indent="0" marL="0">
+              <a:spcAft>
+                <a:spcPts val="600"/>
+              </a:spcAft>
+              <a:buNone/>
+            </a:pPr>
+            <a:r>
+              <a:rPr lang="en-US" sz="1350" dirty="0">
+                <a:solidFill>
+                  <a:srgbClr val="33444F"/>
+                </a:solidFill>
+                <a:latin typeface="Calibri" pitchFamily="34" charset="0"/>
+                <a:ea typeface="Calibri" pitchFamily="34" charset="-122"/>
+                <a:cs typeface="Calibri" pitchFamily="34" charset="-120"/>
+              </a:rPr>
+              <a:t>D. Colony color</a:t>
+            </a:r>
+            <a:endParaRPr lang="en-US" sz="1350" dirty="0"/>
+          </a:p>
+          <a:p>
+            <a:pPr algn="l" indent="0" marL="0">
+              <a:spcAft>
+                <a:spcPts val="600"/>
+              </a:spcAft>
+              <a:buNone/>
+            </a:pPr>
+            <a:r>
+              <a:rPr lang="en-US" sz="1350" dirty="0">
+                <a:solidFill>
+                  <a:srgbClr val="33444F"/>
+                </a:solidFill>
+                <a:latin typeface="Calibri" pitchFamily="34" charset="0"/>
+                <a:ea typeface="Calibri" pitchFamily="34" charset="-122"/>
+                <a:cs typeface="Calibri" pitchFamily="34" charset="-120"/>
+              </a:rPr>
+              <a:t>E. Gram reaction</a:t>
+            </a:r>
+            <a:endParaRPr lang="en-US" sz="1350" dirty="0"/>
+          </a:p>
+        </p:txBody>
+      </p:sp>
+      <p:sp>
+        <p:nvSpPr>
+          <p:cNvPr id="6" name="Shape 4"/>
+          <p:cNvSpPr/>
+          <p:nvPr/>
+        </p:nvSpPr>
+        <p:spPr>
+          <a:xfrm>
+            <a:off x="7201632" y="2395728"/>
+            <a:ext cx="4423136" cy="3246120"/>
+          </a:xfrm>
+          <a:prstGeom prst="roundRect">
+            <a:avLst>
+              <a:gd name="adj" fmla="val 2535"/>
+            </a:avLst>
+          </a:prstGeom>
+          <a:solidFill>
+            <a:srgbClr val="E8F2E9"/>
+          </a:solidFill>
+          <a:ln/>
+          <a:effectLst>
+            <a:outerShdw sx="100000" sy="100000" kx="0" ky="0" algn="bl" rotWithShape="0" blurRad="88900" dist="25400" dir="5400000">
+              <a:srgbClr val="22303C">
+                <a:alpha val="12000"/>
+              </a:srgbClr>
+            </a:outerShdw>
+          </a:effectLst>
+        </p:spPr>
+        <p:txBody>
+          <a:bodyPr/>
+          <a:p/>
+        </p:txBody>
+      </p:sp>
+      <p:sp>
+        <p:nvSpPr>
+          <p:cNvPr id="7" name="Text 5"/>
+          <p:cNvSpPr/>
+          <p:nvPr/>
+        </p:nvSpPr>
+        <p:spPr>
+          <a:xfrm>
+            <a:off x="7439376" y="2578608"/>
+            <a:ext cx="3965936" cy="457200"/>
+          </a:xfrm>
+          <a:prstGeom prst="rect">
+            <a:avLst/>
+          </a:prstGeom>
+          <a:noFill/>
+          <a:ln/>
+        </p:spPr>
+        <p:txBody>
+          <a:bodyPr wrap="square" lIns="0" tIns="0" rIns="0" bIns="0" rtlCol="0" anchor="ctr"/>
+          <a:lstStyle/>
+          <a:p>
+            <a:pPr indent="0" marL="0">
+              <a:buNone/>
+            </a:pPr>
+            <a:r>
+              <a:rPr lang="en-US" sz="1500" b="1" dirty="0">
+                <a:solidFill>
+                  <a:srgbClr val="2E7D32"/>
+                </a:solidFill>
+                <a:latin typeface="Calibri" pitchFamily="34" charset="0"/>
+                <a:ea typeface="Calibri" pitchFamily="34" charset="-122"/>
+                <a:cs typeface="Calibri" pitchFamily="34" charset="-120"/>
+              </a:rPr>
+              <a:t>ANSWER  </a:t>
+            </a:r>
+            <a:pPr indent="0" marL="0">
+              <a:buNone/>
+            </a:pPr>
+            <a:r>
+              <a:rPr lang="en-US" sz="1500" b="1" dirty="0">
+                <a:solidFill>
+                  <a:srgbClr val="1B2A38"/>
+                </a:solidFill>
+                <a:latin typeface="Calibri" pitchFamily="34" charset="0"/>
+                <a:ea typeface="Calibri" pitchFamily="34" charset="-122"/>
+                <a:cs typeface="Calibri" pitchFamily="34" charset="-120"/>
+              </a:rPr>
+              <a:t>C — Protein mass-spectral fingerprint</a:t>
+            </a:r>
+            <a:endParaRPr lang="en-US" sz="1500" dirty="0"/>
+          </a:p>
+        </p:txBody>
+      </p:sp>
+      <p:sp>
+        <p:nvSpPr>
+          <p:cNvPr id="8" name="Text 6"/>
+          <p:cNvSpPr/>
+          <p:nvPr/>
+        </p:nvSpPr>
+        <p:spPr>
+          <a:xfrm>
+            <a:off x="7439376" y="3127248"/>
+            <a:ext cx="3947648" cy="2377440"/>
+          </a:xfrm>
+          <a:prstGeom prst="rect">
+            <a:avLst/>
+          </a:prstGeom>
+          <a:noFill/>
+          <a:ln/>
+        </p:spPr>
+        <p:txBody>
+          <a:bodyPr wrap="square" lIns="0" tIns="0" rIns="0" bIns="0" rtlCol="0" anchor="t"/>
+          <a:lstStyle/>
+          <a:p>
+            <a:pPr algn="l" indent="0" marL="0">
+              <a:lnSpc>
+                <a:spcPct val="108000"/>
+              </a:lnSpc>
+              <a:buNone/>
+            </a:pPr>
+            <a:r>
+              <a:rPr lang="en-US" sz="1250" dirty="0">
+                <a:solidFill>
+                  <a:srgbClr val="33444F"/>
+                </a:solidFill>
+                <a:latin typeface="Calibri" pitchFamily="34" charset="0"/>
+                <a:ea typeface="Calibri" pitchFamily="34" charset="-122"/>
+                <a:cs typeface="Calibri" pitchFamily="34" charset="-120"/>
+              </a:rPr>
+              <a:t>MALDI-TOF matches an organism’s ribosomal protein spectrum against a database for rapid identification from growth.</a:t>
+            </a:r>
+            <a:endParaRPr lang="en-US" sz="1250" dirty="0"/>
+          </a:p>
+        </p:txBody>
+      </p:sp>
+      <p:sp>
+        <p:nvSpPr>
+          <p:cNvPr id="9" name="Text 7"/>
+          <p:cNvSpPr/>
+          <p:nvPr/>
+        </p:nvSpPr>
+        <p:spPr>
+          <a:xfrm>
+            <a:off x="566928" y="6473952"/>
+            <a:ext cx="7772400" cy="274320"/>
+          </a:xfrm>
+          <a:prstGeom prst="rect">
+            <a:avLst/>
+          </a:prstGeom>
+          <a:noFill/>
+          <a:ln/>
+        </p:spPr>
+        <p:txBody>
+          <a:bodyPr wrap="square" lIns="0" tIns="0" rIns="0" bIns="0" rtlCol="0" anchor="ctr"/>
+          <a:lstStyle/>
+          <a:p>
+            <a:pPr algn="l" indent="0" marL="0">
+              <a:buNone/>
+            </a:pPr>
+            <a:r>
+              <a:rPr lang="en-US" sz="850" dirty="0">
+                <a:solidFill>
+                  <a:srgbClr val="9AA8B4"/>
+                </a:solidFill>
+                <a:latin typeface="Calibri" pitchFamily="34" charset="0"/>
+                <a:ea typeface="Calibri" pitchFamily="34" charset="-122"/>
+                <a:cs typeface="Calibri" pitchFamily="34" charset="-120"/>
+              </a:rPr>
+              <a:t>Makassed General Hospital  ·  Department of Laboratory Medicine</a:t>
+            </a:r>
+            <a:endParaRPr lang="en-US" sz="850" dirty="0"/>
+          </a:p>
+        </p:txBody>
+      </p:sp>
+      <p:sp>
+        <p:nvSpPr>
+          <p:cNvPr id="10" name="Text 8"/>
+          <p:cNvSpPr/>
+          <p:nvPr/>
+        </p:nvSpPr>
+        <p:spPr>
+          <a:xfrm>
+            <a:off x="9814255" y="6473952"/>
+            <a:ext cx="1828800" cy="274320"/>
+          </a:xfrm>
+          <a:prstGeom prst="rect">
+            <a:avLst/>
+          </a:prstGeom>
+          <a:noFill/>
+          <a:ln/>
+        </p:spPr>
+        <p:txBody>
+          <a:bodyPr wrap="square" lIns="0" tIns="0" rIns="0" bIns="0" rtlCol="0" anchor="ctr"/>
+          <a:lstStyle/>
+          <a:p>
+            <a:pPr algn="r" indent="0" marL="0">
+              <a:buNone/>
+            </a:pPr>
+            <a:r>
+              <a:rPr lang="en-US" sz="850" dirty="0">
+                <a:solidFill>
+                  <a:srgbClr val="9AA8B4"/>
+                </a:solidFill>
+                <a:latin typeface="Calibri" pitchFamily="34" charset="0"/>
+                <a:ea typeface="Calibri" pitchFamily="34" charset="-122"/>
+                <a:cs typeface="Calibri" pitchFamily="34" charset="-120"/>
+              </a:rPr>
+              <a:t>CP Lecture Series</a:t>
+            </a:r>
+            <a:pPr algn="r" indent="0" marL="0">
+              <a:buNone/>
+            </a:pPr>
+            <a:r>
+              <a:rPr lang="en-US" sz="850" dirty="0">
+                <a:solidFill>
+                  <a:srgbClr val="DCE4EC"/>
+                </a:solidFill>
+                <a:latin typeface="Calibri" pitchFamily="34" charset="0"/>
+                <a:ea typeface="Calibri" pitchFamily="34" charset="-122"/>
+                <a:cs typeface="Calibri" pitchFamily="34" charset="-120"/>
+              </a:rPr>
+              <a:t>   ·   </a:t>
+            </a:r>
+            <a:pPr algn="r" indent="0" marL="0">
+              <a:buNone/>
+            </a:pPr>
+            <a:r>
+              <a:rPr lang="en-US" sz="850" b="1" dirty="0">
+                <a:solidFill>
+                  <a:srgbClr val="2E7D32"/>
+                </a:solidFill>
+                <a:latin typeface="Calibri" pitchFamily="34" charset="0"/>
+                <a:ea typeface="Calibri" pitchFamily="34" charset="-122"/>
+                <a:cs typeface="Calibri" pitchFamily="34" charset="-120"/>
+              </a:rPr>
+              <a:t>19</a:t>
+            </a:r>
+            <a:endParaRPr lang="en-US" sz="850" dirty="0"/>
+          </a:p>
+        </p:txBody>
+      </p:sp>
+    </p:spTree>
+  </p:cSld>
+  <p:clrMapOvr>
+    <a:masterClrMapping/>
+  </p:clrMapOvr>
+</p:sld>
+</file>
+
+<file path=ppt/slides/slide28.xml><?xml version="1.0" encoding="utf-8"?>
+<p:sld xmlns:a="http://schemas.openxmlformats.org/drawingml/2006/main" xmlns:p="http://schemas.openxmlformats.org/presentationml/2006/main" xmlns:r="http://schemas.openxmlformats.org/officeDocument/2006/relationships">
+  <p:cSld>
+    <p:spTree>
+      <p:nvGrpSpPr>
+        <p:cNvPr id="1" name=""/>
+        <p:cNvGrpSpPr/>
+        <p:nvPr/>
+      </p:nvGrpSpPr>
+      <p:grpSpPr/>
+      <p:sp>
+        <p:nvSpPr>
+          <p:cNvPr id="2" name="Text 0"/>
+          <p:cNvSpPr/>
+          <p:nvPr/>
+        </p:nvSpPr>
+        <p:spPr>
+          <a:xfrm>
+            <a:off x="566928" y="329184"/>
+            <a:ext cx="10515600" cy="310896"/>
+          </a:xfrm>
+          <a:prstGeom prst="rect">
+            <a:avLst/>
+          </a:prstGeom>
+          <a:noFill/>
+          <a:ln/>
+        </p:spPr>
+        <p:txBody>
+          <a:bodyPr wrap="square" lIns="0" tIns="0" rIns="0" bIns="0" rtlCol="0" anchor="ctr"/>
+          <a:lstStyle/>
+          <a:p>
+            <a:pPr algn="l" indent="0" marL="0">
+              <a:buNone/>
+            </a:pPr>
+            <a:r>
+              <a:rPr lang="en-US" sz="1100" b="1" spc="150" kern="0" dirty="0">
+                <a:solidFill>
+                  <a:srgbClr val="2E7D32"/>
+                </a:solidFill>
+                <a:latin typeface="Calibri" pitchFamily="34" charset="0"/>
+                <a:ea typeface="Calibri" pitchFamily="34" charset="-122"/>
+                <a:cs typeface="Calibri" pitchFamily="34" charset="-120"/>
+              </a:rPr>
+              <a:t>MICROBIOLOGY   ·   BOARD REVIEW  ·  Q2</a:t>
+            </a:r>
+            <a:endParaRPr lang="en-US" sz="1100" dirty="0"/>
+          </a:p>
+        </p:txBody>
+      </p:sp>
+      <p:sp>
+        <p:nvSpPr>
+          <p:cNvPr id="3" name="Text 1"/>
+          <p:cNvSpPr/>
+          <p:nvPr/>
+        </p:nvSpPr>
+        <p:spPr>
+          <a:xfrm>
+            <a:off x="566928" y="713232"/>
+            <a:ext cx="11064240" cy="749808"/>
+          </a:xfrm>
+          <a:prstGeom prst="rect">
+            <a:avLst/>
+          </a:prstGeom>
+          <a:noFill/>
+          <a:ln/>
+        </p:spPr>
+        <p:txBody>
+          <a:bodyPr wrap="square" lIns="0" tIns="0" rIns="0" bIns="0" rtlCol="0" anchor="ctr"/>
+          <a:lstStyle/>
+          <a:p>
+            <a:pPr algn="l" indent="0" marL="0">
+              <a:buNone/>
+            </a:pPr>
+            <a:r>
+              <a:rPr lang="en-US" sz="2600" b="1" dirty="0">
+                <a:solidFill>
+                  <a:srgbClr val="0E3A5F"/>
+                </a:solidFill>
+                <a:latin typeface="Calibri" pitchFamily="34" charset="0"/>
+                <a:ea typeface="Calibri" pitchFamily="34" charset="-122"/>
+                <a:cs typeface="Calibri" pitchFamily="34" charset="-120"/>
+              </a:rPr>
+              <a:t>Board-Style Review</a:t>
+            </a:r>
+            <a:endParaRPr lang="en-US" sz="2600" dirty="0"/>
+          </a:p>
+        </p:txBody>
+      </p:sp>
+      <p:sp>
+        <p:nvSpPr>
+          <p:cNvPr id="4" name="Text 2"/>
+          <p:cNvSpPr/>
+          <p:nvPr/>
+        </p:nvSpPr>
+        <p:spPr>
+          <a:xfrm>
+            <a:off x="566928" y="1417320"/>
+            <a:ext cx="11057839" cy="914400"/>
+          </a:xfrm>
+          <a:prstGeom prst="rect">
+            <a:avLst/>
+          </a:prstGeom>
+          <a:noFill/>
+          <a:ln/>
+        </p:spPr>
+        <p:txBody>
+          <a:bodyPr wrap="square" lIns="0" tIns="0" rIns="0" bIns="0" rtlCol="0" anchor="t"/>
+          <a:lstStyle/>
+          <a:p>
+            <a:pPr algn="l" indent="0" marL="0">
+              <a:lnSpc>
+                <a:spcPct val="105000"/>
+              </a:lnSpc>
+              <a:buNone/>
+            </a:pPr>
+            <a:r>
+              <a:rPr lang="en-US" sz="1450" b="1" dirty="0">
+                <a:solidFill>
+                  <a:srgbClr val="1B2A38"/>
+                </a:solidFill>
+                <a:latin typeface="Calibri" pitchFamily="34" charset="0"/>
+                <a:ea typeface="Calibri" pitchFamily="34" charset="-122"/>
+                <a:cs typeface="Calibri" pitchFamily="34" charset="-120"/>
+              </a:rPr>
+              <a:t>Pink colonies on MacConkey agar indicate:</a:t>
+            </a:r>
+            <a:endParaRPr lang="en-US" sz="1450" dirty="0"/>
+          </a:p>
+        </p:txBody>
+      </p:sp>
+      <p:sp>
+        <p:nvSpPr>
+          <p:cNvPr id="5" name="Text 3"/>
+          <p:cNvSpPr/>
+          <p:nvPr/>
+        </p:nvSpPr>
+        <p:spPr>
+          <a:xfrm>
+            <a:off x="658368" y="2395728"/>
+            <a:ext cx="6192390" cy="3017520"/>
+          </a:xfrm>
+          <a:prstGeom prst="rect">
+            <a:avLst/>
+          </a:prstGeom>
+          <a:noFill/>
+          <a:ln/>
+        </p:spPr>
+        <p:txBody>
+          <a:bodyPr wrap="square" lIns="0" tIns="0" rIns="0" bIns="0" rtlCol="0" anchor="t"/>
+          <a:lstStyle/>
+          <a:p>
+            <a:pPr algn="l" indent="0" marL="0">
+              <a:spcAft>
+                <a:spcPts val="600"/>
+              </a:spcAft>
+              <a:buNone/>
+            </a:pPr>
+            <a:r>
+              <a:rPr lang="en-US" sz="1350" dirty="0">
+                <a:solidFill>
+                  <a:srgbClr val="33444F"/>
+                </a:solidFill>
+                <a:latin typeface="Calibri" pitchFamily="34" charset="0"/>
+                <a:ea typeface="Calibri" pitchFamily="34" charset="-122"/>
+                <a:cs typeface="Calibri" pitchFamily="34" charset="-120"/>
+              </a:rPr>
+              <a:t>A. A gram-positive organism</a:t>
+            </a:r>
+            <a:endParaRPr lang="en-US" sz="1350" dirty="0"/>
+          </a:p>
+          <a:p>
+            <a:pPr algn="l" indent="0" marL="0">
+              <a:spcAft>
+                <a:spcPts val="600"/>
+              </a:spcAft>
+              <a:buNone/>
+            </a:pPr>
+            <a:r>
+              <a:rPr lang="en-US" sz="1350" dirty="0">
+                <a:solidFill>
+                  <a:srgbClr val="33444F"/>
+                </a:solidFill>
+                <a:latin typeface="Calibri" pitchFamily="34" charset="0"/>
+                <a:ea typeface="Calibri" pitchFamily="34" charset="-122"/>
+                <a:cs typeface="Calibri" pitchFamily="34" charset="-120"/>
+              </a:rPr>
+              <a:t>B. A non-lactose fermenter</a:t>
+            </a:r>
+            <a:endParaRPr lang="en-US" sz="1350" dirty="0"/>
+          </a:p>
+          <a:p>
+            <a:pPr algn="l" indent="0" marL="0">
+              <a:spcAft>
+                <a:spcPts val="600"/>
+              </a:spcAft>
+              <a:buNone/>
+            </a:pPr>
+            <a:r>
+              <a:rPr lang="en-US" sz="1350" b="1" dirty="0">
+                <a:solidFill>
+                  <a:srgbClr val="1F5722"/>
+                </a:solidFill>
+                <a:latin typeface="Calibri" pitchFamily="34" charset="0"/>
+                <a:ea typeface="Calibri" pitchFamily="34" charset="-122"/>
+                <a:cs typeface="Calibri" pitchFamily="34" charset="-120"/>
+              </a:rPr>
+              <a:t>C. A lactose-fermenting gram-negative rod</a:t>
+            </a:r>
+            <a:endParaRPr lang="en-US" sz="1350" dirty="0"/>
+          </a:p>
+          <a:p>
+            <a:pPr algn="l" indent="0" marL="0">
+              <a:spcAft>
+                <a:spcPts val="600"/>
+              </a:spcAft>
+              <a:buNone/>
+            </a:pPr>
+            <a:r>
+              <a:rPr lang="en-US" sz="1350" dirty="0">
+                <a:solidFill>
+                  <a:srgbClr val="33444F"/>
+                </a:solidFill>
+                <a:latin typeface="Calibri" pitchFamily="34" charset="0"/>
+                <a:ea typeface="Calibri" pitchFamily="34" charset="-122"/>
+                <a:cs typeface="Calibri" pitchFamily="34" charset="-120"/>
+              </a:rPr>
+              <a:t>D. A fungus</a:t>
+            </a:r>
+            <a:endParaRPr lang="en-US" sz="1350" dirty="0"/>
+          </a:p>
+          <a:p>
+            <a:pPr algn="l" indent="0" marL="0">
+              <a:spcAft>
+                <a:spcPts val="600"/>
+              </a:spcAft>
+              <a:buNone/>
+            </a:pPr>
+            <a:r>
+              <a:rPr lang="en-US" sz="1350" dirty="0">
+                <a:solidFill>
+                  <a:srgbClr val="33444F"/>
+                </a:solidFill>
+                <a:latin typeface="Calibri" pitchFamily="34" charset="0"/>
+                <a:ea typeface="Calibri" pitchFamily="34" charset="-122"/>
+                <a:cs typeface="Calibri" pitchFamily="34" charset="-120"/>
+              </a:rPr>
+              <a:t>E. An anaerobe</a:t>
+            </a:r>
+            <a:endParaRPr lang="en-US" sz="1350" dirty="0"/>
+          </a:p>
+        </p:txBody>
+      </p:sp>
+      <p:sp>
+        <p:nvSpPr>
+          <p:cNvPr id="6" name="Shape 4"/>
+          <p:cNvSpPr/>
+          <p:nvPr/>
+        </p:nvSpPr>
+        <p:spPr>
+          <a:xfrm>
+            <a:off x="7201632" y="2395728"/>
+            <a:ext cx="4423136" cy="3246120"/>
+          </a:xfrm>
+          <a:prstGeom prst="roundRect">
+            <a:avLst>
+              <a:gd name="adj" fmla="val 2535"/>
+            </a:avLst>
+          </a:prstGeom>
+          <a:solidFill>
+            <a:srgbClr val="E8F2E9"/>
+          </a:solidFill>
+          <a:ln/>
+          <a:effectLst>
+            <a:outerShdw sx="100000" sy="100000" kx="0" ky="0" algn="bl" rotWithShape="0" blurRad="88900" dist="25400" dir="5400000">
+              <a:srgbClr val="22303C">
+                <a:alpha val="12000"/>
+              </a:srgbClr>
+            </a:outerShdw>
+          </a:effectLst>
+        </p:spPr>
+        <p:txBody>
+          <a:bodyPr/>
+          <a:p/>
+        </p:txBody>
+      </p:sp>
+      <p:sp>
+        <p:nvSpPr>
+          <p:cNvPr id="7" name="Text 5"/>
+          <p:cNvSpPr/>
+          <p:nvPr/>
+        </p:nvSpPr>
+        <p:spPr>
+          <a:xfrm>
+            <a:off x="7439376" y="2578608"/>
+            <a:ext cx="3965936" cy="457200"/>
+          </a:xfrm>
+          <a:prstGeom prst="rect">
+            <a:avLst/>
+          </a:prstGeom>
+          <a:noFill/>
+          <a:ln/>
+        </p:spPr>
+        <p:txBody>
+          <a:bodyPr wrap="square" lIns="0" tIns="0" rIns="0" bIns="0" rtlCol="0" anchor="ctr"/>
+          <a:lstStyle/>
+          <a:p>
+            <a:pPr indent="0" marL="0">
+              <a:buNone/>
+            </a:pPr>
+            <a:r>
+              <a:rPr lang="en-US" sz="1500" b="1" dirty="0">
+                <a:solidFill>
+                  <a:srgbClr val="2E7D32"/>
+                </a:solidFill>
+                <a:latin typeface="Calibri" pitchFamily="34" charset="0"/>
+                <a:ea typeface="Calibri" pitchFamily="34" charset="-122"/>
+                <a:cs typeface="Calibri" pitchFamily="34" charset="-120"/>
+              </a:rPr>
+              <a:t>ANSWER  </a:t>
+            </a:r>
+            <a:pPr indent="0" marL="0">
+              <a:buNone/>
+            </a:pPr>
+            <a:r>
+              <a:rPr lang="en-US" sz="1500" b="1" dirty="0">
+                <a:solidFill>
+                  <a:srgbClr val="1B2A38"/>
+                </a:solidFill>
+                <a:latin typeface="Calibri" pitchFamily="34" charset="0"/>
+                <a:ea typeface="Calibri" pitchFamily="34" charset="-122"/>
+                <a:cs typeface="Calibri" pitchFamily="34" charset="-120"/>
+              </a:rPr>
+              <a:t>C — Lactose-fermenting GNR</a:t>
+            </a:r>
+            <a:endParaRPr lang="en-US" sz="1500" dirty="0"/>
+          </a:p>
+        </p:txBody>
+      </p:sp>
+      <p:sp>
+        <p:nvSpPr>
+          <p:cNvPr id="8" name="Text 6"/>
+          <p:cNvSpPr/>
+          <p:nvPr/>
+        </p:nvSpPr>
+        <p:spPr>
+          <a:xfrm>
+            <a:off x="7439376" y="3127248"/>
+            <a:ext cx="3947648" cy="2377440"/>
+          </a:xfrm>
+          <a:prstGeom prst="rect">
+            <a:avLst/>
+          </a:prstGeom>
+          <a:noFill/>
+          <a:ln/>
+        </p:spPr>
+        <p:txBody>
+          <a:bodyPr wrap="square" lIns="0" tIns="0" rIns="0" bIns="0" rtlCol="0" anchor="t"/>
+          <a:lstStyle/>
+          <a:p>
+            <a:pPr algn="l" indent="0" marL="0">
+              <a:lnSpc>
+                <a:spcPct val="108000"/>
+              </a:lnSpc>
+              <a:buNone/>
+            </a:pPr>
+            <a:r>
+              <a:rPr lang="en-US" sz="1250" dirty="0">
+                <a:solidFill>
+                  <a:srgbClr val="33444F"/>
+                </a:solidFill>
+                <a:latin typeface="Calibri" pitchFamily="34" charset="0"/>
+                <a:ea typeface="Calibri" pitchFamily="34" charset="-122"/>
+                <a:cs typeface="Calibri" pitchFamily="34" charset="-120"/>
+              </a:rPr>
+              <a:t>MacConkey selects gram-negative rods and turns pink with lactose fermentation (e.g., E. coli, Klebsiella).</a:t>
+            </a:r>
+            <a:endParaRPr lang="en-US" sz="1250" dirty="0"/>
+          </a:p>
+        </p:txBody>
+      </p:sp>
+      <p:sp>
+        <p:nvSpPr>
+          <p:cNvPr id="9" name="Text 7"/>
+          <p:cNvSpPr/>
+          <p:nvPr/>
+        </p:nvSpPr>
+        <p:spPr>
+          <a:xfrm>
+            <a:off x="566928" y="6473952"/>
+            <a:ext cx="7772400" cy="274320"/>
+          </a:xfrm>
+          <a:prstGeom prst="rect">
+            <a:avLst/>
+          </a:prstGeom>
+          <a:noFill/>
+          <a:ln/>
+        </p:spPr>
+        <p:txBody>
+          <a:bodyPr wrap="square" lIns="0" tIns="0" rIns="0" bIns="0" rtlCol="0" anchor="ctr"/>
+          <a:lstStyle/>
+          <a:p>
+            <a:pPr algn="l" indent="0" marL="0">
+              <a:buNone/>
+            </a:pPr>
+            <a:r>
+              <a:rPr lang="en-US" sz="850" dirty="0">
+                <a:solidFill>
+                  <a:srgbClr val="9AA8B4"/>
+                </a:solidFill>
+                <a:latin typeface="Calibri" pitchFamily="34" charset="0"/>
+                <a:ea typeface="Calibri" pitchFamily="34" charset="-122"/>
+                <a:cs typeface="Calibri" pitchFamily="34" charset="-120"/>
+              </a:rPr>
+              <a:t>Makassed General Hospital  ·  Department of Laboratory Medicine</a:t>
+            </a:r>
+            <a:endParaRPr lang="en-US" sz="850" dirty="0"/>
+          </a:p>
+        </p:txBody>
+      </p:sp>
+      <p:sp>
+        <p:nvSpPr>
+          <p:cNvPr id="10" name="Text 8"/>
+          <p:cNvSpPr/>
+          <p:nvPr/>
+        </p:nvSpPr>
+        <p:spPr>
+          <a:xfrm>
+            <a:off x="9814255" y="6473952"/>
+            <a:ext cx="1828800" cy="274320"/>
+          </a:xfrm>
+          <a:prstGeom prst="rect">
+            <a:avLst/>
+          </a:prstGeom>
+          <a:noFill/>
+          <a:ln/>
+        </p:spPr>
+        <p:txBody>
+          <a:bodyPr wrap="square" lIns="0" tIns="0" rIns="0" bIns="0" rtlCol="0" anchor="ctr"/>
+          <a:lstStyle/>
+          <a:p>
+            <a:pPr algn="r" indent="0" marL="0">
+              <a:buNone/>
+            </a:pPr>
+            <a:r>
+              <a:rPr lang="en-US" sz="850" dirty="0">
+                <a:solidFill>
+                  <a:srgbClr val="9AA8B4"/>
+                </a:solidFill>
+                <a:latin typeface="Calibri" pitchFamily="34" charset="0"/>
+                <a:ea typeface="Calibri" pitchFamily="34" charset="-122"/>
+                <a:cs typeface="Calibri" pitchFamily="34" charset="-120"/>
+              </a:rPr>
+              <a:t>CP Lecture Series</a:t>
+            </a:r>
+            <a:pPr algn="r" indent="0" marL="0">
+              <a:buNone/>
+            </a:pPr>
+            <a:r>
+              <a:rPr lang="en-US" sz="850" dirty="0">
+                <a:solidFill>
+                  <a:srgbClr val="DCE4EC"/>
+                </a:solidFill>
+                <a:latin typeface="Calibri" pitchFamily="34" charset="0"/>
+                <a:ea typeface="Calibri" pitchFamily="34" charset="-122"/>
+                <a:cs typeface="Calibri" pitchFamily="34" charset="-120"/>
+              </a:rPr>
+              <a:t>   ·   </a:t>
+            </a:r>
+            <a:pPr algn="r" indent="0" marL="0">
+              <a:buNone/>
+            </a:pPr>
+            <a:r>
+              <a:rPr lang="en-US" sz="850" b="1" dirty="0">
+                <a:solidFill>
+                  <a:srgbClr val="2E7D32"/>
+                </a:solidFill>
+                <a:latin typeface="Calibri" pitchFamily="34" charset="0"/>
+                <a:ea typeface="Calibri" pitchFamily="34" charset="-122"/>
+                <a:cs typeface="Calibri" pitchFamily="34" charset="-120"/>
+              </a:rPr>
+              <a:t>18</a:t>
+            </a:r>
+            <a:endParaRPr lang="en-US" sz="850" dirty="0"/>
+          </a:p>
+        </p:txBody>
+      </p:sp>
+    </p:spTree>
+  </p:cSld>
+  <p:clrMapOvr>
+    <a:masterClrMapping/>
+  </p:clrMapOvr>
+</p:sld>
+</file>
+
+<file path=ppt/slides/slide29.xml><?xml version="1.0" encoding="utf-8"?>
+<p:sld xmlns:a="http://schemas.openxmlformats.org/drawingml/2006/main" xmlns:p="http://schemas.openxmlformats.org/presentationml/2006/main" xmlns:r="http://schemas.openxmlformats.org/officeDocument/2006/relationships">
+  <p:cSld>
+    <p:spTree>
+      <p:nvGrpSpPr>
+        <p:cNvPr id="1" name=""/>
+        <p:cNvGrpSpPr/>
+        <p:nvPr/>
+      </p:nvGrpSpPr>
+      <p:grpSpPr/>
+      <p:sp>
+        <p:nvSpPr>
+          <p:cNvPr id="2" name="Text 0"/>
+          <p:cNvSpPr/>
+          <p:nvPr/>
+        </p:nvSpPr>
+        <p:spPr>
+          <a:xfrm>
+            <a:off x="566928" y="329184"/>
+            <a:ext cx="10515600" cy="310896"/>
+          </a:xfrm>
+          <a:prstGeom prst="rect">
+            <a:avLst/>
+          </a:prstGeom>
+          <a:noFill/>
+          <a:ln/>
+        </p:spPr>
+        <p:txBody>
+          <a:bodyPr wrap="square" lIns="0" tIns="0" rIns="0" bIns="0" rtlCol="0" anchor="ctr"/>
+          <a:lstStyle/>
+          <a:p>
+            <a:pPr algn="l" indent="0" marL="0">
+              <a:buNone/>
+            </a:pPr>
+            <a:r>
+              <a:rPr lang="en-US" sz="1100" b="1" spc="150" kern="0" dirty="0">
+                <a:solidFill>
+                  <a:srgbClr val="2E7D32"/>
+                </a:solidFill>
+                <a:latin typeface="Calibri" pitchFamily="34" charset="0"/>
+                <a:ea typeface="Calibri" pitchFamily="34" charset="-122"/>
+                <a:cs typeface="Calibri" pitchFamily="34" charset="-120"/>
+              </a:rPr>
+              <a:t>MICROBIOLOGY   ·   BOARD REVIEW  ·  Q1</a:t>
+            </a:r>
+            <a:endParaRPr lang="en-US" sz="1100" dirty="0"/>
+          </a:p>
+        </p:txBody>
+      </p:sp>
+      <p:sp>
+        <p:nvSpPr>
+          <p:cNvPr id="3" name="Text 1"/>
+          <p:cNvSpPr/>
+          <p:nvPr/>
+        </p:nvSpPr>
+        <p:spPr>
+          <a:xfrm>
+            <a:off x="566928" y="713232"/>
+            <a:ext cx="11064240" cy="749808"/>
+          </a:xfrm>
+          <a:prstGeom prst="rect">
+            <a:avLst/>
+          </a:prstGeom>
+          <a:noFill/>
+          <a:ln/>
+        </p:spPr>
+        <p:txBody>
+          <a:bodyPr wrap="square" lIns="0" tIns="0" rIns="0" bIns="0" rtlCol="0" anchor="ctr"/>
+          <a:lstStyle/>
+          <a:p>
+            <a:pPr algn="l" indent="0" marL="0">
+              <a:buNone/>
+            </a:pPr>
+            <a:r>
+              <a:rPr lang="en-US" sz="2600" b="1" dirty="0">
+                <a:solidFill>
+                  <a:srgbClr val="0E3A5F"/>
+                </a:solidFill>
+                <a:latin typeface="Calibri" pitchFamily="34" charset="0"/>
+                <a:ea typeface="Calibri" pitchFamily="34" charset="-122"/>
+                <a:cs typeface="Calibri" pitchFamily="34" charset="-120"/>
+              </a:rPr>
+              <a:t>Board-Style Review</a:t>
+            </a:r>
+            <a:endParaRPr lang="en-US" sz="2600" dirty="0"/>
+          </a:p>
+        </p:txBody>
+      </p:sp>
+      <p:sp>
+        <p:nvSpPr>
+          <p:cNvPr id="4" name="Text 2"/>
+          <p:cNvSpPr/>
+          <p:nvPr/>
+        </p:nvSpPr>
+        <p:spPr>
+          <a:xfrm>
+            <a:off x="566928" y="1417320"/>
+            <a:ext cx="11057839" cy="914400"/>
+          </a:xfrm>
+          <a:prstGeom prst="rect">
+            <a:avLst/>
+          </a:prstGeom>
+          <a:noFill/>
+          <a:ln/>
+        </p:spPr>
+        <p:txBody>
+          <a:bodyPr wrap="square" lIns="0" tIns="0" rIns="0" bIns="0" rtlCol="0" anchor="t"/>
+          <a:lstStyle/>
+          <a:p>
+            <a:pPr algn="l" indent="0" marL="0">
+              <a:lnSpc>
+                <a:spcPct val="105000"/>
+              </a:lnSpc>
+              <a:buNone/>
+            </a:pPr>
+            <a:r>
+              <a:rPr lang="en-US" sz="1450" b="1" dirty="0">
+                <a:solidFill>
+                  <a:srgbClr val="1B2A38"/>
+                </a:solidFill>
+                <a:latin typeface="Calibri" pitchFamily="34" charset="0"/>
+                <a:ea typeface="Calibri" pitchFamily="34" charset="-122"/>
+                <a:cs typeface="Calibri" pitchFamily="34" charset="-120"/>
+              </a:rPr>
+              <a:t>Catalase distinguishes which two groups of gram-positive cocci?</a:t>
+            </a:r>
+            <a:endParaRPr lang="en-US" sz="1450" dirty="0"/>
+          </a:p>
+        </p:txBody>
+      </p:sp>
+      <p:sp>
+        <p:nvSpPr>
+          <p:cNvPr id="5" name="Text 3"/>
+          <p:cNvSpPr/>
+          <p:nvPr/>
+        </p:nvSpPr>
+        <p:spPr>
+          <a:xfrm>
+            <a:off x="658368" y="2395728"/>
+            <a:ext cx="6192390" cy="3017520"/>
+          </a:xfrm>
+          <a:prstGeom prst="rect">
+            <a:avLst/>
+          </a:prstGeom>
+          <a:noFill/>
+          <a:ln/>
+        </p:spPr>
+        <p:txBody>
+          <a:bodyPr wrap="square" lIns="0" tIns="0" rIns="0" bIns="0" rtlCol="0" anchor="t"/>
+          <a:lstStyle/>
+          <a:p>
+            <a:pPr algn="l" indent="0" marL="0">
+              <a:spcAft>
+                <a:spcPts val="600"/>
+              </a:spcAft>
+              <a:buNone/>
+            </a:pPr>
+            <a:r>
+              <a:rPr lang="en-US" sz="1350" b="1" dirty="0">
+                <a:solidFill>
+                  <a:srgbClr val="1F5722"/>
+                </a:solidFill>
+                <a:latin typeface="Calibri" pitchFamily="34" charset="0"/>
+                <a:ea typeface="Calibri" pitchFamily="34" charset="-122"/>
+                <a:cs typeface="Calibri" pitchFamily="34" charset="-120"/>
+              </a:rPr>
+              <a:t>A. Staphylococci (+) from streptococci (–)</a:t>
+            </a:r>
+            <a:endParaRPr lang="en-US" sz="1350" dirty="0"/>
+          </a:p>
+          <a:p>
+            <a:pPr algn="l" indent="0" marL="0">
+              <a:spcAft>
+                <a:spcPts val="600"/>
+              </a:spcAft>
+              <a:buNone/>
+            </a:pPr>
+            <a:r>
+              <a:rPr lang="en-US" sz="1350" dirty="0">
+                <a:solidFill>
+                  <a:srgbClr val="33444F"/>
+                </a:solidFill>
+                <a:latin typeface="Calibri" pitchFamily="34" charset="0"/>
+                <a:ea typeface="Calibri" pitchFamily="34" charset="-122"/>
+                <a:cs typeface="Calibri" pitchFamily="34" charset="-120"/>
+              </a:rPr>
+              <a:t>B. S. aureus from S. epidermidis</a:t>
+            </a:r>
+            <a:endParaRPr lang="en-US" sz="1350" dirty="0"/>
+          </a:p>
+          <a:p>
+            <a:pPr algn="l" indent="0" marL="0">
+              <a:spcAft>
+                <a:spcPts val="600"/>
+              </a:spcAft>
+              <a:buNone/>
+            </a:pPr>
+            <a:r>
+              <a:rPr lang="en-US" sz="1350" dirty="0">
+                <a:solidFill>
+                  <a:srgbClr val="33444F"/>
+                </a:solidFill>
+                <a:latin typeface="Calibri" pitchFamily="34" charset="0"/>
+                <a:ea typeface="Calibri" pitchFamily="34" charset="-122"/>
+                <a:cs typeface="Calibri" pitchFamily="34" charset="-120"/>
+              </a:rPr>
+              <a:t>C. Group A from group B strep</a:t>
+            </a:r>
+            <a:endParaRPr lang="en-US" sz="1350" dirty="0"/>
+          </a:p>
+          <a:p>
+            <a:pPr algn="l" indent="0" marL="0">
+              <a:spcAft>
+                <a:spcPts val="600"/>
+              </a:spcAft>
+              <a:buNone/>
+            </a:pPr>
+            <a:r>
+              <a:rPr lang="en-US" sz="1350" dirty="0">
+                <a:solidFill>
+                  <a:srgbClr val="33444F"/>
+                </a:solidFill>
+                <a:latin typeface="Calibri" pitchFamily="34" charset="0"/>
+                <a:ea typeface="Calibri" pitchFamily="34" charset="-122"/>
+                <a:cs typeface="Calibri" pitchFamily="34" charset="-120"/>
+              </a:rPr>
+              <a:t>D. Enterococci from pneumococci</a:t>
+            </a:r>
+            <a:endParaRPr lang="en-US" sz="1350" dirty="0"/>
+          </a:p>
+          <a:p>
+            <a:pPr algn="l" indent="0" marL="0">
+              <a:spcAft>
+                <a:spcPts val="600"/>
+              </a:spcAft>
+              <a:buNone/>
+            </a:pPr>
+            <a:r>
+              <a:rPr lang="en-US" sz="1350" dirty="0">
+                <a:solidFill>
+                  <a:srgbClr val="33444F"/>
+                </a:solidFill>
+                <a:latin typeface="Calibri" pitchFamily="34" charset="0"/>
+                <a:ea typeface="Calibri" pitchFamily="34" charset="-122"/>
+                <a:cs typeface="Calibri" pitchFamily="34" charset="-120"/>
+              </a:rPr>
+              <a:t>E. Aerobes from anaerobes</a:t>
+            </a:r>
+            <a:endParaRPr lang="en-US" sz="1350" dirty="0"/>
+          </a:p>
+        </p:txBody>
+      </p:sp>
+      <p:sp>
+        <p:nvSpPr>
+          <p:cNvPr id="6" name="Shape 4"/>
+          <p:cNvSpPr/>
+          <p:nvPr/>
+        </p:nvSpPr>
+        <p:spPr>
+          <a:xfrm>
+            <a:off x="7201632" y="2395728"/>
+            <a:ext cx="4423136" cy="3246120"/>
+          </a:xfrm>
+          <a:prstGeom prst="roundRect">
+            <a:avLst>
+              <a:gd name="adj" fmla="val 2535"/>
+            </a:avLst>
+          </a:prstGeom>
+          <a:solidFill>
+            <a:srgbClr val="E8F2E9"/>
+          </a:solidFill>
+          <a:ln/>
+          <a:effectLst>
+            <a:outerShdw sx="100000" sy="100000" kx="0" ky="0" algn="bl" rotWithShape="0" blurRad="88900" dist="25400" dir="5400000">
+              <a:srgbClr val="22303C">
+                <a:alpha val="12000"/>
+              </a:srgbClr>
+            </a:outerShdw>
+          </a:effectLst>
+        </p:spPr>
+        <p:txBody>
+          <a:bodyPr/>
+          <a:p/>
+        </p:txBody>
+      </p:sp>
+      <p:sp>
+        <p:nvSpPr>
+          <p:cNvPr id="7" name="Text 5"/>
+          <p:cNvSpPr/>
+          <p:nvPr/>
+        </p:nvSpPr>
+        <p:spPr>
+          <a:xfrm>
+            <a:off x="7439376" y="2578608"/>
+            <a:ext cx="3965936" cy="457200"/>
+          </a:xfrm>
+          <a:prstGeom prst="rect">
+            <a:avLst/>
+          </a:prstGeom>
+          <a:noFill/>
+          <a:ln/>
+        </p:spPr>
+        <p:txBody>
+          <a:bodyPr wrap="square" lIns="0" tIns="0" rIns="0" bIns="0" rtlCol="0" anchor="ctr"/>
+          <a:lstStyle/>
+          <a:p>
+            <a:pPr indent="0" marL="0">
+              <a:buNone/>
+            </a:pPr>
+            <a:r>
+              <a:rPr lang="en-US" sz="1500" b="1" dirty="0">
+                <a:solidFill>
+                  <a:srgbClr val="2E7D32"/>
+                </a:solidFill>
+                <a:latin typeface="Calibri" pitchFamily="34" charset="0"/>
+                <a:ea typeface="Calibri" pitchFamily="34" charset="-122"/>
+                <a:cs typeface="Calibri" pitchFamily="34" charset="-120"/>
+              </a:rPr>
+              <a:t>ANSWER  </a:t>
+            </a:r>
+            <a:pPr indent="0" marL="0">
+              <a:buNone/>
+            </a:pPr>
+            <a:r>
+              <a:rPr lang="en-US" sz="1500" b="1" dirty="0">
+                <a:solidFill>
+                  <a:srgbClr val="1B2A38"/>
+                </a:solidFill>
+                <a:latin typeface="Calibri" pitchFamily="34" charset="0"/>
+                <a:ea typeface="Calibri" pitchFamily="34" charset="-122"/>
+                <a:cs typeface="Calibri" pitchFamily="34" charset="-120"/>
+              </a:rPr>
+              <a:t>A — Staphylococci (+) from streptococci (–)</a:t>
+            </a:r>
+            <a:endParaRPr lang="en-US" sz="1500" dirty="0"/>
+          </a:p>
+        </p:txBody>
+      </p:sp>
+      <p:sp>
+        <p:nvSpPr>
+          <p:cNvPr id="8" name="Text 6"/>
+          <p:cNvSpPr/>
+          <p:nvPr/>
+        </p:nvSpPr>
+        <p:spPr>
+          <a:xfrm>
+            <a:off x="7439376" y="3127248"/>
+            <a:ext cx="3947648" cy="2377440"/>
+          </a:xfrm>
+          <a:prstGeom prst="rect">
+            <a:avLst/>
+          </a:prstGeom>
+          <a:noFill/>
+          <a:ln/>
+        </p:spPr>
+        <p:txBody>
+          <a:bodyPr wrap="square" lIns="0" tIns="0" rIns="0" bIns="0" rtlCol="0" anchor="t"/>
+          <a:lstStyle/>
+          <a:p>
+            <a:pPr algn="l" indent="0" marL="0">
+              <a:lnSpc>
+                <a:spcPct val="108000"/>
+              </a:lnSpc>
+              <a:buNone/>
+            </a:pPr>
+            <a:r>
+              <a:rPr lang="en-US" sz="1250" dirty="0">
+                <a:solidFill>
+                  <a:srgbClr val="33444F"/>
+                </a:solidFill>
+                <a:latin typeface="Calibri" pitchFamily="34" charset="0"/>
+                <a:ea typeface="Calibri" pitchFamily="34" charset="-122"/>
+                <a:cs typeface="Calibri" pitchFamily="34" charset="-120"/>
+              </a:rPr>
+              <a:t>Catalase is positive in staphylococci and negative in streptococci; coagulase then separates S. aureus from CoNS.</a:t>
+            </a:r>
+            <a:endParaRPr lang="en-US" sz="1250" dirty="0"/>
+          </a:p>
+        </p:txBody>
+      </p:sp>
+      <p:sp>
+        <p:nvSpPr>
+          <p:cNvPr id="9" name="Text 7"/>
+          <p:cNvSpPr/>
+          <p:nvPr/>
+        </p:nvSpPr>
+        <p:spPr>
+          <a:xfrm>
+            <a:off x="566928" y="6473952"/>
+            <a:ext cx="7772400" cy="274320"/>
+          </a:xfrm>
+          <a:prstGeom prst="rect">
+            <a:avLst/>
+          </a:prstGeom>
+          <a:noFill/>
+          <a:ln/>
+        </p:spPr>
+        <p:txBody>
+          <a:bodyPr wrap="square" lIns="0" tIns="0" rIns="0" bIns="0" rtlCol="0" anchor="ctr"/>
+          <a:lstStyle/>
+          <a:p>
+            <a:pPr algn="l" indent="0" marL="0">
+              <a:buNone/>
+            </a:pPr>
+            <a:r>
+              <a:rPr lang="en-US" sz="850" dirty="0">
+                <a:solidFill>
+                  <a:srgbClr val="9AA8B4"/>
+                </a:solidFill>
+                <a:latin typeface="Calibri" pitchFamily="34" charset="0"/>
+                <a:ea typeface="Calibri" pitchFamily="34" charset="-122"/>
+                <a:cs typeface="Calibri" pitchFamily="34" charset="-120"/>
+              </a:rPr>
+              <a:t>Makassed General Hospital  ·  Department of Laboratory Medicine</a:t>
+            </a:r>
+            <a:endParaRPr lang="en-US" sz="850" dirty="0"/>
+          </a:p>
+        </p:txBody>
+      </p:sp>
+      <p:sp>
+        <p:nvSpPr>
+          <p:cNvPr id="10" name="Text 8"/>
+          <p:cNvSpPr/>
+          <p:nvPr/>
+        </p:nvSpPr>
+        <p:spPr>
+          <a:xfrm>
+            <a:off x="9814255" y="6473952"/>
+            <a:ext cx="1828800" cy="274320"/>
+          </a:xfrm>
+          <a:prstGeom prst="rect">
+            <a:avLst/>
+          </a:prstGeom>
+          <a:noFill/>
+          <a:ln/>
+        </p:spPr>
+        <p:txBody>
+          <a:bodyPr wrap="square" lIns="0" tIns="0" rIns="0" bIns="0" rtlCol="0" anchor="ctr"/>
+          <a:lstStyle/>
+          <a:p>
+            <a:pPr algn="r" indent="0" marL="0">
+              <a:buNone/>
+            </a:pPr>
+            <a:r>
+              <a:rPr lang="en-US" sz="850" dirty="0">
+                <a:solidFill>
+                  <a:srgbClr val="9AA8B4"/>
+                </a:solidFill>
+                <a:latin typeface="Calibri" pitchFamily="34" charset="0"/>
+                <a:ea typeface="Calibri" pitchFamily="34" charset="-122"/>
+                <a:cs typeface="Calibri" pitchFamily="34" charset="-120"/>
+              </a:rPr>
+              <a:t>CP Lecture Series</a:t>
+            </a:r>
+            <a:pPr algn="r" indent="0" marL="0">
+              <a:buNone/>
+            </a:pPr>
+            <a:r>
+              <a:rPr lang="en-US" sz="850" dirty="0">
+                <a:solidFill>
+                  <a:srgbClr val="DCE4EC"/>
+                </a:solidFill>
+                <a:latin typeface="Calibri" pitchFamily="34" charset="0"/>
+                <a:ea typeface="Calibri" pitchFamily="34" charset="-122"/>
+                <a:cs typeface="Calibri" pitchFamily="34" charset="-120"/>
+              </a:rPr>
+              <a:t>   ·   </a:t>
+            </a:r>
+            <a:pPr algn="r" indent="0" marL="0">
+              <a:buNone/>
+            </a:pPr>
+            <a:r>
+              <a:rPr lang="en-US" sz="850" b="1" dirty="0">
+                <a:solidFill>
+                  <a:srgbClr val="2E7D32"/>
+                </a:solidFill>
+                <a:latin typeface="Calibri" pitchFamily="34" charset="0"/>
+                <a:ea typeface="Calibri" pitchFamily="34" charset="-122"/>
+                <a:cs typeface="Calibri" pitchFamily="34" charset="-120"/>
+              </a:rPr>
+              <a:t>17</a:t>
+            </a:r>
+            <a:endParaRPr lang="en-US" sz="850" dirty="0"/>
+          </a:p>
+        </p:txBody>
+      </p:sp>
+    </p:spTree>
+  </p:cSld>
+  <p:clrMapOvr>
+    <a:masterClrMapping/>
+  </p:clrMapOvr>
+</p:sld>
+</file>
+
 <file path=ppt/slides/slide3.xml><?xml version="1.0" encoding="utf-8"?>
 <p:sld xmlns:a="http://schemas.openxmlformats.org/drawingml/2006/main" xmlns:r="http://schemas.openxmlformats.org/officeDocument/2006/relationships" xmlns:p="http://schemas.openxmlformats.org/presentationml/2006/main">
   <p:cSld name="Slide 3">
@@ -11802,6 +13426,10 @@
             </a:outerShdw>
           </a:effectLst>
         </p:spPr>
+        <p:txBody>
+          <a:bodyPr/>
+          <a:p/>
+        </p:txBody>
       </p:sp>
       <p:sp>
         <p:nvSpPr>
@@ -11829,6 +13457,10 @@
             </a:outerShdw>
           </a:effectLst>
         </p:spPr>
+        <p:txBody>
+          <a:bodyPr/>
+          <a:p/>
+        </p:txBody>
       </p:sp>
       <p:sp>
         <p:nvSpPr>
@@ -11936,6 +13568,10 @@
             </a:outerShdw>
           </a:effectLst>
         </p:spPr>
+        <p:txBody>
+          <a:bodyPr/>
+          <a:p/>
+        </p:txBody>
       </p:sp>
       <p:sp>
         <p:nvSpPr>
@@ -11963,6 +13599,10 @@
             </a:outerShdw>
           </a:effectLst>
         </p:spPr>
+        <p:txBody>
+          <a:bodyPr/>
+          <a:p/>
+        </p:txBody>
       </p:sp>
       <p:sp>
         <p:nvSpPr>
@@ -12070,6 +13710,10 @@
             </a:outerShdw>
           </a:effectLst>
         </p:spPr>
+        <p:txBody>
+          <a:bodyPr/>
+          <a:p/>
+        </p:txBody>
       </p:sp>
       <p:sp>
         <p:nvSpPr>
@@ -12097,6 +13741,10 @@
             </a:outerShdw>
           </a:effectLst>
         </p:spPr>
+        <p:txBody>
+          <a:bodyPr/>
+          <a:p/>
+        </p:txBody>
       </p:sp>
       <p:sp>
         <p:nvSpPr>
@@ -12204,6 +13852,10 @@
             </a:outerShdw>
           </a:effectLst>
         </p:spPr>
+        <p:txBody>
+          <a:bodyPr/>
+          <a:p/>
+        </p:txBody>
       </p:sp>
       <p:sp>
         <p:nvSpPr>
@@ -12231,6 +13883,10 @@
             </a:outerShdw>
           </a:effectLst>
         </p:spPr>
+        <p:txBody>
+          <a:bodyPr/>
+          <a:p/>
+        </p:txBody>
       </p:sp>
       <p:sp>
         <p:nvSpPr>
@@ -12338,6 +13994,10 @@
             </a:outerShdw>
           </a:effectLst>
         </p:spPr>
+        <p:txBody>
+          <a:bodyPr/>
+          <a:p/>
+        </p:txBody>
       </p:sp>
       <p:sp>
         <p:nvSpPr>
@@ -12365,6 +14025,10 @@
             </a:outerShdw>
           </a:effectLst>
         </p:spPr>
+        <p:txBody>
+          <a:bodyPr/>
+          <a:p/>
+        </p:txBody>
       </p:sp>
       <p:sp>
         <p:nvSpPr>
@@ -12472,6 +14136,10 @@
             </a:outerShdw>
           </a:effectLst>
         </p:spPr>
+        <p:txBody>
+          <a:bodyPr/>
+          <a:p/>
+        </p:txBody>
       </p:sp>
       <p:sp>
         <p:nvSpPr>
@@ -12499,6 +14167,10 @@
             </a:outerShdw>
           </a:effectLst>
         </p:spPr>
+        <p:txBody>
+          <a:bodyPr/>
+          <a:p/>
+        </p:txBody>
       </p:sp>
       <p:sp>
         <p:nvSpPr>
@@ -12822,6 +14494,10 @@
             </a:outerShdw>
           </a:effectLst>
         </p:spPr>
+        <p:txBody>
+          <a:bodyPr/>
+          <a:p/>
+        </p:txBody>
       </p:sp>
       <p:sp>
         <p:nvSpPr>
@@ -12849,6 +14525,10 @@
             </a:outerShdw>
           </a:effectLst>
         </p:spPr>
+        <p:txBody>
+          <a:bodyPr/>
+          <a:p/>
+        </p:txBody>
       </p:sp>
       <p:sp>
         <p:nvSpPr>
@@ -12963,6 +14643,10 @@
           </a:solidFill>
           <a:ln/>
         </p:spPr>
+        <p:txBody>
+          <a:bodyPr/>
+          <a:p/>
+        </p:txBody>
       </p:sp>
       <p:sp>
         <p:nvSpPr>
@@ -12990,6 +14674,10 @@
             </a:outerShdw>
           </a:effectLst>
         </p:spPr>
+        <p:txBody>
+          <a:bodyPr/>
+          <a:p/>
+        </p:txBody>
       </p:sp>
       <p:sp>
         <p:nvSpPr>
@@ -13111,6 +14799,10 @@
             </a:outerShdw>
           </a:effectLst>
         </p:spPr>
+        <p:txBody>
+          <a:bodyPr/>
+          <a:p/>
+        </p:txBody>
       </p:sp>
       <p:sp>
         <p:nvSpPr>
@@ -13138,6 +14830,10 @@
             </a:outerShdw>
           </a:effectLst>
         </p:spPr>
+        <p:txBody>
+          <a:bodyPr/>
+          <a:p/>
+        </p:txBody>
       </p:sp>
       <p:sp>
         <p:nvSpPr>
@@ -13252,6 +14948,10 @@
           </a:solidFill>
           <a:ln/>
         </p:spPr>
+        <p:txBody>
+          <a:bodyPr/>
+          <a:p/>
+        </p:txBody>
       </p:sp>
       <p:sp>
         <p:nvSpPr>
@@ -13279,6 +14979,10 @@
             </a:outerShdw>
           </a:effectLst>
         </p:spPr>
+        <p:txBody>
+          <a:bodyPr/>
+          <a:p/>
+        </p:txBody>
       </p:sp>
       <p:sp>
         <p:nvSpPr>
@@ -13400,6 +15104,10 @@
             </a:outerShdw>
           </a:effectLst>
         </p:spPr>
+        <p:txBody>
+          <a:bodyPr/>
+          <a:p/>
+        </p:txBody>
       </p:sp>
       <p:sp>
         <p:nvSpPr>
@@ -13427,6 +15135,10 @@
             </a:outerShdw>
           </a:effectLst>
         </p:spPr>
+        <p:txBody>
+          <a:bodyPr/>
+          <a:p/>
+        </p:txBody>
       </p:sp>
       <p:sp>
         <p:nvSpPr>
@@ -13665,6 +15377,10 @@
           </a:solidFill>
           <a:ln/>
         </p:spPr>
+        <p:txBody>
+          <a:bodyPr/>
+          <a:p/>
+        </p:txBody>
       </p:sp>
       <p:sp>
         <p:nvSpPr>
@@ -13687,6 +15403,10 @@
           </a:solidFill>
           <a:ln/>
         </p:spPr>
+        <p:txBody>
+          <a:bodyPr/>
+          <a:p/>
+        </p:txBody>
       </p:sp>
       <p:sp>
         <p:nvSpPr>
@@ -13948,6 +15668,10 @@
             </a:outerShdw>
           </a:effectLst>
         </p:spPr>
+        <p:txBody>
+          <a:bodyPr/>
+          <a:p/>
+        </p:txBody>
       </p:sp>
       <p:pic>
         <p:nvPicPr>
@@ -14256,6 +15980,10 @@
             </a:outerShdw>
           </a:effectLst>
         </p:spPr>
+        <p:txBody>
+          <a:bodyPr/>
+          <a:p/>
+        </p:txBody>
       </p:sp>
       <p:sp>
         <p:nvSpPr>
@@ -14430,6 +16158,10 @@
             </a:outerShdw>
           </a:effectLst>
         </p:spPr>
+        <p:txBody>
+          <a:bodyPr/>
+          <a:p/>
+        </p:txBody>
       </p:sp>
       <p:sp>
         <p:nvSpPr>
@@ -14735,6 +16467,10 @@
           </a:solidFill>
           <a:ln/>
         </p:spPr>
+        <p:txBody>
+          <a:bodyPr/>
+          <a:p/>
+        </p:txBody>
       </p:sp>
       <p:sp>
         <p:nvSpPr>
@@ -14757,6 +16493,10 @@
           </a:solidFill>
           <a:ln/>
         </p:spPr>
+        <p:txBody>
+          <a:bodyPr/>
+          <a:p/>
+        </p:txBody>
       </p:sp>
       <p:sp>
         <p:nvSpPr>
